--- a/decks/Chem_01_Analytic-Techniques-and-Error.pptx
+++ b/decks/Chem_01_Analytic-Techniques-and-Error.pptx
@@ -31,9 +31,10 @@
     <p:sldId id="279" r:id="rId25"/>
     <p:sldId id="280" r:id="rId26"/>
     <p:sldId id="281" r:id="rId27"/>
+    <p:sldId id="282" r:id="rId28"/>
   </p:sldIdLst>
   <p:notesMasterIdLst>
-    <p:notesMasterId r:id="rId28"/>
+    <p:notesMasterId r:id="rId29"/>
   </p:notesMasterIdLst>
   <p:sldSz cx="12191695" cy="6858000"/>
   <p:notesSz cx="6858000" cy="12191695"/>
@@ -2135,6 +2136,94 @@
             <a:fld id="{F7021451-1387-4CA6-816F-3879F97B5CBC}" type="slidenum">
               <a:rPr lang="en-US"/>
               <a:t>26</a:t>
+            </a:fld>
+            <a:endParaRPr lang="en-US"/>
+          </a:p>
+        </p:txBody>
+      </p:sp>
+    </p:spTree>
+    <p:extLst>
+      <p:ext uri="{BB962C8B-B14F-4D97-AF65-F5344CB8AC3E}">
+        <p14:creationId xmlns:p14="http://schemas.microsoft.com/office/powerpoint/2010/main" val="1024086991"/>
+      </p:ext>
+    </p:extLst>
+  </p:cSld>
+  <p:clrMapOvr>
+    <a:masterClrMapping/>
+  </p:clrMapOvr>
+</p:notes>
+</file>
+
+<file path=ppt/notesSlides/notesSlide27.xml><?xml version="1.0" encoding="utf-8"?>
+<p:notes xmlns:a="http://schemas.openxmlformats.org/drawingml/2006/main" xmlns:r="http://schemas.openxmlformats.org/officeDocument/2006/relationships" xmlns:p="http://schemas.openxmlformats.org/presentationml/2006/main">
+  <p:cSld>
+    <p:spTree>
+      <p:nvGrpSpPr>
+        <p:cNvPr id="1" name=""/>
+        <p:cNvGrpSpPr/>
+        <p:nvPr/>
+      </p:nvGrpSpPr>
+      <p:grpSpPr>
+        <a:xfrm>
+          <a:off x="0" y="0"/>
+          <a:ext cx="0" cy="0"/>
+          <a:chOff x="0" y="0"/>
+          <a:chExt cx="0" cy="0"/>
+        </a:xfrm>
+      </p:grpSpPr>
+      <p:sp>
+        <p:nvSpPr>
+          <p:cNvPr id="2" name="Slide Image Placeholder 1"/>
+          <p:cNvSpPr>
+            <a:spLocks noGrp="1" noRot="1" noChangeAspect="1"/>
+          </p:cNvSpPr>
+          <p:nvPr>
+            <p:ph type="sldImg"/>
+          </p:nvPr>
+        </p:nvSpPr>
+        <p:spPr/>
+      </p:sp>
+      <p:sp>
+        <p:nvSpPr>
+          <p:cNvPr id="3" name="Notes Placeholder 2"/>
+          <p:cNvSpPr>
+            <a:spLocks noGrp="1"/>
+          </p:cNvSpPr>
+          <p:nvPr>
+            <p:ph type="body" idx="1"/>
+          </p:nvPr>
+        </p:nvSpPr>
+        <p:spPr/>
+        <p:txBody>
+          <a:bodyPr/>
+          <a:lstStyle/>
+          <a:p>
+            <a:r>
+              <a:rPr lang="en-US" dirty="0"/>
+              <a:t/>
+            </a:r>
+            <a:endParaRPr lang="en-US" dirty="0"/>
+          </a:p>
+        </p:txBody>
+      </p:sp>
+      <p:sp>
+        <p:nvSpPr>
+          <p:cNvPr id="4" name="Slide Number Placeholder 3"/>
+          <p:cNvSpPr>
+            <a:spLocks noGrp="1"/>
+          </p:cNvSpPr>
+          <p:nvPr>
+            <p:ph type="sldNum" sz="quarter" idx="10"/>
+          </p:nvPr>
+        </p:nvSpPr>
+        <p:spPr/>
+        <p:txBody>
+          <a:bodyPr/>
+          <a:lstStyle/>
+          <a:p>
+            <a:fld id="{F7021451-1387-4CA6-816F-3879F97B5CBC}" type="slidenum">
+              <a:rPr lang="en-US"/>
+              <a:t>27</a:t>
             </a:fld>
             <a:endParaRPr lang="en-US"/>
           </a:p>
@@ -3652,7 +3741,7 @@
                 <a:ea typeface="Calibri" pitchFamily="34" charset="-122"/>
                 <a:cs typeface="Calibri" pitchFamily="34" charset="-120"/>
               </a:rPr>
-              <a:t>Sample Interferences &amp; the Testing Cycle</a:t>
+              <a:t>Interferences &amp; the Testing Cycle</a:t>
             </a:r>
             <a:endParaRPr lang="en-US" sz="3800" dirty="0"/>
           </a:p>
@@ -3723,7 +3812,7 @@
                 <a:ea typeface="Calibri" pitchFamily="34" charset="-122"/>
                 <a:cs typeface="Calibri" pitchFamily="34" charset="-120"/>
               </a:rPr>
-              <a:t>CLINICAL CHEMISTRY   ·   INTERFERENCES</a:t>
+              <a:t>CLINICAL CHEMISTRY   ·   INTERFERENCE</a:t>
             </a:r>
             <a:endParaRPr lang="en-US" sz="1100" dirty="0"/>
           </a:p>
@@ -3762,6 +3851,570 @@
                 <a:ea typeface="Calibri" pitchFamily="34" charset="-122"/>
                 <a:cs typeface="Calibri" pitchFamily="34" charset="-120"/>
               </a:rPr>
+              <a:t>Antibody, Biotin &amp; Macro-Analyte Interferences</a:t>
+            </a:r>
+            <a:endParaRPr lang="en-US" sz="3000" dirty="0"/>
+          </a:p>
+        </p:txBody>
+      </p:sp>
+      <p:sp>
+        <p:nvSpPr>
+          <p:cNvPr id="4" name="Shape 2"/>
+          <p:cNvSpPr/>
+          <p:nvPr/>
+        </p:nvSpPr>
+        <p:spPr>
+          <a:xfrm>
+            <a:off x="566928" y="1517904"/>
+            <a:ext cx="5346040" cy="4114800"/>
+          </a:xfrm>
+          <a:prstGeom prst="roundRect">
+            <a:avLst>
+              <a:gd name="adj" fmla="val 2000"/>
+            </a:avLst>
+          </a:prstGeom>
+          <a:solidFill>
+            <a:srgbClr val="E7EFFA"/>
+          </a:solidFill>
+          <a:ln/>
+          <a:effectLst>
+            <a:outerShdw sx="100000" sy="100000" kx="0" ky="0" algn="bl" rotWithShape="0" blurRad="88900" dist="25400" dir="5400000">
+              <a:srgbClr val="22303C">
+                <a:alpha val="12000"/>
+              </a:srgbClr>
+            </a:outerShdw>
+          </a:effectLst>
+        </p:spPr>
+      </p:sp>
+      <p:sp>
+        <p:nvSpPr>
+          <p:cNvPr id="5" name="Text 3"/>
+          <p:cNvSpPr/>
+          <p:nvPr/>
+        </p:nvSpPr>
+        <p:spPr>
+          <a:xfrm>
+            <a:off x="804672" y="1682496"/>
+            <a:ext cx="4888840" cy="274320"/>
+          </a:xfrm>
+          <a:prstGeom prst="rect">
+            <a:avLst/>
+          </a:prstGeom>
+          <a:noFill/>
+          <a:ln/>
+        </p:spPr>
+        <p:txBody>
+          <a:bodyPr wrap="square" lIns="0" tIns="0" rIns="0" bIns="0" rtlCol="0" anchor="ctr"/>
+          <a:lstStyle/>
+          <a:p>
+            <a:pPr indent="0" marL="0">
+              <a:buNone/>
+            </a:pPr>
+            <a:r>
+              <a:rPr lang="en-US" sz="1200" b="1" spc="100" kern="0" dirty="0">
+                <a:solidFill>
+                  <a:srgbClr val="0D4A92"/>
+                </a:solidFill>
+                <a:latin typeface="Calibri" pitchFamily="34" charset="0"/>
+                <a:ea typeface="Calibri" pitchFamily="34" charset="-122"/>
+                <a:cs typeface="Calibri" pitchFamily="34" charset="-120"/>
+              </a:rPr>
+              <a:t>ANTIBODY INTERFERENCES</a:t>
+            </a:r>
+            <a:endParaRPr lang="en-US" sz="1200" dirty="0"/>
+          </a:p>
+        </p:txBody>
+      </p:sp>
+      <p:sp>
+        <p:nvSpPr>
+          <p:cNvPr id="6" name="Text 4"/>
+          <p:cNvSpPr/>
+          <p:nvPr/>
+        </p:nvSpPr>
+        <p:spPr>
+          <a:xfrm>
+            <a:off x="804672" y="2029968"/>
+            <a:ext cx="4870552" cy="3474720"/>
+          </a:xfrm>
+          <a:prstGeom prst="rect">
+            <a:avLst/>
+          </a:prstGeom>
+          <a:noFill/>
+          <a:ln/>
+        </p:spPr>
+        <p:txBody>
+          <a:bodyPr wrap="square" lIns="0" tIns="0" rIns="0" bIns="0" rtlCol="0" anchor="t"/>
+          <a:lstStyle/>
+          <a:p>
+            <a:pPr algn="l" marL="177800" indent="-177800">
+              <a:spcAft>
+                <a:spcPts val="900"/>
+              </a:spcAft>
+              <a:buSzPct val="100000"/>
+              <a:buChar char="•"/>
+            </a:pPr>
+            <a:r>
+              <a:rPr lang="en-US" sz="1250" b="1" dirty="0">
+                <a:solidFill>
+                  <a:srgbClr val="1B2A38"/>
+                </a:solidFill>
+                <a:latin typeface="Calibri" pitchFamily="34" charset="0"/>
+                <a:ea typeface="Calibri" pitchFamily="34" charset="-122"/>
+                <a:cs typeface="Calibri" pitchFamily="34" charset="-120"/>
+              </a:rPr>
+              <a:t>Heterophile antibodies (e.g., HAMA) bridge capture/detection antibodies → false elevation.</a:t>
+            </a:r>
+            <a:endParaRPr lang="en-US" sz="1250" dirty="0"/>
+          </a:p>
+          <a:p>
+            <a:pPr algn="l" marL="177800" indent="-177800">
+              <a:spcAft>
+                <a:spcPts val="900"/>
+              </a:spcAft>
+              <a:buSzPct val="100000"/>
+              <a:buChar char="•"/>
+            </a:pPr>
+            <a:r>
+              <a:rPr lang="en-US" sz="1250" dirty="0">
+                <a:solidFill>
+                  <a:srgbClr val="33444F"/>
+                </a:solidFill>
+                <a:latin typeface="Calibri" pitchFamily="34" charset="0"/>
+                <a:ea typeface="Calibri" pitchFamily="34" charset="-122"/>
+                <a:cs typeface="Calibri" pitchFamily="34" charset="-120"/>
+              </a:rPr>
+              <a:t>Suspect when a result doesn’t fit (implausible hCG, troponin).</a:t>
+            </a:r>
+            <a:endParaRPr lang="en-US" sz="1250" dirty="0"/>
+          </a:p>
+          <a:p>
+            <a:pPr algn="l" marL="177800" indent="-177800">
+              <a:spcAft>
+                <a:spcPts val="900"/>
+              </a:spcAft>
+              <a:buSzPct val="100000"/>
+              <a:buChar char="•"/>
+            </a:pPr>
+            <a:r>
+              <a:rPr lang="en-US" sz="1250" dirty="0">
+                <a:solidFill>
+                  <a:srgbClr val="33444F"/>
+                </a:solidFill>
+                <a:latin typeface="Calibri" pitchFamily="34" charset="0"/>
+                <a:ea typeface="Calibri" pitchFamily="34" charset="-122"/>
+                <a:cs typeface="Calibri" pitchFamily="34" charset="-120"/>
+              </a:rPr>
+              <a:t>Confirm with serial dilution (non-linearity), blocking tubes, or another platform.</a:t>
+            </a:r>
+            <a:endParaRPr lang="en-US" sz="1250" dirty="0"/>
+          </a:p>
+          <a:p>
+            <a:pPr algn="l" marL="177800" indent="-177800">
+              <a:spcAft>
+                <a:spcPts val="900"/>
+              </a:spcAft>
+              <a:buSzPct val="100000"/>
+              <a:buChar char="•"/>
+            </a:pPr>
+            <a:r>
+              <a:rPr lang="en-US" sz="1250" dirty="0">
+                <a:solidFill>
+                  <a:srgbClr val="33444F"/>
+                </a:solidFill>
+                <a:latin typeface="Calibri" pitchFamily="34" charset="0"/>
+                <a:ea typeface="Calibri" pitchFamily="34" charset="-122"/>
+                <a:cs typeface="Calibri" pitchFamily="34" charset="-120"/>
+              </a:rPr>
+              <a:t>Macro-CK, macro-AST, macroprolactin → persistent, silent elevations (resolve with PEG).</a:t>
+            </a:r>
+            <a:endParaRPr lang="en-US" sz="1250" dirty="0"/>
+          </a:p>
+        </p:txBody>
+      </p:sp>
+      <p:sp>
+        <p:nvSpPr>
+          <p:cNvPr id="7" name="Shape 5"/>
+          <p:cNvSpPr/>
+          <p:nvPr/>
+        </p:nvSpPr>
+        <p:spPr>
+          <a:xfrm>
+            <a:off x="6278728" y="1517904"/>
+            <a:ext cx="5346040" cy="4114800"/>
+          </a:xfrm>
+          <a:prstGeom prst="roundRect">
+            <a:avLst>
+              <a:gd name="adj" fmla="val 2000"/>
+            </a:avLst>
+          </a:prstGeom>
+          <a:solidFill>
+            <a:srgbClr val="E7EFFA"/>
+          </a:solidFill>
+          <a:ln/>
+          <a:effectLst>
+            <a:outerShdw sx="100000" sy="100000" kx="0" ky="0" algn="bl" rotWithShape="0" blurRad="88900" dist="25400" dir="5400000">
+              <a:srgbClr val="22303C">
+                <a:alpha val="12000"/>
+              </a:srgbClr>
+            </a:outerShdw>
+          </a:effectLst>
+        </p:spPr>
+      </p:sp>
+      <p:sp>
+        <p:nvSpPr>
+          <p:cNvPr id="8" name="Text 6"/>
+          <p:cNvSpPr/>
+          <p:nvPr/>
+        </p:nvSpPr>
+        <p:spPr>
+          <a:xfrm>
+            <a:off x="6516472" y="1682496"/>
+            <a:ext cx="4888840" cy="274320"/>
+          </a:xfrm>
+          <a:prstGeom prst="rect">
+            <a:avLst/>
+          </a:prstGeom>
+          <a:noFill/>
+          <a:ln/>
+        </p:spPr>
+        <p:txBody>
+          <a:bodyPr wrap="square" lIns="0" tIns="0" rIns="0" bIns="0" rtlCol="0" anchor="ctr"/>
+          <a:lstStyle/>
+          <a:p>
+            <a:pPr indent="0" marL="0">
+              <a:buNone/>
+            </a:pPr>
+            <a:r>
+              <a:rPr lang="en-US" sz="1200" b="1" spc="100" kern="0" dirty="0">
+                <a:solidFill>
+                  <a:srgbClr val="0D4A92"/>
+                </a:solidFill>
+                <a:latin typeface="Calibri" pitchFamily="34" charset="0"/>
+                <a:ea typeface="Calibri" pitchFamily="34" charset="-122"/>
+                <a:cs typeface="Calibri" pitchFamily="34" charset="-120"/>
+              </a:rPr>
+              <a:t>BIOTIN &amp; HOOK</a:t>
+            </a:r>
+            <a:endParaRPr lang="en-US" sz="1200" dirty="0"/>
+          </a:p>
+        </p:txBody>
+      </p:sp>
+      <p:sp>
+        <p:nvSpPr>
+          <p:cNvPr id="9" name="Text 7"/>
+          <p:cNvSpPr/>
+          <p:nvPr/>
+        </p:nvSpPr>
+        <p:spPr>
+          <a:xfrm>
+            <a:off x="6516472" y="2029968"/>
+            <a:ext cx="4870552" cy="3474720"/>
+          </a:xfrm>
+          <a:prstGeom prst="rect">
+            <a:avLst/>
+          </a:prstGeom>
+          <a:noFill/>
+          <a:ln/>
+        </p:spPr>
+        <p:txBody>
+          <a:bodyPr wrap="square" lIns="0" tIns="0" rIns="0" bIns="0" rtlCol="0" anchor="t"/>
+          <a:lstStyle/>
+          <a:p>
+            <a:pPr algn="l" marL="177800" indent="-177800">
+              <a:spcAft>
+                <a:spcPts val="900"/>
+              </a:spcAft>
+              <a:buSzPct val="100000"/>
+              <a:buChar char="•"/>
+            </a:pPr>
+            <a:r>
+              <a:rPr lang="en-US" sz="1250" b="1" dirty="0">
+                <a:solidFill>
+                  <a:srgbClr val="1B2A38"/>
+                </a:solidFill>
+                <a:latin typeface="Calibri" pitchFamily="34" charset="0"/>
+                <a:ea typeface="Calibri" pitchFamily="34" charset="-122"/>
+                <a:cs typeface="Calibri" pitchFamily="34" charset="-120"/>
+              </a:rPr>
+              <a:t>High-dose biotin interferes with streptavidin-biotin assays — direction depends on design.</a:t>
+            </a:r>
+            <a:endParaRPr lang="en-US" sz="1250" dirty="0"/>
+          </a:p>
+          <a:p>
+            <a:pPr algn="l" marL="177800" indent="-177800">
+              <a:spcAft>
+                <a:spcPts val="900"/>
+              </a:spcAft>
+              <a:buSzPct val="100000"/>
+              <a:buChar char="•"/>
+            </a:pPr>
+            <a:r>
+              <a:rPr lang="en-US" sz="1250" dirty="0">
+                <a:solidFill>
+                  <a:srgbClr val="33444F"/>
+                </a:solidFill>
+                <a:latin typeface="Calibri" pitchFamily="34" charset="0"/>
+                <a:ea typeface="Calibri" pitchFamily="34" charset="-122"/>
+                <a:cs typeface="Calibri" pitchFamily="34" charset="-120"/>
+              </a:rPr>
+              <a:t>Classic pattern: low TSH + high free T4 mimicking hyperthyroidism.</a:t>
+            </a:r>
+            <a:endParaRPr lang="en-US" sz="1250" dirty="0"/>
+          </a:p>
+          <a:p>
+            <a:pPr algn="l" marL="177800" indent="-177800">
+              <a:spcAft>
+                <a:spcPts val="900"/>
+              </a:spcAft>
+              <a:buSzPct val="100000"/>
+              <a:buChar char="•"/>
+            </a:pPr>
+            <a:r>
+              <a:rPr lang="en-US" sz="1250" dirty="0">
+                <a:solidFill>
+                  <a:srgbClr val="33444F"/>
+                </a:solidFill>
+                <a:latin typeface="Calibri" pitchFamily="34" charset="0"/>
+                <a:ea typeface="Calibri" pitchFamily="34" charset="-122"/>
+                <a:cs typeface="Calibri" pitchFamily="34" charset="-120"/>
+              </a:rPr>
+              <a:t>Hold biotin (often 48–72 h) before testing.</a:t>
+            </a:r>
+            <a:endParaRPr lang="en-US" sz="1250" dirty="0"/>
+          </a:p>
+          <a:p>
+            <a:pPr algn="l" marL="177800" indent="-177800">
+              <a:spcAft>
+                <a:spcPts val="900"/>
+              </a:spcAft>
+              <a:buSzPct val="100000"/>
+              <a:buChar char="•"/>
+            </a:pPr>
+            <a:r>
+              <a:rPr lang="en-US" sz="1250" dirty="0">
+                <a:solidFill>
+                  <a:srgbClr val="33444F"/>
+                </a:solidFill>
+                <a:latin typeface="Calibri" pitchFamily="34" charset="0"/>
+                <a:ea typeface="Calibri" pitchFamily="34" charset="-122"/>
+                <a:cs typeface="Calibri" pitchFamily="34" charset="-120"/>
+              </a:rPr>
+              <a:t>Hook: very high analyte reads low — dilute and re-assay.</a:t>
+            </a:r>
+            <a:endParaRPr lang="en-US" sz="1250" dirty="0"/>
+          </a:p>
+        </p:txBody>
+      </p:sp>
+      <p:sp>
+        <p:nvSpPr>
+          <p:cNvPr id="10" name="Text 8"/>
+          <p:cNvSpPr/>
+          <p:nvPr/>
+        </p:nvSpPr>
+        <p:spPr>
+          <a:xfrm>
+            <a:off x="566928" y="6473952"/>
+            <a:ext cx="7772400" cy="274320"/>
+          </a:xfrm>
+          <a:prstGeom prst="rect">
+            <a:avLst/>
+          </a:prstGeom>
+          <a:noFill/>
+          <a:ln/>
+        </p:spPr>
+        <p:txBody>
+          <a:bodyPr wrap="square" lIns="0" tIns="0" rIns="0" bIns="0" rtlCol="0" anchor="ctr"/>
+          <a:lstStyle/>
+          <a:p>
+            <a:pPr algn="l" indent="0" marL="0">
+              <a:buNone/>
+            </a:pPr>
+            <a:r>
+              <a:rPr lang="en-US" sz="850" dirty="0">
+                <a:solidFill>
+                  <a:srgbClr val="9AA8B4"/>
+                </a:solidFill>
+                <a:latin typeface="Calibri" pitchFamily="34" charset="0"/>
+                <a:ea typeface="Calibri" pitchFamily="34" charset="-122"/>
+                <a:cs typeface="Calibri" pitchFamily="34" charset="-120"/>
+              </a:rPr>
+              <a:t>Makassed General Hospital  ·  Department of Laboratory Medicine</a:t>
+            </a:r>
+            <a:endParaRPr lang="en-US" sz="850" dirty="0"/>
+          </a:p>
+        </p:txBody>
+      </p:sp>
+      <p:sp>
+        <p:nvSpPr>
+          <p:cNvPr id="11" name="Text 9"/>
+          <p:cNvSpPr/>
+          <p:nvPr/>
+        </p:nvSpPr>
+        <p:spPr>
+          <a:xfrm>
+            <a:off x="9814255" y="6473952"/>
+            <a:ext cx="1828800" cy="274320"/>
+          </a:xfrm>
+          <a:prstGeom prst="rect">
+            <a:avLst/>
+          </a:prstGeom>
+          <a:noFill/>
+          <a:ln/>
+        </p:spPr>
+        <p:txBody>
+          <a:bodyPr wrap="square" lIns="0" tIns="0" rIns="0" bIns="0" rtlCol="0" anchor="ctr"/>
+          <a:lstStyle/>
+          <a:p>
+            <a:pPr algn="r" indent="0" marL="0">
+              <a:buNone/>
+            </a:pPr>
+            <a:r>
+              <a:rPr lang="en-US" sz="850" dirty="0">
+                <a:solidFill>
+                  <a:srgbClr val="9AA8B4"/>
+                </a:solidFill>
+                <a:latin typeface="Calibri" pitchFamily="34" charset="0"/>
+                <a:ea typeface="Calibri" pitchFamily="34" charset="-122"/>
+                <a:cs typeface="Calibri" pitchFamily="34" charset="-120"/>
+              </a:rPr>
+              <a:t>CP Lecture Series</a:t>
+            </a:r>
+            <a:pPr algn="r" indent="0" marL="0">
+              <a:buNone/>
+            </a:pPr>
+            <a:r>
+              <a:rPr lang="en-US" sz="850" dirty="0">
+                <a:solidFill>
+                  <a:srgbClr val="DCE4EC"/>
+                </a:solidFill>
+                <a:latin typeface="Calibri" pitchFamily="34" charset="0"/>
+                <a:ea typeface="Calibri" pitchFamily="34" charset="-122"/>
+                <a:cs typeface="Calibri" pitchFamily="34" charset="-120"/>
+              </a:rPr>
+              <a:t>   ·   </a:t>
+            </a:r>
+            <a:pPr algn="r" indent="0" marL="0">
+              <a:buNone/>
+            </a:pPr>
+            <a:r>
+              <a:rPr lang="en-US" sz="850" b="1" dirty="0">
+                <a:solidFill>
+                  <a:srgbClr val="1565C0"/>
+                </a:solidFill>
+                <a:latin typeface="Calibri" pitchFamily="34" charset="0"/>
+                <a:ea typeface="Calibri" pitchFamily="34" charset="-122"/>
+                <a:cs typeface="Calibri" pitchFamily="34" charset="-120"/>
+              </a:rPr>
+              <a:t>9</a:t>
+            </a:r>
+            <a:endParaRPr lang="en-US" sz="850" dirty="0"/>
+          </a:p>
+        </p:txBody>
+      </p:sp>
+    </p:spTree>
+  </p:cSld>
+  <p:clrMapOvr>
+    <a:masterClrMapping/>
+  </p:clrMapOvr>
+</p:sld>
+</file>
+
+<file path=ppt/slides/slide12.xml><?xml version="1.0" encoding="utf-8"?>
+<p:sld xmlns:a="http://schemas.openxmlformats.org/drawingml/2006/main" xmlns:r="http://schemas.openxmlformats.org/officeDocument/2006/relationships" xmlns:p="http://schemas.openxmlformats.org/presentationml/2006/main">
+  <p:cSld name="Slide 12">
+    <p:bg>
+      <p:bgPr>
+        <a:solidFill>
+          <a:srgbClr val="FFFFFF"/>
+        </a:solidFill>
+      </p:bgPr>
+    </p:bg>
+    <p:spTree>
+      <p:nvGrpSpPr>
+        <p:cNvPr id="1" name=""/>
+        <p:cNvGrpSpPr/>
+        <p:nvPr/>
+      </p:nvGrpSpPr>
+      <p:grpSpPr>
+        <a:xfrm>
+          <a:off x="0" y="0"/>
+          <a:ext cx="0" cy="0"/>
+          <a:chOff x="0" y="0"/>
+          <a:chExt cx="0" cy="0"/>
+        </a:xfrm>
+      </p:grpSpPr>
+      <p:sp>
+        <p:nvSpPr>
+          <p:cNvPr id="2" name="Text 0"/>
+          <p:cNvSpPr/>
+          <p:nvPr/>
+        </p:nvSpPr>
+        <p:spPr>
+          <a:xfrm>
+            <a:off x="566928" y="329184"/>
+            <a:ext cx="10515600" cy="310896"/>
+          </a:xfrm>
+          <a:prstGeom prst="rect">
+            <a:avLst/>
+          </a:prstGeom>
+          <a:noFill/>
+          <a:ln/>
+        </p:spPr>
+        <p:txBody>
+          <a:bodyPr wrap="square" lIns="0" tIns="0" rIns="0" bIns="0" rtlCol="0" anchor="ctr"/>
+          <a:lstStyle/>
+          <a:p>
+            <a:pPr algn="l" indent="0" marL="0">
+              <a:buNone/>
+            </a:pPr>
+            <a:r>
+              <a:rPr lang="en-US" sz="1100" b="1" spc="150" kern="0" dirty="0">
+                <a:solidFill>
+                  <a:srgbClr val="1565C0"/>
+                </a:solidFill>
+                <a:latin typeface="Calibri" pitchFamily="34" charset="0"/>
+                <a:ea typeface="Calibri" pitchFamily="34" charset="-122"/>
+                <a:cs typeface="Calibri" pitchFamily="34" charset="-120"/>
+              </a:rPr>
+              <a:t>CLINICAL CHEMISTRY   ·   INTERFERENCES</a:t>
+            </a:r>
+            <a:endParaRPr lang="en-US" sz="1100" dirty="0"/>
+          </a:p>
+        </p:txBody>
+      </p:sp>
+      <p:sp>
+        <p:nvSpPr>
+          <p:cNvPr id="3" name="Text 1"/>
+          <p:cNvSpPr/>
+          <p:nvPr/>
+        </p:nvSpPr>
+        <p:spPr>
+          <a:xfrm>
+            <a:off x="566928" y="713232"/>
+            <a:ext cx="11064240" cy="749808"/>
+          </a:xfrm>
+          <a:prstGeom prst="rect">
+            <a:avLst/>
+          </a:prstGeom>
+          <a:noFill/>
+          <a:ln/>
+        </p:spPr>
+        <p:txBody>
+          <a:bodyPr wrap="square" lIns="0" tIns="0" rIns="0" bIns="0" rtlCol="0" anchor="ctr"/>
+          <a:lstStyle/>
+          <a:p>
+            <a:pPr algn="l" indent="0" marL="0">
+              <a:buNone/>
+            </a:pPr>
+            <a:r>
+              <a:rPr lang="en-US" sz="3000" b="1" dirty="0">
+                <a:solidFill>
+                  <a:srgbClr val="0E3A5F"/>
+                </a:solidFill>
+                <a:latin typeface="Calibri" pitchFamily="34" charset="0"/>
+                <a:ea typeface="Calibri" pitchFamily="34" charset="-122"/>
+                <a:cs typeface="Calibri" pitchFamily="34" charset="-120"/>
+              </a:rPr>
               <a:t>Hemolysis, Icterus, Lipemia (HIL)</a:t>
             </a:r>
             <a:endParaRPr lang="en-US" sz="3000" dirty="0"/>
@@ -3770,7 +4423,7 @@
       </p:sp>
       <p:graphicFrame>
         <p:nvGraphicFramePr>
-          <p:cNvPr id="12" name="Table 0"/>
+          <p:cNvPr id="13" name="Table 0"/>
           <p:cNvGraphicFramePr>
             <a:graphicFrameLocks noGrp="1"/>
           </p:cNvGraphicFramePr>
@@ -3795,7 +4448,7 @@
                 <a:gridCol w="3657600"/>
                 <a:gridCol w="4928616"/>
               </a:tblGrid>
-              <a:tr h="658368">
+              <a:tr h="566928">
                 <a:tc>
                   <a:txBody>
                     <a:bodyPr/>
@@ -4001,7 +4654,7 @@
                   </a:tcPr>
                 </a:tc>
               </a:tr>
-              <a:tr h="658368">
+              <a:tr h="566928">
                 <a:tc>
                   <a:txBody>
                     <a:bodyPr/>
@@ -4087,7 +4740,7 @@
                           <a:ea typeface="Calibri" pitchFamily="34" charset="-122"/>
                           <a:cs typeface="Calibri" pitchFamily="34" charset="-120"/>
                         </a:rPr>
-                        <a:t>Release of intracellular contents + spectral interference</a:t>
+                        <a:t>Intracellular contents + spectral interference</a:t>
                       </a:r>
                       <a:endParaRPr lang="en-US" sz="1100" dirty="0">
                         <a:latin typeface="Calibri" charset="0"/>
@@ -4155,7 +4808,7 @@
                           <a:ea typeface="Calibri" pitchFamily="34" charset="-122"/>
                           <a:cs typeface="Calibri" pitchFamily="34" charset="-120"/>
                         </a:rPr>
-                        <a:t>↑ potassium, ↑ LDH, ↑ AST, ↑ phosphate; ↑ free hemoglobin</a:t>
+                        <a:t>↑ potassium, ↑ LDH, ↑ AST, ↑ phosphate; +free Hb</a:t>
                       </a:r>
                       <a:endParaRPr lang="en-US" sz="1100" dirty="0">
                         <a:latin typeface="Calibri" charset="0"/>
@@ -4207,7 +4860,7 @@
                   </a:tcPr>
                 </a:tc>
               </a:tr>
-              <a:tr h="658368">
+              <a:tr h="566928">
                 <a:tc>
                   <a:txBody>
                     <a:bodyPr/>
@@ -4361,7 +5014,7 @@
                           <a:ea typeface="Calibri" pitchFamily="34" charset="-122"/>
                           <a:cs typeface="Calibri" pitchFamily="34" charset="-120"/>
                         </a:rPr>
-                        <a:t>Interferes with several colorimetric assays (assay-dependent direction)</a:t>
+                        <a:t>Assay-dependent direction; affects colorimetric methods</a:t>
                       </a:r>
                       <a:endParaRPr lang="en-US" sz="1100" dirty="0">
                         <a:latin typeface="Calibri" charset="0"/>
@@ -4413,7 +5066,7 @@
                   </a:tcPr>
                 </a:tc>
               </a:tr>
-              <a:tr h="658368">
+              <a:tr h="566928">
                 <a:tc>
                   <a:txBody>
                     <a:bodyPr/>
@@ -4499,7 +5152,7 @@
                           <a:ea typeface="Calibri" pitchFamily="34" charset="-122"/>
                           <a:cs typeface="Calibri" pitchFamily="34" charset="-120"/>
                         </a:rPr>
-                        <a:t>Turbidity scatters light; volume displacement</a:t>
+                        <a:t>Turbidity + volume displacement</a:t>
                       </a:r>
                       <a:endParaRPr lang="en-US" sz="1100" dirty="0">
                         <a:latin typeface="Calibri" charset="0"/>
@@ -4619,7 +5272,7 @@
                   </a:tcPr>
                 </a:tc>
               </a:tr>
-              <a:tr h="658368">
+              <a:tr h="566928">
                 <a:tc>
                   <a:txBody>
                     <a:bodyPr/>
@@ -4637,7 +5290,7 @@
                           <a:ea typeface="Calibri" pitchFamily="34" charset="-122"/>
                           <a:cs typeface="Calibri" pitchFamily="34" charset="-120"/>
                         </a:rPr>
-                        <a:t>In vitro / preanalytic</a:t>
+                        <a:t>Preanalytic in vitro</a:t>
                       </a:r>
                       <a:endParaRPr lang="en-US" sz="1100" dirty="0">
                         <a:latin typeface="Calibri" charset="0"/>
@@ -4773,7 +5426,7 @@
                           <a:ea typeface="Calibri" pitchFamily="34" charset="-122"/>
                           <a:cs typeface="Calibri" pitchFamily="34" charset="-120"/>
                         </a:rPr>
-                        <a:t>↑ potassium, ↑ lactate; spurious changes</a:t>
+                        <a:t>↑ potassium, ↑ lactate; glucose falls if separation delayed</a:t>
                       </a:r>
                       <a:endParaRPr lang="en-US" sz="1100" dirty="0">
                         <a:latin typeface="Calibri" charset="0"/>
@@ -4968,675 +5621,6 @@
                 <a:ea typeface="Calibri" pitchFamily="34" charset="-122"/>
                 <a:cs typeface="Calibri" pitchFamily="34" charset="-120"/>
               </a:rPr>
-              <a:t>9</a:t>
-            </a:r>
-            <a:endParaRPr lang="en-US" sz="850" dirty="0"/>
-          </a:p>
-        </p:txBody>
-      </p:sp>
-    </p:spTree>
-  </p:cSld>
-  <p:clrMapOvr>
-    <a:masterClrMapping/>
-  </p:clrMapOvr>
-</p:sld>
-</file>
-
-<file path=ppt/slides/slide12.xml><?xml version="1.0" encoding="utf-8"?>
-<p:sld xmlns:a="http://schemas.openxmlformats.org/drawingml/2006/main" xmlns:r="http://schemas.openxmlformats.org/officeDocument/2006/relationships" xmlns:p="http://schemas.openxmlformats.org/presentationml/2006/main">
-  <p:cSld name="Slide 12">
-    <p:bg>
-      <p:bgPr>
-        <a:solidFill>
-          <a:srgbClr val="FFFFFF"/>
-        </a:solidFill>
-      </p:bgPr>
-    </p:bg>
-    <p:spTree>
-      <p:nvGrpSpPr>
-        <p:cNvPr id="1" name=""/>
-        <p:cNvGrpSpPr/>
-        <p:nvPr/>
-      </p:nvGrpSpPr>
-      <p:grpSpPr>
-        <a:xfrm>
-          <a:off x="0" y="0"/>
-          <a:ext cx="0" cy="0"/>
-          <a:chOff x="0" y="0"/>
-          <a:chExt cx="0" cy="0"/>
-        </a:xfrm>
-      </p:grpSpPr>
-      <p:sp>
-        <p:nvSpPr>
-          <p:cNvPr id="2" name="Text 0"/>
-          <p:cNvSpPr/>
-          <p:nvPr/>
-        </p:nvSpPr>
-        <p:spPr>
-          <a:xfrm>
-            <a:off x="566928" y="329184"/>
-            <a:ext cx="10515600" cy="310896"/>
-          </a:xfrm>
-          <a:prstGeom prst="rect">
-            <a:avLst/>
-          </a:prstGeom>
-          <a:noFill/>
-          <a:ln/>
-        </p:spPr>
-        <p:txBody>
-          <a:bodyPr wrap="square" lIns="0" tIns="0" rIns="0" bIns="0" rtlCol="0" anchor="ctr"/>
-          <a:lstStyle/>
-          <a:p>
-            <a:pPr algn="l" indent="0" marL="0">
-              <a:buNone/>
-            </a:pPr>
-            <a:r>
-              <a:rPr lang="en-US" sz="1100" b="1" spc="150" kern="0" dirty="0">
-                <a:solidFill>
-                  <a:srgbClr val="1565C0"/>
-                </a:solidFill>
-                <a:latin typeface="Calibri" pitchFamily="34" charset="0"/>
-                <a:ea typeface="Calibri" pitchFamily="34" charset="-122"/>
-                <a:cs typeface="Calibri" pitchFamily="34" charset="-120"/>
-              </a:rPr>
-              <a:t>CLINICAL CHEMISTRY   ·   THE TESTING CYCLE</a:t>
-            </a:r>
-            <a:endParaRPr lang="en-US" sz="1100" dirty="0"/>
-          </a:p>
-        </p:txBody>
-      </p:sp>
-      <p:sp>
-        <p:nvSpPr>
-          <p:cNvPr id="3" name="Text 1"/>
-          <p:cNvSpPr/>
-          <p:nvPr/>
-        </p:nvSpPr>
-        <p:spPr>
-          <a:xfrm>
-            <a:off x="566928" y="713232"/>
-            <a:ext cx="11064240" cy="749808"/>
-          </a:xfrm>
-          <a:prstGeom prst="rect">
-            <a:avLst/>
-          </a:prstGeom>
-          <a:noFill/>
-          <a:ln/>
-        </p:spPr>
-        <p:txBody>
-          <a:bodyPr wrap="square" lIns="0" tIns="0" rIns="0" bIns="0" rtlCol="0" anchor="ctr"/>
-          <a:lstStyle/>
-          <a:p>
-            <a:pPr algn="l" indent="0" marL="0">
-              <a:buNone/>
-            </a:pPr>
-            <a:r>
-              <a:rPr lang="en-US" sz="3000" b="1" dirty="0">
-                <a:solidFill>
-                  <a:srgbClr val="0E3A5F"/>
-                </a:solidFill>
-                <a:latin typeface="Calibri" pitchFamily="34" charset="0"/>
-                <a:ea typeface="Calibri" pitchFamily="34" charset="-122"/>
-                <a:cs typeface="Calibri" pitchFamily="34" charset="-120"/>
-              </a:rPr>
-              <a:t>Error Across the Testing Cycle</a:t>
-            </a:r>
-            <a:endParaRPr lang="en-US" sz="3000" dirty="0"/>
-          </a:p>
-        </p:txBody>
-      </p:sp>
-      <p:sp>
-        <p:nvSpPr>
-          <p:cNvPr id="4" name="Shape 2"/>
-          <p:cNvSpPr/>
-          <p:nvPr/>
-        </p:nvSpPr>
-        <p:spPr>
-          <a:xfrm>
-            <a:off x="566928" y="1920240"/>
-            <a:ext cx="3383280" cy="1371600"/>
-          </a:xfrm>
-          <a:prstGeom prst="roundRect">
-            <a:avLst>
-              <a:gd name="adj" fmla="val 4667"/>
-            </a:avLst>
-          </a:prstGeom>
-          <a:solidFill>
-            <a:srgbClr val="1565C0"/>
-          </a:solidFill>
-          <a:ln w="15875">
-            <a:solidFill>
-              <a:srgbClr val="1565C0"/>
-            </a:solidFill>
-            <a:prstDash val="solid"/>
-          </a:ln>
-          <a:effectLst>
-            <a:outerShdw sx="100000" sy="100000" kx="0" ky="0" algn="bl" rotWithShape="0" blurRad="88900" dist="25400" dir="5400000">
-              <a:srgbClr val="22303C">
-                <a:alpha val="12000"/>
-              </a:srgbClr>
-            </a:outerShdw>
-          </a:effectLst>
-        </p:spPr>
-      </p:sp>
-      <p:sp>
-        <p:nvSpPr>
-          <p:cNvPr id="5" name="Text 3"/>
-          <p:cNvSpPr/>
-          <p:nvPr/>
-        </p:nvSpPr>
-        <p:spPr>
-          <a:xfrm>
-            <a:off x="621792" y="1920240"/>
-            <a:ext cx="3273552" cy="1371600"/>
-          </a:xfrm>
-          <a:prstGeom prst="rect">
-            <a:avLst/>
-          </a:prstGeom>
-          <a:noFill/>
-          <a:ln/>
-        </p:spPr>
-        <p:txBody>
-          <a:bodyPr wrap="square" lIns="25400" tIns="25400" rIns="25400" bIns="25400" rtlCol="0" anchor="ctr"/>
-          <a:lstStyle/>
-          <a:p>
-            <a:pPr algn="ctr" indent="0" marL="0">
-              <a:buNone/>
-            </a:pPr>
-            <a:r>
-              <a:rPr lang="en-US" sz="1250" b="1" dirty="0">
-                <a:solidFill>
-                  <a:srgbClr val="FFFFFF"/>
-                </a:solidFill>
-                <a:latin typeface="Calibri" pitchFamily="34" charset="0"/>
-                <a:ea typeface="Calibri" pitchFamily="34" charset="-122"/>
-                <a:cs typeface="Calibri" pitchFamily="34" charset="-120"/>
-              </a:rPr>
-              <a:t>PREANALYTIC</a:t>
-            </a:r>
-            <a:endParaRPr lang="en-US" sz="1250" dirty="0"/>
-          </a:p>
-          <a:p>
-            <a:pPr algn="ctr" indent="0" marL="0">
-              <a:buNone/>
-            </a:pPr>
-            <a:r>
-              <a:rPr lang="en-US" sz="1250" b="1" dirty="0">
-                <a:solidFill>
-                  <a:srgbClr val="FFFFFF"/>
-                </a:solidFill>
-                <a:latin typeface="Calibri" pitchFamily="34" charset="0"/>
-                <a:ea typeface="Calibri" pitchFamily="34" charset="-122"/>
-                <a:cs typeface="Calibri" pitchFamily="34" charset="-120"/>
-              </a:rPr>
-              <a:t>order, collect, label, transport, process</a:t>
-            </a:r>
-            <a:endParaRPr lang="en-US" sz="1250" dirty="0"/>
-          </a:p>
-        </p:txBody>
-      </p:sp>
-      <p:sp>
-        <p:nvSpPr>
-          <p:cNvPr id="6" name="Shape 4"/>
-          <p:cNvSpPr/>
-          <p:nvPr/>
-        </p:nvSpPr>
-        <p:spPr>
-          <a:xfrm>
-            <a:off x="3986784" y="2606040"/>
-            <a:ext cx="380848" cy="0"/>
-          </a:xfrm>
-          <a:prstGeom prst="line">
-            <a:avLst/>
-          </a:prstGeom>
-          <a:noFill/>
-          <a:ln w="22225">
-            <a:solidFill>
-              <a:srgbClr val="1565C0"/>
-            </a:solidFill>
-            <a:prstDash val="solid"/>
-            <a:tailEnd type="triangle"/>
-          </a:ln>
-        </p:spPr>
-      </p:sp>
-      <p:sp>
-        <p:nvSpPr>
-          <p:cNvPr id="7" name="Shape 5"/>
-          <p:cNvSpPr/>
-          <p:nvPr/>
-        </p:nvSpPr>
-        <p:spPr>
-          <a:xfrm>
-            <a:off x="4404208" y="1920240"/>
-            <a:ext cx="3383280" cy="1371600"/>
-          </a:xfrm>
-          <a:prstGeom prst="roundRect">
-            <a:avLst>
-              <a:gd name="adj" fmla="val 4667"/>
-            </a:avLst>
-          </a:prstGeom>
-          <a:solidFill>
-            <a:srgbClr val="FFFFFF"/>
-          </a:solidFill>
-          <a:ln w="15875">
-            <a:solidFill>
-              <a:srgbClr val="DCE4EC"/>
-            </a:solidFill>
-            <a:prstDash val="solid"/>
-          </a:ln>
-          <a:effectLst>
-            <a:outerShdw sx="100000" sy="100000" kx="0" ky="0" algn="bl" rotWithShape="0" blurRad="88900" dist="25400" dir="5400000">
-              <a:srgbClr val="22303C">
-                <a:alpha val="12000"/>
-              </a:srgbClr>
-            </a:outerShdw>
-          </a:effectLst>
-        </p:spPr>
-      </p:sp>
-      <p:sp>
-        <p:nvSpPr>
-          <p:cNvPr id="8" name="Text 6"/>
-          <p:cNvSpPr/>
-          <p:nvPr/>
-        </p:nvSpPr>
-        <p:spPr>
-          <a:xfrm>
-            <a:off x="4459072" y="1920240"/>
-            <a:ext cx="3273552" cy="1371600"/>
-          </a:xfrm>
-          <a:prstGeom prst="rect">
-            <a:avLst/>
-          </a:prstGeom>
-          <a:noFill/>
-          <a:ln/>
-        </p:spPr>
-        <p:txBody>
-          <a:bodyPr wrap="square" lIns="25400" tIns="25400" rIns="25400" bIns="25400" rtlCol="0" anchor="ctr"/>
-          <a:lstStyle/>
-          <a:p>
-            <a:pPr algn="ctr" indent="0" marL="0">
-              <a:buNone/>
-            </a:pPr>
-            <a:r>
-              <a:rPr lang="en-US" sz="1250" b="1" dirty="0">
-                <a:solidFill>
-                  <a:srgbClr val="1B2A38"/>
-                </a:solidFill>
-                <a:latin typeface="Calibri" pitchFamily="34" charset="0"/>
-                <a:ea typeface="Calibri" pitchFamily="34" charset="-122"/>
-                <a:cs typeface="Calibri" pitchFamily="34" charset="-120"/>
-              </a:rPr>
-              <a:t>ANALYTIC</a:t>
-            </a:r>
-            <a:endParaRPr lang="en-US" sz="1250" dirty="0"/>
-          </a:p>
-          <a:p>
-            <a:pPr algn="ctr" indent="0" marL="0">
-              <a:buNone/>
-            </a:pPr>
-            <a:r>
-              <a:rPr lang="en-US" sz="1250" b="1" dirty="0">
-                <a:solidFill>
-                  <a:srgbClr val="1B2A38"/>
-                </a:solidFill>
-                <a:latin typeface="Calibri" pitchFamily="34" charset="0"/>
-                <a:ea typeface="Calibri" pitchFamily="34" charset="-122"/>
-                <a:cs typeface="Calibri" pitchFamily="34" charset="-120"/>
-              </a:rPr>
-              <a:t>measurement on the instrument</a:t>
-            </a:r>
-            <a:endParaRPr lang="en-US" sz="1250" dirty="0"/>
-          </a:p>
-        </p:txBody>
-      </p:sp>
-      <p:sp>
-        <p:nvSpPr>
-          <p:cNvPr id="9" name="Shape 7"/>
-          <p:cNvSpPr/>
-          <p:nvPr/>
-        </p:nvSpPr>
-        <p:spPr>
-          <a:xfrm>
-            <a:off x="7824064" y="2606040"/>
-            <a:ext cx="380848" cy="0"/>
-          </a:xfrm>
-          <a:prstGeom prst="line">
-            <a:avLst/>
-          </a:prstGeom>
-          <a:noFill/>
-          <a:ln w="22225">
-            <a:solidFill>
-              <a:srgbClr val="1565C0"/>
-            </a:solidFill>
-            <a:prstDash val="solid"/>
-            <a:tailEnd type="triangle"/>
-          </a:ln>
-        </p:spPr>
-      </p:sp>
-      <p:sp>
-        <p:nvSpPr>
-          <p:cNvPr id="10" name="Shape 8"/>
-          <p:cNvSpPr/>
-          <p:nvPr/>
-        </p:nvSpPr>
-        <p:spPr>
-          <a:xfrm>
-            <a:off x="8241487" y="1920240"/>
-            <a:ext cx="3383280" cy="1371600"/>
-          </a:xfrm>
-          <a:prstGeom prst="roundRect">
-            <a:avLst>
-              <a:gd name="adj" fmla="val 4667"/>
-            </a:avLst>
-          </a:prstGeom>
-          <a:solidFill>
-            <a:srgbClr val="0E3A5F"/>
-          </a:solidFill>
-          <a:ln w="15875">
-            <a:solidFill>
-              <a:srgbClr val="0E3A5F"/>
-            </a:solidFill>
-            <a:prstDash val="solid"/>
-          </a:ln>
-          <a:effectLst>
-            <a:outerShdw sx="100000" sy="100000" kx="0" ky="0" algn="bl" rotWithShape="0" blurRad="88900" dist="25400" dir="5400000">
-              <a:srgbClr val="22303C">
-                <a:alpha val="12000"/>
-              </a:srgbClr>
-            </a:outerShdw>
-          </a:effectLst>
-        </p:spPr>
-      </p:sp>
-      <p:sp>
-        <p:nvSpPr>
-          <p:cNvPr id="11" name="Text 9"/>
-          <p:cNvSpPr/>
-          <p:nvPr/>
-        </p:nvSpPr>
-        <p:spPr>
-          <a:xfrm>
-            <a:off x="8296351" y="1920240"/>
-            <a:ext cx="3273552" cy="1371600"/>
-          </a:xfrm>
-          <a:prstGeom prst="rect">
-            <a:avLst/>
-          </a:prstGeom>
-          <a:noFill/>
-          <a:ln/>
-        </p:spPr>
-        <p:txBody>
-          <a:bodyPr wrap="square" lIns="25400" tIns="25400" rIns="25400" bIns="25400" rtlCol="0" anchor="ctr"/>
-          <a:lstStyle/>
-          <a:p>
-            <a:pPr algn="ctr" indent="0" marL="0">
-              <a:buNone/>
-            </a:pPr>
-            <a:r>
-              <a:rPr lang="en-US" sz="1250" b="1" dirty="0">
-                <a:solidFill>
-                  <a:srgbClr val="FFFFFF"/>
-                </a:solidFill>
-                <a:latin typeface="Calibri" pitchFamily="34" charset="0"/>
-                <a:ea typeface="Calibri" pitchFamily="34" charset="-122"/>
-                <a:cs typeface="Calibri" pitchFamily="34" charset="-120"/>
-              </a:rPr>
-              <a:t>POSTANALYTIC</a:t>
-            </a:r>
-            <a:endParaRPr lang="en-US" sz="1250" dirty="0"/>
-          </a:p>
-          <a:p>
-            <a:pPr algn="ctr" indent="0" marL="0">
-              <a:buNone/>
-            </a:pPr>
-            <a:r>
-              <a:rPr lang="en-US" sz="1250" b="1" dirty="0">
-                <a:solidFill>
-                  <a:srgbClr val="FFFFFF"/>
-                </a:solidFill>
-                <a:latin typeface="Calibri" pitchFamily="34" charset="0"/>
-                <a:ea typeface="Calibri" pitchFamily="34" charset="-122"/>
-                <a:cs typeface="Calibri" pitchFamily="34" charset="-120"/>
-              </a:rPr>
-              <a:t>result, interpretation, reporting</a:t>
-            </a:r>
-            <a:endParaRPr lang="en-US" sz="1250" dirty="0"/>
-          </a:p>
-        </p:txBody>
-      </p:sp>
-      <p:sp>
-        <p:nvSpPr>
-          <p:cNvPr id="12" name="Shape 10"/>
-          <p:cNvSpPr/>
-          <p:nvPr/>
-        </p:nvSpPr>
-        <p:spPr>
-          <a:xfrm>
-            <a:off x="566928" y="3611880"/>
-            <a:ext cx="11057839" cy="1828800"/>
-          </a:xfrm>
-          <a:prstGeom prst="roundRect">
-            <a:avLst>
-              <a:gd name="adj" fmla="val 4500"/>
-            </a:avLst>
-          </a:prstGeom>
-          <a:solidFill>
-            <a:srgbClr val="E7EFFA"/>
-          </a:solidFill>
-          <a:ln/>
-          <a:effectLst>
-            <a:outerShdw sx="100000" sy="100000" kx="0" ky="0" algn="bl" rotWithShape="0" blurRad="88900" dist="25400" dir="5400000">
-              <a:srgbClr val="22303C">
-                <a:alpha val="12000"/>
-              </a:srgbClr>
-            </a:outerShdw>
-          </a:effectLst>
-        </p:spPr>
-      </p:sp>
-      <p:sp>
-        <p:nvSpPr>
-          <p:cNvPr id="13" name="Text 11"/>
-          <p:cNvSpPr/>
-          <p:nvPr/>
-        </p:nvSpPr>
-        <p:spPr>
-          <a:xfrm>
-            <a:off x="841248" y="3794760"/>
-            <a:ext cx="10509199" cy="1554480"/>
-          </a:xfrm>
-          <a:prstGeom prst="rect">
-            <a:avLst/>
-          </a:prstGeom>
-          <a:noFill/>
-          <a:ln/>
-        </p:spPr>
-        <p:txBody>
-          <a:bodyPr wrap="square" lIns="0" tIns="0" rIns="0" bIns="0" rtlCol="0" anchor="t"/>
-          <a:lstStyle/>
-          <a:p>
-            <a:pPr algn="l" marL="177800" indent="-177800">
-              <a:spcAft>
-                <a:spcPts val="500"/>
-              </a:spcAft>
-              <a:buSzPct val="100000"/>
-              <a:buChar char="•"/>
-            </a:pPr>
-            <a:r>
-              <a:rPr lang="en-US" sz="1250" b="1" dirty="0">
-                <a:solidFill>
-                  <a:srgbClr val="1B2A38"/>
-                </a:solidFill>
-                <a:latin typeface="Calibri" pitchFamily="34" charset="0"/>
-                <a:ea typeface="Calibri" pitchFamily="34" charset="-122"/>
-                <a:cs typeface="Calibri" pitchFamily="34" charset="-120"/>
-              </a:rPr>
-              <a:t>Most errors are PREANALYTIC: wrong patient/tube, hemolysis, clotting, wrong additive, delayed processing.</a:t>
-            </a:r>
-            <a:endParaRPr lang="en-US" sz="1250" dirty="0"/>
-          </a:p>
-          <a:p>
-            <a:pPr algn="l" marL="177800" indent="-177800">
-              <a:spcAft>
-                <a:spcPts val="500"/>
-              </a:spcAft>
-              <a:buSzPct val="100000"/>
-              <a:buChar char="•"/>
-            </a:pPr>
-            <a:r>
-              <a:rPr lang="en-US" sz="1250" dirty="0">
-                <a:solidFill>
-                  <a:srgbClr val="33444F"/>
-                </a:solidFill>
-                <a:latin typeface="Calibri" pitchFamily="34" charset="0"/>
-                <a:ea typeface="Calibri" pitchFamily="34" charset="-122"/>
-                <a:cs typeface="Calibri" pitchFamily="34" charset="-120"/>
-              </a:rPr>
-              <a:t>Analytic errors: calibration drift, interference, carryover — caught by quality control and delta checks.</a:t>
-            </a:r>
-            <a:endParaRPr lang="en-US" sz="1250" dirty="0"/>
-          </a:p>
-          <a:p>
-            <a:pPr algn="l" marL="177800" indent="-177800">
-              <a:spcAft>
-                <a:spcPts val="500"/>
-              </a:spcAft>
-              <a:buSzPct val="100000"/>
-              <a:buChar char="•"/>
-            </a:pPr>
-            <a:r>
-              <a:rPr lang="en-US" sz="1250" dirty="0">
-                <a:solidFill>
-                  <a:srgbClr val="33444F"/>
-                </a:solidFill>
-                <a:latin typeface="Calibri" pitchFamily="34" charset="0"/>
-                <a:ea typeface="Calibri" pitchFamily="34" charset="-122"/>
-                <a:cs typeface="Calibri" pitchFamily="34" charset="-120"/>
-              </a:rPr>
-              <a:t>Postanalytic errors: transcription, wrong reference interval, failure to communicate a critical value.</a:t>
-            </a:r>
-            <a:endParaRPr lang="en-US" sz="1250" dirty="0"/>
-          </a:p>
-          <a:p>
-            <a:pPr algn="l" marL="177800" indent="-177800">
-              <a:spcAft>
-                <a:spcPts val="500"/>
-              </a:spcAft>
-              <a:buSzPct val="100000"/>
-              <a:buChar char="•"/>
-            </a:pPr>
-            <a:r>
-              <a:rPr lang="en-US" sz="1250" dirty="0">
-                <a:solidFill>
-                  <a:srgbClr val="33444F"/>
-                </a:solidFill>
-                <a:latin typeface="Calibri" pitchFamily="34" charset="0"/>
-                <a:ea typeface="Calibri" pitchFamily="34" charset="-122"/>
-                <a:cs typeface="Calibri" pitchFamily="34" charset="-120"/>
-              </a:rPr>
-              <a:t>Delta checks compare a new result with the patient’s prior value to catch sample mix-ups and large shifts.</a:t>
-            </a:r>
-            <a:endParaRPr lang="en-US" sz="1250" dirty="0"/>
-          </a:p>
-        </p:txBody>
-      </p:sp>
-      <p:sp>
-        <p:nvSpPr>
-          <p:cNvPr id="14" name="Text 12"/>
-          <p:cNvSpPr/>
-          <p:nvPr/>
-        </p:nvSpPr>
-        <p:spPr>
-          <a:xfrm>
-            <a:off x="566928" y="6473952"/>
-            <a:ext cx="7772400" cy="274320"/>
-          </a:xfrm>
-          <a:prstGeom prst="rect">
-            <a:avLst/>
-          </a:prstGeom>
-          <a:noFill/>
-          <a:ln/>
-        </p:spPr>
-        <p:txBody>
-          <a:bodyPr wrap="square" lIns="0" tIns="0" rIns="0" bIns="0" rtlCol="0" anchor="ctr"/>
-          <a:lstStyle/>
-          <a:p>
-            <a:pPr algn="l" indent="0" marL="0">
-              <a:buNone/>
-            </a:pPr>
-            <a:r>
-              <a:rPr lang="en-US" sz="850" dirty="0">
-                <a:solidFill>
-                  <a:srgbClr val="9AA8B4"/>
-                </a:solidFill>
-                <a:latin typeface="Calibri" pitchFamily="34" charset="0"/>
-                <a:ea typeface="Calibri" pitchFamily="34" charset="-122"/>
-                <a:cs typeface="Calibri" pitchFamily="34" charset="-120"/>
-              </a:rPr>
-              <a:t>Makassed General Hospital  ·  Department of Laboratory Medicine</a:t>
-            </a:r>
-            <a:endParaRPr lang="en-US" sz="850" dirty="0"/>
-          </a:p>
-        </p:txBody>
-      </p:sp>
-      <p:sp>
-        <p:nvSpPr>
-          <p:cNvPr id="15" name="Text 13"/>
-          <p:cNvSpPr/>
-          <p:nvPr/>
-        </p:nvSpPr>
-        <p:spPr>
-          <a:xfrm>
-            <a:off x="9814255" y="6473952"/>
-            <a:ext cx="1828800" cy="274320"/>
-          </a:xfrm>
-          <a:prstGeom prst="rect">
-            <a:avLst/>
-          </a:prstGeom>
-          <a:noFill/>
-          <a:ln/>
-        </p:spPr>
-        <p:txBody>
-          <a:bodyPr wrap="square" lIns="0" tIns="0" rIns="0" bIns="0" rtlCol="0" anchor="ctr"/>
-          <a:lstStyle/>
-          <a:p>
-            <a:pPr algn="r" indent="0" marL="0">
-              <a:buNone/>
-            </a:pPr>
-            <a:r>
-              <a:rPr lang="en-US" sz="850" dirty="0">
-                <a:solidFill>
-                  <a:srgbClr val="9AA8B4"/>
-                </a:solidFill>
-                <a:latin typeface="Calibri" pitchFamily="34" charset="0"/>
-                <a:ea typeface="Calibri" pitchFamily="34" charset="-122"/>
-                <a:cs typeface="Calibri" pitchFamily="34" charset="-120"/>
-              </a:rPr>
-              <a:t>CP Lecture Series</a:t>
-            </a:r>
-            <a:pPr algn="r" indent="0" marL="0">
-              <a:buNone/>
-            </a:pPr>
-            <a:r>
-              <a:rPr lang="en-US" sz="850" dirty="0">
-                <a:solidFill>
-                  <a:srgbClr val="DCE4EC"/>
-                </a:solidFill>
-                <a:latin typeface="Calibri" pitchFamily="34" charset="0"/>
-                <a:ea typeface="Calibri" pitchFamily="34" charset="-122"/>
-                <a:cs typeface="Calibri" pitchFamily="34" charset="-120"/>
-              </a:rPr>
-              <a:t>   ·   </a:t>
-            </a:r>
-            <a:pPr algn="r" indent="0" marL="0">
-              <a:buNone/>
-            </a:pPr>
-            <a:r>
-              <a:rPr lang="en-US" sz="850" b="1" dirty="0">
-                <a:solidFill>
-                  <a:srgbClr val="1565C0"/>
-                </a:solidFill>
-                <a:latin typeface="Calibri" pitchFamily="34" charset="0"/>
-                <a:ea typeface="Calibri" pitchFamily="34" charset="-122"/>
-                <a:cs typeface="Calibri" pitchFamily="34" charset="-120"/>
-              </a:rPr>
               <a:t>10</a:t>
             </a:r>
             <a:endParaRPr lang="en-US" sz="850" dirty="0"/>
@@ -5708,7 +5692,7 @@
                 <a:ea typeface="Calibri" pitchFamily="34" charset="-122"/>
                 <a:cs typeface="Calibri" pitchFamily="34" charset="-120"/>
               </a:rPr>
-              <a:t>CLINICAL CHEMISTRY   ·   QUALITY CONTROL</a:t>
+              <a:t>CLINICAL CHEMISTRY   ·   THE TESTING CYCLE</a:t>
             </a:r>
             <a:endParaRPr lang="en-US" sz="1100" dirty="0"/>
           </a:p>
@@ -5747,7 +5731,7 @@
                 <a:ea typeface="Calibri" pitchFamily="34" charset="-122"/>
                 <a:cs typeface="Calibri" pitchFamily="34" charset="-120"/>
               </a:rPr>
-              <a:t>Detecting Analytic Error</a:t>
+              <a:t>Error Across the Testing Cycle</a:t>
             </a:r>
             <a:endParaRPr lang="en-US" sz="3000" dirty="0"/>
           </a:p>
@@ -5761,18 +5745,23 @@
         </p:nvSpPr>
         <p:spPr>
           <a:xfrm>
-            <a:off x="566928" y="1517904"/>
-            <a:ext cx="5346040" cy="4114800"/>
+            <a:off x="566928" y="1828800"/>
+            <a:ext cx="3442106" cy="1371600"/>
           </a:xfrm>
           <a:prstGeom prst="roundRect">
             <a:avLst>
-              <a:gd name="adj" fmla="val 2000"/>
+              <a:gd name="adj" fmla="val 4667"/>
             </a:avLst>
           </a:prstGeom>
           <a:solidFill>
-            <a:srgbClr val="E7EFFA"/>
+            <a:srgbClr val="1565C0"/>
           </a:solidFill>
-          <a:ln/>
+          <a:ln w="15875">
+            <a:solidFill>
+              <a:srgbClr val="1565C0"/>
+            </a:solidFill>
+            <a:prstDash val="solid"/>
+          </a:ln>
           <a:effectLst>
             <a:outerShdw sx="100000" sy="100000" kx="0" ky="0" algn="bl" rotWithShape="0" blurRad="88900" dist="25400" dir="5400000">
               <a:srgbClr val="22303C">
@@ -5790,142 +5779,77 @@
         </p:nvSpPr>
         <p:spPr>
           <a:xfrm>
-            <a:off x="804672" y="1682496"/>
-            <a:ext cx="4888840" cy="274320"/>
-          </a:xfrm>
-          <a:prstGeom prst="rect">
-            <a:avLst/>
-          </a:prstGeom>
-          <a:noFill/>
-          <a:ln/>
-        </p:spPr>
-        <p:txBody>
-          <a:bodyPr wrap="square" lIns="0" tIns="0" rIns="0" bIns="0" rtlCol="0" anchor="ctr"/>
-          <a:lstStyle/>
-          <a:p>
-            <a:pPr indent="0" marL="0">
-              <a:buNone/>
-            </a:pPr>
-            <a:r>
-              <a:rPr lang="en-US" sz="1200" b="1" spc="100" kern="0" dirty="0">
-                <a:solidFill>
-                  <a:srgbClr val="0D4A92"/>
-                </a:solidFill>
-                <a:latin typeface="Calibri" pitchFamily="34" charset="0"/>
-                <a:ea typeface="Calibri" pitchFamily="34" charset="-122"/>
-                <a:cs typeface="Calibri" pitchFamily="34" charset="-120"/>
-              </a:rPr>
-              <a:t>QC FUNDAMENTALS</a:t>
-            </a:r>
-            <a:endParaRPr lang="en-US" sz="1200" dirty="0"/>
-          </a:p>
-        </p:txBody>
-      </p:sp>
-      <p:sp>
-        <p:nvSpPr>
-          <p:cNvPr id="6" name="Text 4"/>
-          <p:cNvSpPr/>
-          <p:nvPr/>
-        </p:nvSpPr>
-        <p:spPr>
-          <a:xfrm>
-            <a:off x="804672" y="2029968"/>
-            <a:ext cx="4870552" cy="3474720"/>
-          </a:xfrm>
-          <a:prstGeom prst="rect">
-            <a:avLst/>
-          </a:prstGeom>
-          <a:noFill/>
-          <a:ln/>
-        </p:spPr>
-        <p:txBody>
-          <a:bodyPr wrap="square" lIns="0" tIns="0" rIns="0" bIns="0" rtlCol="0" anchor="t"/>
-          <a:lstStyle/>
-          <a:p>
-            <a:pPr algn="l" marL="177800" indent="-177800">
-              <a:spcAft>
-                <a:spcPts val="900"/>
-              </a:spcAft>
-              <a:buSzPct val="100000"/>
-              <a:buChar char="•"/>
+            <a:off x="621792" y="1828800"/>
+            <a:ext cx="3332378" cy="1371600"/>
+          </a:xfrm>
+          <a:prstGeom prst="rect">
+            <a:avLst/>
+          </a:prstGeom>
+          <a:noFill/>
+          <a:ln/>
+        </p:spPr>
+        <p:txBody>
+          <a:bodyPr wrap="square" lIns="25400" tIns="25400" rIns="25400" bIns="25400" rtlCol="0" anchor="ctr"/>
+          <a:lstStyle/>
+          <a:p>
+            <a:pPr algn="ctr" indent="0" marL="0">
+              <a:buNone/>
             </a:pPr>
             <a:r>
               <a:rPr lang="en-US" sz="1250" b="1" dirty="0">
                 <a:solidFill>
-                  <a:srgbClr val="1B2A38"/>
-                </a:solidFill>
-                <a:latin typeface="Calibri" pitchFamily="34" charset="0"/>
-                <a:ea typeface="Calibri" pitchFamily="34" charset="-122"/>
-                <a:cs typeface="Calibri" pitchFamily="34" charset="-120"/>
-              </a:rPr>
-              <a:t>Run controls at defined intervals; plot on a Levey-Jennings chart against mean ± SD.</a:t>
+                  <a:srgbClr val="FFFFFF"/>
+                </a:solidFill>
+                <a:latin typeface="Calibri" pitchFamily="34" charset="0"/>
+                <a:ea typeface="Calibri" pitchFamily="34" charset="-122"/>
+                <a:cs typeface="Calibri" pitchFamily="34" charset="-120"/>
+              </a:rPr>
+              <a:t>PREANALYTIC</a:t>
             </a:r>
             <a:endParaRPr lang="en-US" sz="1250" dirty="0"/>
           </a:p>
           <a:p>
-            <a:pPr algn="l" marL="177800" indent="-177800">
-              <a:spcAft>
-                <a:spcPts val="900"/>
-              </a:spcAft>
-              <a:buSzPct val="100000"/>
-              <a:buChar char="•"/>
-            </a:pPr>
-            <a:r>
-              <a:rPr lang="en-US" sz="1250" dirty="0">
-                <a:solidFill>
-                  <a:srgbClr val="33444F"/>
-                </a:solidFill>
-                <a:latin typeface="Calibri" pitchFamily="34" charset="0"/>
-                <a:ea typeface="Calibri" pitchFamily="34" charset="-122"/>
-                <a:cs typeface="Calibri" pitchFamily="34" charset="-120"/>
-              </a:rPr>
-              <a:t>Random error widens scatter (precision); systematic error shifts/trends the mean (accuracy).</a:t>
+            <a:pPr algn="ctr" indent="0" marL="0">
+              <a:buNone/>
+            </a:pPr>
+            <a:r>
+              <a:rPr lang="en-US" sz="1250" b="1" dirty="0">
+                <a:solidFill>
+                  <a:srgbClr val="FFFFFF"/>
+                </a:solidFill>
+                <a:latin typeface="Calibri" pitchFamily="34" charset="0"/>
+                <a:ea typeface="Calibri" pitchFamily="34" charset="-122"/>
+                <a:cs typeface="Calibri" pitchFamily="34" charset="-120"/>
+              </a:rPr>
+              <a:t>order, collect, label, transport</a:t>
             </a:r>
             <a:endParaRPr lang="en-US" sz="1250" dirty="0"/>
           </a:p>
-          <a:p>
-            <a:pPr algn="l" marL="177800" indent="-177800">
-              <a:spcAft>
-                <a:spcPts val="900"/>
-              </a:spcAft>
-              <a:buSzPct val="100000"/>
-              <a:buChar char="•"/>
-            </a:pPr>
-            <a:r>
-              <a:rPr lang="en-US" sz="1250" dirty="0">
-                <a:solidFill>
-                  <a:srgbClr val="33444F"/>
-                </a:solidFill>
-                <a:latin typeface="Calibri" pitchFamily="34" charset="0"/>
-                <a:ea typeface="Calibri" pitchFamily="34" charset="-122"/>
-                <a:cs typeface="Calibri" pitchFamily="34" charset="-120"/>
-              </a:rPr>
-              <a:t>Westgard multirules (e.g., 1₃ₛ, 2₂ₛ, R₄ₛ, 10ₓ) flag out-of-control runs.</a:t>
-            </a:r>
-            <a:endParaRPr lang="en-US" sz="1250" dirty="0"/>
-          </a:p>
-          <a:p>
-            <a:pPr algn="l" marL="177800" indent="-177800">
-              <a:spcAft>
-                <a:spcPts val="900"/>
-              </a:spcAft>
-              <a:buSzPct val="100000"/>
-              <a:buChar char="•"/>
-            </a:pPr>
-            <a:r>
-              <a:rPr lang="en-US" sz="1250" dirty="0">
-                <a:solidFill>
-                  <a:srgbClr val="33444F"/>
-                </a:solidFill>
-                <a:latin typeface="Calibri" pitchFamily="34" charset="0"/>
-                <a:ea typeface="Calibri" pitchFamily="34" charset="-122"/>
-                <a:cs typeface="Calibri" pitchFamily="34" charset="-120"/>
-              </a:rPr>
-              <a:t>A shift suggests a new lot/calibration; a trend suggests reagent or electrode deterioration.</a:t>
-            </a:r>
-            <a:endParaRPr lang="en-US" sz="1250" dirty="0"/>
-          </a:p>
-        </p:txBody>
+        </p:txBody>
+      </p:sp>
+      <p:sp>
+        <p:nvSpPr>
+          <p:cNvPr id="6" name="Shape 4"/>
+          <p:cNvSpPr/>
+          <p:nvPr/>
+        </p:nvSpPr>
+        <p:spPr>
+          <a:xfrm>
+            <a:off x="4027322" y="2514600"/>
+            <a:ext cx="329184" cy="0"/>
+          </a:xfrm>
+          <a:prstGeom prst="line">
+            <a:avLst/>
+          </a:prstGeom>
+          <a:noFill/>
+          <a:ln w="22225">
+            <a:solidFill>
+              <a:srgbClr val="1565C0"/>
+            </a:solidFill>
+            <a:prstDash val="solid"/>
+            <a:tailEnd type="triangle"/>
+          </a:ln>
+        </p:spPr>
       </p:sp>
       <p:sp>
         <p:nvSpPr>
@@ -5935,18 +5859,23 @@
         </p:nvSpPr>
         <p:spPr>
           <a:xfrm>
-            <a:off x="6278728" y="1517904"/>
-            <a:ext cx="5346040" cy="4114800"/>
+            <a:off x="4374794" y="1828800"/>
+            <a:ext cx="3442106" cy="1371600"/>
           </a:xfrm>
           <a:prstGeom prst="roundRect">
             <a:avLst>
-              <a:gd name="adj" fmla="val 2000"/>
+              <a:gd name="adj" fmla="val 4667"/>
             </a:avLst>
           </a:prstGeom>
           <a:solidFill>
-            <a:srgbClr val="E7EFFA"/>
+            <a:srgbClr val="FFFFFF"/>
           </a:solidFill>
-          <a:ln/>
+          <a:ln w="15875">
+            <a:solidFill>
+              <a:srgbClr val="DCE4EC"/>
+            </a:solidFill>
+            <a:prstDash val="solid"/>
+          </a:ln>
           <a:effectLst>
             <a:outerShdw sx="100000" sy="100000" kx="0" ky="0" algn="bl" rotWithShape="0" blurRad="88900" dist="25400" dir="5400000">
               <a:srgbClr val="22303C">
@@ -5964,8 +5893,207 @@
         </p:nvSpPr>
         <p:spPr>
           <a:xfrm>
-            <a:off x="6516472" y="1682496"/>
-            <a:ext cx="4888840" cy="274320"/>
+            <a:off x="4429658" y="1828800"/>
+            <a:ext cx="3332378" cy="1371600"/>
+          </a:xfrm>
+          <a:prstGeom prst="rect">
+            <a:avLst/>
+          </a:prstGeom>
+          <a:noFill/>
+          <a:ln/>
+        </p:spPr>
+        <p:txBody>
+          <a:bodyPr wrap="square" lIns="25400" tIns="25400" rIns="25400" bIns="25400" rtlCol="0" anchor="ctr"/>
+          <a:lstStyle/>
+          <a:p>
+            <a:pPr algn="ctr" indent="0" marL="0">
+              <a:buNone/>
+            </a:pPr>
+            <a:r>
+              <a:rPr lang="en-US" sz="1250" b="1" dirty="0">
+                <a:solidFill>
+                  <a:srgbClr val="1B2A38"/>
+                </a:solidFill>
+                <a:latin typeface="Calibri" pitchFamily="34" charset="0"/>
+                <a:ea typeface="Calibri" pitchFamily="34" charset="-122"/>
+                <a:cs typeface="Calibri" pitchFamily="34" charset="-120"/>
+              </a:rPr>
+              <a:t>ANALYTIC</a:t>
+            </a:r>
+            <a:endParaRPr lang="en-US" sz="1250" dirty="0"/>
+          </a:p>
+          <a:p>
+            <a:pPr algn="ctr" indent="0" marL="0">
+              <a:buNone/>
+            </a:pPr>
+            <a:r>
+              <a:rPr lang="en-US" sz="1250" b="1" dirty="0">
+                <a:solidFill>
+                  <a:srgbClr val="1B2A38"/>
+                </a:solidFill>
+                <a:latin typeface="Calibri" pitchFamily="34" charset="0"/>
+                <a:ea typeface="Calibri" pitchFamily="34" charset="-122"/>
+                <a:cs typeface="Calibri" pitchFamily="34" charset="-120"/>
+              </a:rPr>
+              <a:t>measurement on the instrument</a:t>
+            </a:r>
+            <a:endParaRPr lang="en-US" sz="1250" dirty="0"/>
+          </a:p>
+        </p:txBody>
+      </p:sp>
+      <p:sp>
+        <p:nvSpPr>
+          <p:cNvPr id="9" name="Shape 7"/>
+          <p:cNvSpPr/>
+          <p:nvPr/>
+        </p:nvSpPr>
+        <p:spPr>
+          <a:xfrm>
+            <a:off x="7835189" y="2514600"/>
+            <a:ext cx="329184" cy="0"/>
+          </a:xfrm>
+          <a:prstGeom prst="line">
+            <a:avLst/>
+          </a:prstGeom>
+          <a:noFill/>
+          <a:ln w="22225">
+            <a:solidFill>
+              <a:srgbClr val="1565C0"/>
+            </a:solidFill>
+            <a:prstDash val="solid"/>
+            <a:tailEnd type="triangle"/>
+          </a:ln>
+        </p:spPr>
+      </p:sp>
+      <p:sp>
+        <p:nvSpPr>
+          <p:cNvPr id="10" name="Shape 8"/>
+          <p:cNvSpPr/>
+          <p:nvPr/>
+        </p:nvSpPr>
+        <p:spPr>
+          <a:xfrm>
+            <a:off x="8182661" y="1828800"/>
+            <a:ext cx="3442106" cy="1371600"/>
+          </a:xfrm>
+          <a:prstGeom prst="roundRect">
+            <a:avLst>
+              <a:gd name="adj" fmla="val 4667"/>
+            </a:avLst>
+          </a:prstGeom>
+          <a:solidFill>
+            <a:srgbClr val="FFFFFF"/>
+          </a:solidFill>
+          <a:ln w="15875">
+            <a:solidFill>
+              <a:srgbClr val="DCE4EC"/>
+            </a:solidFill>
+            <a:prstDash val="solid"/>
+          </a:ln>
+          <a:effectLst>
+            <a:outerShdw sx="100000" sy="100000" kx="0" ky="0" algn="bl" rotWithShape="0" blurRad="88900" dist="25400" dir="5400000">
+              <a:srgbClr val="22303C">
+                <a:alpha val="12000"/>
+              </a:srgbClr>
+            </a:outerShdw>
+          </a:effectLst>
+        </p:spPr>
+      </p:sp>
+      <p:sp>
+        <p:nvSpPr>
+          <p:cNvPr id="11" name="Text 9"/>
+          <p:cNvSpPr/>
+          <p:nvPr/>
+        </p:nvSpPr>
+        <p:spPr>
+          <a:xfrm>
+            <a:off x="8237525" y="1828800"/>
+            <a:ext cx="3332378" cy="1371600"/>
+          </a:xfrm>
+          <a:prstGeom prst="rect">
+            <a:avLst/>
+          </a:prstGeom>
+          <a:noFill/>
+          <a:ln/>
+        </p:spPr>
+        <p:txBody>
+          <a:bodyPr wrap="square" lIns="25400" tIns="25400" rIns="25400" bIns="25400" rtlCol="0" anchor="ctr"/>
+          <a:lstStyle/>
+          <a:p>
+            <a:pPr algn="ctr" indent="0" marL="0">
+              <a:buNone/>
+            </a:pPr>
+            <a:r>
+              <a:rPr lang="en-US" sz="1250" b="1" dirty="0">
+                <a:solidFill>
+                  <a:srgbClr val="1B2A38"/>
+                </a:solidFill>
+                <a:latin typeface="Calibri" pitchFamily="34" charset="0"/>
+                <a:ea typeface="Calibri" pitchFamily="34" charset="-122"/>
+                <a:cs typeface="Calibri" pitchFamily="34" charset="-120"/>
+              </a:rPr>
+              <a:t>POSTANALYTIC</a:t>
+            </a:r>
+            <a:endParaRPr lang="en-US" sz="1250" dirty="0"/>
+          </a:p>
+          <a:p>
+            <a:pPr algn="ctr" indent="0" marL="0">
+              <a:buNone/>
+            </a:pPr>
+            <a:r>
+              <a:rPr lang="en-US" sz="1250" b="1" dirty="0">
+                <a:solidFill>
+                  <a:srgbClr val="1B2A38"/>
+                </a:solidFill>
+                <a:latin typeface="Calibri" pitchFamily="34" charset="0"/>
+                <a:ea typeface="Calibri" pitchFamily="34" charset="-122"/>
+                <a:cs typeface="Calibri" pitchFamily="34" charset="-120"/>
+              </a:rPr>
+              <a:t>result, interpretation, reporting</a:t>
+            </a:r>
+            <a:endParaRPr lang="en-US" sz="1250" dirty="0"/>
+          </a:p>
+        </p:txBody>
+      </p:sp>
+      <p:sp>
+        <p:nvSpPr>
+          <p:cNvPr id="12" name="Shape 10"/>
+          <p:cNvSpPr/>
+          <p:nvPr/>
+        </p:nvSpPr>
+        <p:spPr>
+          <a:xfrm>
+            <a:off x="566928" y="3429000"/>
+            <a:ext cx="11057839" cy="914400"/>
+          </a:xfrm>
+          <a:prstGeom prst="roundRect">
+            <a:avLst>
+              <a:gd name="adj" fmla="val 9000"/>
+            </a:avLst>
+          </a:prstGeom>
+          <a:solidFill>
+            <a:srgbClr val="E7EFFA"/>
+          </a:solidFill>
+          <a:ln/>
+          <a:effectLst>
+            <a:outerShdw sx="100000" sy="100000" kx="0" ky="0" algn="bl" rotWithShape="0" blurRad="88900" dist="25400" dir="5400000">
+              <a:srgbClr val="22303C">
+                <a:alpha val="12000"/>
+              </a:srgbClr>
+            </a:outerShdw>
+          </a:effectLst>
+        </p:spPr>
+      </p:sp>
+      <p:sp>
+        <p:nvSpPr>
+          <p:cNvPr id="13" name="Text 11"/>
+          <p:cNvSpPr/>
+          <p:nvPr/>
+        </p:nvSpPr>
+        <p:spPr>
+          <a:xfrm>
+            <a:off x="841248" y="3429000"/>
+            <a:ext cx="10509199" cy="914400"/>
           </a:xfrm>
           <a:prstGeom prst="rect">
             <a:avLst/>
@@ -5977,34 +6105,37 @@
           <a:bodyPr wrap="square" lIns="0" tIns="0" rIns="0" bIns="0" rtlCol="0" anchor="ctr"/>
           <a:lstStyle/>
           <a:p>
-            <a:pPr indent="0" marL="0">
-              <a:buNone/>
-            </a:pPr>
-            <a:r>
-              <a:rPr lang="en-US" sz="1200" b="1" spc="100" kern="0" dirty="0">
-                <a:solidFill>
-                  <a:srgbClr val="0D4A92"/>
-                </a:solidFill>
-                <a:latin typeface="Calibri" pitchFamily="34" charset="0"/>
-                <a:ea typeface="Calibri" pitchFamily="34" charset="-122"/>
-                <a:cs typeface="Calibri" pitchFamily="34" charset="-120"/>
-              </a:rPr>
-              <a:t>BEYOND QC</a:t>
-            </a:r>
-            <a:endParaRPr lang="en-US" sz="1200" dirty="0"/>
-          </a:p>
-        </p:txBody>
-      </p:sp>
-      <p:sp>
-        <p:nvSpPr>
-          <p:cNvPr id="9" name="Text 7"/>
-          <p:cNvSpPr/>
-          <p:nvPr/>
-        </p:nvSpPr>
-        <p:spPr>
-          <a:xfrm>
-            <a:off x="6516472" y="2029968"/>
-            <a:ext cx="4870552" cy="3474720"/>
+            <a:pPr algn="l" indent="0" marL="0">
+              <a:lnSpc>
+                <a:spcPct val="105000"/>
+              </a:lnSpc>
+              <a:buNone/>
+            </a:pPr>
+            <a:r>
+              <a:rPr lang="en-US" sz="1300" dirty="0">
+                <a:solidFill>
+                  <a:srgbClr val="33444F"/>
+                </a:solidFill>
+                <a:latin typeface="Calibri" pitchFamily="34" charset="0"/>
+                <a:ea typeface="Calibri" pitchFamily="34" charset="-122"/>
+                <a:cs typeface="Calibri" pitchFamily="34" charset="-120"/>
+              </a:rPr>
+              <a:t>Most errors are PREANALYTIC: wrong patient/tube, hemolysis, clotting, wrong additive, delayed processing.</a:t>
+            </a:r>
+            <a:endParaRPr lang="en-US" sz="1300" dirty="0"/>
+          </a:p>
+        </p:txBody>
+      </p:sp>
+      <p:sp>
+        <p:nvSpPr>
+          <p:cNvPr id="14" name="Text 12"/>
+          <p:cNvSpPr/>
+          <p:nvPr/>
+        </p:nvSpPr>
+        <p:spPr>
+          <a:xfrm>
+            <a:off x="566928" y="4526280"/>
+            <a:ext cx="11057839" cy="1783080"/>
           </a:xfrm>
           <a:prstGeom prst="rect">
             <a:avLst/>
@@ -6018,7 +6149,7 @@
           <a:p>
             <a:pPr algn="l" marL="177800" indent="-177800">
               <a:spcAft>
-                <a:spcPts val="900"/>
+                <a:spcPts val="500"/>
               </a:spcAft>
               <a:buSzPct val="100000"/>
               <a:buChar char="•"/>
@@ -6032,14 +6163,14 @@
                 <a:ea typeface="Calibri" pitchFamily="34" charset="-122"/>
                 <a:cs typeface="Calibri" pitchFamily="34" charset="-120"/>
               </a:rPr>
-              <a:t>Proficiency testing benchmarks performance against peers.</a:t>
+              <a:t>Analytic errors (calibration drift, interference, carryover) are caught by QC and delta checks.</a:t>
             </a:r>
             <a:endParaRPr lang="en-US" sz="1250" dirty="0"/>
           </a:p>
           <a:p>
             <a:pPr algn="l" marL="177800" indent="-177800">
               <a:spcAft>
-                <a:spcPts val="900"/>
+                <a:spcPts val="500"/>
               </a:spcAft>
               <a:buSzPct val="100000"/>
               <a:buChar char="•"/>
@@ -6053,57 +6184,15 @@
                 <a:ea typeface="Calibri" pitchFamily="34" charset="-122"/>
                 <a:cs typeface="Calibri" pitchFamily="34" charset="-120"/>
               </a:rPr>
-              <a:t>Delta checks and absurd-value limits catch sample and analytic problems.</a:t>
+              <a:t>Postanalytic errors: transcription, wrong reference interval, failure to communicate a critical value.</a:t>
             </a:r>
             <a:endParaRPr lang="en-US" sz="1250" dirty="0"/>
           </a:p>
-          <a:p>
-            <a:pPr algn="l" marL="177800" indent="-177800">
-              <a:spcAft>
-                <a:spcPts val="900"/>
-              </a:spcAft>
-              <a:buSzPct val="100000"/>
-              <a:buChar char="•"/>
-            </a:pPr>
-            <a:r>
-              <a:rPr lang="en-US" sz="1250" dirty="0">
-                <a:solidFill>
-                  <a:srgbClr val="33444F"/>
-                </a:solidFill>
-                <a:latin typeface="Calibri" pitchFamily="34" charset="0"/>
-                <a:ea typeface="Calibri" pitchFamily="34" charset="-122"/>
-                <a:cs typeface="Calibri" pitchFamily="34" charset="-120"/>
-              </a:rPr>
-              <a:t>Calibration verification and linearity confirm the reportable range.</a:t>
-            </a:r>
-            <a:endParaRPr lang="en-US" sz="1250" dirty="0"/>
-          </a:p>
-          <a:p>
-            <a:pPr algn="l" marL="177800" indent="-177800">
-              <a:spcAft>
-                <a:spcPts val="900"/>
-              </a:spcAft>
-              <a:buSzPct val="100000"/>
-              <a:buChar char="•"/>
-            </a:pPr>
-            <a:r>
-              <a:rPr lang="en-US" sz="1250" dirty="0">
-                <a:solidFill>
-                  <a:srgbClr val="33444F"/>
-                </a:solidFill>
-                <a:latin typeface="Calibri" pitchFamily="34" charset="0"/>
-                <a:ea typeface="Calibri" pitchFamily="34" charset="-122"/>
-                <a:cs typeface="Calibri" pitchFamily="34" charset="-120"/>
-              </a:rPr>
-              <a:t>Method comparison and bias assessment when changing platforms.</a:t>
-            </a:r>
-            <a:endParaRPr lang="en-US" sz="1250" dirty="0"/>
-          </a:p>
-        </p:txBody>
-      </p:sp>
-      <p:sp>
-        <p:nvSpPr>
-          <p:cNvPr id="10" name="Text 8"/>
+        </p:txBody>
+      </p:sp>
+      <p:sp>
+        <p:nvSpPr>
+          <p:cNvPr id="15" name="Text 13"/>
           <p:cNvSpPr/>
           <p:nvPr/>
         </p:nvSpPr>
@@ -6142,7 +6231,7 @@
       </p:sp>
       <p:sp>
         <p:nvSpPr>
-          <p:cNvPr id="11" name="Text 9"/>
+          <p:cNvPr id="16" name="Text 14"/>
           <p:cNvSpPr/>
           <p:nvPr/>
         </p:nvSpPr>
@@ -6218,6 +6307,570 @@
 <file path=ppt/slides/slide14.xml><?xml version="1.0" encoding="utf-8"?>
 <p:sld xmlns:a="http://schemas.openxmlformats.org/drawingml/2006/main" xmlns:r="http://schemas.openxmlformats.org/officeDocument/2006/relationships" xmlns:p="http://schemas.openxmlformats.org/presentationml/2006/main">
   <p:cSld name="Slide 14">
+    <p:bg>
+      <p:bgPr>
+        <a:solidFill>
+          <a:srgbClr val="FFFFFF"/>
+        </a:solidFill>
+      </p:bgPr>
+    </p:bg>
+    <p:spTree>
+      <p:nvGrpSpPr>
+        <p:cNvPr id="1" name=""/>
+        <p:cNvGrpSpPr/>
+        <p:nvPr/>
+      </p:nvGrpSpPr>
+      <p:grpSpPr>
+        <a:xfrm>
+          <a:off x="0" y="0"/>
+          <a:ext cx="0" cy="0"/>
+          <a:chOff x="0" y="0"/>
+          <a:chExt cx="0" cy="0"/>
+        </a:xfrm>
+      </p:grpSpPr>
+      <p:sp>
+        <p:nvSpPr>
+          <p:cNvPr id="2" name="Text 0"/>
+          <p:cNvSpPr/>
+          <p:nvPr/>
+        </p:nvSpPr>
+        <p:spPr>
+          <a:xfrm>
+            <a:off x="566928" y="329184"/>
+            <a:ext cx="10515600" cy="310896"/>
+          </a:xfrm>
+          <a:prstGeom prst="rect">
+            <a:avLst/>
+          </a:prstGeom>
+          <a:noFill/>
+          <a:ln/>
+        </p:spPr>
+        <p:txBody>
+          <a:bodyPr wrap="square" lIns="0" tIns="0" rIns="0" bIns="0" rtlCol="0" anchor="ctr"/>
+          <a:lstStyle/>
+          <a:p>
+            <a:pPr algn="l" indent="0" marL="0">
+              <a:buNone/>
+            </a:pPr>
+            <a:r>
+              <a:rPr lang="en-US" sz="1100" b="1" spc="150" kern="0" dirty="0">
+                <a:solidFill>
+                  <a:srgbClr val="1565C0"/>
+                </a:solidFill>
+                <a:latin typeface="Calibri" pitchFamily="34" charset="0"/>
+                <a:ea typeface="Calibri" pitchFamily="34" charset="-122"/>
+                <a:cs typeface="Calibri" pitchFamily="34" charset="-120"/>
+              </a:rPr>
+              <a:t>CLINICAL CHEMISTRY   ·   QUALITY CONTROL</a:t>
+            </a:r>
+            <a:endParaRPr lang="en-US" sz="1100" dirty="0"/>
+          </a:p>
+        </p:txBody>
+      </p:sp>
+      <p:sp>
+        <p:nvSpPr>
+          <p:cNvPr id="3" name="Text 1"/>
+          <p:cNvSpPr/>
+          <p:nvPr/>
+        </p:nvSpPr>
+        <p:spPr>
+          <a:xfrm>
+            <a:off x="566928" y="713232"/>
+            <a:ext cx="11064240" cy="749808"/>
+          </a:xfrm>
+          <a:prstGeom prst="rect">
+            <a:avLst/>
+          </a:prstGeom>
+          <a:noFill/>
+          <a:ln/>
+        </p:spPr>
+        <p:txBody>
+          <a:bodyPr wrap="square" lIns="0" tIns="0" rIns="0" bIns="0" rtlCol="0" anchor="ctr"/>
+          <a:lstStyle/>
+          <a:p>
+            <a:pPr algn="l" indent="0" marL="0">
+              <a:buNone/>
+            </a:pPr>
+            <a:r>
+              <a:rPr lang="en-US" sz="3000" b="1" dirty="0">
+                <a:solidFill>
+                  <a:srgbClr val="0E3A5F"/>
+                </a:solidFill>
+                <a:latin typeface="Calibri" pitchFamily="34" charset="0"/>
+                <a:ea typeface="Calibri" pitchFamily="34" charset="-122"/>
+                <a:cs typeface="Calibri" pitchFamily="34" charset="-120"/>
+              </a:rPr>
+              <a:t>Detecting Analytic Error</a:t>
+            </a:r>
+            <a:endParaRPr lang="en-US" sz="3000" dirty="0"/>
+          </a:p>
+        </p:txBody>
+      </p:sp>
+      <p:sp>
+        <p:nvSpPr>
+          <p:cNvPr id="4" name="Shape 2"/>
+          <p:cNvSpPr/>
+          <p:nvPr/>
+        </p:nvSpPr>
+        <p:spPr>
+          <a:xfrm>
+            <a:off x="566928" y="1517904"/>
+            <a:ext cx="5346040" cy="4114800"/>
+          </a:xfrm>
+          <a:prstGeom prst="roundRect">
+            <a:avLst>
+              <a:gd name="adj" fmla="val 2000"/>
+            </a:avLst>
+          </a:prstGeom>
+          <a:solidFill>
+            <a:srgbClr val="E7EFFA"/>
+          </a:solidFill>
+          <a:ln/>
+          <a:effectLst>
+            <a:outerShdw sx="100000" sy="100000" kx="0" ky="0" algn="bl" rotWithShape="0" blurRad="88900" dist="25400" dir="5400000">
+              <a:srgbClr val="22303C">
+                <a:alpha val="12000"/>
+              </a:srgbClr>
+            </a:outerShdw>
+          </a:effectLst>
+        </p:spPr>
+      </p:sp>
+      <p:sp>
+        <p:nvSpPr>
+          <p:cNvPr id="5" name="Text 3"/>
+          <p:cNvSpPr/>
+          <p:nvPr/>
+        </p:nvSpPr>
+        <p:spPr>
+          <a:xfrm>
+            <a:off x="804672" y="1682496"/>
+            <a:ext cx="4888840" cy="274320"/>
+          </a:xfrm>
+          <a:prstGeom prst="rect">
+            <a:avLst/>
+          </a:prstGeom>
+          <a:noFill/>
+          <a:ln/>
+        </p:spPr>
+        <p:txBody>
+          <a:bodyPr wrap="square" lIns="0" tIns="0" rIns="0" bIns="0" rtlCol="0" anchor="ctr"/>
+          <a:lstStyle/>
+          <a:p>
+            <a:pPr indent="0" marL="0">
+              <a:buNone/>
+            </a:pPr>
+            <a:r>
+              <a:rPr lang="en-US" sz="1200" b="1" spc="100" kern="0" dirty="0">
+                <a:solidFill>
+                  <a:srgbClr val="0D4A92"/>
+                </a:solidFill>
+                <a:latin typeface="Calibri" pitchFamily="34" charset="0"/>
+                <a:ea typeface="Calibri" pitchFamily="34" charset="-122"/>
+                <a:cs typeface="Calibri" pitchFamily="34" charset="-120"/>
+              </a:rPr>
+              <a:t>QC FUNDAMENTALS</a:t>
+            </a:r>
+            <a:endParaRPr lang="en-US" sz="1200" dirty="0"/>
+          </a:p>
+        </p:txBody>
+      </p:sp>
+      <p:sp>
+        <p:nvSpPr>
+          <p:cNvPr id="6" name="Text 4"/>
+          <p:cNvSpPr/>
+          <p:nvPr/>
+        </p:nvSpPr>
+        <p:spPr>
+          <a:xfrm>
+            <a:off x="804672" y="2029968"/>
+            <a:ext cx="4870552" cy="3474720"/>
+          </a:xfrm>
+          <a:prstGeom prst="rect">
+            <a:avLst/>
+          </a:prstGeom>
+          <a:noFill/>
+          <a:ln/>
+        </p:spPr>
+        <p:txBody>
+          <a:bodyPr wrap="square" lIns="0" tIns="0" rIns="0" bIns="0" rtlCol="0" anchor="t"/>
+          <a:lstStyle/>
+          <a:p>
+            <a:pPr algn="l" marL="177800" indent="-177800">
+              <a:spcAft>
+                <a:spcPts val="900"/>
+              </a:spcAft>
+              <a:buSzPct val="100000"/>
+              <a:buChar char="•"/>
+            </a:pPr>
+            <a:r>
+              <a:rPr lang="en-US" sz="1250" b="1" dirty="0">
+                <a:solidFill>
+                  <a:srgbClr val="1B2A38"/>
+                </a:solidFill>
+                <a:latin typeface="Calibri" pitchFamily="34" charset="0"/>
+                <a:ea typeface="Calibri" pitchFamily="34" charset="-122"/>
+                <a:cs typeface="Calibri" pitchFamily="34" charset="-120"/>
+              </a:rPr>
+              <a:t>Run controls at intervals; plot on a Levey-Jennings chart vs mean ± SD.</a:t>
+            </a:r>
+            <a:endParaRPr lang="en-US" sz="1250" dirty="0"/>
+          </a:p>
+          <a:p>
+            <a:pPr algn="l" marL="177800" indent="-177800">
+              <a:spcAft>
+                <a:spcPts val="900"/>
+              </a:spcAft>
+              <a:buSzPct val="100000"/>
+              <a:buChar char="•"/>
+            </a:pPr>
+            <a:r>
+              <a:rPr lang="en-US" sz="1250" dirty="0">
+                <a:solidFill>
+                  <a:srgbClr val="33444F"/>
+                </a:solidFill>
+                <a:latin typeface="Calibri" pitchFamily="34" charset="0"/>
+                <a:ea typeface="Calibri" pitchFamily="34" charset="-122"/>
+                <a:cs typeface="Calibri" pitchFamily="34" charset="-120"/>
+              </a:rPr>
+              <a:t>Random error widens scatter (precision); systematic error shifts/trends the mean (accuracy).</a:t>
+            </a:r>
+            <a:endParaRPr lang="en-US" sz="1250" dirty="0"/>
+          </a:p>
+          <a:p>
+            <a:pPr algn="l" marL="177800" indent="-177800">
+              <a:spcAft>
+                <a:spcPts val="900"/>
+              </a:spcAft>
+              <a:buSzPct val="100000"/>
+              <a:buChar char="•"/>
+            </a:pPr>
+            <a:r>
+              <a:rPr lang="en-US" sz="1250" dirty="0">
+                <a:solidFill>
+                  <a:srgbClr val="33444F"/>
+                </a:solidFill>
+                <a:latin typeface="Calibri" pitchFamily="34" charset="0"/>
+                <a:ea typeface="Calibri" pitchFamily="34" charset="-122"/>
+                <a:cs typeface="Calibri" pitchFamily="34" charset="-120"/>
+              </a:rPr>
+              <a:t>Westgard multirules (1₃ₛ, 2₂ₛ, R₄ₛ, 10ₓ) flag out-of-control runs.</a:t>
+            </a:r>
+            <a:endParaRPr lang="en-US" sz="1250" dirty="0"/>
+          </a:p>
+          <a:p>
+            <a:pPr algn="l" marL="177800" indent="-177800">
+              <a:spcAft>
+                <a:spcPts val="900"/>
+              </a:spcAft>
+              <a:buSzPct val="100000"/>
+              <a:buChar char="•"/>
+            </a:pPr>
+            <a:r>
+              <a:rPr lang="en-US" sz="1250" dirty="0">
+                <a:solidFill>
+                  <a:srgbClr val="33444F"/>
+                </a:solidFill>
+                <a:latin typeface="Calibri" pitchFamily="34" charset="0"/>
+                <a:ea typeface="Calibri" pitchFamily="34" charset="-122"/>
+                <a:cs typeface="Calibri" pitchFamily="34" charset="-120"/>
+              </a:rPr>
+              <a:t>Shift → new lot/calibration; trend → reagent/electrode deterioration.</a:t>
+            </a:r>
+            <a:endParaRPr lang="en-US" sz="1250" dirty="0"/>
+          </a:p>
+        </p:txBody>
+      </p:sp>
+      <p:sp>
+        <p:nvSpPr>
+          <p:cNvPr id="7" name="Shape 5"/>
+          <p:cNvSpPr/>
+          <p:nvPr/>
+        </p:nvSpPr>
+        <p:spPr>
+          <a:xfrm>
+            <a:off x="6278728" y="1517904"/>
+            <a:ext cx="5346040" cy="4114800"/>
+          </a:xfrm>
+          <a:prstGeom prst="roundRect">
+            <a:avLst>
+              <a:gd name="adj" fmla="val 2000"/>
+            </a:avLst>
+          </a:prstGeom>
+          <a:solidFill>
+            <a:srgbClr val="E7EFFA"/>
+          </a:solidFill>
+          <a:ln/>
+          <a:effectLst>
+            <a:outerShdw sx="100000" sy="100000" kx="0" ky="0" algn="bl" rotWithShape="0" blurRad="88900" dist="25400" dir="5400000">
+              <a:srgbClr val="22303C">
+                <a:alpha val="12000"/>
+              </a:srgbClr>
+            </a:outerShdw>
+          </a:effectLst>
+        </p:spPr>
+      </p:sp>
+      <p:sp>
+        <p:nvSpPr>
+          <p:cNvPr id="8" name="Text 6"/>
+          <p:cNvSpPr/>
+          <p:nvPr/>
+        </p:nvSpPr>
+        <p:spPr>
+          <a:xfrm>
+            <a:off x="6516472" y="1682496"/>
+            <a:ext cx="4888840" cy="274320"/>
+          </a:xfrm>
+          <a:prstGeom prst="rect">
+            <a:avLst/>
+          </a:prstGeom>
+          <a:noFill/>
+          <a:ln/>
+        </p:spPr>
+        <p:txBody>
+          <a:bodyPr wrap="square" lIns="0" tIns="0" rIns="0" bIns="0" rtlCol="0" anchor="ctr"/>
+          <a:lstStyle/>
+          <a:p>
+            <a:pPr indent="0" marL="0">
+              <a:buNone/>
+            </a:pPr>
+            <a:r>
+              <a:rPr lang="en-US" sz="1200" b="1" spc="100" kern="0" dirty="0">
+                <a:solidFill>
+                  <a:srgbClr val="0D4A92"/>
+                </a:solidFill>
+                <a:latin typeface="Calibri" pitchFamily="34" charset="0"/>
+                <a:ea typeface="Calibri" pitchFamily="34" charset="-122"/>
+                <a:cs typeface="Calibri" pitchFamily="34" charset="-120"/>
+              </a:rPr>
+              <a:t>BEYOND QC</a:t>
+            </a:r>
+            <a:endParaRPr lang="en-US" sz="1200" dirty="0"/>
+          </a:p>
+        </p:txBody>
+      </p:sp>
+      <p:sp>
+        <p:nvSpPr>
+          <p:cNvPr id="9" name="Text 7"/>
+          <p:cNvSpPr/>
+          <p:nvPr/>
+        </p:nvSpPr>
+        <p:spPr>
+          <a:xfrm>
+            <a:off x="6516472" y="2029968"/>
+            <a:ext cx="4870552" cy="3474720"/>
+          </a:xfrm>
+          <a:prstGeom prst="rect">
+            <a:avLst/>
+          </a:prstGeom>
+          <a:noFill/>
+          <a:ln/>
+        </p:spPr>
+        <p:txBody>
+          <a:bodyPr wrap="square" lIns="0" tIns="0" rIns="0" bIns="0" rtlCol="0" anchor="t"/>
+          <a:lstStyle/>
+          <a:p>
+            <a:pPr algn="l" marL="177800" indent="-177800">
+              <a:spcAft>
+                <a:spcPts val="900"/>
+              </a:spcAft>
+              <a:buSzPct val="100000"/>
+              <a:buChar char="•"/>
+            </a:pPr>
+            <a:r>
+              <a:rPr lang="en-US" sz="1250" b="1" dirty="0">
+                <a:solidFill>
+                  <a:srgbClr val="1B2A38"/>
+                </a:solidFill>
+                <a:latin typeface="Calibri" pitchFamily="34" charset="0"/>
+                <a:ea typeface="Calibri" pitchFamily="34" charset="-122"/>
+                <a:cs typeface="Calibri" pitchFamily="34" charset="-120"/>
+              </a:rPr>
+              <a:t>Proficiency testing benchmarks against peers (and is mandatory).</a:t>
+            </a:r>
+            <a:endParaRPr lang="en-US" sz="1250" dirty="0"/>
+          </a:p>
+          <a:p>
+            <a:pPr algn="l" marL="177800" indent="-177800">
+              <a:spcAft>
+                <a:spcPts val="900"/>
+              </a:spcAft>
+              <a:buSzPct val="100000"/>
+              <a:buChar char="•"/>
+            </a:pPr>
+            <a:r>
+              <a:rPr lang="en-US" sz="1250" dirty="0">
+                <a:solidFill>
+                  <a:srgbClr val="33444F"/>
+                </a:solidFill>
+                <a:latin typeface="Calibri" pitchFamily="34" charset="0"/>
+                <a:ea typeface="Calibri" pitchFamily="34" charset="-122"/>
+                <a:cs typeface="Calibri" pitchFamily="34" charset="-120"/>
+              </a:rPr>
+              <a:t>Delta checks and absurd-value limits catch sample/analytic problems.</a:t>
+            </a:r>
+            <a:endParaRPr lang="en-US" sz="1250" dirty="0"/>
+          </a:p>
+          <a:p>
+            <a:pPr algn="l" marL="177800" indent="-177800">
+              <a:spcAft>
+                <a:spcPts val="900"/>
+              </a:spcAft>
+              <a:buSzPct val="100000"/>
+              <a:buChar char="•"/>
+            </a:pPr>
+            <a:r>
+              <a:rPr lang="en-US" sz="1250" dirty="0">
+                <a:solidFill>
+                  <a:srgbClr val="33444F"/>
+                </a:solidFill>
+                <a:latin typeface="Calibri" pitchFamily="34" charset="0"/>
+                <a:ea typeface="Calibri" pitchFamily="34" charset="-122"/>
+                <a:cs typeface="Calibri" pitchFamily="34" charset="-120"/>
+              </a:rPr>
+              <a:t>Calibration verification and linearity confirm the reportable range.</a:t>
+            </a:r>
+            <a:endParaRPr lang="en-US" sz="1250" dirty="0"/>
+          </a:p>
+          <a:p>
+            <a:pPr algn="l" marL="177800" indent="-177800">
+              <a:spcAft>
+                <a:spcPts val="900"/>
+              </a:spcAft>
+              <a:buSzPct val="100000"/>
+              <a:buChar char="•"/>
+            </a:pPr>
+            <a:r>
+              <a:rPr lang="en-US" sz="1250" dirty="0">
+                <a:solidFill>
+                  <a:srgbClr val="33444F"/>
+                </a:solidFill>
+                <a:latin typeface="Calibri" pitchFamily="34" charset="0"/>
+                <a:ea typeface="Calibri" pitchFamily="34" charset="-122"/>
+                <a:cs typeface="Calibri" pitchFamily="34" charset="-120"/>
+              </a:rPr>
+              <a:t>Method comparison and bias assessment when changing platforms.</a:t>
+            </a:r>
+            <a:endParaRPr lang="en-US" sz="1250" dirty="0"/>
+          </a:p>
+        </p:txBody>
+      </p:sp>
+      <p:sp>
+        <p:nvSpPr>
+          <p:cNvPr id="10" name="Text 8"/>
+          <p:cNvSpPr/>
+          <p:nvPr/>
+        </p:nvSpPr>
+        <p:spPr>
+          <a:xfrm>
+            <a:off x="566928" y="6473952"/>
+            <a:ext cx="7772400" cy="274320"/>
+          </a:xfrm>
+          <a:prstGeom prst="rect">
+            <a:avLst/>
+          </a:prstGeom>
+          <a:noFill/>
+          <a:ln/>
+        </p:spPr>
+        <p:txBody>
+          <a:bodyPr wrap="square" lIns="0" tIns="0" rIns="0" bIns="0" rtlCol="0" anchor="ctr"/>
+          <a:lstStyle/>
+          <a:p>
+            <a:pPr algn="l" indent="0" marL="0">
+              <a:buNone/>
+            </a:pPr>
+            <a:r>
+              <a:rPr lang="en-US" sz="850" dirty="0">
+                <a:solidFill>
+                  <a:srgbClr val="9AA8B4"/>
+                </a:solidFill>
+                <a:latin typeface="Calibri" pitchFamily="34" charset="0"/>
+                <a:ea typeface="Calibri" pitchFamily="34" charset="-122"/>
+                <a:cs typeface="Calibri" pitchFamily="34" charset="-120"/>
+              </a:rPr>
+              <a:t>Makassed General Hospital  ·  Department of Laboratory Medicine</a:t>
+            </a:r>
+            <a:endParaRPr lang="en-US" sz="850" dirty="0"/>
+          </a:p>
+        </p:txBody>
+      </p:sp>
+      <p:sp>
+        <p:nvSpPr>
+          <p:cNvPr id="11" name="Text 9"/>
+          <p:cNvSpPr/>
+          <p:nvPr/>
+        </p:nvSpPr>
+        <p:spPr>
+          <a:xfrm>
+            <a:off x="9814255" y="6473952"/>
+            <a:ext cx="1828800" cy="274320"/>
+          </a:xfrm>
+          <a:prstGeom prst="rect">
+            <a:avLst/>
+          </a:prstGeom>
+          <a:noFill/>
+          <a:ln/>
+        </p:spPr>
+        <p:txBody>
+          <a:bodyPr wrap="square" lIns="0" tIns="0" rIns="0" bIns="0" rtlCol="0" anchor="ctr"/>
+          <a:lstStyle/>
+          <a:p>
+            <a:pPr algn="r" indent="0" marL="0">
+              <a:buNone/>
+            </a:pPr>
+            <a:r>
+              <a:rPr lang="en-US" sz="850" dirty="0">
+                <a:solidFill>
+                  <a:srgbClr val="9AA8B4"/>
+                </a:solidFill>
+                <a:latin typeface="Calibri" pitchFamily="34" charset="0"/>
+                <a:ea typeface="Calibri" pitchFamily="34" charset="-122"/>
+                <a:cs typeface="Calibri" pitchFamily="34" charset="-120"/>
+              </a:rPr>
+              <a:t>CP Lecture Series</a:t>
+            </a:r>
+            <a:pPr algn="r" indent="0" marL="0">
+              <a:buNone/>
+            </a:pPr>
+            <a:r>
+              <a:rPr lang="en-US" sz="850" dirty="0">
+                <a:solidFill>
+                  <a:srgbClr val="DCE4EC"/>
+                </a:solidFill>
+                <a:latin typeface="Calibri" pitchFamily="34" charset="0"/>
+                <a:ea typeface="Calibri" pitchFamily="34" charset="-122"/>
+                <a:cs typeface="Calibri" pitchFamily="34" charset="-120"/>
+              </a:rPr>
+              <a:t>   ·   </a:t>
+            </a:r>
+            <a:pPr algn="r" indent="0" marL="0">
+              <a:buNone/>
+            </a:pPr>
+            <a:r>
+              <a:rPr lang="en-US" sz="850" b="1" dirty="0">
+                <a:solidFill>
+                  <a:srgbClr val="1565C0"/>
+                </a:solidFill>
+                <a:latin typeface="Calibri" pitchFamily="34" charset="0"/>
+                <a:ea typeface="Calibri" pitchFamily="34" charset="-122"/>
+                <a:cs typeface="Calibri" pitchFamily="34" charset="-120"/>
+              </a:rPr>
+              <a:t>12</a:t>
+            </a:r>
+            <a:endParaRPr lang="en-US" sz="850" dirty="0"/>
+          </a:p>
+        </p:txBody>
+      </p:sp>
+    </p:spTree>
+  </p:cSld>
+  <p:clrMapOvr>
+    <a:masterClrMapping/>
+  </p:clrMapOvr>
+</p:sld>
+</file>
+
+<file path=ppt/slides/slide15.xml><?xml version="1.0" encoding="utf-8"?>
+<p:sld xmlns:a="http://schemas.openxmlformats.org/drawingml/2006/main" xmlns:r="http://schemas.openxmlformats.org/officeDocument/2006/relationships" xmlns:p="http://schemas.openxmlformats.org/presentationml/2006/main">
+  <p:cSld name="Slide 15">
     <p:bg>
       <p:bgPr>
         <a:solidFill>
@@ -6397,439 +7050,6 @@
               <a:t>Cases &amp; Board Review</a:t>
             </a:r>
             <a:endParaRPr lang="en-US" sz="3800" dirty="0"/>
-          </a:p>
-        </p:txBody>
-      </p:sp>
-    </p:spTree>
-  </p:cSld>
-  <p:clrMapOvr>
-    <a:masterClrMapping/>
-  </p:clrMapOvr>
-</p:sld>
-</file>
-
-<file path=ppt/slides/slide15.xml><?xml version="1.0" encoding="utf-8"?>
-<p:sld xmlns:a="http://schemas.openxmlformats.org/drawingml/2006/main" xmlns:r="http://schemas.openxmlformats.org/officeDocument/2006/relationships" xmlns:p="http://schemas.openxmlformats.org/presentationml/2006/main">
-  <p:cSld name="Slide 15">
-    <p:bg>
-      <p:bgPr>
-        <a:solidFill>
-          <a:srgbClr val="FFFFFF"/>
-        </a:solidFill>
-      </p:bgPr>
-    </p:bg>
-    <p:spTree>
-      <p:nvGrpSpPr>
-        <p:cNvPr id="1" name=""/>
-        <p:cNvGrpSpPr/>
-        <p:nvPr/>
-      </p:nvGrpSpPr>
-      <p:grpSpPr>
-        <a:xfrm>
-          <a:off x="0" y="0"/>
-          <a:ext cx="0" cy="0"/>
-          <a:chOff x="0" y="0"/>
-          <a:chExt cx="0" cy="0"/>
-        </a:xfrm>
-      </p:grpSpPr>
-      <p:sp>
-        <p:nvSpPr>
-          <p:cNvPr id="2" name="Text 0"/>
-          <p:cNvSpPr/>
-          <p:nvPr/>
-        </p:nvSpPr>
-        <p:spPr>
-          <a:xfrm>
-            <a:off x="566928" y="329184"/>
-            <a:ext cx="10515600" cy="310896"/>
-          </a:xfrm>
-          <a:prstGeom prst="rect">
-            <a:avLst/>
-          </a:prstGeom>
-          <a:noFill/>
-          <a:ln/>
-        </p:spPr>
-        <p:txBody>
-          <a:bodyPr wrap="square" lIns="0" tIns="0" rIns="0" bIns="0" rtlCol="0" anchor="ctr"/>
-          <a:lstStyle/>
-          <a:p>
-            <a:pPr algn="l" indent="0" marL="0">
-              <a:buNone/>
-            </a:pPr>
-            <a:r>
-              <a:rPr lang="en-US" sz="1100" b="1" spc="150" kern="0" dirty="0">
-                <a:solidFill>
-                  <a:srgbClr val="1565C0"/>
-                </a:solidFill>
-                <a:latin typeface="Calibri" pitchFamily="34" charset="0"/>
-                <a:ea typeface="Calibri" pitchFamily="34" charset="-122"/>
-                <a:cs typeface="Calibri" pitchFamily="34" charset="-120"/>
-              </a:rPr>
-              <a:t>CLINICAL CHEMISTRY   ·   CASE 1</a:t>
-            </a:r>
-            <a:endParaRPr lang="en-US" sz="1100" dirty="0"/>
-          </a:p>
-        </p:txBody>
-      </p:sp>
-      <p:sp>
-        <p:nvSpPr>
-          <p:cNvPr id="3" name="Text 1"/>
-          <p:cNvSpPr/>
-          <p:nvPr/>
-        </p:nvSpPr>
-        <p:spPr>
-          <a:xfrm>
-            <a:off x="566928" y="713232"/>
-            <a:ext cx="11064240" cy="749808"/>
-          </a:xfrm>
-          <a:prstGeom prst="rect">
-            <a:avLst/>
-          </a:prstGeom>
-          <a:noFill/>
-          <a:ln/>
-        </p:spPr>
-        <p:txBody>
-          <a:bodyPr wrap="square" lIns="0" tIns="0" rIns="0" bIns="0" rtlCol="0" anchor="ctr"/>
-          <a:lstStyle/>
-          <a:p>
-            <a:pPr algn="l" indent="0" marL="0">
-              <a:buNone/>
-            </a:pPr>
-            <a:r>
-              <a:rPr lang="en-US" sz="3000" b="1" dirty="0">
-                <a:solidFill>
-                  <a:srgbClr val="0E3A5F"/>
-                </a:solidFill>
-                <a:latin typeface="Calibri" pitchFamily="34" charset="0"/>
-                <a:ea typeface="Calibri" pitchFamily="34" charset="-122"/>
-                <a:cs typeface="Calibri" pitchFamily="34" charset="-120"/>
-              </a:rPr>
-              <a:t>Case 1</a:t>
-            </a:r>
-            <a:endParaRPr lang="en-US" sz="3000" dirty="0"/>
-          </a:p>
-        </p:txBody>
-      </p:sp>
-      <p:sp>
-        <p:nvSpPr>
-          <p:cNvPr id="4" name="Shape 2"/>
-          <p:cNvSpPr/>
-          <p:nvPr/>
-        </p:nvSpPr>
-        <p:spPr>
-          <a:xfrm>
-            <a:off x="566928" y="1517904"/>
-            <a:ext cx="11057839" cy="2788920"/>
-          </a:xfrm>
-          <a:prstGeom prst="roundRect">
-            <a:avLst>
-              <a:gd name="adj" fmla="val 2951"/>
-            </a:avLst>
-          </a:prstGeom>
-          <a:solidFill>
-            <a:srgbClr val="E7EFFA"/>
-          </a:solidFill>
-          <a:ln/>
-          <a:effectLst>
-            <a:outerShdw sx="100000" sy="100000" kx="0" ky="0" algn="bl" rotWithShape="0" blurRad="88900" dist="25400" dir="5400000">
-              <a:srgbClr val="22303C">
-                <a:alpha val="12000"/>
-              </a:srgbClr>
-            </a:outerShdw>
-          </a:effectLst>
-        </p:spPr>
-      </p:sp>
-      <p:sp>
-        <p:nvSpPr>
-          <p:cNvPr id="5" name="Text 3"/>
-          <p:cNvSpPr/>
-          <p:nvPr/>
-        </p:nvSpPr>
-        <p:spPr>
-          <a:xfrm>
-            <a:off x="841248" y="1700784"/>
-            <a:ext cx="5486400" cy="292608"/>
-          </a:xfrm>
-          <a:prstGeom prst="rect">
-            <a:avLst/>
-          </a:prstGeom>
-          <a:noFill/>
-          <a:ln/>
-        </p:spPr>
-        <p:txBody>
-          <a:bodyPr wrap="square" lIns="0" tIns="0" rIns="0" bIns="0" rtlCol="0" anchor="ctr"/>
-          <a:lstStyle/>
-          <a:p>
-            <a:pPr indent="0" marL="0">
-              <a:buNone/>
-            </a:pPr>
-            <a:r>
-              <a:rPr lang="en-US" sz="1100" b="1" spc="150" kern="0" dirty="0">
-                <a:solidFill>
-                  <a:srgbClr val="1565C0"/>
-                </a:solidFill>
-                <a:latin typeface="Calibri" pitchFamily="34" charset="0"/>
-                <a:ea typeface="Calibri" pitchFamily="34" charset="-122"/>
-                <a:cs typeface="Calibri" pitchFamily="34" charset="-120"/>
-              </a:rPr>
-              <a:t>CLINICAL VIGNETTE</a:t>
-            </a:r>
-            <a:endParaRPr lang="en-US" sz="1100" dirty="0"/>
-          </a:p>
-        </p:txBody>
-      </p:sp>
-      <p:sp>
-        <p:nvSpPr>
-          <p:cNvPr id="6" name="Text 4"/>
-          <p:cNvSpPr/>
-          <p:nvPr/>
-        </p:nvSpPr>
-        <p:spPr>
-          <a:xfrm>
-            <a:off x="841248" y="2029968"/>
-            <a:ext cx="10509199" cy="2148840"/>
-          </a:xfrm>
-          <a:prstGeom prst="rect">
-            <a:avLst/>
-          </a:prstGeom>
-          <a:noFill/>
-          <a:ln/>
-        </p:spPr>
-        <p:txBody>
-          <a:bodyPr wrap="square" lIns="0" tIns="0" rIns="0" bIns="0" rtlCol="0" anchor="t"/>
-          <a:lstStyle/>
-          <a:p>
-            <a:pPr algn="l" indent="0" marL="0">
-              <a:lnSpc>
-                <a:spcPct val="108000"/>
-              </a:lnSpc>
-              <a:buNone/>
-            </a:pPr>
-            <a:r>
-              <a:rPr lang="en-US" sz="1450" dirty="0">
-                <a:solidFill>
-                  <a:srgbClr val="33444F"/>
-                </a:solidFill>
-                <a:latin typeface="Calibri" pitchFamily="34" charset="0"/>
-                <a:ea typeface="Calibri" pitchFamily="34" charset="-122"/>
-                <a:cs typeface="Calibri" pitchFamily="34" charset="-120"/>
-              </a:rPr>
-              <a:t>A potassium of 7.2 mmol/L is reported on a well outpatient with a normal ECG. The sample is noted to be visibly hemolyzed, and the LDH and phosphate are also elevated. A repeat, carefully drawn sample is normal.</a:t>
-            </a:r>
-            <a:endParaRPr lang="en-US" sz="1450" dirty="0"/>
-          </a:p>
-        </p:txBody>
-      </p:sp>
-      <p:sp>
-        <p:nvSpPr>
-          <p:cNvPr id="7" name="Shape 5"/>
-          <p:cNvSpPr/>
-          <p:nvPr/>
-        </p:nvSpPr>
-        <p:spPr>
-          <a:xfrm>
-            <a:off x="566928" y="4553712"/>
-            <a:ext cx="11057839" cy="1325880"/>
-          </a:xfrm>
-          <a:prstGeom prst="roundRect">
-            <a:avLst>
-              <a:gd name="adj" fmla="val 6207"/>
-            </a:avLst>
-          </a:prstGeom>
-          <a:solidFill>
-            <a:srgbClr val="0E3A5F"/>
-          </a:solidFill>
-          <a:ln/>
-          <a:effectLst>
-            <a:outerShdw sx="100000" sy="100000" kx="0" ky="0" algn="bl" rotWithShape="0" blurRad="88900" dist="25400" dir="5400000">
-              <a:srgbClr val="22303C">
-                <a:alpha val="12000"/>
-              </a:srgbClr>
-            </a:outerShdw>
-          </a:effectLst>
-        </p:spPr>
-      </p:sp>
-      <p:sp>
-        <p:nvSpPr>
-          <p:cNvPr id="8" name="Text 6"/>
-          <p:cNvSpPr/>
-          <p:nvPr/>
-        </p:nvSpPr>
-        <p:spPr>
-          <a:xfrm>
-            <a:off x="822960" y="4681728"/>
-            <a:ext cx="640080" cy="960120"/>
-          </a:xfrm>
-          <a:prstGeom prst="rect">
-            <a:avLst/>
-          </a:prstGeom>
-          <a:noFill/>
-          <a:ln/>
-        </p:spPr>
-        <p:txBody>
-          <a:bodyPr wrap="square" lIns="0" tIns="0" rIns="0" bIns="0" rtlCol="0" anchor="ctr"/>
-          <a:lstStyle/>
-          <a:p>
-            <a:pPr algn="ctr" indent="0" marL="0">
-              <a:buNone/>
-            </a:pPr>
-            <a:r>
-              <a:rPr lang="en-US" sz="4000" b="1" dirty="0">
-                <a:solidFill>
-                  <a:srgbClr val="1565C0"/>
-                </a:solidFill>
-                <a:latin typeface="Calibri" pitchFamily="34" charset="0"/>
-                <a:ea typeface="Calibri" pitchFamily="34" charset="-122"/>
-                <a:cs typeface="Calibri" pitchFamily="34" charset="-120"/>
-              </a:rPr>
-              <a:t>?</a:t>
-            </a:r>
-            <a:endParaRPr lang="en-US" sz="4000" dirty="0"/>
-          </a:p>
-        </p:txBody>
-      </p:sp>
-      <p:sp>
-        <p:nvSpPr>
-          <p:cNvPr id="9" name="Text 7"/>
-          <p:cNvSpPr/>
-          <p:nvPr/>
-        </p:nvSpPr>
-        <p:spPr>
-          <a:xfrm>
-            <a:off x="1618488" y="4553712"/>
-            <a:ext cx="9686239" cy="1325880"/>
-          </a:xfrm>
-          <a:prstGeom prst="rect">
-            <a:avLst/>
-          </a:prstGeom>
-          <a:noFill/>
-          <a:ln/>
-        </p:spPr>
-        <p:txBody>
-          <a:bodyPr wrap="square" lIns="0" tIns="0" rIns="0" bIns="0" rtlCol="0" anchor="ctr"/>
-          <a:lstStyle/>
-          <a:p>
-            <a:pPr algn="l" indent="0" marL="0">
-              <a:buNone/>
-            </a:pPr>
-            <a:r>
-              <a:rPr lang="en-US" sz="1500" b="1" dirty="0">
-                <a:solidFill>
-                  <a:srgbClr val="FFFFFF"/>
-                </a:solidFill>
-                <a:latin typeface="Calibri" pitchFamily="34" charset="0"/>
-                <a:ea typeface="Calibri" pitchFamily="34" charset="-122"/>
-                <a:cs typeface="Calibri" pitchFamily="34" charset="-120"/>
-              </a:rPr>
-              <a:t>What explains the first result, and what is the lesson for reporting?</a:t>
-            </a:r>
-            <a:endParaRPr lang="en-US" sz="1500" dirty="0"/>
-          </a:p>
-        </p:txBody>
-      </p:sp>
-      <p:sp>
-        <p:nvSpPr>
-          <p:cNvPr id="10" name="Text 8"/>
-          <p:cNvSpPr/>
-          <p:nvPr/>
-        </p:nvSpPr>
-        <p:spPr>
-          <a:xfrm>
-            <a:off x="566928" y="6473952"/>
-            <a:ext cx="7772400" cy="274320"/>
-          </a:xfrm>
-          <a:prstGeom prst="rect">
-            <a:avLst/>
-          </a:prstGeom>
-          <a:noFill/>
-          <a:ln/>
-        </p:spPr>
-        <p:txBody>
-          <a:bodyPr wrap="square" lIns="0" tIns="0" rIns="0" bIns="0" rtlCol="0" anchor="ctr"/>
-          <a:lstStyle/>
-          <a:p>
-            <a:pPr algn="l" indent="0" marL="0">
-              <a:buNone/>
-            </a:pPr>
-            <a:r>
-              <a:rPr lang="en-US" sz="850" dirty="0">
-                <a:solidFill>
-                  <a:srgbClr val="9AA8B4"/>
-                </a:solidFill>
-                <a:latin typeface="Calibri" pitchFamily="34" charset="0"/>
-                <a:ea typeface="Calibri" pitchFamily="34" charset="-122"/>
-                <a:cs typeface="Calibri" pitchFamily="34" charset="-120"/>
-              </a:rPr>
-              <a:t>Makassed General Hospital  ·  Department of Laboratory Medicine</a:t>
-            </a:r>
-            <a:endParaRPr lang="en-US" sz="850" dirty="0"/>
-          </a:p>
-        </p:txBody>
-      </p:sp>
-      <p:sp>
-        <p:nvSpPr>
-          <p:cNvPr id="11" name="Text 9"/>
-          <p:cNvSpPr/>
-          <p:nvPr/>
-        </p:nvSpPr>
-        <p:spPr>
-          <a:xfrm>
-            <a:off x="9814255" y="6473952"/>
-            <a:ext cx="1828800" cy="274320"/>
-          </a:xfrm>
-          <a:prstGeom prst="rect">
-            <a:avLst/>
-          </a:prstGeom>
-          <a:noFill/>
-          <a:ln/>
-        </p:spPr>
-        <p:txBody>
-          <a:bodyPr wrap="square" lIns="0" tIns="0" rIns="0" bIns="0" rtlCol="0" anchor="ctr"/>
-          <a:lstStyle/>
-          <a:p>
-            <a:pPr algn="r" indent="0" marL="0">
-              <a:buNone/>
-            </a:pPr>
-            <a:r>
-              <a:rPr lang="en-US" sz="850" dirty="0">
-                <a:solidFill>
-                  <a:srgbClr val="9AA8B4"/>
-                </a:solidFill>
-                <a:latin typeface="Calibri" pitchFamily="34" charset="0"/>
-                <a:ea typeface="Calibri" pitchFamily="34" charset="-122"/>
-                <a:cs typeface="Calibri" pitchFamily="34" charset="-120"/>
-              </a:rPr>
-              <a:t>CP Lecture Series</a:t>
-            </a:r>
-            <a:pPr algn="r" indent="0" marL="0">
-              <a:buNone/>
-            </a:pPr>
-            <a:r>
-              <a:rPr lang="en-US" sz="850" dirty="0">
-                <a:solidFill>
-                  <a:srgbClr val="DCE4EC"/>
-                </a:solidFill>
-                <a:latin typeface="Calibri" pitchFamily="34" charset="0"/>
-                <a:ea typeface="Calibri" pitchFamily="34" charset="-122"/>
-                <a:cs typeface="Calibri" pitchFamily="34" charset="-120"/>
-              </a:rPr>
-              <a:t>   ·   </a:t>
-            </a:r>
-            <a:pPr algn="r" indent="0" marL="0">
-              <a:buNone/>
-            </a:pPr>
-            <a:r>
-              <a:rPr lang="en-US" sz="850" b="1" dirty="0">
-                <a:solidFill>
-                  <a:srgbClr val="1565C0"/>
-                </a:solidFill>
-                <a:latin typeface="Calibri" pitchFamily="34" charset="0"/>
-                <a:ea typeface="Calibri" pitchFamily="34" charset="-122"/>
-                <a:cs typeface="Calibri" pitchFamily="34" charset="-120"/>
-              </a:rPr>
-              <a:t>12</a:t>
-            </a:r>
-            <a:endParaRPr lang="en-US" sz="850" dirty="0"/>
           </a:p>
         </p:txBody>
       </p:sp>
@@ -6898,7 +7118,7 @@
                 <a:ea typeface="Calibri" pitchFamily="34" charset="-122"/>
                 <a:cs typeface="Calibri" pitchFamily="34" charset="-120"/>
               </a:rPr>
-              <a:t>CLINICAL CHEMISTRY   ·   CASE 1  ·  RESOLUTION</a:t>
+              <a:t>CLINICAL CHEMISTRY   ·   CASE 1</a:t>
             </a:r>
             <a:endParaRPr lang="en-US" sz="1100" dirty="0"/>
           </a:p>
@@ -6937,7 +7157,7 @@
                 <a:ea typeface="Calibri" pitchFamily="34" charset="-122"/>
                 <a:cs typeface="Calibri" pitchFamily="34" charset="-120"/>
               </a:rPr>
-              <a:t>Case 1: Hemolysis-Induced Pseudohyperkalemia</a:t>
+              <a:t>Case 1</a:t>
             </a:r>
             <a:endParaRPr lang="en-US" sz="3000" dirty="0"/>
           </a:p>
@@ -6945,124 +7165,18 @@
       </p:sp>
       <p:sp>
         <p:nvSpPr>
-          <p:cNvPr id="4" name="Text 2"/>
-          <p:cNvSpPr/>
-          <p:nvPr/>
-        </p:nvSpPr>
-        <p:spPr>
-          <a:xfrm>
-            <a:off x="566928" y="1554480"/>
-            <a:ext cx="6413547" cy="4023360"/>
-          </a:xfrm>
-          <a:prstGeom prst="rect">
-            <a:avLst/>
-          </a:prstGeom>
-          <a:noFill/>
-          <a:ln/>
-        </p:spPr>
-        <p:txBody>
-          <a:bodyPr wrap="square" lIns="0" tIns="0" rIns="0" bIns="0" rtlCol="0" anchor="t"/>
-          <a:lstStyle/>
-          <a:p>
-            <a:pPr algn="l" marL="177800" indent="-177800">
-              <a:spcAft>
-                <a:spcPts val="900"/>
-              </a:spcAft>
-              <a:buSzPct val="100000"/>
-              <a:buChar char="•"/>
-            </a:pPr>
-            <a:r>
-              <a:rPr lang="en-US" sz="1400" b="1" dirty="0">
-                <a:solidFill>
-                  <a:srgbClr val="1B2A38"/>
-                </a:solidFill>
-                <a:latin typeface="Calibri" pitchFamily="34" charset="0"/>
-                <a:ea typeface="Calibri" pitchFamily="34" charset="-122"/>
-                <a:cs typeface="Calibri" pitchFamily="34" charset="-120"/>
-              </a:rPr>
-              <a:t>In vitro hemolysis released intracellular potassium (and LDH, AST, phosphate) → spurious hyperkalemia.</a:t>
-            </a:r>
-            <a:endParaRPr lang="en-US" sz="1400" dirty="0"/>
-          </a:p>
-          <a:p>
-            <a:pPr algn="l" marL="177800" indent="-177800">
-              <a:spcAft>
-                <a:spcPts val="900"/>
-              </a:spcAft>
-              <a:buSzPct val="100000"/>
-              <a:buChar char="•"/>
-            </a:pPr>
-            <a:r>
-              <a:rPr lang="en-US" sz="1400" dirty="0">
-                <a:solidFill>
-                  <a:srgbClr val="33444F"/>
-                </a:solidFill>
-                <a:latin typeface="Calibri" pitchFamily="34" charset="0"/>
-                <a:ea typeface="Calibri" pitchFamily="34" charset="-122"/>
-                <a:cs typeface="Calibri" pitchFamily="34" charset="-120"/>
-              </a:rPr>
-              <a:t>The clinical mismatch (well patient, normal ECG) is the tell.</a:t>
-            </a:r>
-            <a:endParaRPr lang="en-US" sz="1400" dirty="0"/>
-          </a:p>
-          <a:p>
-            <a:pPr algn="l" marL="177800" indent="-177800">
-              <a:spcAft>
-                <a:spcPts val="900"/>
-              </a:spcAft>
-              <a:buSzPct val="100000"/>
-              <a:buChar char="•"/>
-            </a:pPr>
-            <a:r>
-              <a:rPr lang="en-US" sz="1400" dirty="0">
-                <a:solidFill>
-                  <a:srgbClr val="33444F"/>
-                </a:solidFill>
-                <a:latin typeface="Calibri" pitchFamily="34" charset="0"/>
-                <a:ea typeface="Calibri" pitchFamily="34" charset="-122"/>
-                <a:cs typeface="Calibri" pitchFamily="34" charset="-120"/>
-              </a:rPr>
-              <a:t>The HIL index and the recollected normal result confirm the artifact.</a:t>
-            </a:r>
-            <a:endParaRPr lang="en-US" sz="1400" dirty="0"/>
-          </a:p>
-          <a:p>
-            <a:pPr algn="l" marL="177800" indent="-177800">
-              <a:spcAft>
-                <a:spcPts val="900"/>
-              </a:spcAft>
-              <a:buSzPct val="100000"/>
-              <a:buChar char="•"/>
-            </a:pPr>
-            <a:r>
-              <a:rPr lang="en-US" sz="1400" dirty="0">
-                <a:solidFill>
-                  <a:srgbClr val="33444F"/>
-                </a:solidFill>
-                <a:latin typeface="Calibri" pitchFamily="34" charset="0"/>
-                <a:ea typeface="Calibri" pitchFamily="34" charset="-122"/>
-                <a:cs typeface="Calibri" pitchFamily="34" charset="-120"/>
-              </a:rPr>
-              <a:t>Report with a hemolysis comment or recollect — never let a spurious critical potassium drive treatment.</a:t>
-            </a:r>
-            <a:endParaRPr lang="en-US" sz="1400" dirty="0"/>
-          </a:p>
-        </p:txBody>
-      </p:sp>
-      <p:sp>
-        <p:nvSpPr>
-          <p:cNvPr id="5" name="Shape 3"/>
-          <p:cNvSpPr/>
-          <p:nvPr/>
-        </p:nvSpPr>
-        <p:spPr>
-          <a:xfrm>
-            <a:off x="7422788" y="1554480"/>
-            <a:ext cx="4201979" cy="3977640"/>
+          <p:cNvPr id="4" name="Shape 2"/>
+          <p:cNvSpPr/>
+          <p:nvPr/>
+        </p:nvSpPr>
+        <p:spPr>
+          <a:xfrm>
+            <a:off x="566928" y="1517904"/>
+            <a:ext cx="11057839" cy="2788920"/>
           </a:xfrm>
           <a:prstGeom prst="roundRect">
             <a:avLst>
-              <a:gd name="adj" fmla="val 2069"/>
+              <a:gd name="adj" fmla="val 2951"/>
             </a:avLst>
           </a:prstGeom>
           <a:solidFill>
@@ -7080,53 +7194,53 @@
       </p:sp>
       <p:sp>
         <p:nvSpPr>
+          <p:cNvPr id="5" name="Text 3"/>
+          <p:cNvSpPr/>
+          <p:nvPr/>
+        </p:nvSpPr>
+        <p:spPr>
+          <a:xfrm>
+            <a:off x="841248" y="1700784"/>
+            <a:ext cx="5486400" cy="292608"/>
+          </a:xfrm>
+          <a:prstGeom prst="rect">
+            <a:avLst/>
+          </a:prstGeom>
+          <a:noFill/>
+          <a:ln/>
+        </p:spPr>
+        <p:txBody>
+          <a:bodyPr wrap="square" lIns="0" tIns="0" rIns="0" bIns="0" rtlCol="0" anchor="ctr"/>
+          <a:lstStyle/>
+          <a:p>
+            <a:pPr indent="0" marL="0">
+              <a:buNone/>
+            </a:pPr>
+            <a:r>
+              <a:rPr lang="en-US" sz="1100" b="1" spc="150" kern="0" dirty="0">
+                <a:solidFill>
+                  <a:srgbClr val="1565C0"/>
+                </a:solidFill>
+                <a:latin typeface="Calibri" pitchFamily="34" charset="0"/>
+                <a:ea typeface="Calibri" pitchFamily="34" charset="-122"/>
+                <a:cs typeface="Calibri" pitchFamily="34" charset="-120"/>
+              </a:rPr>
+              <a:t>CLINICAL VIGNETTE</a:t>
+            </a:r>
+            <a:endParaRPr lang="en-US" sz="1100" dirty="0"/>
+          </a:p>
+        </p:txBody>
+      </p:sp>
+      <p:sp>
+        <p:nvSpPr>
           <p:cNvPr id="6" name="Text 4"/>
           <p:cNvSpPr/>
           <p:nvPr/>
         </p:nvSpPr>
         <p:spPr>
           <a:xfrm>
-            <a:off x="7660532" y="1755648"/>
-            <a:ext cx="3744779" cy="310896"/>
-          </a:xfrm>
-          <a:prstGeom prst="rect">
-            <a:avLst/>
-          </a:prstGeom>
-          <a:noFill/>
-          <a:ln/>
-        </p:spPr>
-        <p:txBody>
-          <a:bodyPr wrap="square" lIns="0" tIns="0" rIns="0" bIns="0" rtlCol="0" anchor="ctr"/>
-          <a:lstStyle/>
-          <a:p>
-            <a:pPr indent="0" marL="0">
-              <a:buNone/>
-            </a:pPr>
-            <a:r>
-              <a:rPr lang="en-US" sz="1100" b="1" spc="140" kern="0" dirty="0">
-                <a:solidFill>
-                  <a:srgbClr val="1565C0"/>
-                </a:solidFill>
-                <a:latin typeface="Calibri" pitchFamily="34" charset="0"/>
-                <a:ea typeface="Calibri" pitchFamily="34" charset="-122"/>
-                <a:cs typeface="Calibri" pitchFamily="34" charset="-120"/>
-              </a:rPr>
-              <a:t>TEACHING POINT</a:t>
-            </a:r>
-            <a:endParaRPr lang="en-US" sz="1100" dirty="0"/>
-          </a:p>
-        </p:txBody>
-      </p:sp>
-      <p:sp>
-        <p:nvSpPr>
-          <p:cNvPr id="7" name="Text 5"/>
-          <p:cNvSpPr/>
-          <p:nvPr/>
-        </p:nvSpPr>
-        <p:spPr>
-          <a:xfrm>
-            <a:off x="7660532" y="2121408"/>
-            <a:ext cx="3726491" cy="3291840"/>
+            <a:off x="841248" y="2029968"/>
+            <a:ext cx="10509199" cy="2148840"/>
           </a:xfrm>
           <a:prstGeom prst="rect">
             <a:avLst/>
@@ -7140,12 +7254,12 @@
           <a:p>
             <a:pPr algn="l" indent="0" marL="0">
               <a:lnSpc>
-                <a:spcPct val="110000"/>
+                <a:spcPct val="108000"/>
               </a:lnSpc>
               <a:buNone/>
             </a:pPr>
             <a:r>
-              <a:rPr lang="en-US" sz="1350" dirty="0">
+              <a:rPr lang="en-US" sz="1450" dirty="0">
                 <a:solidFill>
                   <a:srgbClr val="33444F"/>
                 </a:solidFill>
@@ -7153,15 +7267,122 @@
                 <a:ea typeface="Calibri" pitchFamily="34" charset="-122"/>
                 <a:cs typeface="Calibri" pitchFamily="34" charset="-120"/>
               </a:rPr>
-              <a:t>Hemolysis is the commonest interference; potassium, LDH, AST, and phosphate move up together. Always reconcile criticals with the patient.</a:t>
-            </a:r>
-            <a:endParaRPr lang="en-US" sz="1350" dirty="0"/>
-          </a:p>
-        </p:txBody>
+              <a:t>A potassium of 7.2 mmol/L is reported on a well outpatient with a normal ECG. The sample is visibly hemolyzed; LDH and phosphate are also elevated. A repeat, carefully drawn sample is normal.</a:t>
+            </a:r>
+            <a:endParaRPr lang="en-US" sz="1450" dirty="0"/>
+          </a:p>
+        </p:txBody>
+      </p:sp>
+      <p:sp>
+        <p:nvSpPr>
+          <p:cNvPr id="7" name="Shape 5"/>
+          <p:cNvSpPr/>
+          <p:nvPr/>
+        </p:nvSpPr>
+        <p:spPr>
+          <a:xfrm>
+            <a:off x="566928" y="4553712"/>
+            <a:ext cx="11057839" cy="1325880"/>
+          </a:xfrm>
+          <a:prstGeom prst="roundRect">
+            <a:avLst>
+              <a:gd name="adj" fmla="val 6207"/>
+            </a:avLst>
+          </a:prstGeom>
+          <a:solidFill>
+            <a:srgbClr val="0E3A5F"/>
+          </a:solidFill>
+          <a:ln/>
+          <a:effectLst>
+            <a:outerShdw sx="100000" sy="100000" kx="0" ky="0" algn="bl" rotWithShape="0" blurRad="88900" dist="25400" dir="5400000">
+              <a:srgbClr val="22303C">
+                <a:alpha val="12000"/>
+              </a:srgbClr>
+            </a:outerShdw>
+          </a:effectLst>
+        </p:spPr>
       </p:sp>
       <p:sp>
         <p:nvSpPr>
           <p:cNvPr id="8" name="Text 6"/>
+          <p:cNvSpPr/>
+          <p:nvPr/>
+        </p:nvSpPr>
+        <p:spPr>
+          <a:xfrm>
+            <a:off x="822960" y="4681728"/>
+            <a:ext cx="640080" cy="960120"/>
+          </a:xfrm>
+          <a:prstGeom prst="rect">
+            <a:avLst/>
+          </a:prstGeom>
+          <a:noFill/>
+          <a:ln/>
+        </p:spPr>
+        <p:txBody>
+          <a:bodyPr wrap="square" lIns="0" tIns="0" rIns="0" bIns="0" rtlCol="0" anchor="ctr"/>
+          <a:lstStyle/>
+          <a:p>
+            <a:pPr algn="ctr" indent="0" marL="0">
+              <a:buNone/>
+            </a:pPr>
+            <a:r>
+              <a:rPr lang="en-US" sz="4000" b="1" dirty="0">
+                <a:solidFill>
+                  <a:srgbClr val="1565C0"/>
+                </a:solidFill>
+                <a:latin typeface="Calibri" pitchFamily="34" charset="0"/>
+                <a:ea typeface="Calibri" pitchFamily="34" charset="-122"/>
+                <a:cs typeface="Calibri" pitchFamily="34" charset="-120"/>
+              </a:rPr>
+              <a:t>?</a:t>
+            </a:r>
+            <a:endParaRPr lang="en-US" sz="4000" dirty="0"/>
+          </a:p>
+        </p:txBody>
+      </p:sp>
+      <p:sp>
+        <p:nvSpPr>
+          <p:cNvPr id="9" name="Text 7"/>
+          <p:cNvSpPr/>
+          <p:nvPr/>
+        </p:nvSpPr>
+        <p:spPr>
+          <a:xfrm>
+            <a:off x="1618488" y="4553712"/>
+            <a:ext cx="9686239" cy="1325880"/>
+          </a:xfrm>
+          <a:prstGeom prst="rect">
+            <a:avLst/>
+          </a:prstGeom>
+          <a:noFill/>
+          <a:ln/>
+        </p:spPr>
+        <p:txBody>
+          <a:bodyPr wrap="square" lIns="0" tIns="0" rIns="0" bIns="0" rtlCol="0" anchor="ctr"/>
+          <a:lstStyle/>
+          <a:p>
+            <a:pPr algn="l" indent="0" marL="0">
+              <a:buNone/>
+            </a:pPr>
+            <a:r>
+              <a:rPr lang="en-US" sz="1500" b="1" dirty="0">
+                <a:solidFill>
+                  <a:srgbClr val="FFFFFF"/>
+                </a:solidFill>
+                <a:latin typeface="Calibri" pitchFamily="34" charset="0"/>
+                <a:ea typeface="Calibri" pitchFamily="34" charset="-122"/>
+                <a:cs typeface="Calibri" pitchFamily="34" charset="-120"/>
+              </a:rPr>
+              <a:t>What explains the first result, and what is the lesson for reporting?</a:t>
+            </a:r>
+            <a:endParaRPr lang="en-US" sz="1500" dirty="0"/>
+          </a:p>
+        </p:txBody>
+      </p:sp>
+      <p:sp>
+        <p:nvSpPr>
+          <p:cNvPr id="10" name="Text 8"/>
           <p:cNvSpPr/>
           <p:nvPr/>
         </p:nvSpPr>
@@ -7200,7 +7421,7 @@
       </p:sp>
       <p:sp>
         <p:nvSpPr>
-          <p:cNvPr id="9" name="Text 7"/>
+          <p:cNvPr id="11" name="Text 9"/>
           <p:cNvSpPr/>
           <p:nvPr/>
         </p:nvSpPr>
@@ -7330,7 +7551,7 @@
                 <a:ea typeface="Calibri" pitchFamily="34" charset="-122"/>
                 <a:cs typeface="Calibri" pitchFamily="34" charset="-120"/>
               </a:rPr>
-              <a:t>CLINICAL CHEMISTRY   ·   CASE 2</a:t>
+              <a:t>CLINICAL CHEMISTRY   ·   CASE 1  ·  RESOLUTION</a:t>
             </a:r>
             <a:endParaRPr lang="en-US" sz="1100" dirty="0"/>
           </a:p>
@@ -7369,7 +7590,7 @@
                 <a:ea typeface="Calibri" pitchFamily="34" charset="-122"/>
                 <a:cs typeface="Calibri" pitchFamily="34" charset="-120"/>
               </a:rPr>
-              <a:t>Case 2</a:t>
+              <a:t>Case 1: Hemolysis-Induced Pseudohyperkalemia</a:t>
             </a:r>
             <a:endParaRPr lang="en-US" sz="3000" dirty="0"/>
           </a:p>
@@ -7377,18 +7598,124 @@
       </p:sp>
       <p:sp>
         <p:nvSpPr>
-          <p:cNvPr id="4" name="Shape 2"/>
-          <p:cNvSpPr/>
-          <p:nvPr/>
-        </p:nvSpPr>
-        <p:spPr>
-          <a:xfrm>
-            <a:off x="566928" y="1517904"/>
-            <a:ext cx="11057839" cy="2788920"/>
+          <p:cNvPr id="4" name="Text 2"/>
+          <p:cNvSpPr/>
+          <p:nvPr/>
+        </p:nvSpPr>
+        <p:spPr>
+          <a:xfrm>
+            <a:off x="566928" y="1554480"/>
+            <a:ext cx="6413547" cy="4023360"/>
+          </a:xfrm>
+          <a:prstGeom prst="rect">
+            <a:avLst/>
+          </a:prstGeom>
+          <a:noFill/>
+          <a:ln/>
+        </p:spPr>
+        <p:txBody>
+          <a:bodyPr wrap="square" lIns="0" tIns="0" rIns="0" bIns="0" rtlCol="0" anchor="t"/>
+          <a:lstStyle/>
+          <a:p>
+            <a:pPr algn="l" marL="177800" indent="-177800">
+              <a:spcAft>
+                <a:spcPts val="900"/>
+              </a:spcAft>
+              <a:buSzPct val="100000"/>
+              <a:buChar char="•"/>
+            </a:pPr>
+            <a:r>
+              <a:rPr lang="en-US" sz="1400" b="1" dirty="0">
+                <a:solidFill>
+                  <a:srgbClr val="1B2A38"/>
+                </a:solidFill>
+                <a:latin typeface="Calibri" pitchFamily="34" charset="0"/>
+                <a:ea typeface="Calibri" pitchFamily="34" charset="-122"/>
+                <a:cs typeface="Calibri" pitchFamily="34" charset="-120"/>
+              </a:rPr>
+              <a:t>In vitro hemolysis released intracellular potassium (and LDH, AST, phosphate) → spurious hyperkalemia.</a:t>
+            </a:r>
+            <a:endParaRPr lang="en-US" sz="1400" dirty="0"/>
+          </a:p>
+          <a:p>
+            <a:pPr algn="l" marL="177800" indent="-177800">
+              <a:spcAft>
+                <a:spcPts val="900"/>
+              </a:spcAft>
+              <a:buSzPct val="100000"/>
+              <a:buChar char="•"/>
+            </a:pPr>
+            <a:r>
+              <a:rPr lang="en-US" sz="1400" dirty="0">
+                <a:solidFill>
+                  <a:srgbClr val="33444F"/>
+                </a:solidFill>
+                <a:latin typeface="Calibri" pitchFamily="34" charset="0"/>
+                <a:ea typeface="Calibri" pitchFamily="34" charset="-122"/>
+                <a:cs typeface="Calibri" pitchFamily="34" charset="-120"/>
+              </a:rPr>
+              <a:t>The clinical mismatch (well patient, normal ECG) is the tell.</a:t>
+            </a:r>
+            <a:endParaRPr lang="en-US" sz="1400" dirty="0"/>
+          </a:p>
+          <a:p>
+            <a:pPr algn="l" marL="177800" indent="-177800">
+              <a:spcAft>
+                <a:spcPts val="900"/>
+              </a:spcAft>
+              <a:buSzPct val="100000"/>
+              <a:buChar char="•"/>
+            </a:pPr>
+            <a:r>
+              <a:rPr lang="en-US" sz="1400" dirty="0">
+                <a:solidFill>
+                  <a:srgbClr val="33444F"/>
+                </a:solidFill>
+                <a:latin typeface="Calibri" pitchFamily="34" charset="0"/>
+                <a:ea typeface="Calibri" pitchFamily="34" charset="-122"/>
+                <a:cs typeface="Calibri" pitchFamily="34" charset="-120"/>
+              </a:rPr>
+              <a:t>The HIL index and the recollected normal result confirm the artifact.</a:t>
+            </a:r>
+            <a:endParaRPr lang="en-US" sz="1400" dirty="0"/>
+          </a:p>
+          <a:p>
+            <a:pPr algn="l" marL="177800" indent="-177800">
+              <a:spcAft>
+                <a:spcPts val="900"/>
+              </a:spcAft>
+              <a:buSzPct val="100000"/>
+              <a:buChar char="•"/>
+            </a:pPr>
+            <a:r>
+              <a:rPr lang="en-US" sz="1400" dirty="0">
+                <a:solidFill>
+                  <a:srgbClr val="33444F"/>
+                </a:solidFill>
+                <a:latin typeface="Calibri" pitchFamily="34" charset="0"/>
+                <a:ea typeface="Calibri" pitchFamily="34" charset="-122"/>
+                <a:cs typeface="Calibri" pitchFamily="34" charset="-120"/>
+              </a:rPr>
+              <a:t>Report with a hemolysis comment or recollect — never let a spurious critical drive treatment.</a:t>
+            </a:r>
+            <a:endParaRPr lang="en-US" sz="1400" dirty="0"/>
+          </a:p>
+        </p:txBody>
+      </p:sp>
+      <p:sp>
+        <p:nvSpPr>
+          <p:cNvPr id="5" name="Shape 3"/>
+          <p:cNvSpPr/>
+          <p:nvPr/>
+        </p:nvSpPr>
+        <p:spPr>
+          <a:xfrm>
+            <a:off x="7422788" y="1554480"/>
+            <a:ext cx="4201979" cy="3977640"/>
           </a:xfrm>
           <a:prstGeom prst="roundRect">
             <a:avLst>
-              <a:gd name="adj" fmla="val 2951"/>
+              <a:gd name="adj" fmla="val 2069"/>
             </a:avLst>
           </a:prstGeom>
           <a:solidFill>
@@ -7406,14 +7733,14 @@
       </p:sp>
       <p:sp>
         <p:nvSpPr>
-          <p:cNvPr id="5" name="Text 3"/>
-          <p:cNvSpPr/>
-          <p:nvPr/>
-        </p:nvSpPr>
-        <p:spPr>
-          <a:xfrm>
-            <a:off x="841248" y="1700784"/>
-            <a:ext cx="5486400" cy="292608"/>
+          <p:cNvPr id="6" name="Text 4"/>
+          <p:cNvSpPr/>
+          <p:nvPr/>
+        </p:nvSpPr>
+        <p:spPr>
+          <a:xfrm>
+            <a:off x="7660532" y="1755648"/>
+            <a:ext cx="3744779" cy="310896"/>
           </a:xfrm>
           <a:prstGeom prst="rect">
             <a:avLst/>
@@ -7429,7 +7756,7 @@
               <a:buNone/>
             </a:pPr>
             <a:r>
-              <a:rPr lang="en-US" sz="1100" b="1" spc="150" kern="0" dirty="0">
+              <a:rPr lang="en-US" sz="1100" b="1" spc="140" kern="0" dirty="0">
                 <a:solidFill>
                   <a:srgbClr val="1565C0"/>
                 </a:solidFill>
@@ -7437,7 +7764,7 @@
                 <a:ea typeface="Calibri" pitchFamily="34" charset="-122"/>
                 <a:cs typeface="Calibri" pitchFamily="34" charset="-120"/>
               </a:rPr>
-              <a:t>CLINICAL VIGNETTE</a:t>
+              <a:t>TEACHING POINT</a:t>
             </a:r>
             <a:endParaRPr lang="en-US" sz="1100" dirty="0"/>
           </a:p>
@@ -7445,14 +7772,14 @@
       </p:sp>
       <p:sp>
         <p:nvSpPr>
-          <p:cNvPr id="6" name="Text 4"/>
-          <p:cNvSpPr/>
-          <p:nvPr/>
-        </p:nvSpPr>
-        <p:spPr>
-          <a:xfrm>
-            <a:off x="841248" y="2029968"/>
-            <a:ext cx="10509199" cy="2148840"/>
+          <p:cNvPr id="7" name="Text 5"/>
+          <p:cNvSpPr/>
+          <p:nvPr/>
+        </p:nvSpPr>
+        <p:spPr>
+          <a:xfrm>
+            <a:off x="7660532" y="2121408"/>
+            <a:ext cx="3726491" cy="3291840"/>
           </a:xfrm>
           <a:prstGeom prst="rect">
             <a:avLst/>
@@ -7466,12 +7793,12 @@
           <a:p>
             <a:pPr algn="l" indent="0" marL="0">
               <a:lnSpc>
-                <a:spcPct val="108000"/>
+                <a:spcPct val="110000"/>
               </a:lnSpc>
               <a:buNone/>
             </a:pPr>
             <a:r>
-              <a:rPr lang="en-US" sz="1450" dirty="0">
+              <a:rPr lang="en-US" sz="1350" dirty="0">
                 <a:solidFill>
                   <a:srgbClr val="33444F"/>
                 </a:solidFill>
@@ -7479,122 +7806,15 @@
                 <a:ea typeface="Calibri" pitchFamily="34" charset="-122"/>
                 <a:cs typeface="Calibri" pitchFamily="34" charset="-120"/>
               </a:rPr>
-              <a:t>A non-pregnant patient has a markedly elevated hCG, but imaging shows no pregnancy or tumor. Serial dilution of the sample does not yield proportional results, and a different platform reports a normal value.</a:t>
-            </a:r>
-            <a:endParaRPr lang="en-US" sz="1450" dirty="0"/>
-          </a:p>
-        </p:txBody>
-      </p:sp>
-      <p:sp>
-        <p:nvSpPr>
-          <p:cNvPr id="7" name="Shape 5"/>
-          <p:cNvSpPr/>
-          <p:nvPr/>
-        </p:nvSpPr>
-        <p:spPr>
-          <a:xfrm>
-            <a:off x="566928" y="4553712"/>
-            <a:ext cx="11057839" cy="1325880"/>
-          </a:xfrm>
-          <a:prstGeom prst="roundRect">
-            <a:avLst>
-              <a:gd name="adj" fmla="val 6207"/>
-            </a:avLst>
-          </a:prstGeom>
-          <a:solidFill>
-            <a:srgbClr val="0E3A5F"/>
-          </a:solidFill>
-          <a:ln/>
-          <a:effectLst>
-            <a:outerShdw sx="100000" sy="100000" kx="0" ky="0" algn="bl" rotWithShape="0" blurRad="88900" dist="25400" dir="5400000">
-              <a:srgbClr val="22303C">
-                <a:alpha val="12000"/>
-              </a:srgbClr>
-            </a:outerShdw>
-          </a:effectLst>
-        </p:spPr>
+              <a:t>Hemolysis raises potassium, LDH, AST, and phosphate together; always reconcile a critical value with the patient.</a:t>
+            </a:r>
+            <a:endParaRPr lang="en-US" sz="1350" dirty="0"/>
+          </a:p>
+        </p:txBody>
       </p:sp>
       <p:sp>
         <p:nvSpPr>
           <p:cNvPr id="8" name="Text 6"/>
-          <p:cNvSpPr/>
-          <p:nvPr/>
-        </p:nvSpPr>
-        <p:spPr>
-          <a:xfrm>
-            <a:off x="822960" y="4681728"/>
-            <a:ext cx="640080" cy="960120"/>
-          </a:xfrm>
-          <a:prstGeom prst="rect">
-            <a:avLst/>
-          </a:prstGeom>
-          <a:noFill/>
-          <a:ln/>
-        </p:spPr>
-        <p:txBody>
-          <a:bodyPr wrap="square" lIns="0" tIns="0" rIns="0" bIns="0" rtlCol="0" anchor="ctr"/>
-          <a:lstStyle/>
-          <a:p>
-            <a:pPr algn="ctr" indent="0" marL="0">
-              <a:buNone/>
-            </a:pPr>
-            <a:r>
-              <a:rPr lang="en-US" sz="4000" b="1" dirty="0">
-                <a:solidFill>
-                  <a:srgbClr val="1565C0"/>
-                </a:solidFill>
-                <a:latin typeface="Calibri" pitchFamily="34" charset="0"/>
-                <a:ea typeface="Calibri" pitchFamily="34" charset="-122"/>
-                <a:cs typeface="Calibri" pitchFamily="34" charset="-120"/>
-              </a:rPr>
-              <a:t>?</a:t>
-            </a:r>
-            <a:endParaRPr lang="en-US" sz="4000" dirty="0"/>
-          </a:p>
-        </p:txBody>
-      </p:sp>
-      <p:sp>
-        <p:nvSpPr>
-          <p:cNvPr id="9" name="Text 7"/>
-          <p:cNvSpPr/>
-          <p:nvPr/>
-        </p:nvSpPr>
-        <p:spPr>
-          <a:xfrm>
-            <a:off x="1618488" y="4553712"/>
-            <a:ext cx="9686239" cy="1325880"/>
-          </a:xfrm>
-          <a:prstGeom prst="rect">
-            <a:avLst/>
-          </a:prstGeom>
-          <a:noFill/>
-          <a:ln/>
-        </p:spPr>
-        <p:txBody>
-          <a:bodyPr wrap="square" lIns="0" tIns="0" rIns="0" bIns="0" rtlCol="0" anchor="ctr"/>
-          <a:lstStyle/>
-          <a:p>
-            <a:pPr algn="l" indent="0" marL="0">
-              <a:buNone/>
-            </a:pPr>
-            <a:r>
-              <a:rPr lang="en-US" sz="1500" b="1" dirty="0">
-                <a:solidFill>
-                  <a:srgbClr val="FFFFFF"/>
-                </a:solidFill>
-                <a:latin typeface="Calibri" pitchFamily="34" charset="0"/>
-                <a:ea typeface="Calibri" pitchFamily="34" charset="-122"/>
-                <a:cs typeface="Calibri" pitchFamily="34" charset="-120"/>
-              </a:rPr>
-              <a:t>What interference is most likely, and how did the laboratory confirm it?</a:t>
-            </a:r>
-            <a:endParaRPr lang="en-US" sz="1500" dirty="0"/>
-          </a:p>
-        </p:txBody>
-      </p:sp>
-      <p:sp>
-        <p:nvSpPr>
-          <p:cNvPr id="10" name="Text 8"/>
           <p:cNvSpPr/>
           <p:nvPr/>
         </p:nvSpPr>
@@ -7633,7 +7853,7 @@
       </p:sp>
       <p:sp>
         <p:nvSpPr>
-          <p:cNvPr id="11" name="Text 9"/>
+          <p:cNvPr id="9" name="Text 7"/>
           <p:cNvSpPr/>
           <p:nvPr/>
         </p:nvSpPr>
@@ -7763,7 +7983,7 @@
                 <a:ea typeface="Calibri" pitchFamily="34" charset="-122"/>
                 <a:cs typeface="Calibri" pitchFamily="34" charset="-120"/>
               </a:rPr>
-              <a:t>CLINICAL CHEMISTRY   ·   CASE 2  ·  RESOLUTION</a:t>
+              <a:t>CLINICAL CHEMISTRY   ·   CASE 2</a:t>
             </a:r>
             <a:endParaRPr lang="en-US" sz="1100" dirty="0"/>
           </a:p>
@@ -7802,7 +8022,7 @@
                 <a:ea typeface="Calibri" pitchFamily="34" charset="-122"/>
                 <a:cs typeface="Calibri" pitchFamily="34" charset="-120"/>
               </a:rPr>
-              <a:t>Case 2: Heterophile-Antibody Interference</a:t>
+              <a:t>Case 2</a:t>
             </a:r>
             <a:endParaRPr lang="en-US" sz="3000" dirty="0"/>
           </a:p>
@@ -7810,124 +8030,18 @@
       </p:sp>
       <p:sp>
         <p:nvSpPr>
-          <p:cNvPr id="4" name="Text 2"/>
-          <p:cNvSpPr/>
-          <p:nvPr/>
-        </p:nvSpPr>
-        <p:spPr>
-          <a:xfrm>
-            <a:off x="566928" y="1554480"/>
-            <a:ext cx="6413547" cy="4023360"/>
-          </a:xfrm>
-          <a:prstGeom prst="rect">
-            <a:avLst/>
-          </a:prstGeom>
-          <a:noFill/>
-          <a:ln/>
-        </p:spPr>
-        <p:txBody>
-          <a:bodyPr wrap="square" lIns="0" tIns="0" rIns="0" bIns="0" rtlCol="0" anchor="t"/>
-          <a:lstStyle/>
-          <a:p>
-            <a:pPr algn="l" marL="177800" indent="-177800">
-              <a:spcAft>
-                <a:spcPts val="900"/>
-              </a:spcAft>
-              <a:buSzPct val="100000"/>
-              <a:buChar char="•"/>
-            </a:pPr>
-            <a:r>
-              <a:rPr lang="en-US" sz="1400" b="1" dirty="0">
-                <a:solidFill>
-                  <a:srgbClr val="1B2A38"/>
-                </a:solidFill>
-                <a:latin typeface="Calibri" pitchFamily="34" charset="0"/>
-                <a:ea typeface="Calibri" pitchFamily="34" charset="-122"/>
-                <a:cs typeface="Calibri" pitchFamily="34" charset="-120"/>
-              </a:rPr>
-              <a:t>Heterophile antibodies bridged the assay antibodies, producing a false-positive hCG.</a:t>
-            </a:r>
-            <a:endParaRPr lang="en-US" sz="1400" dirty="0"/>
-          </a:p>
-          <a:p>
-            <a:pPr algn="l" marL="177800" indent="-177800">
-              <a:spcAft>
-                <a:spcPts val="900"/>
-              </a:spcAft>
-              <a:buSzPct val="100000"/>
-              <a:buChar char="•"/>
-            </a:pPr>
-            <a:r>
-              <a:rPr lang="en-US" sz="1400" dirty="0">
-                <a:solidFill>
-                  <a:srgbClr val="33444F"/>
-                </a:solidFill>
-                <a:latin typeface="Calibri" pitchFamily="34" charset="0"/>
-                <a:ea typeface="Calibri" pitchFamily="34" charset="-122"/>
-                <a:cs typeface="Calibri" pitchFamily="34" charset="-120"/>
-              </a:rPr>
-              <a:t>Non-linearity on dilution is a classic clue to interference.</a:t>
-            </a:r>
-            <a:endParaRPr lang="en-US" sz="1400" dirty="0"/>
-          </a:p>
-          <a:p>
-            <a:pPr algn="l" marL="177800" indent="-177800">
-              <a:spcAft>
-                <a:spcPts val="900"/>
-              </a:spcAft>
-              <a:buSzPct val="100000"/>
-              <a:buChar char="•"/>
-            </a:pPr>
-            <a:r>
-              <a:rPr lang="en-US" sz="1400" dirty="0">
-                <a:solidFill>
-                  <a:srgbClr val="33444F"/>
-                </a:solidFill>
-                <a:latin typeface="Calibri" pitchFamily="34" charset="0"/>
-                <a:ea typeface="Calibri" pitchFamily="34" charset="-122"/>
-                <a:cs typeface="Calibri" pitchFamily="34" charset="-120"/>
-              </a:rPr>
-              <a:t>Confirmation: a normal result on an alternative platform (and/or heterophile-blocking tubes).</a:t>
-            </a:r>
-            <a:endParaRPr lang="en-US" sz="1400" dirty="0"/>
-          </a:p>
-          <a:p>
-            <a:pPr algn="l" marL="177800" indent="-177800">
-              <a:spcAft>
-                <a:spcPts val="900"/>
-              </a:spcAft>
-              <a:buSzPct val="100000"/>
-              <a:buChar char="•"/>
-            </a:pPr>
-            <a:r>
-              <a:rPr lang="en-US" sz="1400" dirty="0">
-                <a:solidFill>
-                  <a:srgbClr val="33444F"/>
-                </a:solidFill>
-                <a:latin typeface="Calibri" pitchFamily="34" charset="0"/>
-                <a:ea typeface="Calibri" pitchFamily="34" charset="-122"/>
-                <a:cs typeface="Calibri" pitchFamily="34" charset="-120"/>
-              </a:rPr>
-              <a:t>Recognizing this prevents harmful work-ups or therapy for a non-existent condition.</a:t>
-            </a:r>
-            <a:endParaRPr lang="en-US" sz="1400" dirty="0"/>
-          </a:p>
-        </p:txBody>
-      </p:sp>
-      <p:sp>
-        <p:nvSpPr>
-          <p:cNvPr id="5" name="Shape 3"/>
-          <p:cNvSpPr/>
-          <p:nvPr/>
-        </p:nvSpPr>
-        <p:spPr>
-          <a:xfrm>
-            <a:off x="7422788" y="1554480"/>
-            <a:ext cx="4201979" cy="3977640"/>
+          <p:cNvPr id="4" name="Shape 2"/>
+          <p:cNvSpPr/>
+          <p:nvPr/>
+        </p:nvSpPr>
+        <p:spPr>
+          <a:xfrm>
+            <a:off x="566928" y="1517904"/>
+            <a:ext cx="11057839" cy="2788920"/>
           </a:xfrm>
           <a:prstGeom prst="roundRect">
             <a:avLst>
-              <a:gd name="adj" fmla="val 2069"/>
+              <a:gd name="adj" fmla="val 2951"/>
             </a:avLst>
           </a:prstGeom>
           <a:solidFill>
@@ -7945,53 +8059,53 @@
       </p:sp>
       <p:sp>
         <p:nvSpPr>
+          <p:cNvPr id="5" name="Text 3"/>
+          <p:cNvSpPr/>
+          <p:nvPr/>
+        </p:nvSpPr>
+        <p:spPr>
+          <a:xfrm>
+            <a:off x="841248" y="1700784"/>
+            <a:ext cx="5486400" cy="292608"/>
+          </a:xfrm>
+          <a:prstGeom prst="rect">
+            <a:avLst/>
+          </a:prstGeom>
+          <a:noFill/>
+          <a:ln/>
+        </p:spPr>
+        <p:txBody>
+          <a:bodyPr wrap="square" lIns="0" tIns="0" rIns="0" bIns="0" rtlCol="0" anchor="ctr"/>
+          <a:lstStyle/>
+          <a:p>
+            <a:pPr indent="0" marL="0">
+              <a:buNone/>
+            </a:pPr>
+            <a:r>
+              <a:rPr lang="en-US" sz="1100" b="1" spc="150" kern="0" dirty="0">
+                <a:solidFill>
+                  <a:srgbClr val="1565C0"/>
+                </a:solidFill>
+                <a:latin typeface="Calibri" pitchFamily="34" charset="0"/>
+                <a:ea typeface="Calibri" pitchFamily="34" charset="-122"/>
+                <a:cs typeface="Calibri" pitchFamily="34" charset="-120"/>
+              </a:rPr>
+              <a:t>CLINICAL VIGNETTE</a:t>
+            </a:r>
+            <a:endParaRPr lang="en-US" sz="1100" dirty="0"/>
+          </a:p>
+        </p:txBody>
+      </p:sp>
+      <p:sp>
+        <p:nvSpPr>
           <p:cNvPr id="6" name="Text 4"/>
           <p:cNvSpPr/>
           <p:nvPr/>
         </p:nvSpPr>
         <p:spPr>
           <a:xfrm>
-            <a:off x="7660532" y="1755648"/>
-            <a:ext cx="3744779" cy="310896"/>
-          </a:xfrm>
-          <a:prstGeom prst="rect">
-            <a:avLst/>
-          </a:prstGeom>
-          <a:noFill/>
-          <a:ln/>
-        </p:spPr>
-        <p:txBody>
-          <a:bodyPr wrap="square" lIns="0" tIns="0" rIns="0" bIns="0" rtlCol="0" anchor="ctr"/>
-          <a:lstStyle/>
-          <a:p>
-            <a:pPr indent="0" marL="0">
-              <a:buNone/>
-            </a:pPr>
-            <a:r>
-              <a:rPr lang="en-US" sz="1100" b="1" spc="140" kern="0" dirty="0">
-                <a:solidFill>
-                  <a:srgbClr val="1565C0"/>
-                </a:solidFill>
-                <a:latin typeface="Calibri" pitchFamily="34" charset="0"/>
-                <a:ea typeface="Calibri" pitchFamily="34" charset="-122"/>
-                <a:cs typeface="Calibri" pitchFamily="34" charset="-120"/>
-              </a:rPr>
-              <a:t>TEACHING POINT</a:t>
-            </a:r>
-            <a:endParaRPr lang="en-US" sz="1100" dirty="0"/>
-          </a:p>
-        </p:txBody>
-      </p:sp>
-      <p:sp>
-        <p:nvSpPr>
-          <p:cNvPr id="7" name="Text 5"/>
-          <p:cNvSpPr/>
-          <p:nvPr/>
-        </p:nvSpPr>
-        <p:spPr>
-          <a:xfrm>
-            <a:off x="7660532" y="2121408"/>
-            <a:ext cx="3726491" cy="3291840"/>
+            <a:off x="841248" y="2029968"/>
+            <a:ext cx="10509199" cy="2148840"/>
           </a:xfrm>
           <a:prstGeom prst="rect">
             <a:avLst/>
@@ -8005,12 +8119,12 @@
           <a:p>
             <a:pPr algn="l" indent="0" marL="0">
               <a:lnSpc>
-                <a:spcPct val="110000"/>
+                <a:spcPct val="108000"/>
               </a:lnSpc>
               <a:buNone/>
             </a:pPr>
             <a:r>
-              <a:rPr lang="en-US" sz="1350" dirty="0">
+              <a:rPr lang="en-US" sz="1450" dirty="0">
                 <a:solidFill>
                   <a:srgbClr val="33444F"/>
                 </a:solidFill>
@@ -8018,15 +8132,122 @@
                 <a:ea typeface="Calibri" pitchFamily="34" charset="-122"/>
                 <a:cs typeface="Calibri" pitchFamily="34" charset="-120"/>
               </a:rPr>
-              <a:t>When an immunoassay result defies the clinical picture, think interference: dilute, block, or switch platforms before acting.</a:t>
-            </a:r>
-            <a:endParaRPr lang="en-US" sz="1350" dirty="0"/>
-          </a:p>
-        </p:txBody>
+              <a:t>A non-pregnant patient has a markedly elevated hCG, but imaging shows no pregnancy or tumor. Serial dilution is non-linear and a different platform reports a normal value.</a:t>
+            </a:r>
+            <a:endParaRPr lang="en-US" sz="1450" dirty="0"/>
+          </a:p>
+        </p:txBody>
+      </p:sp>
+      <p:sp>
+        <p:nvSpPr>
+          <p:cNvPr id="7" name="Shape 5"/>
+          <p:cNvSpPr/>
+          <p:nvPr/>
+        </p:nvSpPr>
+        <p:spPr>
+          <a:xfrm>
+            <a:off x="566928" y="4553712"/>
+            <a:ext cx="11057839" cy="1325880"/>
+          </a:xfrm>
+          <a:prstGeom prst="roundRect">
+            <a:avLst>
+              <a:gd name="adj" fmla="val 6207"/>
+            </a:avLst>
+          </a:prstGeom>
+          <a:solidFill>
+            <a:srgbClr val="0E3A5F"/>
+          </a:solidFill>
+          <a:ln/>
+          <a:effectLst>
+            <a:outerShdw sx="100000" sy="100000" kx="0" ky="0" algn="bl" rotWithShape="0" blurRad="88900" dist="25400" dir="5400000">
+              <a:srgbClr val="22303C">
+                <a:alpha val="12000"/>
+              </a:srgbClr>
+            </a:outerShdw>
+          </a:effectLst>
+        </p:spPr>
       </p:sp>
       <p:sp>
         <p:nvSpPr>
           <p:cNvPr id="8" name="Text 6"/>
+          <p:cNvSpPr/>
+          <p:nvPr/>
+        </p:nvSpPr>
+        <p:spPr>
+          <a:xfrm>
+            <a:off x="822960" y="4681728"/>
+            <a:ext cx="640080" cy="960120"/>
+          </a:xfrm>
+          <a:prstGeom prst="rect">
+            <a:avLst/>
+          </a:prstGeom>
+          <a:noFill/>
+          <a:ln/>
+        </p:spPr>
+        <p:txBody>
+          <a:bodyPr wrap="square" lIns="0" tIns="0" rIns="0" bIns="0" rtlCol="0" anchor="ctr"/>
+          <a:lstStyle/>
+          <a:p>
+            <a:pPr algn="ctr" indent="0" marL="0">
+              <a:buNone/>
+            </a:pPr>
+            <a:r>
+              <a:rPr lang="en-US" sz="4000" b="1" dirty="0">
+                <a:solidFill>
+                  <a:srgbClr val="1565C0"/>
+                </a:solidFill>
+                <a:latin typeface="Calibri" pitchFamily="34" charset="0"/>
+                <a:ea typeface="Calibri" pitchFamily="34" charset="-122"/>
+                <a:cs typeface="Calibri" pitchFamily="34" charset="-120"/>
+              </a:rPr>
+              <a:t>?</a:t>
+            </a:r>
+            <a:endParaRPr lang="en-US" sz="4000" dirty="0"/>
+          </a:p>
+        </p:txBody>
+      </p:sp>
+      <p:sp>
+        <p:nvSpPr>
+          <p:cNvPr id="9" name="Text 7"/>
+          <p:cNvSpPr/>
+          <p:nvPr/>
+        </p:nvSpPr>
+        <p:spPr>
+          <a:xfrm>
+            <a:off x="1618488" y="4553712"/>
+            <a:ext cx="9686239" cy="1325880"/>
+          </a:xfrm>
+          <a:prstGeom prst="rect">
+            <a:avLst/>
+          </a:prstGeom>
+          <a:noFill/>
+          <a:ln/>
+        </p:spPr>
+        <p:txBody>
+          <a:bodyPr wrap="square" lIns="0" tIns="0" rIns="0" bIns="0" rtlCol="0" anchor="ctr"/>
+          <a:lstStyle/>
+          <a:p>
+            <a:pPr algn="l" indent="0" marL="0">
+              <a:buNone/>
+            </a:pPr>
+            <a:r>
+              <a:rPr lang="en-US" sz="1500" b="1" dirty="0">
+                <a:solidFill>
+                  <a:srgbClr val="FFFFFF"/>
+                </a:solidFill>
+                <a:latin typeface="Calibri" pitchFamily="34" charset="0"/>
+                <a:ea typeface="Calibri" pitchFamily="34" charset="-122"/>
+                <a:cs typeface="Calibri" pitchFamily="34" charset="-120"/>
+              </a:rPr>
+              <a:t>What interference is most likely, and how was it confirmed?</a:t>
+            </a:r>
+            <a:endParaRPr lang="en-US" sz="1500" dirty="0"/>
+          </a:p>
+        </p:txBody>
+      </p:sp>
+      <p:sp>
+        <p:nvSpPr>
+          <p:cNvPr id="10" name="Text 8"/>
           <p:cNvSpPr/>
           <p:nvPr/>
         </p:nvSpPr>
@@ -8065,7 +8286,7 @@
       </p:sp>
       <p:sp>
         <p:nvSpPr>
-          <p:cNvPr id="9" name="Text 7"/>
+          <p:cNvPr id="11" name="Text 9"/>
           <p:cNvSpPr/>
           <p:nvPr/>
         </p:nvSpPr>
@@ -8195,7 +8416,7 @@
                 <a:ea typeface="Calibri" pitchFamily="34" charset="-122"/>
                 <a:cs typeface="Calibri" pitchFamily="34" charset="-120"/>
               </a:rPr>
-              <a:t>CLINICAL CHEMISTRY   ·   CASE 3</a:t>
+              <a:t>CLINICAL CHEMISTRY   ·   CASE 2  ·  RESOLUTION</a:t>
             </a:r>
             <a:endParaRPr lang="en-US" sz="1100" dirty="0"/>
           </a:p>
@@ -8234,7 +8455,7 @@
                 <a:ea typeface="Calibri" pitchFamily="34" charset="-122"/>
                 <a:cs typeface="Calibri" pitchFamily="34" charset="-120"/>
               </a:rPr>
-              <a:t>Case 3</a:t>
+              <a:t>Case 2: Heterophile-Antibody Interference</a:t>
             </a:r>
             <a:endParaRPr lang="en-US" sz="3000" dirty="0"/>
           </a:p>
@@ -8242,18 +8463,124 @@
       </p:sp>
       <p:sp>
         <p:nvSpPr>
-          <p:cNvPr id="4" name="Shape 2"/>
-          <p:cNvSpPr/>
-          <p:nvPr/>
-        </p:nvSpPr>
-        <p:spPr>
-          <a:xfrm>
-            <a:off x="566928" y="1517904"/>
-            <a:ext cx="11057839" cy="2788920"/>
+          <p:cNvPr id="4" name="Text 2"/>
+          <p:cNvSpPr/>
+          <p:nvPr/>
+        </p:nvSpPr>
+        <p:spPr>
+          <a:xfrm>
+            <a:off x="566928" y="1554480"/>
+            <a:ext cx="6413547" cy="4023360"/>
+          </a:xfrm>
+          <a:prstGeom prst="rect">
+            <a:avLst/>
+          </a:prstGeom>
+          <a:noFill/>
+          <a:ln/>
+        </p:spPr>
+        <p:txBody>
+          <a:bodyPr wrap="square" lIns="0" tIns="0" rIns="0" bIns="0" rtlCol="0" anchor="t"/>
+          <a:lstStyle/>
+          <a:p>
+            <a:pPr algn="l" marL="177800" indent="-177800">
+              <a:spcAft>
+                <a:spcPts val="900"/>
+              </a:spcAft>
+              <a:buSzPct val="100000"/>
+              <a:buChar char="•"/>
+            </a:pPr>
+            <a:r>
+              <a:rPr lang="en-US" sz="1400" b="1" dirty="0">
+                <a:solidFill>
+                  <a:srgbClr val="1B2A38"/>
+                </a:solidFill>
+                <a:latin typeface="Calibri" pitchFamily="34" charset="0"/>
+                <a:ea typeface="Calibri" pitchFamily="34" charset="-122"/>
+                <a:cs typeface="Calibri" pitchFamily="34" charset="-120"/>
+              </a:rPr>
+              <a:t>Heterophile antibodies bridged the assay antibodies, producing a false-positive hCG.</a:t>
+            </a:r>
+            <a:endParaRPr lang="en-US" sz="1400" dirty="0"/>
+          </a:p>
+          <a:p>
+            <a:pPr algn="l" marL="177800" indent="-177800">
+              <a:spcAft>
+                <a:spcPts val="900"/>
+              </a:spcAft>
+              <a:buSzPct val="100000"/>
+              <a:buChar char="•"/>
+            </a:pPr>
+            <a:r>
+              <a:rPr lang="en-US" sz="1400" dirty="0">
+                <a:solidFill>
+                  <a:srgbClr val="33444F"/>
+                </a:solidFill>
+                <a:latin typeface="Calibri" pitchFamily="34" charset="0"/>
+                <a:ea typeface="Calibri" pitchFamily="34" charset="-122"/>
+                <a:cs typeface="Calibri" pitchFamily="34" charset="-120"/>
+              </a:rPr>
+              <a:t>Non-linearity on dilution is a classic clue.</a:t>
+            </a:r>
+            <a:endParaRPr lang="en-US" sz="1400" dirty="0"/>
+          </a:p>
+          <a:p>
+            <a:pPr algn="l" marL="177800" indent="-177800">
+              <a:spcAft>
+                <a:spcPts val="900"/>
+              </a:spcAft>
+              <a:buSzPct val="100000"/>
+              <a:buChar char="•"/>
+            </a:pPr>
+            <a:r>
+              <a:rPr lang="en-US" sz="1400" dirty="0">
+                <a:solidFill>
+                  <a:srgbClr val="33444F"/>
+                </a:solidFill>
+                <a:latin typeface="Calibri" pitchFamily="34" charset="0"/>
+                <a:ea typeface="Calibri" pitchFamily="34" charset="-122"/>
+                <a:cs typeface="Calibri" pitchFamily="34" charset="-120"/>
+              </a:rPr>
+              <a:t>Confirmation: a normal result on an alternative platform and/or heterophile-blocking tubes.</a:t>
+            </a:r>
+            <a:endParaRPr lang="en-US" sz="1400" dirty="0"/>
+          </a:p>
+          <a:p>
+            <a:pPr algn="l" marL="177800" indent="-177800">
+              <a:spcAft>
+                <a:spcPts val="900"/>
+              </a:spcAft>
+              <a:buSzPct val="100000"/>
+              <a:buChar char="•"/>
+            </a:pPr>
+            <a:r>
+              <a:rPr lang="en-US" sz="1400" dirty="0">
+                <a:solidFill>
+                  <a:srgbClr val="33444F"/>
+                </a:solidFill>
+                <a:latin typeface="Calibri" pitchFamily="34" charset="0"/>
+                <a:ea typeface="Calibri" pitchFamily="34" charset="-122"/>
+                <a:cs typeface="Calibri" pitchFamily="34" charset="-120"/>
+              </a:rPr>
+              <a:t>Recognizing this prevents harmful workups for a non-existent condition.</a:t>
+            </a:r>
+            <a:endParaRPr lang="en-US" sz="1400" dirty="0"/>
+          </a:p>
+        </p:txBody>
+      </p:sp>
+      <p:sp>
+        <p:nvSpPr>
+          <p:cNvPr id="5" name="Shape 3"/>
+          <p:cNvSpPr/>
+          <p:nvPr/>
+        </p:nvSpPr>
+        <p:spPr>
+          <a:xfrm>
+            <a:off x="7422788" y="1554480"/>
+            <a:ext cx="4201979" cy="3977640"/>
           </a:xfrm>
           <a:prstGeom prst="roundRect">
             <a:avLst>
-              <a:gd name="adj" fmla="val 2951"/>
+              <a:gd name="adj" fmla="val 2069"/>
             </a:avLst>
           </a:prstGeom>
           <a:solidFill>
@@ -8271,14 +8598,14 @@
       </p:sp>
       <p:sp>
         <p:nvSpPr>
-          <p:cNvPr id="5" name="Text 3"/>
-          <p:cNvSpPr/>
-          <p:nvPr/>
-        </p:nvSpPr>
-        <p:spPr>
-          <a:xfrm>
-            <a:off x="841248" y="1700784"/>
-            <a:ext cx="5486400" cy="292608"/>
+          <p:cNvPr id="6" name="Text 4"/>
+          <p:cNvSpPr/>
+          <p:nvPr/>
+        </p:nvSpPr>
+        <p:spPr>
+          <a:xfrm>
+            <a:off x="7660532" y="1755648"/>
+            <a:ext cx="3744779" cy="310896"/>
           </a:xfrm>
           <a:prstGeom prst="rect">
             <a:avLst/>
@@ -8294,7 +8621,7 @@
               <a:buNone/>
             </a:pPr>
             <a:r>
-              <a:rPr lang="en-US" sz="1100" b="1" spc="150" kern="0" dirty="0">
+              <a:rPr lang="en-US" sz="1100" b="1" spc="140" kern="0" dirty="0">
                 <a:solidFill>
                   <a:srgbClr val="1565C0"/>
                 </a:solidFill>
@@ -8302,7 +8629,7 @@
                 <a:ea typeface="Calibri" pitchFamily="34" charset="-122"/>
                 <a:cs typeface="Calibri" pitchFamily="34" charset="-120"/>
               </a:rPr>
-              <a:t>CLINICAL VIGNETTE</a:t>
+              <a:t>TEACHING POINT</a:t>
             </a:r>
             <a:endParaRPr lang="en-US" sz="1100" dirty="0"/>
           </a:p>
@@ -8310,14 +8637,14 @@
       </p:sp>
       <p:sp>
         <p:nvSpPr>
-          <p:cNvPr id="6" name="Text 4"/>
-          <p:cNvSpPr/>
-          <p:nvPr/>
-        </p:nvSpPr>
-        <p:spPr>
-          <a:xfrm>
-            <a:off x="841248" y="2029968"/>
-            <a:ext cx="10509199" cy="2148840"/>
+          <p:cNvPr id="7" name="Text 5"/>
+          <p:cNvSpPr/>
+          <p:nvPr/>
+        </p:nvSpPr>
+        <p:spPr>
+          <a:xfrm>
+            <a:off x="7660532" y="2121408"/>
+            <a:ext cx="3726491" cy="3291840"/>
           </a:xfrm>
           <a:prstGeom prst="rect">
             <a:avLst/>
@@ -8331,12 +8658,12 @@
           <a:p>
             <a:pPr algn="l" indent="0" marL="0">
               <a:lnSpc>
-                <a:spcPct val="108000"/>
+                <a:spcPct val="110000"/>
               </a:lnSpc>
               <a:buNone/>
             </a:pPr>
             <a:r>
-              <a:rPr lang="en-US" sz="1450" dirty="0">
+              <a:rPr lang="en-US" sz="1350" dirty="0">
                 <a:solidFill>
                   <a:srgbClr val="33444F"/>
                 </a:solidFill>
@@ -8344,122 +8671,15 @@
                 <a:ea typeface="Calibri" pitchFamily="34" charset="-122"/>
                 <a:cs typeface="Calibri" pitchFamily="34" charset="-120"/>
               </a:rPr>
-              <a:t>A patient on high-dose biotin supplements has a suppressed TSH with a high free T4, suggesting hyperthyroidism, but is clinically euthyroid. Repeat testing after stopping biotin is normal.</a:t>
-            </a:r>
-            <a:endParaRPr lang="en-US" sz="1450" dirty="0"/>
-          </a:p>
-        </p:txBody>
-      </p:sp>
-      <p:sp>
-        <p:nvSpPr>
-          <p:cNvPr id="7" name="Shape 5"/>
-          <p:cNvSpPr/>
-          <p:nvPr/>
-        </p:nvSpPr>
-        <p:spPr>
-          <a:xfrm>
-            <a:off x="566928" y="4553712"/>
-            <a:ext cx="11057839" cy="1325880"/>
-          </a:xfrm>
-          <a:prstGeom prst="roundRect">
-            <a:avLst>
-              <a:gd name="adj" fmla="val 6207"/>
-            </a:avLst>
-          </a:prstGeom>
-          <a:solidFill>
-            <a:srgbClr val="0E3A5F"/>
-          </a:solidFill>
-          <a:ln/>
-          <a:effectLst>
-            <a:outerShdw sx="100000" sy="100000" kx="0" ky="0" algn="bl" rotWithShape="0" blurRad="88900" dist="25400" dir="5400000">
-              <a:srgbClr val="22303C">
-                <a:alpha val="12000"/>
-              </a:srgbClr>
-            </a:outerShdw>
-          </a:effectLst>
-        </p:spPr>
+              <a:t>When an immunoassay defies the clinical picture, think interference: dilute, block, or switch platforms before acting.</a:t>
+            </a:r>
+            <a:endParaRPr lang="en-US" sz="1350" dirty="0"/>
+          </a:p>
+        </p:txBody>
       </p:sp>
       <p:sp>
         <p:nvSpPr>
           <p:cNvPr id="8" name="Text 6"/>
-          <p:cNvSpPr/>
-          <p:nvPr/>
-        </p:nvSpPr>
-        <p:spPr>
-          <a:xfrm>
-            <a:off x="822960" y="4681728"/>
-            <a:ext cx="640080" cy="960120"/>
-          </a:xfrm>
-          <a:prstGeom prst="rect">
-            <a:avLst/>
-          </a:prstGeom>
-          <a:noFill/>
-          <a:ln/>
-        </p:spPr>
-        <p:txBody>
-          <a:bodyPr wrap="square" lIns="0" tIns="0" rIns="0" bIns="0" rtlCol="0" anchor="ctr"/>
-          <a:lstStyle/>
-          <a:p>
-            <a:pPr algn="ctr" indent="0" marL="0">
-              <a:buNone/>
-            </a:pPr>
-            <a:r>
-              <a:rPr lang="en-US" sz="4000" b="1" dirty="0">
-                <a:solidFill>
-                  <a:srgbClr val="1565C0"/>
-                </a:solidFill>
-                <a:latin typeface="Calibri" pitchFamily="34" charset="0"/>
-                <a:ea typeface="Calibri" pitchFamily="34" charset="-122"/>
-                <a:cs typeface="Calibri" pitchFamily="34" charset="-120"/>
-              </a:rPr>
-              <a:t>?</a:t>
-            </a:r>
-            <a:endParaRPr lang="en-US" sz="4000" dirty="0"/>
-          </a:p>
-        </p:txBody>
-      </p:sp>
-      <p:sp>
-        <p:nvSpPr>
-          <p:cNvPr id="9" name="Text 7"/>
-          <p:cNvSpPr/>
-          <p:nvPr/>
-        </p:nvSpPr>
-        <p:spPr>
-          <a:xfrm>
-            <a:off x="1618488" y="4553712"/>
-            <a:ext cx="9686239" cy="1325880"/>
-          </a:xfrm>
-          <a:prstGeom prst="rect">
-            <a:avLst/>
-          </a:prstGeom>
-          <a:noFill/>
-          <a:ln/>
-        </p:spPr>
-        <p:txBody>
-          <a:bodyPr wrap="square" lIns="0" tIns="0" rIns="0" bIns="0" rtlCol="0" anchor="ctr"/>
-          <a:lstStyle/>
-          <a:p>
-            <a:pPr algn="l" indent="0" marL="0">
-              <a:buNone/>
-            </a:pPr>
-            <a:r>
-              <a:rPr lang="en-US" sz="1500" b="1" dirty="0">
-                <a:solidFill>
-                  <a:srgbClr val="FFFFFF"/>
-                </a:solidFill>
-                <a:latin typeface="Calibri" pitchFamily="34" charset="0"/>
-                <a:ea typeface="Calibri" pitchFamily="34" charset="-122"/>
-                <a:cs typeface="Calibri" pitchFamily="34" charset="-120"/>
-              </a:rPr>
-              <a:t>What caused the pattern, and what advice prevents it?</a:t>
-            </a:r>
-            <a:endParaRPr lang="en-US" sz="1500" dirty="0"/>
-          </a:p>
-        </p:txBody>
-      </p:sp>
-      <p:sp>
-        <p:nvSpPr>
-          <p:cNvPr id="10" name="Text 8"/>
           <p:cNvSpPr/>
           <p:nvPr/>
         </p:nvSpPr>
@@ -8498,7 +8718,7 @@
       </p:sp>
       <p:sp>
         <p:nvSpPr>
-          <p:cNvPr id="11" name="Text 9"/>
+          <p:cNvPr id="9" name="Text 7"/>
           <p:cNvSpPr/>
           <p:nvPr/>
         </p:nvSpPr>
@@ -9279,7 +9499,7 @@
                 <a:ea typeface="Calibri" pitchFamily="34" charset="-122"/>
                 <a:cs typeface="Calibri" pitchFamily="34" charset="-120"/>
               </a:rPr>
-              <a:t>CLINICAL CHEMISTRY   ·   CASE 3  ·  RESOLUTION</a:t>
+              <a:t>CLINICAL CHEMISTRY   ·   CASE 3</a:t>
             </a:r>
             <a:endParaRPr lang="en-US" sz="1100" dirty="0"/>
           </a:p>
@@ -9318,7 +9538,7 @@
                 <a:ea typeface="Calibri" pitchFamily="34" charset="-122"/>
                 <a:cs typeface="Calibri" pitchFamily="34" charset="-120"/>
               </a:rPr>
-              <a:t>Case 3: Biotin Interference</a:t>
+              <a:t>Case 3</a:t>
             </a:r>
             <a:endParaRPr lang="en-US" sz="3000" dirty="0"/>
           </a:p>
@@ -9326,124 +9546,18 @@
       </p:sp>
       <p:sp>
         <p:nvSpPr>
-          <p:cNvPr id="4" name="Text 2"/>
-          <p:cNvSpPr/>
-          <p:nvPr/>
-        </p:nvSpPr>
-        <p:spPr>
-          <a:xfrm>
-            <a:off x="566928" y="1554480"/>
-            <a:ext cx="6413547" cy="4023360"/>
-          </a:xfrm>
-          <a:prstGeom prst="rect">
-            <a:avLst/>
-          </a:prstGeom>
-          <a:noFill/>
-          <a:ln/>
-        </p:spPr>
-        <p:txBody>
-          <a:bodyPr wrap="square" lIns="0" tIns="0" rIns="0" bIns="0" rtlCol="0" anchor="t"/>
-          <a:lstStyle/>
-          <a:p>
-            <a:pPr algn="l" marL="177800" indent="-177800">
-              <a:spcAft>
-                <a:spcPts val="900"/>
-              </a:spcAft>
-              <a:buSzPct val="100000"/>
-              <a:buChar char="•"/>
-            </a:pPr>
-            <a:r>
-              <a:rPr lang="en-US" sz="1400" b="1" dirty="0">
-                <a:solidFill>
-                  <a:srgbClr val="1B2A38"/>
-                </a:solidFill>
-                <a:latin typeface="Calibri" pitchFamily="34" charset="0"/>
-                <a:ea typeface="Calibri" pitchFamily="34" charset="-122"/>
-                <a:cs typeface="Calibri" pitchFamily="34" charset="-120"/>
-              </a:rPr>
-              <a:t>High-dose biotin interferes with streptavidin-biotin immunoassays, mimicking hyperthyroidism (low TSH, high free T4).</a:t>
-            </a:r>
-            <a:endParaRPr lang="en-US" sz="1400" dirty="0"/>
-          </a:p>
-          <a:p>
-            <a:pPr algn="l" marL="177800" indent="-177800">
-              <a:spcAft>
-                <a:spcPts val="900"/>
-              </a:spcAft>
-              <a:buSzPct val="100000"/>
-              <a:buChar char="•"/>
-            </a:pPr>
-            <a:r>
-              <a:rPr lang="en-US" sz="1400" dirty="0">
-                <a:solidFill>
-                  <a:srgbClr val="33444F"/>
-                </a:solidFill>
-                <a:latin typeface="Calibri" pitchFamily="34" charset="0"/>
-                <a:ea typeface="Calibri" pitchFamily="34" charset="-122"/>
-                <a:cs typeface="Calibri" pitchFamily="34" charset="-120"/>
-              </a:rPr>
-              <a:t>The direction depends on assay design (sandwich vs competitive).</a:t>
-            </a:r>
-            <a:endParaRPr lang="en-US" sz="1400" dirty="0"/>
-          </a:p>
-          <a:p>
-            <a:pPr algn="l" marL="177800" indent="-177800">
-              <a:spcAft>
-                <a:spcPts val="900"/>
-              </a:spcAft>
-              <a:buSzPct val="100000"/>
-              <a:buChar char="•"/>
-            </a:pPr>
-            <a:r>
-              <a:rPr lang="en-US" sz="1400" dirty="0">
-                <a:solidFill>
-                  <a:srgbClr val="33444F"/>
-                </a:solidFill>
-                <a:latin typeface="Calibri" pitchFamily="34" charset="0"/>
-                <a:ea typeface="Calibri" pitchFamily="34" charset="-122"/>
-                <a:cs typeface="Calibri" pitchFamily="34" charset="-120"/>
-              </a:rPr>
-              <a:t>Advise holding biotin (often ~48–72 h) before testing.</a:t>
-            </a:r>
-            <a:endParaRPr lang="en-US" sz="1400" dirty="0"/>
-          </a:p>
-          <a:p>
-            <a:pPr algn="l" marL="177800" indent="-177800">
-              <a:spcAft>
-                <a:spcPts val="900"/>
-              </a:spcAft>
-              <a:buSzPct val="100000"/>
-              <a:buChar char="•"/>
-            </a:pPr>
-            <a:r>
-              <a:rPr lang="en-US" sz="1400" dirty="0">
-                <a:solidFill>
-                  <a:srgbClr val="33444F"/>
-                </a:solidFill>
-                <a:latin typeface="Calibri" pitchFamily="34" charset="0"/>
-                <a:ea typeface="Calibri" pitchFamily="34" charset="-122"/>
-                <a:cs typeface="Calibri" pitchFamily="34" charset="-120"/>
-              </a:rPr>
-              <a:t>Reconcile thyroid results with the clinical state before acting.</a:t>
-            </a:r>
-            <a:endParaRPr lang="en-US" sz="1400" dirty="0"/>
-          </a:p>
-        </p:txBody>
-      </p:sp>
-      <p:sp>
-        <p:nvSpPr>
-          <p:cNvPr id="5" name="Shape 3"/>
-          <p:cNvSpPr/>
-          <p:nvPr/>
-        </p:nvSpPr>
-        <p:spPr>
-          <a:xfrm>
-            <a:off x="7422788" y="1554480"/>
-            <a:ext cx="4201979" cy="3977640"/>
+          <p:cNvPr id="4" name="Shape 2"/>
+          <p:cNvSpPr/>
+          <p:nvPr/>
+        </p:nvSpPr>
+        <p:spPr>
+          <a:xfrm>
+            <a:off x="566928" y="1517904"/>
+            <a:ext cx="11057839" cy="2788920"/>
           </a:xfrm>
           <a:prstGeom prst="roundRect">
             <a:avLst>
-              <a:gd name="adj" fmla="val 2069"/>
+              <a:gd name="adj" fmla="val 2951"/>
             </a:avLst>
           </a:prstGeom>
           <a:solidFill>
@@ -9461,53 +9575,53 @@
       </p:sp>
       <p:sp>
         <p:nvSpPr>
+          <p:cNvPr id="5" name="Text 3"/>
+          <p:cNvSpPr/>
+          <p:nvPr/>
+        </p:nvSpPr>
+        <p:spPr>
+          <a:xfrm>
+            <a:off x="841248" y="1700784"/>
+            <a:ext cx="5486400" cy="292608"/>
+          </a:xfrm>
+          <a:prstGeom prst="rect">
+            <a:avLst/>
+          </a:prstGeom>
+          <a:noFill/>
+          <a:ln/>
+        </p:spPr>
+        <p:txBody>
+          <a:bodyPr wrap="square" lIns="0" tIns="0" rIns="0" bIns="0" rtlCol="0" anchor="ctr"/>
+          <a:lstStyle/>
+          <a:p>
+            <a:pPr indent="0" marL="0">
+              <a:buNone/>
+            </a:pPr>
+            <a:r>
+              <a:rPr lang="en-US" sz="1100" b="1" spc="150" kern="0" dirty="0">
+                <a:solidFill>
+                  <a:srgbClr val="1565C0"/>
+                </a:solidFill>
+                <a:latin typeface="Calibri" pitchFamily="34" charset="0"/>
+                <a:ea typeface="Calibri" pitchFamily="34" charset="-122"/>
+                <a:cs typeface="Calibri" pitchFamily="34" charset="-120"/>
+              </a:rPr>
+              <a:t>CLINICAL VIGNETTE</a:t>
+            </a:r>
+            <a:endParaRPr lang="en-US" sz="1100" dirty="0"/>
+          </a:p>
+        </p:txBody>
+      </p:sp>
+      <p:sp>
+        <p:nvSpPr>
           <p:cNvPr id="6" name="Text 4"/>
           <p:cNvSpPr/>
           <p:nvPr/>
         </p:nvSpPr>
         <p:spPr>
           <a:xfrm>
-            <a:off x="7660532" y="1755648"/>
-            <a:ext cx="3744779" cy="310896"/>
-          </a:xfrm>
-          <a:prstGeom prst="rect">
-            <a:avLst/>
-          </a:prstGeom>
-          <a:noFill/>
-          <a:ln/>
-        </p:spPr>
-        <p:txBody>
-          <a:bodyPr wrap="square" lIns="0" tIns="0" rIns="0" bIns="0" rtlCol="0" anchor="ctr"/>
-          <a:lstStyle/>
-          <a:p>
-            <a:pPr indent="0" marL="0">
-              <a:buNone/>
-            </a:pPr>
-            <a:r>
-              <a:rPr lang="en-US" sz="1100" b="1" spc="140" kern="0" dirty="0">
-                <a:solidFill>
-                  <a:srgbClr val="1565C0"/>
-                </a:solidFill>
-                <a:latin typeface="Calibri" pitchFamily="34" charset="0"/>
-                <a:ea typeface="Calibri" pitchFamily="34" charset="-122"/>
-                <a:cs typeface="Calibri" pitchFamily="34" charset="-120"/>
-              </a:rPr>
-              <a:t>TEACHING POINT</a:t>
-            </a:r>
-            <a:endParaRPr lang="en-US" sz="1100" dirty="0"/>
-          </a:p>
-        </p:txBody>
-      </p:sp>
-      <p:sp>
-        <p:nvSpPr>
-          <p:cNvPr id="7" name="Text 5"/>
-          <p:cNvSpPr/>
-          <p:nvPr/>
-        </p:nvSpPr>
-        <p:spPr>
-          <a:xfrm>
-            <a:off x="7660532" y="2121408"/>
-            <a:ext cx="3726491" cy="3291840"/>
+            <a:off x="841248" y="2029968"/>
+            <a:ext cx="10509199" cy="2148840"/>
           </a:xfrm>
           <a:prstGeom prst="rect">
             <a:avLst/>
@@ -9521,12 +9635,12 @@
           <a:p>
             <a:pPr algn="l" indent="0" marL="0">
               <a:lnSpc>
-                <a:spcPct val="110000"/>
+                <a:spcPct val="108000"/>
               </a:lnSpc>
               <a:buNone/>
             </a:pPr>
             <a:r>
-              <a:rPr lang="en-US" sz="1350" dirty="0">
+              <a:rPr lang="en-US" sz="1450" dirty="0">
                 <a:solidFill>
                   <a:srgbClr val="33444F"/>
                 </a:solidFill>
@@ -9534,15 +9648,122 @@
                 <a:ea typeface="Calibri" pitchFamily="34" charset="-122"/>
                 <a:cs typeface="Calibri" pitchFamily="34" charset="-120"/>
               </a:rPr>
-              <a:t>Ask about biotin supplements when thyroid (or troponin) results don’t fit — a simple history prevents a misdiagnosis.</a:t>
-            </a:r>
-            <a:endParaRPr lang="en-US" sz="1350" dirty="0"/>
-          </a:p>
-        </p:txBody>
+              <a:t>A patient on high-dose biotin has a suppressed TSH with a high free T4 suggesting hyperthyroidism, but is clinically euthyroid. Testing after stopping biotin is normal.</a:t>
+            </a:r>
+            <a:endParaRPr lang="en-US" sz="1450" dirty="0"/>
+          </a:p>
+        </p:txBody>
+      </p:sp>
+      <p:sp>
+        <p:nvSpPr>
+          <p:cNvPr id="7" name="Shape 5"/>
+          <p:cNvSpPr/>
+          <p:nvPr/>
+        </p:nvSpPr>
+        <p:spPr>
+          <a:xfrm>
+            <a:off x="566928" y="4553712"/>
+            <a:ext cx="11057839" cy="1325880"/>
+          </a:xfrm>
+          <a:prstGeom prst="roundRect">
+            <a:avLst>
+              <a:gd name="adj" fmla="val 6207"/>
+            </a:avLst>
+          </a:prstGeom>
+          <a:solidFill>
+            <a:srgbClr val="0E3A5F"/>
+          </a:solidFill>
+          <a:ln/>
+          <a:effectLst>
+            <a:outerShdw sx="100000" sy="100000" kx="0" ky="0" algn="bl" rotWithShape="0" blurRad="88900" dist="25400" dir="5400000">
+              <a:srgbClr val="22303C">
+                <a:alpha val="12000"/>
+              </a:srgbClr>
+            </a:outerShdw>
+          </a:effectLst>
+        </p:spPr>
       </p:sp>
       <p:sp>
         <p:nvSpPr>
           <p:cNvPr id="8" name="Text 6"/>
+          <p:cNvSpPr/>
+          <p:nvPr/>
+        </p:nvSpPr>
+        <p:spPr>
+          <a:xfrm>
+            <a:off x="822960" y="4681728"/>
+            <a:ext cx="640080" cy="960120"/>
+          </a:xfrm>
+          <a:prstGeom prst="rect">
+            <a:avLst/>
+          </a:prstGeom>
+          <a:noFill/>
+          <a:ln/>
+        </p:spPr>
+        <p:txBody>
+          <a:bodyPr wrap="square" lIns="0" tIns="0" rIns="0" bIns="0" rtlCol="0" anchor="ctr"/>
+          <a:lstStyle/>
+          <a:p>
+            <a:pPr algn="ctr" indent="0" marL="0">
+              <a:buNone/>
+            </a:pPr>
+            <a:r>
+              <a:rPr lang="en-US" sz="4000" b="1" dirty="0">
+                <a:solidFill>
+                  <a:srgbClr val="1565C0"/>
+                </a:solidFill>
+                <a:latin typeface="Calibri" pitchFamily="34" charset="0"/>
+                <a:ea typeface="Calibri" pitchFamily="34" charset="-122"/>
+                <a:cs typeface="Calibri" pitchFamily="34" charset="-120"/>
+              </a:rPr>
+              <a:t>?</a:t>
+            </a:r>
+            <a:endParaRPr lang="en-US" sz="4000" dirty="0"/>
+          </a:p>
+        </p:txBody>
+      </p:sp>
+      <p:sp>
+        <p:nvSpPr>
+          <p:cNvPr id="9" name="Text 7"/>
+          <p:cNvSpPr/>
+          <p:nvPr/>
+        </p:nvSpPr>
+        <p:spPr>
+          <a:xfrm>
+            <a:off x="1618488" y="4553712"/>
+            <a:ext cx="9686239" cy="1325880"/>
+          </a:xfrm>
+          <a:prstGeom prst="rect">
+            <a:avLst/>
+          </a:prstGeom>
+          <a:noFill/>
+          <a:ln/>
+        </p:spPr>
+        <p:txBody>
+          <a:bodyPr wrap="square" lIns="0" tIns="0" rIns="0" bIns="0" rtlCol="0" anchor="ctr"/>
+          <a:lstStyle/>
+          <a:p>
+            <a:pPr algn="l" indent="0" marL="0">
+              <a:buNone/>
+            </a:pPr>
+            <a:r>
+              <a:rPr lang="en-US" sz="1500" b="1" dirty="0">
+                <a:solidFill>
+                  <a:srgbClr val="FFFFFF"/>
+                </a:solidFill>
+                <a:latin typeface="Calibri" pitchFamily="34" charset="0"/>
+                <a:ea typeface="Calibri" pitchFamily="34" charset="-122"/>
+                <a:cs typeface="Calibri" pitchFamily="34" charset="-120"/>
+              </a:rPr>
+              <a:t>What caused the pattern, and what advice prevents it?</a:t>
+            </a:r>
+            <a:endParaRPr lang="en-US" sz="1500" dirty="0"/>
+          </a:p>
+        </p:txBody>
+      </p:sp>
+      <p:sp>
+        <p:nvSpPr>
+          <p:cNvPr id="10" name="Text 8"/>
           <p:cNvSpPr/>
           <p:nvPr/>
         </p:nvSpPr>
@@ -9581,7 +9802,7 @@
       </p:sp>
       <p:sp>
         <p:nvSpPr>
-          <p:cNvPr id="9" name="Text 7"/>
+          <p:cNvPr id="11" name="Text 9"/>
           <p:cNvSpPr/>
           <p:nvPr/>
         </p:nvSpPr>
@@ -9660,7 +9881,7 @@
     <p:bg>
       <p:bgPr>
         <a:solidFill>
-          <a:srgbClr val="0D4A92"/>
+          <a:srgbClr val="FFFFFF"/>
         </a:solidFill>
       </p:bgPr>
     </p:bg>
@@ -9680,58 +9901,227 @@
       </p:grpSpPr>
       <p:sp>
         <p:nvSpPr>
-          <p:cNvPr id="2" name="Shape 0"/>
-          <p:cNvSpPr/>
-          <p:nvPr/>
-        </p:nvSpPr>
-        <p:spPr>
-          <a:xfrm>
-            <a:off x="9509760" y="-1280160"/>
-            <a:ext cx="4754880" cy="4754880"/>
-          </a:xfrm>
-          <a:prstGeom prst="ellipse">
-            <a:avLst/>
+          <p:cNvPr id="2" name="Text 0"/>
+          <p:cNvSpPr/>
+          <p:nvPr/>
+        </p:nvSpPr>
+        <p:spPr>
+          <a:xfrm>
+            <a:off x="566928" y="329184"/>
+            <a:ext cx="10515600" cy="310896"/>
+          </a:xfrm>
+          <a:prstGeom prst="rect">
+            <a:avLst/>
+          </a:prstGeom>
+          <a:noFill/>
+          <a:ln/>
+        </p:spPr>
+        <p:txBody>
+          <a:bodyPr wrap="square" lIns="0" tIns="0" rIns="0" bIns="0" rtlCol="0" anchor="ctr"/>
+          <a:lstStyle/>
+          <a:p>
+            <a:pPr algn="l" indent="0" marL="0">
+              <a:buNone/>
+            </a:pPr>
+            <a:r>
+              <a:rPr lang="en-US" sz="1100" b="1" spc="150" kern="0" dirty="0">
+                <a:solidFill>
+                  <a:srgbClr val="1565C0"/>
+                </a:solidFill>
+                <a:latin typeface="Calibri" pitchFamily="34" charset="0"/>
+                <a:ea typeface="Calibri" pitchFamily="34" charset="-122"/>
+                <a:cs typeface="Calibri" pitchFamily="34" charset="-120"/>
+              </a:rPr>
+              <a:t>CLINICAL CHEMISTRY   ·   CASE 3  ·  RESOLUTION</a:t>
+            </a:r>
+            <a:endParaRPr lang="en-US" sz="1100" dirty="0"/>
+          </a:p>
+        </p:txBody>
+      </p:sp>
+      <p:sp>
+        <p:nvSpPr>
+          <p:cNvPr id="3" name="Text 1"/>
+          <p:cNvSpPr/>
+          <p:nvPr/>
+        </p:nvSpPr>
+        <p:spPr>
+          <a:xfrm>
+            <a:off x="566928" y="713232"/>
+            <a:ext cx="11064240" cy="749808"/>
+          </a:xfrm>
+          <a:prstGeom prst="rect">
+            <a:avLst/>
+          </a:prstGeom>
+          <a:noFill/>
+          <a:ln/>
+        </p:spPr>
+        <p:txBody>
+          <a:bodyPr wrap="square" lIns="0" tIns="0" rIns="0" bIns="0" rtlCol="0" anchor="ctr"/>
+          <a:lstStyle/>
+          <a:p>
+            <a:pPr algn="l" indent="0" marL="0">
+              <a:buNone/>
+            </a:pPr>
+            <a:r>
+              <a:rPr lang="en-US" sz="3000" b="1" dirty="0">
+                <a:solidFill>
+                  <a:srgbClr val="0E3A5F"/>
+                </a:solidFill>
+                <a:latin typeface="Calibri" pitchFamily="34" charset="0"/>
+                <a:ea typeface="Calibri" pitchFamily="34" charset="-122"/>
+                <a:cs typeface="Calibri" pitchFamily="34" charset="-120"/>
+              </a:rPr>
+              <a:t>Case 3: Biotin Interference</a:t>
+            </a:r>
+            <a:endParaRPr lang="en-US" sz="3000" dirty="0"/>
+          </a:p>
+        </p:txBody>
+      </p:sp>
+      <p:sp>
+        <p:nvSpPr>
+          <p:cNvPr id="4" name="Text 2"/>
+          <p:cNvSpPr/>
+          <p:nvPr/>
+        </p:nvSpPr>
+        <p:spPr>
+          <a:xfrm>
+            <a:off x="566928" y="1554480"/>
+            <a:ext cx="6413547" cy="4023360"/>
+          </a:xfrm>
+          <a:prstGeom prst="rect">
+            <a:avLst/>
+          </a:prstGeom>
+          <a:noFill/>
+          <a:ln/>
+        </p:spPr>
+        <p:txBody>
+          <a:bodyPr wrap="square" lIns="0" tIns="0" rIns="0" bIns="0" rtlCol="0" anchor="t"/>
+          <a:lstStyle/>
+          <a:p>
+            <a:pPr algn="l" marL="177800" indent="-177800">
+              <a:spcAft>
+                <a:spcPts val="900"/>
+              </a:spcAft>
+              <a:buSzPct val="100000"/>
+              <a:buChar char="•"/>
+            </a:pPr>
+            <a:r>
+              <a:rPr lang="en-US" sz="1400" b="1" dirty="0">
+                <a:solidFill>
+                  <a:srgbClr val="1B2A38"/>
+                </a:solidFill>
+                <a:latin typeface="Calibri" pitchFamily="34" charset="0"/>
+                <a:ea typeface="Calibri" pitchFamily="34" charset="-122"/>
+                <a:cs typeface="Calibri" pitchFamily="34" charset="-120"/>
+              </a:rPr>
+              <a:t>High-dose biotin interferes with streptavidin-biotin immunoassays, mimicking hyperthyroidism.</a:t>
+            </a:r>
+            <a:endParaRPr lang="en-US" sz="1400" dirty="0"/>
+          </a:p>
+          <a:p>
+            <a:pPr algn="l" marL="177800" indent="-177800">
+              <a:spcAft>
+                <a:spcPts val="900"/>
+              </a:spcAft>
+              <a:buSzPct val="100000"/>
+              <a:buChar char="•"/>
+            </a:pPr>
+            <a:r>
+              <a:rPr lang="en-US" sz="1400" dirty="0">
+                <a:solidFill>
+                  <a:srgbClr val="33444F"/>
+                </a:solidFill>
+                <a:latin typeface="Calibri" pitchFamily="34" charset="0"/>
+                <a:ea typeface="Calibri" pitchFamily="34" charset="-122"/>
+                <a:cs typeface="Calibri" pitchFamily="34" charset="-120"/>
+              </a:rPr>
+              <a:t>Direction depends on assay design (sandwich vs competitive).</a:t>
+            </a:r>
+            <a:endParaRPr lang="en-US" sz="1400" dirty="0"/>
+          </a:p>
+          <a:p>
+            <a:pPr algn="l" marL="177800" indent="-177800">
+              <a:spcAft>
+                <a:spcPts val="900"/>
+              </a:spcAft>
+              <a:buSzPct val="100000"/>
+              <a:buChar char="•"/>
+            </a:pPr>
+            <a:r>
+              <a:rPr lang="en-US" sz="1400" dirty="0">
+                <a:solidFill>
+                  <a:srgbClr val="33444F"/>
+                </a:solidFill>
+                <a:latin typeface="Calibri" pitchFamily="34" charset="0"/>
+                <a:ea typeface="Calibri" pitchFamily="34" charset="-122"/>
+                <a:cs typeface="Calibri" pitchFamily="34" charset="-120"/>
+              </a:rPr>
+              <a:t>Advise holding biotin (often 48–72 h) before testing.</a:t>
+            </a:r>
+            <a:endParaRPr lang="en-US" sz="1400" dirty="0"/>
+          </a:p>
+          <a:p>
+            <a:pPr algn="l" marL="177800" indent="-177800">
+              <a:spcAft>
+                <a:spcPts val="900"/>
+              </a:spcAft>
+              <a:buSzPct val="100000"/>
+              <a:buChar char="•"/>
+            </a:pPr>
+            <a:r>
+              <a:rPr lang="en-US" sz="1400" dirty="0">
+                <a:solidFill>
+                  <a:srgbClr val="33444F"/>
+                </a:solidFill>
+                <a:latin typeface="Calibri" pitchFamily="34" charset="0"/>
+                <a:ea typeface="Calibri" pitchFamily="34" charset="-122"/>
+                <a:cs typeface="Calibri" pitchFamily="34" charset="-120"/>
+              </a:rPr>
+              <a:t>Reconcile thyroid results with the clinical state before acting.</a:t>
+            </a:r>
+            <a:endParaRPr lang="en-US" sz="1400" dirty="0"/>
+          </a:p>
+        </p:txBody>
+      </p:sp>
+      <p:sp>
+        <p:nvSpPr>
+          <p:cNvPr id="5" name="Shape 3"/>
+          <p:cNvSpPr/>
+          <p:nvPr/>
+        </p:nvSpPr>
+        <p:spPr>
+          <a:xfrm>
+            <a:off x="7422788" y="1554480"/>
+            <a:ext cx="4201979" cy="3977640"/>
+          </a:xfrm>
+          <a:prstGeom prst="roundRect">
+            <a:avLst>
+              <a:gd name="adj" fmla="val 2069"/>
+            </a:avLst>
           </a:prstGeom>
           <a:solidFill>
-            <a:srgbClr val="FFFFFF">
-              <a:alpha val="8000"/>
-            </a:srgbClr>
+            <a:srgbClr val="E7EFFA"/>
           </a:solidFill>
           <a:ln/>
-        </p:spPr>
-      </p:sp>
-      <p:sp>
-        <p:nvSpPr>
-          <p:cNvPr id="3" name="Shape 1"/>
-          <p:cNvSpPr/>
-          <p:nvPr/>
-        </p:nvSpPr>
-        <p:spPr>
-          <a:xfrm>
-            <a:off x="10607040" y="3931920"/>
-            <a:ext cx="3108960" cy="3108960"/>
-          </a:xfrm>
-          <a:prstGeom prst="ellipse">
-            <a:avLst/>
-          </a:prstGeom>
-          <a:solidFill>
-            <a:srgbClr val="FFFFFF">
-              <a:alpha val="6000"/>
-            </a:srgbClr>
-          </a:solidFill>
-          <a:ln/>
-        </p:spPr>
-      </p:sp>
-      <p:sp>
-        <p:nvSpPr>
-          <p:cNvPr id="4" name="Text 2"/>
-          <p:cNvSpPr/>
-          <p:nvPr/>
-        </p:nvSpPr>
-        <p:spPr>
-          <a:xfrm>
-            <a:off x="566928" y="1783080"/>
-            <a:ext cx="2743200" cy="1463040"/>
+          <a:effectLst>
+            <a:outerShdw sx="100000" sy="100000" kx="0" ky="0" algn="bl" rotWithShape="0" blurRad="88900" dist="25400" dir="5400000">
+              <a:srgbClr val="22303C">
+                <a:alpha val="12000"/>
+              </a:srgbClr>
+            </a:outerShdw>
+          </a:effectLst>
+        </p:spPr>
+      </p:sp>
+      <p:sp>
+        <p:nvSpPr>
+          <p:cNvPr id="6" name="Text 4"/>
+          <p:cNvSpPr/>
+          <p:nvPr/>
+        </p:nvSpPr>
+        <p:spPr>
+          <a:xfrm>
+            <a:off x="7660532" y="1755648"/>
+            <a:ext cx="3744779" cy="310896"/>
           </a:xfrm>
           <a:prstGeom prst="rect">
             <a:avLst/>
@@ -9743,34 +10133,76 @@
           <a:bodyPr wrap="square" lIns="0" tIns="0" rIns="0" bIns="0" rtlCol="0" anchor="ctr"/>
           <a:lstStyle/>
           <a:p>
+            <a:pPr indent="0" marL="0">
+              <a:buNone/>
+            </a:pPr>
+            <a:r>
+              <a:rPr lang="en-US" sz="1100" b="1" spc="140" kern="0" dirty="0">
+                <a:solidFill>
+                  <a:srgbClr val="1565C0"/>
+                </a:solidFill>
+                <a:latin typeface="Calibri" pitchFamily="34" charset="0"/>
+                <a:ea typeface="Calibri" pitchFamily="34" charset="-122"/>
+                <a:cs typeface="Calibri" pitchFamily="34" charset="-120"/>
+              </a:rPr>
+              <a:t>TEACHING POINT</a:t>
+            </a:r>
+            <a:endParaRPr lang="en-US" sz="1100" dirty="0"/>
+          </a:p>
+        </p:txBody>
+      </p:sp>
+      <p:sp>
+        <p:nvSpPr>
+          <p:cNvPr id="7" name="Text 5"/>
+          <p:cNvSpPr/>
+          <p:nvPr/>
+        </p:nvSpPr>
+        <p:spPr>
+          <a:xfrm>
+            <a:off x="7660532" y="2121408"/>
+            <a:ext cx="3726491" cy="3291840"/>
+          </a:xfrm>
+          <a:prstGeom prst="rect">
+            <a:avLst/>
+          </a:prstGeom>
+          <a:noFill/>
+          <a:ln/>
+        </p:spPr>
+        <p:txBody>
+          <a:bodyPr wrap="square" lIns="0" tIns="0" rIns="0" bIns="0" rtlCol="0" anchor="t"/>
+          <a:lstStyle/>
+          <a:p>
             <a:pPr algn="l" indent="0" marL="0">
-              <a:buNone/>
-            </a:pPr>
-            <a:r>
-              <a:rPr lang="en-US" sz="6400" b="1" dirty="0">
-                <a:solidFill>
-                  <a:srgbClr val="E7EFFA"/>
-                </a:solidFill>
-                <a:latin typeface="Calibri" pitchFamily="34" charset="0"/>
-                <a:ea typeface="Calibri" pitchFamily="34" charset="-122"/>
-                <a:cs typeface="Calibri" pitchFamily="34" charset="-120"/>
-              </a:rPr>
-              <a:t>04</a:t>
-            </a:r>
-            <a:endParaRPr lang="en-US" sz="6400" dirty="0"/>
-          </a:p>
-        </p:txBody>
-      </p:sp>
-      <p:sp>
-        <p:nvSpPr>
-          <p:cNvPr id="5" name="Text 3"/>
-          <p:cNvSpPr/>
-          <p:nvPr/>
-        </p:nvSpPr>
-        <p:spPr>
-          <a:xfrm>
-            <a:off x="566928" y="3246120"/>
-            <a:ext cx="10058400" cy="365760"/>
+              <a:lnSpc>
+                <a:spcPct val="110000"/>
+              </a:lnSpc>
+              <a:buNone/>
+            </a:pPr>
+            <a:r>
+              <a:rPr lang="en-US" sz="1350" dirty="0">
+                <a:solidFill>
+                  <a:srgbClr val="33444F"/>
+                </a:solidFill>
+                <a:latin typeface="Calibri" pitchFamily="34" charset="0"/>
+                <a:ea typeface="Calibri" pitchFamily="34" charset="-122"/>
+                <a:cs typeface="Calibri" pitchFamily="34" charset="-120"/>
+              </a:rPr>
+              <a:t>Ask about biotin when thyroid (or troponin) results don’t fit — a one-question history prevents a misdiagnosis.</a:t>
+            </a:r>
+            <a:endParaRPr lang="en-US" sz="1350" dirty="0"/>
+          </a:p>
+        </p:txBody>
+      </p:sp>
+      <p:sp>
+        <p:nvSpPr>
+          <p:cNvPr id="8" name="Text 6"/>
+          <p:cNvSpPr/>
+          <p:nvPr/>
+        </p:nvSpPr>
+        <p:spPr>
+          <a:xfrm>
+            <a:off x="566928" y="6473952"/>
+            <a:ext cx="7772400" cy="274320"/>
           </a:xfrm>
           <a:prstGeom prst="rect">
             <a:avLst/>
@@ -9786,56 +10218,84 @@
               <a:buNone/>
             </a:pPr>
             <a:r>
-              <a:rPr lang="en-US" sz="1300" b="1" spc="250" kern="0" dirty="0">
-                <a:solidFill>
-                  <a:srgbClr val="F2C9D9"/>
-                </a:solidFill>
-                <a:latin typeface="Calibri" pitchFamily="34" charset="0"/>
-                <a:ea typeface="Calibri" pitchFamily="34" charset="-122"/>
-                <a:cs typeface="Calibri" pitchFamily="34" charset="-120"/>
-              </a:rPr>
-              <a:t>PART FOUR</a:t>
-            </a:r>
-            <a:endParaRPr lang="en-US" sz="1300" dirty="0"/>
-          </a:p>
-        </p:txBody>
-      </p:sp>
-      <p:sp>
-        <p:nvSpPr>
-          <p:cNvPr id="6" name="Text 4"/>
-          <p:cNvSpPr/>
-          <p:nvPr/>
-        </p:nvSpPr>
-        <p:spPr>
-          <a:xfrm>
-            <a:off x="566928" y="3611880"/>
-            <a:ext cx="10607040" cy="1463040"/>
-          </a:xfrm>
-          <a:prstGeom prst="rect">
-            <a:avLst/>
-          </a:prstGeom>
-          <a:noFill/>
-          <a:ln/>
-        </p:spPr>
-        <p:txBody>
-          <a:bodyPr wrap="square" lIns="0" tIns="0" rIns="0" bIns="0" rtlCol="0" anchor="t"/>
-          <a:lstStyle/>
-          <a:p>
-            <a:pPr algn="l" indent="0" marL="0">
-              <a:buNone/>
-            </a:pPr>
-            <a:r>
-              <a:rPr lang="en-US" sz="3800" b="1" dirty="0">
-                <a:solidFill>
-                  <a:srgbClr val="FFFFFF"/>
-                </a:solidFill>
-                <a:latin typeface="Calibri" pitchFamily="34" charset="0"/>
-                <a:ea typeface="Calibri" pitchFamily="34" charset="-122"/>
-                <a:cs typeface="Calibri" pitchFamily="34" charset="-120"/>
-              </a:rPr>
-              <a:t>Board Review</a:t>
-            </a:r>
-            <a:endParaRPr lang="en-US" sz="3800" dirty="0"/>
+              <a:rPr lang="en-US" sz="850" dirty="0">
+                <a:solidFill>
+                  <a:srgbClr val="9AA8B4"/>
+                </a:solidFill>
+                <a:latin typeface="Calibri" pitchFamily="34" charset="0"/>
+                <a:ea typeface="Calibri" pitchFamily="34" charset="-122"/>
+                <a:cs typeface="Calibri" pitchFamily="34" charset="-120"/>
+              </a:rPr>
+              <a:t>Makassed General Hospital  ·  Department of Laboratory Medicine</a:t>
+            </a:r>
+            <a:endParaRPr lang="en-US" sz="850" dirty="0"/>
+          </a:p>
+        </p:txBody>
+      </p:sp>
+      <p:sp>
+        <p:nvSpPr>
+          <p:cNvPr id="9" name="Text 7"/>
+          <p:cNvSpPr/>
+          <p:nvPr/>
+        </p:nvSpPr>
+        <p:spPr>
+          <a:xfrm>
+            <a:off x="9814255" y="6473952"/>
+            <a:ext cx="1828800" cy="274320"/>
+          </a:xfrm>
+          <a:prstGeom prst="rect">
+            <a:avLst/>
+          </a:prstGeom>
+          <a:noFill/>
+          <a:ln/>
+        </p:spPr>
+        <p:txBody>
+          <a:bodyPr wrap="square" lIns="0" tIns="0" rIns="0" bIns="0" rtlCol="0" anchor="ctr"/>
+          <a:lstStyle/>
+          <a:p>
+            <a:pPr algn="r" indent="0" marL="0">
+              <a:buNone/>
+            </a:pPr>
+            <a:r>
+              <a:rPr lang="en-US" sz="850" dirty="0">
+                <a:solidFill>
+                  <a:srgbClr val="9AA8B4"/>
+                </a:solidFill>
+                <a:latin typeface="Calibri" pitchFamily="34" charset="0"/>
+                <a:ea typeface="Calibri" pitchFamily="34" charset="-122"/>
+                <a:cs typeface="Calibri" pitchFamily="34" charset="-120"/>
+              </a:rPr>
+              <a:t>CP Lecture Series</a:t>
+            </a:r>
+            <a:pPr algn="r" indent="0" marL="0">
+              <a:buNone/>
+            </a:pPr>
+            <a:r>
+              <a:rPr lang="en-US" sz="850" dirty="0">
+                <a:solidFill>
+                  <a:srgbClr val="DCE4EC"/>
+                </a:solidFill>
+                <a:latin typeface="Calibri" pitchFamily="34" charset="0"/>
+                <a:ea typeface="Calibri" pitchFamily="34" charset="-122"/>
+                <a:cs typeface="Calibri" pitchFamily="34" charset="-120"/>
+              </a:rPr>
+              <a:t>   ·   </a:t>
+            </a:r>
+            <a:pPr algn="r" indent="0" marL="0">
+              <a:buNone/>
+            </a:pPr>
+            <a:r>
+              <a:rPr lang="en-US" sz="850" b="1" dirty="0">
+                <a:solidFill>
+                  <a:srgbClr val="1565C0"/>
+                </a:solidFill>
+                <a:latin typeface="Calibri" pitchFamily="34" charset="0"/>
+                <a:ea typeface="Calibri" pitchFamily="34" charset="-122"/>
+                <a:cs typeface="Calibri" pitchFamily="34" charset="-120"/>
+              </a:rPr>
+              <a:t>18</a:t>
+            </a:r>
+            <a:endParaRPr lang="en-US" sz="850" dirty="0"/>
           </a:p>
         </p:txBody>
       </p:sp>
@@ -9985,7 +10445,7 @@
                 <a:ea typeface="Calibri" pitchFamily="34" charset="-122"/>
                 <a:cs typeface="Calibri" pitchFamily="34" charset="-120"/>
               </a:rPr>
-              <a:t>A sandwich immunoassay reports an unexpectedly LOW value in a patient you suspect has a very high analyte level. What is the best next step?</a:t>
+              <a:t>A sandwich immunoassay reports an unexpectedly LOW value in a patient you suspect has very high analyte. Best next step?</a:t>
             </a:r>
             <a:endParaRPr lang="en-US" sz="1450" dirty="0"/>
           </a:p>
@@ -10231,7 +10691,7 @@
                 <a:ea typeface="Calibri" pitchFamily="34" charset="-122"/>
                 <a:cs typeface="Calibri" pitchFamily="34" charset="-120"/>
               </a:rPr>
-              <a:t>Extremely high analyte saturates a sandwich assay’s antibodies and lowers the signal (high-dose hook). Dilution relieves saturation and yields the true, higher value.</a:t>
+              <a:t>Extremely high analyte saturates a sandwich assay’s antibodies and lowers signal (hook). Dilution relieves saturation and yields the true value.</a:t>
             </a:r>
             <a:endParaRPr lang="en-US" sz="1250" dirty="0"/>
           </a:p>
@@ -10337,7 +10797,7 @@
                 <a:ea typeface="Calibri" pitchFamily="34" charset="-122"/>
                 <a:cs typeface="Calibri" pitchFamily="34" charset="-120"/>
               </a:rPr>
-              <a:t>18</a:t>
+              <a:t>19</a:t>
             </a:r>
             <a:endParaRPr lang="en-US" sz="850" dirty="0"/>
           </a:p>
@@ -10489,7 +10949,7 @@
                 <a:ea typeface="Calibri" pitchFamily="34" charset="-122"/>
                 <a:cs typeface="Calibri" pitchFamily="34" charset="-120"/>
               </a:rPr>
-              <a:t>Which set of analytes characteristically rises together due to in vitro hemolysis?</a:t>
+              <a:t>Which analytes characteristically rise together due to in vitro hemolysis?</a:t>
             </a:r>
             <a:endParaRPr lang="en-US" sz="1450" dirty="0"/>
           </a:p>
@@ -10735,7 +11195,7 @@
                 <a:ea typeface="Calibri" pitchFamily="34" charset="-122"/>
                 <a:cs typeface="Calibri" pitchFamily="34" charset="-120"/>
               </a:rPr>
-              <a:t>These are concentrated intracellularly; red-cell lysis releases them, producing concordant spurious elevations and signaling hemolysis.</a:t>
+              <a:t>These are concentrated intracellularly; red-cell lysis releases them, producing concordant spurious elevations.</a:t>
             </a:r>
             <a:endParaRPr lang="en-US" sz="1250" dirty="0"/>
           </a:p>
@@ -10841,7 +11301,7 @@
                 <a:ea typeface="Calibri" pitchFamily="34" charset="-122"/>
                 <a:cs typeface="Calibri" pitchFamily="34" charset="-120"/>
               </a:rPr>
-              <a:t>19</a:t>
+              <a:t>20</a:t>
             </a:r>
             <a:endParaRPr lang="en-US" sz="850" dirty="0"/>
           </a:p>
@@ -10993,7 +11453,7 @@
                 <a:ea typeface="Calibri" pitchFamily="34" charset="-122"/>
                 <a:cs typeface="Calibri" pitchFamily="34" charset="-120"/>
               </a:rPr>
-              <a:t>On a Levey-Jennings chart, the control mean gradually drifts upward over two weeks. This pattern indicates:</a:t>
+              <a:t>On a Levey-Jennings chart, the control mean gradually drifts upward over two weeks. This indicates:</a:t>
             </a:r>
             <a:endParaRPr lang="en-US" sz="1450" dirty="0"/>
           </a:p>
@@ -11055,7 +11515,7 @@
                 <a:ea typeface="Calibri" pitchFamily="34" charset="-122"/>
                 <a:cs typeface="Calibri" pitchFamily="34" charset="-120"/>
               </a:rPr>
-              <a:t>B. A trend, suggesting systematic error (e.g., reagent/electrode deterioration)</a:t>
+              <a:t>B. A trend (systematic error, e.g., reagent deterioration)</a:t>
             </a:r>
             <a:endParaRPr lang="en-US" sz="1350" dirty="0"/>
           </a:p>
@@ -11239,7 +11699,7 @@
                 <a:ea typeface="Calibri" pitchFamily="34" charset="-122"/>
                 <a:cs typeface="Calibri" pitchFamily="34" charset="-120"/>
               </a:rPr>
-              <a:t>A gradual, progressive drift is a trend, indicating systematic error such as deteriorating reagent or a failing electrode. An abrupt step is a shift (e.g., new lot/calibration).</a:t>
+              <a:t>A gradual, progressive drift is a trend (systematic error). An abrupt step would be a shift (new lot/calibration).</a:t>
             </a:r>
             <a:endParaRPr lang="en-US" sz="1250" dirty="0"/>
           </a:p>
@@ -11345,7 +11805,7 @@
                 <a:ea typeface="Calibri" pitchFamily="34" charset="-122"/>
                 <a:cs typeface="Calibri" pitchFamily="34" charset="-120"/>
               </a:rPr>
-              <a:t>20</a:t>
+              <a:t>21</a:t>
             </a:r>
             <a:endParaRPr lang="en-US" sz="850" dirty="0"/>
           </a:p>
@@ -11362,6 +11822,510 @@
 <file path=ppt/slides/slide25.xml><?xml version="1.0" encoding="utf-8"?>
 <p:sld xmlns:a="http://schemas.openxmlformats.org/drawingml/2006/main" xmlns:r="http://schemas.openxmlformats.org/officeDocument/2006/relationships" xmlns:p="http://schemas.openxmlformats.org/presentationml/2006/main">
   <p:cSld name="Slide 25">
+    <p:bg>
+      <p:bgPr>
+        <a:solidFill>
+          <a:srgbClr val="FFFFFF"/>
+        </a:solidFill>
+      </p:bgPr>
+    </p:bg>
+    <p:spTree>
+      <p:nvGrpSpPr>
+        <p:cNvPr id="1" name=""/>
+        <p:cNvGrpSpPr/>
+        <p:nvPr/>
+      </p:nvGrpSpPr>
+      <p:grpSpPr>
+        <a:xfrm>
+          <a:off x="0" y="0"/>
+          <a:ext cx="0" cy="0"/>
+          <a:chOff x="0" y="0"/>
+          <a:chExt cx="0" cy="0"/>
+        </a:xfrm>
+      </p:grpSpPr>
+      <p:sp>
+        <p:nvSpPr>
+          <p:cNvPr id="2" name="Text 0"/>
+          <p:cNvSpPr/>
+          <p:nvPr/>
+        </p:nvSpPr>
+        <p:spPr>
+          <a:xfrm>
+            <a:off x="566928" y="329184"/>
+            <a:ext cx="10515600" cy="310896"/>
+          </a:xfrm>
+          <a:prstGeom prst="rect">
+            <a:avLst/>
+          </a:prstGeom>
+          <a:noFill/>
+          <a:ln/>
+        </p:spPr>
+        <p:txBody>
+          <a:bodyPr wrap="square" lIns="0" tIns="0" rIns="0" bIns="0" rtlCol="0" anchor="ctr"/>
+          <a:lstStyle/>
+          <a:p>
+            <a:pPr algn="l" indent="0" marL="0">
+              <a:buNone/>
+            </a:pPr>
+            <a:r>
+              <a:rPr lang="en-US" sz="1100" b="1" spc="150" kern="0" dirty="0">
+                <a:solidFill>
+                  <a:srgbClr val="1565C0"/>
+                </a:solidFill>
+                <a:latin typeface="Calibri" pitchFamily="34" charset="0"/>
+                <a:ea typeface="Calibri" pitchFamily="34" charset="-122"/>
+                <a:cs typeface="Calibri" pitchFamily="34" charset="-120"/>
+              </a:rPr>
+              <a:t>CLINICAL CHEMISTRY   ·   BOARD REVIEW  ·  Q4</a:t>
+            </a:r>
+            <a:endParaRPr lang="en-US" sz="1100" dirty="0"/>
+          </a:p>
+        </p:txBody>
+      </p:sp>
+      <p:sp>
+        <p:nvSpPr>
+          <p:cNvPr id="3" name="Text 1"/>
+          <p:cNvSpPr/>
+          <p:nvPr/>
+        </p:nvSpPr>
+        <p:spPr>
+          <a:xfrm>
+            <a:off x="566928" y="713232"/>
+            <a:ext cx="11064240" cy="749808"/>
+          </a:xfrm>
+          <a:prstGeom prst="rect">
+            <a:avLst/>
+          </a:prstGeom>
+          <a:noFill/>
+          <a:ln/>
+        </p:spPr>
+        <p:txBody>
+          <a:bodyPr wrap="square" lIns="0" tIns="0" rIns="0" bIns="0" rtlCol="0" anchor="ctr"/>
+          <a:lstStyle/>
+          <a:p>
+            <a:pPr algn="l" indent="0" marL="0">
+              <a:buNone/>
+            </a:pPr>
+            <a:r>
+              <a:rPr lang="en-US" sz="2600" b="1" dirty="0">
+                <a:solidFill>
+                  <a:srgbClr val="0E3A5F"/>
+                </a:solidFill>
+                <a:latin typeface="Calibri" pitchFamily="34" charset="0"/>
+                <a:ea typeface="Calibri" pitchFamily="34" charset="-122"/>
+                <a:cs typeface="Calibri" pitchFamily="34" charset="-120"/>
+              </a:rPr>
+              <a:t>Board-Style Review</a:t>
+            </a:r>
+            <a:endParaRPr lang="en-US" sz="2600" dirty="0"/>
+          </a:p>
+        </p:txBody>
+      </p:sp>
+      <p:sp>
+        <p:nvSpPr>
+          <p:cNvPr id="4" name="Text 2"/>
+          <p:cNvSpPr/>
+          <p:nvPr/>
+        </p:nvSpPr>
+        <p:spPr>
+          <a:xfrm>
+            <a:off x="566928" y="1417320"/>
+            <a:ext cx="11057839" cy="914400"/>
+          </a:xfrm>
+          <a:prstGeom prst="rect">
+            <a:avLst/>
+          </a:prstGeom>
+          <a:noFill/>
+          <a:ln/>
+        </p:spPr>
+        <p:txBody>
+          <a:bodyPr wrap="square" lIns="0" tIns="0" rIns="0" bIns="0" rtlCol="0" anchor="t"/>
+          <a:lstStyle/>
+          <a:p>
+            <a:pPr algn="l" indent="0" marL="0">
+              <a:lnSpc>
+                <a:spcPct val="105000"/>
+              </a:lnSpc>
+              <a:buNone/>
+            </a:pPr>
+            <a:r>
+              <a:rPr lang="en-US" sz="1450" b="1" dirty="0">
+                <a:solidFill>
+                  <a:srgbClr val="1B2A38"/>
+                </a:solidFill>
+                <a:latin typeface="Calibri" pitchFamily="34" charset="0"/>
+                <a:ea typeface="Calibri" pitchFamily="34" charset="-122"/>
+                <a:cs typeface="Calibri" pitchFamily="34" charset="-120"/>
+              </a:rPr>
+              <a:t>A persistently elevated CK with no clinical correlate and normal other muscle markers most likely reflects:</a:t>
+            </a:r>
+            <a:endParaRPr lang="en-US" sz="1450" dirty="0"/>
+          </a:p>
+        </p:txBody>
+      </p:sp>
+      <p:sp>
+        <p:nvSpPr>
+          <p:cNvPr id="5" name="Text 3"/>
+          <p:cNvSpPr/>
+          <p:nvPr/>
+        </p:nvSpPr>
+        <p:spPr>
+          <a:xfrm>
+            <a:off x="658368" y="2395728"/>
+            <a:ext cx="6192390" cy="3017520"/>
+          </a:xfrm>
+          <a:prstGeom prst="rect">
+            <a:avLst/>
+          </a:prstGeom>
+          <a:noFill/>
+          <a:ln/>
+        </p:spPr>
+        <p:txBody>
+          <a:bodyPr wrap="square" lIns="0" tIns="0" rIns="0" bIns="0" rtlCol="0" anchor="t"/>
+          <a:lstStyle/>
+          <a:p>
+            <a:pPr algn="l" indent="0" marL="0">
+              <a:spcAft>
+                <a:spcPts val="600"/>
+              </a:spcAft>
+              <a:buNone/>
+            </a:pPr>
+            <a:r>
+              <a:rPr lang="en-US" sz="1350" dirty="0">
+                <a:solidFill>
+                  <a:srgbClr val="33444F"/>
+                </a:solidFill>
+                <a:latin typeface="Calibri" pitchFamily="34" charset="0"/>
+                <a:ea typeface="Calibri" pitchFamily="34" charset="-122"/>
+                <a:cs typeface="Calibri" pitchFamily="34" charset="-120"/>
+              </a:rPr>
+              <a:t>A. Acute myocardial infarction</a:t>
+            </a:r>
+            <a:endParaRPr lang="en-US" sz="1350" dirty="0"/>
+          </a:p>
+          <a:p>
+            <a:pPr algn="l" indent="0" marL="0">
+              <a:spcAft>
+                <a:spcPts val="600"/>
+              </a:spcAft>
+              <a:buNone/>
+            </a:pPr>
+            <a:r>
+              <a:rPr lang="en-US" sz="1350" b="1" dirty="0">
+                <a:solidFill>
+                  <a:srgbClr val="0D4A92"/>
+                </a:solidFill>
+                <a:latin typeface="Calibri" pitchFamily="34" charset="0"/>
+                <a:ea typeface="Calibri" pitchFamily="34" charset="-122"/>
+                <a:cs typeface="Calibri" pitchFamily="34" charset="-120"/>
+              </a:rPr>
+              <a:t>B. Macro-CK (immunoglobulin-bound CK)</a:t>
+            </a:r>
+            <a:endParaRPr lang="en-US" sz="1350" dirty="0"/>
+          </a:p>
+          <a:p>
+            <a:pPr algn="l" indent="0" marL="0">
+              <a:spcAft>
+                <a:spcPts val="600"/>
+              </a:spcAft>
+              <a:buNone/>
+            </a:pPr>
+            <a:r>
+              <a:rPr lang="en-US" sz="1350" dirty="0">
+                <a:solidFill>
+                  <a:srgbClr val="33444F"/>
+                </a:solidFill>
+                <a:latin typeface="Calibri" pitchFamily="34" charset="0"/>
+                <a:ea typeface="Calibri" pitchFamily="34" charset="-122"/>
+                <a:cs typeface="Calibri" pitchFamily="34" charset="-120"/>
+              </a:rPr>
+              <a:t>C. Rhabdomyolysis</a:t>
+            </a:r>
+            <a:endParaRPr lang="en-US" sz="1350" dirty="0"/>
+          </a:p>
+          <a:p>
+            <a:pPr algn="l" indent="0" marL="0">
+              <a:spcAft>
+                <a:spcPts val="600"/>
+              </a:spcAft>
+              <a:buNone/>
+            </a:pPr>
+            <a:r>
+              <a:rPr lang="en-US" sz="1350" dirty="0">
+                <a:solidFill>
+                  <a:srgbClr val="33444F"/>
+                </a:solidFill>
+                <a:latin typeface="Calibri" pitchFamily="34" charset="0"/>
+                <a:ea typeface="Calibri" pitchFamily="34" charset="-122"/>
+                <a:cs typeface="Calibri" pitchFamily="34" charset="-120"/>
+              </a:rPr>
+              <a:t>D. Hemolysis</a:t>
+            </a:r>
+            <a:endParaRPr lang="en-US" sz="1350" dirty="0"/>
+          </a:p>
+          <a:p>
+            <a:pPr algn="l" indent="0" marL="0">
+              <a:spcAft>
+                <a:spcPts val="600"/>
+              </a:spcAft>
+              <a:buNone/>
+            </a:pPr>
+            <a:r>
+              <a:rPr lang="en-US" sz="1350" dirty="0">
+                <a:solidFill>
+                  <a:srgbClr val="33444F"/>
+                </a:solidFill>
+                <a:latin typeface="Calibri" pitchFamily="34" charset="0"/>
+                <a:ea typeface="Calibri" pitchFamily="34" charset="-122"/>
+                <a:cs typeface="Calibri" pitchFamily="34" charset="-120"/>
+              </a:rPr>
+              <a:t>E. Biotin interference</a:t>
+            </a:r>
+            <a:endParaRPr lang="en-US" sz="1350" dirty="0"/>
+          </a:p>
+        </p:txBody>
+      </p:sp>
+      <p:sp>
+        <p:nvSpPr>
+          <p:cNvPr id="6" name="Shape 4"/>
+          <p:cNvSpPr/>
+          <p:nvPr/>
+        </p:nvSpPr>
+        <p:spPr>
+          <a:xfrm>
+            <a:off x="7201632" y="2395728"/>
+            <a:ext cx="4423136" cy="3246120"/>
+          </a:xfrm>
+          <a:prstGeom prst="roundRect">
+            <a:avLst>
+              <a:gd name="adj" fmla="val 2535"/>
+            </a:avLst>
+          </a:prstGeom>
+          <a:solidFill>
+            <a:srgbClr val="E7EFFA"/>
+          </a:solidFill>
+          <a:ln/>
+          <a:effectLst>
+            <a:outerShdw sx="100000" sy="100000" kx="0" ky="0" algn="bl" rotWithShape="0" blurRad="88900" dist="25400" dir="5400000">
+              <a:srgbClr val="22303C">
+                <a:alpha val="12000"/>
+              </a:srgbClr>
+            </a:outerShdw>
+          </a:effectLst>
+        </p:spPr>
+      </p:sp>
+      <p:sp>
+        <p:nvSpPr>
+          <p:cNvPr id="7" name="Text 5"/>
+          <p:cNvSpPr/>
+          <p:nvPr/>
+        </p:nvSpPr>
+        <p:spPr>
+          <a:xfrm>
+            <a:off x="7439376" y="2578608"/>
+            <a:ext cx="3965936" cy="457200"/>
+          </a:xfrm>
+          <a:prstGeom prst="rect">
+            <a:avLst/>
+          </a:prstGeom>
+          <a:noFill/>
+          <a:ln/>
+        </p:spPr>
+        <p:txBody>
+          <a:bodyPr wrap="square" lIns="0" tIns="0" rIns="0" bIns="0" rtlCol="0" anchor="ctr"/>
+          <a:lstStyle/>
+          <a:p>
+            <a:pPr indent="0" marL="0">
+              <a:buNone/>
+            </a:pPr>
+            <a:r>
+              <a:rPr lang="en-US" sz="1500" b="1" dirty="0">
+                <a:solidFill>
+                  <a:srgbClr val="1565C0"/>
+                </a:solidFill>
+                <a:latin typeface="Calibri" pitchFamily="34" charset="0"/>
+                <a:ea typeface="Calibri" pitchFamily="34" charset="-122"/>
+                <a:cs typeface="Calibri" pitchFamily="34" charset="-120"/>
+              </a:rPr>
+              <a:t>ANSWER  </a:t>
+            </a:r>
+            <a:pPr indent="0" marL="0">
+              <a:buNone/>
+            </a:pPr>
+            <a:r>
+              <a:rPr lang="en-US" sz="1500" b="1" dirty="0">
+                <a:solidFill>
+                  <a:srgbClr val="1B2A38"/>
+                </a:solidFill>
+                <a:latin typeface="Calibri" pitchFamily="34" charset="0"/>
+                <a:ea typeface="Calibri" pitchFamily="34" charset="-122"/>
+                <a:cs typeface="Calibri" pitchFamily="34" charset="-120"/>
+              </a:rPr>
+              <a:t>B — Macro-CK</a:t>
+            </a:r>
+            <a:endParaRPr lang="en-US" sz="1500" dirty="0"/>
+          </a:p>
+        </p:txBody>
+      </p:sp>
+      <p:sp>
+        <p:nvSpPr>
+          <p:cNvPr id="8" name="Text 6"/>
+          <p:cNvSpPr/>
+          <p:nvPr/>
+        </p:nvSpPr>
+        <p:spPr>
+          <a:xfrm>
+            <a:off x="7439376" y="3127248"/>
+            <a:ext cx="3947648" cy="2377440"/>
+          </a:xfrm>
+          <a:prstGeom prst="rect">
+            <a:avLst/>
+          </a:prstGeom>
+          <a:noFill/>
+          <a:ln/>
+        </p:spPr>
+        <p:txBody>
+          <a:bodyPr wrap="square" lIns="0" tIns="0" rIns="0" bIns="0" rtlCol="0" anchor="t"/>
+          <a:lstStyle/>
+          <a:p>
+            <a:pPr algn="l" indent="0" marL="0">
+              <a:lnSpc>
+                <a:spcPct val="108000"/>
+              </a:lnSpc>
+              <a:buNone/>
+            </a:pPr>
+            <a:r>
+              <a:rPr lang="en-US" sz="1250" dirty="0">
+                <a:solidFill>
+                  <a:srgbClr val="33444F"/>
+                </a:solidFill>
+                <a:latin typeface="Calibri" pitchFamily="34" charset="0"/>
+                <a:ea typeface="Calibri" pitchFamily="34" charset="-122"/>
+                <a:cs typeface="Calibri" pitchFamily="34" charset="-120"/>
+              </a:rPr>
+              <a:t>Macro-analytes (macro-CK, macroprolactin) are immunoglobulin-bound forms causing persistent, clinically silent elevations; confirm with special handling/PEG.</a:t>
+            </a:r>
+            <a:endParaRPr lang="en-US" sz="1250" dirty="0"/>
+          </a:p>
+        </p:txBody>
+      </p:sp>
+      <p:sp>
+        <p:nvSpPr>
+          <p:cNvPr id="9" name="Text 7"/>
+          <p:cNvSpPr/>
+          <p:nvPr/>
+        </p:nvSpPr>
+        <p:spPr>
+          <a:xfrm>
+            <a:off x="566928" y="6473952"/>
+            <a:ext cx="7772400" cy="274320"/>
+          </a:xfrm>
+          <a:prstGeom prst="rect">
+            <a:avLst/>
+          </a:prstGeom>
+          <a:noFill/>
+          <a:ln/>
+        </p:spPr>
+        <p:txBody>
+          <a:bodyPr wrap="square" lIns="0" tIns="0" rIns="0" bIns="0" rtlCol="0" anchor="ctr"/>
+          <a:lstStyle/>
+          <a:p>
+            <a:pPr algn="l" indent="0" marL="0">
+              <a:buNone/>
+            </a:pPr>
+            <a:r>
+              <a:rPr lang="en-US" sz="850" dirty="0">
+                <a:solidFill>
+                  <a:srgbClr val="9AA8B4"/>
+                </a:solidFill>
+                <a:latin typeface="Calibri" pitchFamily="34" charset="0"/>
+                <a:ea typeface="Calibri" pitchFamily="34" charset="-122"/>
+                <a:cs typeface="Calibri" pitchFamily="34" charset="-120"/>
+              </a:rPr>
+              <a:t>Makassed General Hospital  ·  Department of Laboratory Medicine</a:t>
+            </a:r>
+            <a:endParaRPr lang="en-US" sz="850" dirty="0"/>
+          </a:p>
+        </p:txBody>
+      </p:sp>
+      <p:sp>
+        <p:nvSpPr>
+          <p:cNvPr id="10" name="Text 8"/>
+          <p:cNvSpPr/>
+          <p:nvPr/>
+        </p:nvSpPr>
+        <p:spPr>
+          <a:xfrm>
+            <a:off x="9814255" y="6473952"/>
+            <a:ext cx="1828800" cy="274320"/>
+          </a:xfrm>
+          <a:prstGeom prst="rect">
+            <a:avLst/>
+          </a:prstGeom>
+          <a:noFill/>
+          <a:ln/>
+        </p:spPr>
+        <p:txBody>
+          <a:bodyPr wrap="square" lIns="0" tIns="0" rIns="0" bIns="0" rtlCol="0" anchor="ctr"/>
+          <a:lstStyle/>
+          <a:p>
+            <a:pPr algn="r" indent="0" marL="0">
+              <a:buNone/>
+            </a:pPr>
+            <a:r>
+              <a:rPr lang="en-US" sz="850" dirty="0">
+                <a:solidFill>
+                  <a:srgbClr val="9AA8B4"/>
+                </a:solidFill>
+                <a:latin typeface="Calibri" pitchFamily="34" charset="0"/>
+                <a:ea typeface="Calibri" pitchFamily="34" charset="-122"/>
+                <a:cs typeface="Calibri" pitchFamily="34" charset="-120"/>
+              </a:rPr>
+              <a:t>CP Lecture Series</a:t>
+            </a:r>
+            <a:pPr algn="r" indent="0" marL="0">
+              <a:buNone/>
+            </a:pPr>
+            <a:r>
+              <a:rPr lang="en-US" sz="850" dirty="0">
+                <a:solidFill>
+                  <a:srgbClr val="DCE4EC"/>
+                </a:solidFill>
+                <a:latin typeface="Calibri" pitchFamily="34" charset="0"/>
+                <a:ea typeface="Calibri" pitchFamily="34" charset="-122"/>
+                <a:cs typeface="Calibri" pitchFamily="34" charset="-120"/>
+              </a:rPr>
+              <a:t>   ·   </a:t>
+            </a:r>
+            <a:pPr algn="r" indent="0" marL="0">
+              <a:buNone/>
+            </a:pPr>
+            <a:r>
+              <a:rPr lang="en-US" sz="850" b="1" dirty="0">
+                <a:solidFill>
+                  <a:srgbClr val="1565C0"/>
+                </a:solidFill>
+                <a:latin typeface="Calibri" pitchFamily="34" charset="0"/>
+                <a:ea typeface="Calibri" pitchFamily="34" charset="-122"/>
+                <a:cs typeface="Calibri" pitchFamily="34" charset="-120"/>
+              </a:rPr>
+              <a:t>22</a:t>
+            </a:r>
+            <a:endParaRPr lang="en-US" sz="850" dirty="0"/>
+          </a:p>
+        </p:txBody>
+      </p:sp>
+    </p:spTree>
+  </p:cSld>
+  <p:clrMapOvr>
+    <a:masterClrMapping/>
+  </p:clrMapOvr>
+</p:sld>
+</file>
+
+<file path=ppt/slides/slide26.xml><?xml version="1.0" encoding="utf-8"?>
+<p:sld xmlns:a="http://schemas.openxmlformats.org/drawingml/2006/main" xmlns:r="http://schemas.openxmlformats.org/officeDocument/2006/relationships" xmlns:p="http://schemas.openxmlformats.org/presentationml/2006/main">
+  <p:cSld name="Slide 26">
     <p:bg>
       <p:bgPr>
         <a:solidFill>
@@ -11582,7 +12546,7 @@
                 <a:ea typeface="Calibri" pitchFamily="34" charset="-122"/>
                 <a:cs typeface="Calibri" pitchFamily="34" charset="-120"/>
               </a:rPr>
-              <a:t>Know what each method measures: spectrophotometry (Beer-Lambert), immunoassay (sandwich vs competitive), and MS (confirmatory).</a:t>
+              <a:t>Know each method: spectrophotometry (Beer-Lambert), immunoassay (sandwich vs competitive), MS (confirmatory).</a:t>
             </a:r>
             <a:endParaRPr lang="en-US" sz="1350" dirty="0"/>
           </a:p>
@@ -11709,7 +12673,7 @@
                 <a:ea typeface="Calibri" pitchFamily="34" charset="-122"/>
                 <a:cs typeface="Calibri" pitchFamily="34" charset="-120"/>
               </a:rPr>
-              <a:t>Sandwich assays read high analyte falsely LOW (hook); heterophile and biotin interferences mimic disease — reconcile with the clinic.</a:t>
+              <a:t>Sandwich assays read very high analyte falsely LOW (hook); heterophile, biotin, and macro-analytes mimic disease — reconcile with the clinic.</a:t>
             </a:r>
             <a:endParaRPr lang="en-US" sz="1350" dirty="0"/>
           </a:p>
@@ -11836,7 +12800,7 @@
                 <a:ea typeface="Calibri" pitchFamily="34" charset="-122"/>
                 <a:cs typeface="Calibri" pitchFamily="34" charset="-120"/>
               </a:rPr>
-              <a:t>Hemolysis raises potassium, LDH, AST, and phosphate together; lipemia causes pseudohyponatremia by indirect ISE.</a:t>
+              <a:t>Hemolysis raises potassium, LDH, AST, phosphate together; lipemia causes pseudohyponatremia by indirect ISE.</a:t>
             </a:r>
             <a:endParaRPr lang="en-US" sz="1350" dirty="0"/>
           </a:p>
@@ -11963,7 +12927,7 @@
                 <a:ea typeface="Calibri" pitchFamily="34" charset="-122"/>
                 <a:cs typeface="Calibri" pitchFamily="34" charset="-120"/>
               </a:rPr>
-              <a:t>Most errors are preanalytic; delta checks and HIL indices catch many before they reach the chart.</a:t>
+              <a:t>Most errors are preanalytic; delta checks and HIL indices catch many before reporting.</a:t>
             </a:r>
             <a:endParaRPr lang="en-US" sz="1350" dirty="0"/>
           </a:p>
@@ -12168,7 +13132,7 @@
                 <a:ea typeface="Calibri" pitchFamily="34" charset="-122"/>
                 <a:cs typeface="Calibri" pitchFamily="34" charset="-120"/>
               </a:rPr>
-              <a:t>21</a:t>
+              <a:t>23</a:t>
             </a:r>
             <a:endParaRPr lang="en-US" sz="850" dirty="0"/>
           </a:p>
@@ -12182,9 +13146,9 @@
 </p:sld>
 </file>
 
-<file path=ppt/slides/slide26.xml><?xml version="1.0" encoding="utf-8"?>
+<file path=ppt/slides/slide27.xml><?xml version="1.0" encoding="utf-8"?>
 <p:sld xmlns:a="http://schemas.openxmlformats.org/drawingml/2006/main" xmlns:r="http://schemas.openxmlformats.org/officeDocument/2006/relationships" xmlns:p="http://schemas.openxmlformats.org/presentationml/2006/main">
-  <p:cSld name="Slide 26">
+  <p:cSld name="Slide 27">
     <p:bg>
       <p:bgPr>
         <a:solidFill>
@@ -12486,7 +13450,7 @@
                 <a:ea typeface="Calibri" pitchFamily="34" charset="-122"/>
                 <a:cs typeface="Calibri" pitchFamily="34" charset="-120"/>
               </a:rPr>
-              <a:t>22</a:t>
+              <a:t>24</a:t>
             </a:r>
             <a:endParaRPr lang="en-US" sz="850" dirty="0"/>
           </a:p>
@@ -12557,7 +13521,7 @@
                 <a:ea typeface="Calibri" pitchFamily="34" charset="-122"/>
                 <a:cs typeface="Calibri" pitchFamily="34" charset="-120"/>
               </a:rPr>
-              <a:t>CLINICAL CHEMISTRY   ·   LECTURE 1 OF 5</a:t>
+              <a:t>CLINICAL CHEMISTRY   ·   ·</a:t>
             </a:r>
             <a:endParaRPr lang="en-US" sz="1100" dirty="0"/>
           </a:p>
@@ -12864,7 +13828,7 @@
                 <a:ea typeface="Calibri" pitchFamily="34" charset="-122"/>
                 <a:cs typeface="Calibri" pitchFamily="34" charset="-120"/>
               </a:rPr>
-              <a:t>Contrast sandwich and competitive immunoassay designs.</a:t>
+              <a:t>Contrast sandwich and competitive immunoassay designs and their failure modes.</a:t>
             </a:r>
             <a:endParaRPr lang="en-US" sz="1350" dirty="0"/>
           </a:p>
@@ -13132,7 +14096,7 @@
                 <a:ea typeface="Calibri" pitchFamily="34" charset="-122"/>
                 <a:cs typeface="Calibri" pitchFamily="34" charset="-120"/>
               </a:rPr>
-              <a:t>Identify the hook effect, heterophile-antibody, and biotin interferences.</a:t>
+              <a:t>Identify hook, heterophile, biotin, and macro-analyte interferences.</a:t>
             </a:r>
             <a:endParaRPr lang="en-US" sz="1350" dirty="0"/>
           </a:p>
@@ -13400,7 +14364,7 @@
                 <a:ea typeface="Calibri" pitchFamily="34" charset="-122"/>
                 <a:cs typeface="Calibri" pitchFamily="34" charset="-120"/>
               </a:rPr>
-              <a:t>Apply basic quality-control concepts to detect analytic error.</a:t>
+              <a:t>Apply quality-control rules to detect random vs systematic error.</a:t>
             </a:r>
             <a:endParaRPr lang="en-US" sz="1350" dirty="0"/>
           </a:p>
@@ -13631,11 +14595,11 @@
         <p:spPr>
           <a:xfrm>
             <a:off x="566928" y="1481328"/>
-            <a:ext cx="11057839" cy="786384"/>
+            <a:ext cx="11057839" cy="652272"/>
           </a:xfrm>
           <a:prstGeom prst="roundRect">
             <a:avLst>
-              <a:gd name="adj" fmla="val 10465"/>
+              <a:gd name="adj" fmla="val 12617"/>
             </a:avLst>
           </a:prstGeom>
           <a:solidFill>
@@ -13659,7 +14623,7 @@
         </p:nvSpPr>
         <p:spPr>
           <a:xfrm>
-            <a:off x="749808" y="1682496"/>
+            <a:off x="749808" y="1615440"/>
             <a:ext cx="384048" cy="384048"/>
           </a:xfrm>
           <a:prstGeom prst="ellipse">
@@ -13686,7 +14650,7 @@
         </p:nvSpPr>
         <p:spPr>
           <a:xfrm>
-            <a:off x="749808" y="1682496"/>
+            <a:off x="749808" y="1615440"/>
             <a:ext cx="384048" cy="384048"/>
           </a:xfrm>
           <a:prstGeom prst="rect">
@@ -13726,7 +14690,7 @@
         <p:spPr>
           <a:xfrm>
             <a:off x="1298448" y="1481328"/>
-            <a:ext cx="10143439" cy="786384"/>
+            <a:ext cx="10143439" cy="652272"/>
           </a:xfrm>
           <a:prstGeom prst="rect">
             <a:avLst/>
@@ -13778,12 +14742,12 @@
         </p:nvSpPr>
         <p:spPr>
           <a:xfrm>
-            <a:off x="566928" y="2432304"/>
-            <a:ext cx="11057839" cy="786384"/>
+            <a:off x="566928" y="2298192"/>
+            <a:ext cx="11057839" cy="652272"/>
           </a:xfrm>
           <a:prstGeom prst="roundRect">
             <a:avLst>
-              <a:gd name="adj" fmla="val 10465"/>
+              <a:gd name="adj" fmla="val 12617"/>
             </a:avLst>
           </a:prstGeom>
           <a:solidFill>
@@ -13800,7 +14764,7 @@
         </p:nvSpPr>
         <p:spPr>
           <a:xfrm>
-            <a:off x="749808" y="2633472"/>
+            <a:off x="749808" y="2432304"/>
             <a:ext cx="384048" cy="384048"/>
           </a:xfrm>
           <a:prstGeom prst="ellipse">
@@ -13827,7 +14791,7 @@
         </p:nvSpPr>
         <p:spPr>
           <a:xfrm>
-            <a:off x="749808" y="2633472"/>
+            <a:off x="749808" y="2432304"/>
             <a:ext cx="384048" cy="384048"/>
           </a:xfrm>
           <a:prstGeom prst="rect">
@@ -13866,8 +14830,8 @@
         </p:nvSpPr>
         <p:spPr>
           <a:xfrm>
-            <a:off x="1298448" y="2432304"/>
-            <a:ext cx="10143439" cy="786384"/>
+            <a:off x="1298448" y="2298192"/>
+            <a:ext cx="10143439" cy="652272"/>
           </a:xfrm>
           <a:prstGeom prst="rect">
             <a:avLst/>
@@ -13891,7 +14855,7 @@
                 <a:ea typeface="Calibri" pitchFamily="34" charset="-122"/>
                 <a:cs typeface="Calibri" pitchFamily="34" charset="-120"/>
               </a:rPr>
-              <a:t>Immunoassay design &amp; pitfalls</a:t>
+              <a:t>Immunoassay pitfalls</a:t>
             </a:r>
             <a:pPr algn="l" indent="0" marL="0">
               <a:buNone/>
@@ -13905,7 +14869,7 @@
                 <a:ea typeface="Calibri" pitchFamily="34" charset="-122"/>
                 <a:cs typeface="Calibri" pitchFamily="34" charset="-120"/>
               </a:rPr>
-              <a:t>   —  sandwich vs competitive; hook, heterophile, biotin</a:t>
+              <a:t>   —  hook, heterophile, biotin, macro-analytes</a:t>
             </a:r>
             <a:endParaRPr lang="en-US" sz="1400" dirty="0"/>
           </a:p>
@@ -13919,12 +14883,12 @@
         </p:nvSpPr>
         <p:spPr>
           <a:xfrm>
-            <a:off x="566928" y="3383280"/>
-            <a:ext cx="11057839" cy="786384"/>
+            <a:off x="566928" y="3115056"/>
+            <a:ext cx="11057839" cy="652272"/>
           </a:xfrm>
           <a:prstGeom prst="roundRect">
             <a:avLst>
-              <a:gd name="adj" fmla="val 10465"/>
+              <a:gd name="adj" fmla="val 12617"/>
             </a:avLst>
           </a:prstGeom>
           <a:solidFill>
@@ -13948,7 +14912,7 @@
         </p:nvSpPr>
         <p:spPr>
           <a:xfrm>
-            <a:off x="749808" y="3584448"/>
+            <a:off x="749808" y="3249168"/>
             <a:ext cx="384048" cy="384048"/>
           </a:xfrm>
           <a:prstGeom prst="ellipse">
@@ -13975,7 +14939,7 @@
         </p:nvSpPr>
         <p:spPr>
           <a:xfrm>
-            <a:off x="749808" y="3584448"/>
+            <a:off x="749808" y="3249168"/>
             <a:ext cx="384048" cy="384048"/>
           </a:xfrm>
           <a:prstGeom prst="rect">
@@ -14014,8 +14978,8 @@
         </p:nvSpPr>
         <p:spPr>
           <a:xfrm>
-            <a:off x="1298448" y="3383280"/>
-            <a:ext cx="10143439" cy="786384"/>
+            <a:off x="1298448" y="3115056"/>
+            <a:ext cx="10143439" cy="652272"/>
           </a:xfrm>
           <a:prstGeom prst="rect">
             <a:avLst/>
@@ -14067,12 +15031,12 @@
         </p:nvSpPr>
         <p:spPr>
           <a:xfrm>
-            <a:off x="566928" y="4334256"/>
-            <a:ext cx="11057839" cy="786384"/>
+            <a:off x="566928" y="3931920"/>
+            <a:ext cx="11057839" cy="652272"/>
           </a:xfrm>
           <a:prstGeom prst="roundRect">
             <a:avLst>
-              <a:gd name="adj" fmla="val 10465"/>
+              <a:gd name="adj" fmla="val 12617"/>
             </a:avLst>
           </a:prstGeom>
           <a:solidFill>
@@ -14089,7 +15053,7 @@
         </p:nvSpPr>
         <p:spPr>
           <a:xfrm>
-            <a:off x="749808" y="4535424"/>
+            <a:off x="749808" y="4066032"/>
             <a:ext cx="384048" cy="384048"/>
           </a:xfrm>
           <a:prstGeom prst="ellipse">
@@ -14116,7 +15080,7 @@
         </p:nvSpPr>
         <p:spPr>
           <a:xfrm>
-            <a:off x="749808" y="4535424"/>
+            <a:off x="749808" y="4066032"/>
             <a:ext cx="384048" cy="384048"/>
           </a:xfrm>
           <a:prstGeom prst="rect">
@@ -14155,8 +15119,8 @@
         </p:nvSpPr>
         <p:spPr>
           <a:xfrm>
-            <a:off x="1298448" y="4334256"/>
-            <a:ext cx="10143439" cy="786384"/>
+            <a:off x="1298448" y="3931920"/>
+            <a:ext cx="10143439" cy="652272"/>
           </a:xfrm>
           <a:prstGeom prst="rect">
             <a:avLst/>
@@ -14180,7 +15144,7 @@
                 <a:ea typeface="Calibri" pitchFamily="34" charset="-122"/>
                 <a:cs typeface="Calibri" pitchFamily="34" charset="-120"/>
               </a:rPr>
-              <a:t>The testing cycle &amp; QC</a:t>
+              <a:t>The testing cycle</a:t>
             </a:r>
             <a:pPr algn="l" indent="0" marL="0">
               <a:buNone/>
@@ -14208,12 +15172,12 @@
         </p:nvSpPr>
         <p:spPr>
           <a:xfrm>
-            <a:off x="566928" y="5285232"/>
-            <a:ext cx="11057839" cy="786384"/>
+            <a:off x="566928" y="4748784"/>
+            <a:ext cx="11057839" cy="652272"/>
           </a:xfrm>
           <a:prstGeom prst="roundRect">
             <a:avLst>
-              <a:gd name="adj" fmla="val 10465"/>
+              <a:gd name="adj" fmla="val 12617"/>
             </a:avLst>
           </a:prstGeom>
           <a:solidFill>
@@ -14237,7 +15201,7 @@
         </p:nvSpPr>
         <p:spPr>
           <a:xfrm>
-            <a:off x="749808" y="5486400"/>
+            <a:off x="749808" y="4882896"/>
             <a:ext cx="384048" cy="384048"/>
           </a:xfrm>
           <a:prstGeom prst="ellipse">
@@ -14264,7 +15228,7 @@
         </p:nvSpPr>
         <p:spPr>
           <a:xfrm>
-            <a:off x="749808" y="5486400"/>
+            <a:off x="749808" y="4882896"/>
             <a:ext cx="384048" cy="384048"/>
           </a:xfrm>
           <a:prstGeom prst="rect">
@@ -14303,8 +15267,8 @@
         </p:nvSpPr>
         <p:spPr>
           <a:xfrm>
-            <a:off x="1298448" y="5285232"/>
-            <a:ext cx="10143439" cy="786384"/>
+            <a:off x="1298448" y="4748784"/>
+            <a:ext cx="10143439" cy="652272"/>
           </a:xfrm>
           <a:prstGeom prst="rect">
             <a:avLst/>
@@ -14328,29 +15292,156 @@
                 <a:ea typeface="Calibri" pitchFamily="34" charset="-122"/>
                 <a:cs typeface="Calibri" pitchFamily="34" charset="-120"/>
               </a:rPr>
+              <a:t>Quality control</a:t>
+            </a:r>
+            <a:pPr algn="l" indent="0" marL="0">
+              <a:buNone/>
+            </a:pPr>
+            <a:r>
+              <a:rPr lang="en-US" sz="1200" dirty="0">
+                <a:solidFill>
+                  <a:srgbClr val="6B7B8A"/>
+                </a:solidFill>
+                <a:latin typeface="Calibri" pitchFamily="34" charset="0"/>
+                <a:ea typeface="Calibri" pitchFamily="34" charset="-122"/>
+                <a:cs typeface="Calibri" pitchFamily="34" charset="-120"/>
+              </a:rPr>
+              <a:t>   —  Levey-Jennings, Westgard, delta checks</a:t>
+            </a:r>
+            <a:endParaRPr lang="en-US" sz="1400" dirty="0"/>
+          </a:p>
+        </p:txBody>
+      </p:sp>
+      <p:sp>
+        <p:nvSpPr>
+          <p:cNvPr id="24" name="Shape 22"/>
+          <p:cNvSpPr/>
+          <p:nvPr/>
+        </p:nvSpPr>
+        <p:spPr>
+          <a:xfrm>
+            <a:off x="566928" y="5565648"/>
+            <a:ext cx="11057839" cy="652272"/>
+          </a:xfrm>
+          <a:prstGeom prst="roundRect">
+            <a:avLst>
+              <a:gd name="adj" fmla="val 12617"/>
+            </a:avLst>
+          </a:prstGeom>
+          <a:solidFill>
+            <a:srgbClr val="FFFFFF"/>
+          </a:solidFill>
+          <a:ln/>
+        </p:spPr>
+      </p:sp>
+      <p:sp>
+        <p:nvSpPr>
+          <p:cNvPr id="25" name="Shape 23"/>
+          <p:cNvSpPr/>
+          <p:nvPr/>
+        </p:nvSpPr>
+        <p:spPr>
+          <a:xfrm>
+            <a:off x="749808" y="5699760"/>
+            <a:ext cx="384048" cy="384048"/>
+          </a:xfrm>
+          <a:prstGeom prst="ellipse">
+            <a:avLst/>
+          </a:prstGeom>
+          <a:solidFill>
+            <a:srgbClr val="1565C0"/>
+          </a:solidFill>
+          <a:ln/>
+          <a:effectLst>
+            <a:outerShdw sx="100000" sy="100000" kx="0" ky="0" algn="bl" rotWithShape="0" blurRad="88900" dist="25400" dir="5400000">
+              <a:srgbClr val="22303C">
+                <a:alpha val="12000"/>
+              </a:srgbClr>
+            </a:outerShdw>
+          </a:effectLst>
+        </p:spPr>
+      </p:sp>
+      <p:sp>
+        <p:nvSpPr>
+          <p:cNvPr id="26" name="Text 24"/>
+          <p:cNvSpPr/>
+          <p:nvPr/>
+        </p:nvSpPr>
+        <p:spPr>
+          <a:xfrm>
+            <a:off x="749808" y="5699760"/>
+            <a:ext cx="384048" cy="384048"/>
+          </a:xfrm>
+          <a:prstGeom prst="rect">
+            <a:avLst/>
+          </a:prstGeom>
+          <a:noFill/>
+          <a:ln/>
+        </p:spPr>
+        <p:txBody>
+          <a:bodyPr wrap="square" lIns="0" tIns="0" rIns="0" bIns="0" rtlCol="0" anchor="ctr"/>
+          <a:lstStyle/>
+          <a:p>
+            <a:pPr algn="ctr" indent="0" marL="0">
+              <a:buNone/>
+            </a:pPr>
+            <a:r>
+              <a:rPr lang="en-US" sz="1500" b="1" dirty="0">
+                <a:solidFill>
+                  <a:srgbClr val="FFFFFF"/>
+                </a:solidFill>
+                <a:latin typeface="Calibri" pitchFamily="34" charset="0"/>
+                <a:ea typeface="Calibri" pitchFamily="34" charset="-122"/>
+                <a:cs typeface="Calibri" pitchFamily="34" charset="-120"/>
+              </a:rPr>
+              <a:t>6</a:t>
+            </a:r>
+            <a:endParaRPr lang="en-US" sz="1500" dirty="0"/>
+          </a:p>
+        </p:txBody>
+      </p:sp>
+      <p:sp>
+        <p:nvSpPr>
+          <p:cNvPr id="27" name="Text 25"/>
+          <p:cNvSpPr/>
+          <p:nvPr/>
+        </p:nvSpPr>
+        <p:spPr>
+          <a:xfrm>
+            <a:off x="1298448" y="5565648"/>
+            <a:ext cx="10143439" cy="652272"/>
+          </a:xfrm>
+          <a:prstGeom prst="rect">
+            <a:avLst/>
+          </a:prstGeom>
+          <a:noFill/>
+          <a:ln/>
+        </p:spPr>
+        <p:txBody>
+          <a:bodyPr wrap="square" lIns="0" tIns="0" rIns="0" bIns="0" rtlCol="0" anchor="ctr"/>
+          <a:lstStyle/>
+          <a:p>
+            <a:pPr algn="l" indent="0" marL="0">
+              <a:buNone/>
+            </a:pPr>
+            <a:r>
+              <a:rPr lang="en-US" sz="1400" b="1" dirty="0">
+                <a:solidFill>
+                  <a:srgbClr val="1B2A38"/>
+                </a:solidFill>
+                <a:latin typeface="Calibri" pitchFamily="34" charset="0"/>
+                <a:ea typeface="Calibri" pitchFamily="34" charset="-122"/>
+                <a:cs typeface="Calibri" pitchFamily="34" charset="-120"/>
+              </a:rPr>
               <a:t>Cases &amp; board review</a:t>
             </a:r>
-            <a:pPr algn="l" indent="0" marL="0">
-              <a:buNone/>
-            </a:pPr>
-            <a:r>
-              <a:rPr lang="en-US" sz="1200" dirty="0">
-                <a:solidFill>
-                  <a:srgbClr val="6B7B8A"/>
-                </a:solidFill>
-                <a:latin typeface="Calibri" pitchFamily="34" charset="0"/>
-                <a:ea typeface="Calibri" pitchFamily="34" charset="-122"/>
-                <a:cs typeface="Calibri" pitchFamily="34" charset="-120"/>
-              </a:rPr>
-              <a:t>   —  recognizing the impossible result</a:t>
-            </a:r>
             <a:endParaRPr lang="en-US" sz="1400" dirty="0"/>
           </a:p>
         </p:txBody>
       </p:sp>
       <p:sp>
         <p:nvSpPr>
-          <p:cNvPr id="24" name="Text 22"/>
+          <p:cNvPr id="28" name="Text 26"/>
           <p:cNvSpPr/>
           <p:nvPr/>
         </p:nvSpPr>
@@ -14389,7 +15480,7 @@
       </p:sp>
       <p:sp>
         <p:nvSpPr>
-          <p:cNvPr id="25" name="Text 23"/>
+          <p:cNvPr id="29" name="Text 27"/>
           <p:cNvSpPr/>
           <p:nvPr/>
         </p:nvSpPr>
@@ -14751,7 +15842,7 @@
                 <a:ea typeface="Calibri" pitchFamily="34" charset="-122"/>
                 <a:cs typeface="Calibri" pitchFamily="34" charset="-120"/>
               </a:rPr>
-              <a:t>Spectrophotometry &amp; Chromatography–MS</a:t>
+              <a:t>Spectrophotometry</a:t>
             </a:r>
             <a:endParaRPr lang="en-US" sz="3000" dirty="0"/>
           </a:p>
@@ -14819,7 +15910,7 @@
                 <a:ea typeface="Calibri" pitchFamily="34" charset="-122"/>
                 <a:cs typeface="Calibri" pitchFamily="34" charset="-120"/>
               </a:rPr>
-              <a:t>SPECTROPHOTOMETRY</a:t>
+              <a:t>PRINCIPLE</a:t>
             </a:r>
             <a:endParaRPr lang="en-US" sz="1200" dirty="0"/>
           </a:p>
@@ -14862,7 +15953,7 @@
                 <a:ea typeface="Calibri" pitchFamily="34" charset="-122"/>
                 <a:cs typeface="Calibri" pitchFamily="34" charset="-120"/>
               </a:rPr>
-              <a:t>Beer-Lambert law: absorbance is proportional to analyte concentration and path length.</a:t>
+              <a:t>Beer-Lambert law: absorbance ∝ concentration × path length.</a:t>
             </a:r>
             <a:endParaRPr lang="en-US" sz="1250" dirty="0"/>
           </a:p>
@@ -14883,7 +15974,7 @@
                 <a:ea typeface="Calibri" pitchFamily="34" charset="-122"/>
                 <a:cs typeface="Calibri" pitchFamily="34" charset="-120"/>
               </a:rPr>
-              <a:t>The basis of most routine chemistry (enzymatic and colorimetric assays).</a:t>
+              <a:t>The workhorse of routine chemistry (enzymatic and colorimetric assays).</a:t>
             </a:r>
             <a:endParaRPr lang="en-US" sz="1250" dirty="0"/>
           </a:p>
@@ -14904,7 +15995,7 @@
                 <a:ea typeface="Calibri" pitchFamily="34" charset="-122"/>
                 <a:cs typeface="Calibri" pitchFamily="34" charset="-120"/>
               </a:rPr>
-              <a:t>Endpoint vs kinetic (rate) measurements; enzyme activity is measured kinetically.</a:t>
+              <a:t>Endpoint vs kinetic (rate) measurement — enzyme activity is kinetic.</a:t>
             </a:r>
             <a:endParaRPr lang="en-US" sz="1250" dirty="0"/>
           </a:p>
@@ -14925,7 +16016,7 @@
                 <a:ea typeface="Calibri" pitchFamily="34" charset="-122"/>
                 <a:cs typeface="Calibri" pitchFamily="34" charset="-120"/>
               </a:rPr>
-              <a:t>Turbidity from lipemia and color from hemolysis/icterus distort absorbance.</a:t>
+              <a:t>Bichromatic/blank correction reduces interference.</a:t>
             </a:r>
             <a:endParaRPr lang="en-US" sz="1250" dirty="0"/>
           </a:p>
@@ -14993,7 +16084,7 @@
                 <a:ea typeface="Calibri" pitchFamily="34" charset="-122"/>
                 <a:cs typeface="Calibri" pitchFamily="34" charset="-120"/>
               </a:rPr>
-              <a:t>CHROMATOGRAPHY &amp; MASS SPECTROMETRY</a:t>
+              <a:t>WHERE IT FAILS</a:t>
             </a:r>
             <a:endParaRPr lang="en-US" sz="1200" dirty="0"/>
           </a:p>
@@ -15036,7 +16127,7 @@
                 <a:ea typeface="Calibri" pitchFamily="34" charset="-122"/>
                 <a:cs typeface="Calibri" pitchFamily="34" charset="-120"/>
               </a:rPr>
-              <a:t>LC-MS/MS and GC-MS separate compounds then identify them by mass-to-charge.</a:t>
+              <a:t>Turbidity from lipemia scatters light; hemoglobin and bilirubin add absorbance.</a:t>
             </a:r>
             <a:endParaRPr lang="en-US" sz="1250" dirty="0"/>
           </a:p>
@@ -15057,7 +16148,7 @@
                 <a:ea typeface="Calibri" pitchFamily="34" charset="-122"/>
                 <a:cs typeface="Calibri" pitchFamily="34" charset="-120"/>
               </a:rPr>
-              <a:t>High specificity — the confirmatory standard in toxicology and for steroids, drugs, metanephrines.</a:t>
+              <a:t>Automated HIL indices flag affected samples.</a:t>
             </a:r>
             <a:endParaRPr lang="en-US" sz="1250" dirty="0"/>
           </a:p>
@@ -15078,7 +16169,7 @@
                 <a:ea typeface="Calibri" pitchFamily="34" charset="-122"/>
                 <a:cs typeface="Calibri" pitchFamily="34" charset="-120"/>
               </a:rPr>
-              <a:t>Resolves many immunoassay interferences (no antibody cross-reactivity).</a:t>
+              <a:t>Carryover between samples; reagent deterioration.</a:t>
             </a:r>
             <a:endParaRPr lang="en-US" sz="1250" dirty="0"/>
           </a:p>
@@ -15099,7 +16190,7 @@
                 <a:ea typeface="Calibri" pitchFamily="34" charset="-122"/>
                 <a:cs typeface="Calibri" pitchFamily="34" charset="-120"/>
               </a:rPr>
-              <a:t>Labor-intensive and expertise-dependent.</a:t>
+              <a:t>Linearity limits at very high concentrations.</a:t>
             </a:r>
             <a:endParaRPr lang="en-US" sz="1250" dirty="0"/>
           </a:p>
@@ -15412,7 +16503,7 @@
                 <a:ea typeface="Calibri" pitchFamily="34" charset="-122"/>
                 <a:cs typeface="Calibri" pitchFamily="34" charset="-120"/>
               </a:rPr>
-              <a:t>Original schematic. In a sandwich assay, signal tracks analyte — until extreme concentrations saturate the antibodies and the signal paradoxically falls (high-dose hook).</a:t>
+              <a:t>Original schematic. In a sandwich assay, signal tracks analyte — until extreme concentrations saturate the antibodies and the signal paradoxically falls.</a:t>
             </a:r>
             <a:endParaRPr lang="en-US" sz="1150" dirty="0"/>
           </a:p>
@@ -15760,7 +16851,7 @@
                 <a:ea typeface="Calibri" pitchFamily="34" charset="-122"/>
                 <a:cs typeface="Calibri" pitchFamily="34" charset="-120"/>
               </a:rPr>
-              <a:t>Signal is directly proportional to analyte — used for larger molecules (TSH, hCG, troponin).</a:t>
+              <a:t>Signal directly proportional to analyte — larger molecules (TSH, hCG, troponin).</a:t>
             </a:r>
             <a:endParaRPr lang="en-US" sz="1250" dirty="0"/>
           </a:p>
@@ -15781,7 +16872,7 @@
                 <a:ea typeface="Calibri" pitchFamily="34" charset="-122"/>
                 <a:cs typeface="Calibri" pitchFamily="34" charset="-120"/>
               </a:rPr>
-              <a:t>Vulnerable to the high-dose hook effect at extreme concentrations.</a:t>
+              <a:t>Vulnerable to the high-dose hook effect.</a:t>
             </a:r>
             <a:endParaRPr lang="en-US" sz="1250" dirty="0"/>
           </a:p>
@@ -15802,7 +16893,7 @@
                 <a:ea typeface="Calibri" pitchFamily="34" charset="-122"/>
                 <a:cs typeface="Calibri" pitchFamily="34" charset="-120"/>
               </a:rPr>
-              <a:t>Needs two epitopes, so very small analytes can’t use it.</a:t>
+              <a:t>Needs two epitopes; not for very small analytes.</a:t>
             </a:r>
             <a:endParaRPr lang="en-US" sz="1250" dirty="0"/>
           </a:p>
@@ -15934,7 +17025,7 @@
                 <a:ea typeface="Calibri" pitchFamily="34" charset="-122"/>
                 <a:cs typeface="Calibri" pitchFamily="34" charset="-120"/>
               </a:rPr>
-              <a:t>Signal is INVERSELY proportional to analyte — used for small molecules (cortisol, drugs, T4).</a:t>
+              <a:t>Signal INVERSELY proportional — small molecules (cortisol, T4, drugs).</a:t>
             </a:r>
             <a:endParaRPr lang="en-US" sz="1250" dirty="0"/>
           </a:p>
@@ -15955,7 +17046,7 @@
                 <a:ea typeface="Calibri" pitchFamily="34" charset="-122"/>
                 <a:cs typeface="Calibri" pitchFamily="34" charset="-120"/>
               </a:rPr>
-              <a:t>No hook effect in the same way, but cross-reactivity matters.</a:t>
+              <a:t>Cross-reactivity is the main concern.</a:t>
             </a:r>
             <a:endParaRPr lang="en-US" sz="1250" dirty="0"/>
           </a:p>
@@ -15976,7 +17067,7 @@
                 <a:ea typeface="Calibri" pitchFamily="34" charset="-122"/>
                 <a:cs typeface="Calibri" pitchFamily="34" charset="-120"/>
               </a:rPr>
-              <a:t>Calibration curves are nonlinear.</a:t>
+              <a:t>Nonlinear calibration curves.</a:t>
             </a:r>
             <a:endParaRPr lang="en-US" sz="1250" dirty="0"/>
           </a:p>
@@ -16153,7 +17244,7 @@
                 <a:ea typeface="Calibri" pitchFamily="34" charset="-122"/>
                 <a:cs typeface="Calibri" pitchFamily="34" charset="-120"/>
               </a:rPr>
-              <a:t>CLINICAL CHEMISTRY   ·   IMMUNOASSAY</a:t>
+              <a:t>CLINICAL CHEMISTRY   ·   METHODS</a:t>
             </a:r>
             <a:endParaRPr lang="en-US" sz="1100" dirty="0"/>
           </a:p>
@@ -16192,7 +17283,7 @@
                 <a:ea typeface="Calibri" pitchFamily="34" charset="-122"/>
                 <a:cs typeface="Calibri" pitchFamily="34" charset="-120"/>
               </a:rPr>
-              <a:t>Immunoassay Interferences You Must Know</a:t>
+              <a:t>Chromatography &amp; Mass Spectrometry</a:t>
             </a:r>
             <a:endParaRPr lang="en-US" sz="3000" dirty="0"/>
           </a:p>
@@ -16260,7 +17351,7 @@
                 <a:ea typeface="Calibri" pitchFamily="34" charset="-122"/>
                 <a:cs typeface="Calibri" pitchFamily="34" charset="-120"/>
               </a:rPr>
-              <a:t>ANTIBODY INTERFERENCES</a:t>
+              <a:t>HOW IT WORKS</a:t>
             </a:r>
             <a:endParaRPr lang="en-US" sz="1200" dirty="0"/>
           </a:p>
@@ -16303,7 +17394,7 @@
                 <a:ea typeface="Calibri" pitchFamily="34" charset="-122"/>
                 <a:cs typeface="Calibri" pitchFamily="34" charset="-120"/>
               </a:rPr>
-              <a:t>Heterophile antibodies (e.g., HAMA) bridge capture and detection antibodies → false positive/elevation.</a:t>
+              <a:t>Chromatography separates compounds; mass spectrometry identifies by mass-to-charge.</a:t>
             </a:r>
             <a:endParaRPr lang="en-US" sz="1250" dirty="0"/>
           </a:p>
@@ -16324,7 +17415,7 @@
                 <a:ea typeface="Calibri" pitchFamily="34" charset="-122"/>
                 <a:cs typeface="Calibri" pitchFamily="34" charset="-120"/>
               </a:rPr>
-              <a:t>Suspect when a result doesn’t fit the clinical picture (e.g., implausibly high hCG, troponin).</a:t>
+              <a:t>LC-MS/MS and GC-MS are the confirmatory standard (tox, steroids, metanephrines).</a:t>
             </a:r>
             <a:endParaRPr lang="en-US" sz="1250" dirty="0"/>
           </a:p>
@@ -16345,7 +17436,7 @@
                 <a:ea typeface="Calibri" pitchFamily="34" charset="-122"/>
                 <a:cs typeface="Calibri" pitchFamily="34" charset="-120"/>
               </a:rPr>
-              <a:t>Confirm with serial dilution (non-linearity), heterophile blocking tubes, or an alternative platform.</a:t>
+              <a:t>High specificity — resolves immunoassay cross-reactivity.</a:t>
             </a:r>
             <a:endParaRPr lang="en-US" sz="1250" dirty="0"/>
           </a:p>
@@ -16366,7 +17457,7 @@
                 <a:ea typeface="Calibri" pitchFamily="34" charset="-122"/>
                 <a:cs typeface="Calibri" pitchFamily="34" charset="-120"/>
               </a:rPr>
-              <a:t>Macro-analytes (macroprolactin, macro-CK) cause spurious elevations.</a:t>
+              <a:t>Quantitative with isotope-labeled internal standards.</a:t>
             </a:r>
             <a:endParaRPr lang="en-US" sz="1250" dirty="0"/>
           </a:p>
@@ -16434,7 +17525,7 @@
                 <a:ea typeface="Calibri" pitchFamily="34" charset="-122"/>
                 <a:cs typeface="Calibri" pitchFamily="34" charset="-120"/>
               </a:rPr>
-              <a:t>BIOTIN &amp; HOOK</a:t>
+              <a:t>TRADE-OFFS</a:t>
             </a:r>
             <a:endParaRPr lang="en-US" sz="1200" dirty="0"/>
           </a:p>
@@ -16477,7 +17568,7 @@
                 <a:ea typeface="Calibri" pitchFamily="34" charset="-122"/>
                 <a:cs typeface="Calibri" pitchFamily="34" charset="-120"/>
               </a:rPr>
-              <a:t>High-dose biotin (supplements) interferes with streptavidin-biotin assays — can falsely raise or lower results by design.</a:t>
+              <a:t>Labor- and expertise-intensive; longer turnaround.</a:t>
             </a:r>
             <a:endParaRPr lang="en-US" sz="1250" dirty="0"/>
           </a:p>
@@ -16498,7 +17589,7 @@
                 <a:ea typeface="Calibri" pitchFamily="34" charset="-122"/>
                 <a:cs typeface="Calibri" pitchFamily="34" charset="-120"/>
               </a:rPr>
-              <a:t>Classic pattern: low TSH with high free T4 mimicking hyperthyroidism.</a:t>
+              <a:t>Ion suppression/matrix effects must be controlled.</a:t>
             </a:r>
             <a:endParaRPr lang="en-US" sz="1250" dirty="0"/>
           </a:p>
@@ -16519,7 +17610,7 @@
                 <a:ea typeface="Calibri" pitchFamily="34" charset="-122"/>
                 <a:cs typeface="Calibri" pitchFamily="34" charset="-120"/>
               </a:rPr>
-              <a:t>The hook effect makes a very high analyte read falsely low — dilute and re-assay if suspected.</a:t>
+              <a:t>Often laboratory-developed — full validation required.</a:t>
             </a:r>
             <a:endParaRPr lang="en-US" sz="1250" dirty="0"/>
           </a:p>
@@ -16540,7 +17631,7 @@
                 <a:ea typeface="Calibri" pitchFamily="34" charset="-122"/>
                 <a:cs typeface="Calibri" pitchFamily="34" charset="-120"/>
               </a:rPr>
-              <a:t>Always reconcile a surprising value with the clinical context.</a:t>
+              <a:t>Reserved for confirmation and specialized analytes.</a:t>
             </a:r>
             <a:endParaRPr lang="en-US" sz="1250" dirty="0"/>
           </a:p>

--- a/decks/Chem_01_Analytic-Techniques-and-Error.pptx
+++ b/decks/Chem_01_Analytic-Techniques-and-Error.pptx
@@ -27,9 +27,13 @@
     <p:sldId id="275" r:id="rId21"/>
     <p:sldId id="276" r:id="rId22"/>
     <p:sldId id="277" r:id="rId23"/>
+    <p:sldId id="286" r:id="rId37"/>
     <p:sldId id="278" r:id="rId24"/>
+    <p:sldId id="285" r:id="rId36"/>
     <p:sldId id="279" r:id="rId25"/>
+    <p:sldId id="284" r:id="rId35"/>
     <p:sldId id="280" r:id="rId26"/>
+    <p:sldId id="283" r:id="rId34"/>
     <p:sldId id="281" r:id="rId27"/>
     <p:sldId id="282" r:id="rId28"/>
   </p:sldIdLst>
@@ -3210,6 +3214,10 @@
           </a:solidFill>
           <a:ln/>
         </p:spPr>
+        <p:txBody>
+          <a:bodyPr/>
+          <a:p/>
+        </p:txBody>
       </p:sp>
       <p:sp>
         <p:nvSpPr>
@@ -3232,6 +3240,10 @@
           </a:solidFill>
           <a:ln/>
         </p:spPr>
+        <p:txBody>
+          <a:bodyPr/>
+          <a:p/>
+        </p:txBody>
       </p:sp>
       <p:sp>
         <p:nvSpPr>
@@ -3254,6 +3266,10 @@
           </a:solidFill>
           <a:ln/>
         </p:spPr>
+        <p:txBody>
+          <a:bodyPr/>
+          <a:p/>
+        </p:txBody>
       </p:sp>
       <p:sp>
         <p:nvSpPr>
@@ -3276,6 +3292,10 @@
           </a:solidFill>
           <a:ln/>
         </p:spPr>
+        <p:txBody>
+          <a:bodyPr/>
+          <a:p/>
+        </p:txBody>
       </p:sp>
       <p:sp>
         <p:nvSpPr>
@@ -3607,6 +3627,10 @@
           </a:solidFill>
           <a:ln/>
         </p:spPr>
+        <p:txBody>
+          <a:bodyPr/>
+          <a:p/>
+        </p:txBody>
       </p:sp>
       <p:sp>
         <p:nvSpPr>
@@ -3629,6 +3653,10 @@
           </a:solidFill>
           <a:ln/>
         </p:spPr>
+        <p:txBody>
+          <a:bodyPr/>
+          <a:p/>
+        </p:txBody>
       </p:sp>
       <p:sp>
         <p:nvSpPr>
@@ -3885,6 +3913,10 @@
             </a:outerShdw>
           </a:effectLst>
         </p:spPr>
+        <p:txBody>
+          <a:bodyPr/>
+          <a:p/>
+        </p:txBody>
       </p:sp>
       <p:sp>
         <p:nvSpPr>
@@ -4059,6 +4091,10 @@
             </a:outerShdw>
           </a:effectLst>
         </p:spPr>
+        <p:txBody>
+          <a:bodyPr/>
+          <a:p/>
+        </p:txBody>
       </p:sp>
       <p:sp>
         <p:nvSpPr>
@@ -5770,6 +5806,10 @@
             </a:outerShdw>
           </a:effectLst>
         </p:spPr>
+        <p:txBody>
+          <a:bodyPr/>
+          <a:p/>
+        </p:txBody>
       </p:sp>
       <p:sp>
         <p:nvSpPr>
@@ -5850,6 +5890,10 @@
             <a:tailEnd type="triangle"/>
           </a:ln>
         </p:spPr>
+        <p:txBody>
+          <a:bodyPr/>
+          <a:p/>
+        </p:txBody>
       </p:sp>
       <p:sp>
         <p:nvSpPr>
@@ -5884,6 +5928,10 @@
             </a:outerShdw>
           </a:effectLst>
         </p:spPr>
+        <p:txBody>
+          <a:bodyPr/>
+          <a:p/>
+        </p:txBody>
       </p:sp>
       <p:sp>
         <p:nvSpPr>
@@ -5964,6 +6012,10 @@
             <a:tailEnd type="triangle"/>
           </a:ln>
         </p:spPr>
+        <p:txBody>
+          <a:bodyPr/>
+          <a:p/>
+        </p:txBody>
       </p:sp>
       <p:sp>
         <p:nvSpPr>
@@ -5998,6 +6050,10 @@
             </a:outerShdw>
           </a:effectLst>
         </p:spPr>
+        <p:txBody>
+          <a:bodyPr/>
+          <a:p/>
+        </p:txBody>
       </p:sp>
       <p:sp>
         <p:nvSpPr>
@@ -6083,6 +6139,10 @@
             </a:outerShdw>
           </a:effectLst>
         </p:spPr>
+        <p:txBody>
+          <a:bodyPr/>
+          <a:p/>
+        </p:txBody>
       </p:sp>
       <p:sp>
         <p:nvSpPr>
@@ -6434,6 +6494,10 @@
             </a:outerShdw>
           </a:effectLst>
         </p:spPr>
+        <p:txBody>
+          <a:bodyPr/>
+          <a:p/>
+        </p:txBody>
       </p:sp>
       <p:sp>
         <p:nvSpPr>
@@ -6608,6 +6672,10 @@
             </a:outerShdw>
           </a:effectLst>
         </p:spPr>
+        <p:txBody>
+          <a:bodyPr/>
+          <a:p/>
+        </p:txBody>
       </p:sp>
       <p:sp>
         <p:nvSpPr>
@@ -6913,6 +6981,10 @@
           </a:solidFill>
           <a:ln/>
         </p:spPr>
+        <p:txBody>
+          <a:bodyPr/>
+          <a:p/>
+        </p:txBody>
       </p:sp>
       <p:sp>
         <p:nvSpPr>
@@ -6935,6 +7007,10 @@
           </a:solidFill>
           <a:ln/>
         </p:spPr>
+        <p:txBody>
+          <a:bodyPr/>
+          <a:p/>
+        </p:txBody>
       </p:sp>
       <p:sp>
         <p:nvSpPr>
@@ -7191,6 +7267,10 @@
             </a:outerShdw>
           </a:effectLst>
         </p:spPr>
+        <p:txBody>
+          <a:bodyPr/>
+          <a:p/>
+        </p:txBody>
       </p:sp>
       <p:sp>
         <p:nvSpPr>
@@ -7301,6 +7381,10 @@
             </a:outerShdw>
           </a:effectLst>
         </p:spPr>
+        <p:txBody>
+          <a:bodyPr/>
+          <a:p/>
+        </p:txBody>
       </p:sp>
       <p:sp>
         <p:nvSpPr>
@@ -7730,6 +7814,10 @@
             </a:outerShdw>
           </a:effectLst>
         </p:spPr>
+        <p:txBody>
+          <a:bodyPr/>
+          <a:p/>
+        </p:txBody>
       </p:sp>
       <p:sp>
         <p:nvSpPr>
@@ -8056,6 +8144,10 @@
             </a:outerShdw>
           </a:effectLst>
         </p:spPr>
+        <p:txBody>
+          <a:bodyPr/>
+          <a:p/>
+        </p:txBody>
       </p:sp>
       <p:sp>
         <p:nvSpPr>
@@ -8166,6 +8258,10 @@
             </a:outerShdw>
           </a:effectLst>
         </p:spPr>
+        <p:txBody>
+          <a:bodyPr/>
+          <a:p/>
+        </p:txBody>
       </p:sp>
       <p:sp>
         <p:nvSpPr>
@@ -8595,6 +8691,10 @@
             </a:outerShdw>
           </a:effectLst>
         </p:spPr>
+        <p:txBody>
+          <a:bodyPr/>
+          <a:p/>
+        </p:txBody>
       </p:sp>
       <p:sp>
         <p:nvSpPr>
@@ -8921,6 +9021,10 @@
             </a:outerShdw>
           </a:effectLst>
         </p:spPr>
+        <p:txBody>
+          <a:bodyPr/>
+          <a:p/>
+        </p:txBody>
       </p:sp>
       <p:sp>
         <p:nvSpPr>
@@ -9028,6 +9132,10 @@
             </a:outerShdw>
           </a:effectLst>
         </p:spPr>
+        <p:txBody>
+          <a:bodyPr/>
+          <a:p/>
+        </p:txBody>
       </p:sp>
       <p:sp>
         <p:nvSpPr>
@@ -9135,6 +9243,10 @@
             </a:outerShdw>
           </a:effectLst>
         </p:spPr>
+        <p:txBody>
+          <a:bodyPr/>
+          <a:p/>
+        </p:txBody>
       </p:sp>
       <p:sp>
         <p:nvSpPr>
@@ -9242,6 +9354,10 @@
             </a:outerShdw>
           </a:effectLst>
         </p:spPr>
+        <p:txBody>
+          <a:bodyPr/>
+          <a:p/>
+        </p:txBody>
       </p:sp>
       <p:sp>
         <p:nvSpPr>
@@ -9572,6 +9688,10 @@
             </a:outerShdw>
           </a:effectLst>
         </p:spPr>
+        <p:txBody>
+          <a:bodyPr/>
+          <a:p/>
+        </p:txBody>
       </p:sp>
       <p:sp>
         <p:nvSpPr>
@@ -9682,6 +9802,10 @@
             </a:outerShdw>
           </a:effectLst>
         </p:spPr>
+        <p:txBody>
+          <a:bodyPr/>
+          <a:p/>
+        </p:txBody>
       </p:sp>
       <p:sp>
         <p:nvSpPr>
@@ -10111,6 +10235,10 @@
             </a:outerShdw>
           </a:effectLst>
         </p:spPr>
+        <p:txBody>
+          <a:bodyPr/>
+          <a:p/>
+        </p:txBody>
       </p:sp>
       <p:sp>
         <p:nvSpPr>
@@ -10499,9 +10627,9 @@
               <a:buNone/>
             </a:pPr>
             <a:r>
-              <a:rPr lang="en-US" sz="1350" b="1" dirty="0">
-                <a:solidFill>
-                  <a:srgbClr val="0D4A92"/>
+              <a:rPr lang="en-US" sz="1350" b="0" dirty="0">
+                <a:solidFill>
+                  <a:srgbClr val="33444F"/>
                 </a:solidFill>
                 <a:latin typeface="Calibri" pitchFamily="34" charset="0"/>
                 <a:ea typeface="Calibri" pitchFamily="34" charset="-122"/>
@@ -10570,130 +10698,6 @@
               <a:t>E. Repeat without changes</a:t>
             </a:r>
             <a:endParaRPr lang="en-US" sz="1350" dirty="0"/>
-          </a:p>
-        </p:txBody>
-      </p:sp>
-      <p:sp>
-        <p:nvSpPr>
-          <p:cNvPr id="6" name="Shape 4"/>
-          <p:cNvSpPr/>
-          <p:nvPr/>
-        </p:nvSpPr>
-        <p:spPr>
-          <a:xfrm>
-            <a:off x="7201632" y="2395728"/>
-            <a:ext cx="4423136" cy="3246120"/>
-          </a:xfrm>
-          <a:prstGeom prst="roundRect">
-            <a:avLst>
-              <a:gd name="adj" fmla="val 2535"/>
-            </a:avLst>
-          </a:prstGeom>
-          <a:solidFill>
-            <a:srgbClr val="E7EFFA"/>
-          </a:solidFill>
-          <a:ln/>
-          <a:effectLst>
-            <a:outerShdw sx="100000" sy="100000" kx="0" ky="0" algn="bl" rotWithShape="0" blurRad="88900" dist="25400" dir="5400000">
-              <a:srgbClr val="22303C">
-                <a:alpha val="12000"/>
-              </a:srgbClr>
-            </a:outerShdw>
-          </a:effectLst>
-        </p:spPr>
-      </p:sp>
-      <p:sp>
-        <p:nvSpPr>
-          <p:cNvPr id="7" name="Text 5"/>
-          <p:cNvSpPr/>
-          <p:nvPr/>
-        </p:nvSpPr>
-        <p:spPr>
-          <a:xfrm>
-            <a:off x="7439376" y="2578608"/>
-            <a:ext cx="3965936" cy="457200"/>
-          </a:xfrm>
-          <a:prstGeom prst="rect">
-            <a:avLst/>
-          </a:prstGeom>
-          <a:noFill/>
-          <a:ln/>
-        </p:spPr>
-        <p:txBody>
-          <a:bodyPr wrap="square" lIns="0" tIns="0" rIns="0" bIns="0" rtlCol="0" anchor="ctr"/>
-          <a:lstStyle/>
-          <a:p>
-            <a:pPr indent="0" marL="0">
-              <a:buNone/>
-            </a:pPr>
-            <a:r>
-              <a:rPr lang="en-US" sz="1500" b="1" dirty="0">
-                <a:solidFill>
-                  <a:srgbClr val="1565C0"/>
-                </a:solidFill>
-                <a:latin typeface="Calibri" pitchFamily="34" charset="0"/>
-                <a:ea typeface="Calibri" pitchFamily="34" charset="-122"/>
-                <a:cs typeface="Calibri" pitchFamily="34" charset="-120"/>
-              </a:rPr>
-              <a:t>ANSWER  </a:t>
-            </a:r>
-            <a:pPr indent="0" marL="0">
-              <a:buNone/>
-            </a:pPr>
-            <a:r>
-              <a:rPr lang="en-US" sz="1500" b="1" dirty="0">
-                <a:solidFill>
-                  <a:srgbClr val="1B2A38"/>
-                </a:solidFill>
-                <a:latin typeface="Calibri" pitchFamily="34" charset="0"/>
-                <a:ea typeface="Calibri" pitchFamily="34" charset="-122"/>
-                <a:cs typeface="Calibri" pitchFamily="34" charset="-120"/>
-              </a:rPr>
-              <a:t>B — Dilute and re-assay (hook effect)</a:t>
-            </a:r>
-            <a:endParaRPr lang="en-US" sz="1500" dirty="0"/>
-          </a:p>
-        </p:txBody>
-      </p:sp>
-      <p:sp>
-        <p:nvSpPr>
-          <p:cNvPr id="8" name="Text 6"/>
-          <p:cNvSpPr/>
-          <p:nvPr/>
-        </p:nvSpPr>
-        <p:spPr>
-          <a:xfrm>
-            <a:off x="7439376" y="3127248"/>
-            <a:ext cx="3947648" cy="2377440"/>
-          </a:xfrm>
-          <a:prstGeom prst="rect">
-            <a:avLst/>
-          </a:prstGeom>
-          <a:noFill/>
-          <a:ln/>
-        </p:spPr>
-        <p:txBody>
-          <a:bodyPr wrap="square" lIns="0" tIns="0" rIns="0" bIns="0" rtlCol="0" anchor="t"/>
-          <a:lstStyle/>
-          <a:p>
-            <a:pPr algn="l" indent="0" marL="0">
-              <a:lnSpc>
-                <a:spcPct val="108000"/>
-              </a:lnSpc>
-              <a:buNone/>
-            </a:pPr>
-            <a:r>
-              <a:rPr lang="en-US" sz="1250" dirty="0">
-                <a:solidFill>
-                  <a:srgbClr val="33444F"/>
-                </a:solidFill>
-                <a:latin typeface="Calibri" pitchFamily="34" charset="0"/>
-                <a:ea typeface="Calibri" pitchFamily="34" charset="-122"/>
-                <a:cs typeface="Calibri" pitchFamily="34" charset="-120"/>
-              </a:rPr>
-              <a:t>Extremely high analyte saturates a sandwich assay’s antibodies and lowers signal (hook). Dilution relieves saturation and yields the true value.</a:t>
-            </a:r>
-            <a:endParaRPr lang="en-US" sz="1250" dirty="0"/>
           </a:p>
         </p:txBody>
       </p:sp>
@@ -11003,9 +11007,9 @@
               <a:buNone/>
             </a:pPr>
             <a:r>
-              <a:rPr lang="en-US" sz="1350" b="1" dirty="0">
-                <a:solidFill>
-                  <a:srgbClr val="0D4A92"/>
+              <a:rPr lang="en-US" sz="1350" b="0" dirty="0">
+                <a:solidFill>
+                  <a:srgbClr val="33444F"/>
                 </a:solidFill>
                 <a:latin typeface="Calibri" pitchFamily="34" charset="0"/>
                 <a:ea typeface="Calibri" pitchFamily="34" charset="-122"/>
@@ -11074,130 +11078,6 @@
               <a:t>E. TSH, free T4</a:t>
             </a:r>
             <a:endParaRPr lang="en-US" sz="1350" dirty="0"/>
-          </a:p>
-        </p:txBody>
-      </p:sp>
-      <p:sp>
-        <p:nvSpPr>
-          <p:cNvPr id="6" name="Shape 4"/>
-          <p:cNvSpPr/>
-          <p:nvPr/>
-        </p:nvSpPr>
-        <p:spPr>
-          <a:xfrm>
-            <a:off x="7201632" y="2395728"/>
-            <a:ext cx="4423136" cy="3246120"/>
-          </a:xfrm>
-          <a:prstGeom prst="roundRect">
-            <a:avLst>
-              <a:gd name="adj" fmla="val 2535"/>
-            </a:avLst>
-          </a:prstGeom>
-          <a:solidFill>
-            <a:srgbClr val="E7EFFA"/>
-          </a:solidFill>
-          <a:ln/>
-          <a:effectLst>
-            <a:outerShdw sx="100000" sy="100000" kx="0" ky="0" algn="bl" rotWithShape="0" blurRad="88900" dist="25400" dir="5400000">
-              <a:srgbClr val="22303C">
-                <a:alpha val="12000"/>
-              </a:srgbClr>
-            </a:outerShdw>
-          </a:effectLst>
-        </p:spPr>
-      </p:sp>
-      <p:sp>
-        <p:nvSpPr>
-          <p:cNvPr id="7" name="Text 5"/>
-          <p:cNvSpPr/>
-          <p:nvPr/>
-        </p:nvSpPr>
-        <p:spPr>
-          <a:xfrm>
-            <a:off x="7439376" y="2578608"/>
-            <a:ext cx="3965936" cy="457200"/>
-          </a:xfrm>
-          <a:prstGeom prst="rect">
-            <a:avLst/>
-          </a:prstGeom>
-          <a:noFill/>
-          <a:ln/>
-        </p:spPr>
-        <p:txBody>
-          <a:bodyPr wrap="square" lIns="0" tIns="0" rIns="0" bIns="0" rtlCol="0" anchor="ctr"/>
-          <a:lstStyle/>
-          <a:p>
-            <a:pPr indent="0" marL="0">
-              <a:buNone/>
-            </a:pPr>
-            <a:r>
-              <a:rPr lang="en-US" sz="1500" b="1" dirty="0">
-                <a:solidFill>
-                  <a:srgbClr val="1565C0"/>
-                </a:solidFill>
-                <a:latin typeface="Calibri" pitchFamily="34" charset="0"/>
-                <a:ea typeface="Calibri" pitchFamily="34" charset="-122"/>
-                <a:cs typeface="Calibri" pitchFamily="34" charset="-120"/>
-              </a:rPr>
-              <a:t>ANSWER  </a:t>
-            </a:r>
-            <a:pPr indent="0" marL="0">
-              <a:buNone/>
-            </a:pPr>
-            <a:r>
-              <a:rPr lang="en-US" sz="1500" b="1" dirty="0">
-                <a:solidFill>
-                  <a:srgbClr val="1B2A38"/>
-                </a:solidFill>
-                <a:latin typeface="Calibri" pitchFamily="34" charset="0"/>
-                <a:ea typeface="Calibri" pitchFamily="34" charset="-122"/>
-                <a:cs typeface="Calibri" pitchFamily="34" charset="-120"/>
-              </a:rPr>
-              <a:t>B — Potassium, LDH, AST, phosphate</a:t>
-            </a:r>
-            <a:endParaRPr lang="en-US" sz="1500" dirty="0"/>
-          </a:p>
-        </p:txBody>
-      </p:sp>
-      <p:sp>
-        <p:nvSpPr>
-          <p:cNvPr id="8" name="Text 6"/>
-          <p:cNvSpPr/>
-          <p:nvPr/>
-        </p:nvSpPr>
-        <p:spPr>
-          <a:xfrm>
-            <a:off x="7439376" y="3127248"/>
-            <a:ext cx="3947648" cy="2377440"/>
-          </a:xfrm>
-          <a:prstGeom prst="rect">
-            <a:avLst/>
-          </a:prstGeom>
-          <a:noFill/>
-          <a:ln/>
-        </p:spPr>
-        <p:txBody>
-          <a:bodyPr wrap="square" lIns="0" tIns="0" rIns="0" bIns="0" rtlCol="0" anchor="t"/>
-          <a:lstStyle/>
-          <a:p>
-            <a:pPr algn="l" indent="0" marL="0">
-              <a:lnSpc>
-                <a:spcPct val="108000"/>
-              </a:lnSpc>
-              <a:buNone/>
-            </a:pPr>
-            <a:r>
-              <a:rPr lang="en-US" sz="1250" dirty="0">
-                <a:solidFill>
-                  <a:srgbClr val="33444F"/>
-                </a:solidFill>
-                <a:latin typeface="Calibri" pitchFamily="34" charset="0"/>
-                <a:ea typeface="Calibri" pitchFamily="34" charset="-122"/>
-                <a:cs typeface="Calibri" pitchFamily="34" charset="-120"/>
-              </a:rPr>
-              <a:t>These are concentrated intracellularly; red-cell lysis releases them, producing concordant spurious elevations.</a:t>
-            </a:r>
-            <a:endParaRPr lang="en-US" sz="1250" dirty="0"/>
           </a:p>
         </p:txBody>
       </p:sp>
@@ -11507,9 +11387,9 @@
               <a:buNone/>
             </a:pPr>
             <a:r>
-              <a:rPr lang="en-US" sz="1350" b="1" dirty="0">
-                <a:solidFill>
-                  <a:srgbClr val="0D4A92"/>
+              <a:rPr lang="en-US" sz="1350" b="0" dirty="0">
+                <a:solidFill>
+                  <a:srgbClr val="33444F"/>
                 </a:solidFill>
                 <a:latin typeface="Calibri" pitchFamily="34" charset="0"/>
                 <a:ea typeface="Calibri" pitchFamily="34" charset="-122"/>
@@ -11578,130 +11458,6 @@
               <a:t>E. Clerical error</a:t>
             </a:r>
             <a:endParaRPr lang="en-US" sz="1350" dirty="0"/>
-          </a:p>
-        </p:txBody>
-      </p:sp>
-      <p:sp>
-        <p:nvSpPr>
-          <p:cNvPr id="6" name="Shape 4"/>
-          <p:cNvSpPr/>
-          <p:nvPr/>
-        </p:nvSpPr>
-        <p:spPr>
-          <a:xfrm>
-            <a:off x="7201632" y="2395728"/>
-            <a:ext cx="4423136" cy="3246120"/>
-          </a:xfrm>
-          <a:prstGeom prst="roundRect">
-            <a:avLst>
-              <a:gd name="adj" fmla="val 2535"/>
-            </a:avLst>
-          </a:prstGeom>
-          <a:solidFill>
-            <a:srgbClr val="E7EFFA"/>
-          </a:solidFill>
-          <a:ln/>
-          <a:effectLst>
-            <a:outerShdw sx="100000" sy="100000" kx="0" ky="0" algn="bl" rotWithShape="0" blurRad="88900" dist="25400" dir="5400000">
-              <a:srgbClr val="22303C">
-                <a:alpha val="12000"/>
-              </a:srgbClr>
-            </a:outerShdw>
-          </a:effectLst>
-        </p:spPr>
-      </p:sp>
-      <p:sp>
-        <p:nvSpPr>
-          <p:cNvPr id="7" name="Text 5"/>
-          <p:cNvSpPr/>
-          <p:nvPr/>
-        </p:nvSpPr>
-        <p:spPr>
-          <a:xfrm>
-            <a:off x="7439376" y="2578608"/>
-            <a:ext cx="3965936" cy="457200"/>
-          </a:xfrm>
-          <a:prstGeom prst="rect">
-            <a:avLst/>
-          </a:prstGeom>
-          <a:noFill/>
-          <a:ln/>
-        </p:spPr>
-        <p:txBody>
-          <a:bodyPr wrap="square" lIns="0" tIns="0" rIns="0" bIns="0" rtlCol="0" anchor="ctr"/>
-          <a:lstStyle/>
-          <a:p>
-            <a:pPr indent="0" marL="0">
-              <a:buNone/>
-            </a:pPr>
-            <a:r>
-              <a:rPr lang="en-US" sz="1500" b="1" dirty="0">
-                <a:solidFill>
-                  <a:srgbClr val="1565C0"/>
-                </a:solidFill>
-                <a:latin typeface="Calibri" pitchFamily="34" charset="0"/>
-                <a:ea typeface="Calibri" pitchFamily="34" charset="-122"/>
-                <a:cs typeface="Calibri" pitchFamily="34" charset="-120"/>
-              </a:rPr>
-              <a:t>ANSWER  </a:t>
-            </a:r>
-            <a:pPr indent="0" marL="0">
-              <a:buNone/>
-            </a:pPr>
-            <a:r>
-              <a:rPr lang="en-US" sz="1500" b="1" dirty="0">
-                <a:solidFill>
-                  <a:srgbClr val="1B2A38"/>
-                </a:solidFill>
-                <a:latin typeface="Calibri" pitchFamily="34" charset="0"/>
-                <a:ea typeface="Calibri" pitchFamily="34" charset="-122"/>
-                <a:cs typeface="Calibri" pitchFamily="34" charset="-120"/>
-              </a:rPr>
-              <a:t>B — A trend (systematic error)</a:t>
-            </a:r>
-            <a:endParaRPr lang="en-US" sz="1500" dirty="0"/>
-          </a:p>
-        </p:txBody>
-      </p:sp>
-      <p:sp>
-        <p:nvSpPr>
-          <p:cNvPr id="8" name="Text 6"/>
-          <p:cNvSpPr/>
-          <p:nvPr/>
-        </p:nvSpPr>
-        <p:spPr>
-          <a:xfrm>
-            <a:off x="7439376" y="3127248"/>
-            <a:ext cx="3947648" cy="2377440"/>
-          </a:xfrm>
-          <a:prstGeom prst="rect">
-            <a:avLst/>
-          </a:prstGeom>
-          <a:noFill/>
-          <a:ln/>
-        </p:spPr>
-        <p:txBody>
-          <a:bodyPr wrap="square" lIns="0" tIns="0" rIns="0" bIns="0" rtlCol="0" anchor="t"/>
-          <a:lstStyle/>
-          <a:p>
-            <a:pPr algn="l" indent="0" marL="0">
-              <a:lnSpc>
-                <a:spcPct val="108000"/>
-              </a:lnSpc>
-              <a:buNone/>
-            </a:pPr>
-            <a:r>
-              <a:rPr lang="en-US" sz="1250" dirty="0">
-                <a:solidFill>
-                  <a:srgbClr val="33444F"/>
-                </a:solidFill>
-                <a:latin typeface="Calibri" pitchFamily="34" charset="0"/>
-                <a:ea typeface="Calibri" pitchFamily="34" charset="-122"/>
-                <a:cs typeface="Calibri" pitchFamily="34" charset="-120"/>
-              </a:rPr>
-              <a:t>A gradual, progressive drift is a trend (systematic error). An abrupt step would be a shift (new lot/calibration).</a:t>
-            </a:r>
-            <a:endParaRPr lang="en-US" sz="1250" dirty="0"/>
           </a:p>
         </p:txBody>
       </p:sp>
@@ -12011,9 +11767,9 @@
               <a:buNone/>
             </a:pPr>
             <a:r>
-              <a:rPr lang="en-US" sz="1350" b="1" dirty="0">
-                <a:solidFill>
-                  <a:srgbClr val="0D4A92"/>
+              <a:rPr lang="en-US" sz="1350" b="0" dirty="0">
+                <a:solidFill>
+                  <a:srgbClr val="33444F"/>
                 </a:solidFill>
                 <a:latin typeface="Calibri" pitchFamily="34" charset="0"/>
                 <a:ea typeface="Calibri" pitchFamily="34" charset="-122"/>
@@ -12082,130 +11838,6 @@
               <a:t>E. Biotin interference</a:t>
             </a:r>
             <a:endParaRPr lang="en-US" sz="1350" dirty="0"/>
-          </a:p>
-        </p:txBody>
-      </p:sp>
-      <p:sp>
-        <p:nvSpPr>
-          <p:cNvPr id="6" name="Shape 4"/>
-          <p:cNvSpPr/>
-          <p:nvPr/>
-        </p:nvSpPr>
-        <p:spPr>
-          <a:xfrm>
-            <a:off x="7201632" y="2395728"/>
-            <a:ext cx="4423136" cy="3246120"/>
-          </a:xfrm>
-          <a:prstGeom prst="roundRect">
-            <a:avLst>
-              <a:gd name="adj" fmla="val 2535"/>
-            </a:avLst>
-          </a:prstGeom>
-          <a:solidFill>
-            <a:srgbClr val="E7EFFA"/>
-          </a:solidFill>
-          <a:ln/>
-          <a:effectLst>
-            <a:outerShdw sx="100000" sy="100000" kx="0" ky="0" algn="bl" rotWithShape="0" blurRad="88900" dist="25400" dir="5400000">
-              <a:srgbClr val="22303C">
-                <a:alpha val="12000"/>
-              </a:srgbClr>
-            </a:outerShdw>
-          </a:effectLst>
-        </p:spPr>
-      </p:sp>
-      <p:sp>
-        <p:nvSpPr>
-          <p:cNvPr id="7" name="Text 5"/>
-          <p:cNvSpPr/>
-          <p:nvPr/>
-        </p:nvSpPr>
-        <p:spPr>
-          <a:xfrm>
-            <a:off x="7439376" y="2578608"/>
-            <a:ext cx="3965936" cy="457200"/>
-          </a:xfrm>
-          <a:prstGeom prst="rect">
-            <a:avLst/>
-          </a:prstGeom>
-          <a:noFill/>
-          <a:ln/>
-        </p:spPr>
-        <p:txBody>
-          <a:bodyPr wrap="square" lIns="0" tIns="0" rIns="0" bIns="0" rtlCol="0" anchor="ctr"/>
-          <a:lstStyle/>
-          <a:p>
-            <a:pPr indent="0" marL="0">
-              <a:buNone/>
-            </a:pPr>
-            <a:r>
-              <a:rPr lang="en-US" sz="1500" b="1" dirty="0">
-                <a:solidFill>
-                  <a:srgbClr val="1565C0"/>
-                </a:solidFill>
-                <a:latin typeface="Calibri" pitchFamily="34" charset="0"/>
-                <a:ea typeface="Calibri" pitchFamily="34" charset="-122"/>
-                <a:cs typeface="Calibri" pitchFamily="34" charset="-120"/>
-              </a:rPr>
-              <a:t>ANSWER  </a:t>
-            </a:r>
-            <a:pPr indent="0" marL="0">
-              <a:buNone/>
-            </a:pPr>
-            <a:r>
-              <a:rPr lang="en-US" sz="1500" b="1" dirty="0">
-                <a:solidFill>
-                  <a:srgbClr val="1B2A38"/>
-                </a:solidFill>
-                <a:latin typeface="Calibri" pitchFamily="34" charset="0"/>
-                <a:ea typeface="Calibri" pitchFamily="34" charset="-122"/>
-                <a:cs typeface="Calibri" pitchFamily="34" charset="-120"/>
-              </a:rPr>
-              <a:t>B — Macro-CK</a:t>
-            </a:r>
-            <a:endParaRPr lang="en-US" sz="1500" dirty="0"/>
-          </a:p>
-        </p:txBody>
-      </p:sp>
-      <p:sp>
-        <p:nvSpPr>
-          <p:cNvPr id="8" name="Text 6"/>
-          <p:cNvSpPr/>
-          <p:nvPr/>
-        </p:nvSpPr>
-        <p:spPr>
-          <a:xfrm>
-            <a:off x="7439376" y="3127248"/>
-            <a:ext cx="3947648" cy="2377440"/>
-          </a:xfrm>
-          <a:prstGeom prst="rect">
-            <a:avLst/>
-          </a:prstGeom>
-          <a:noFill/>
-          <a:ln/>
-        </p:spPr>
-        <p:txBody>
-          <a:bodyPr wrap="square" lIns="0" tIns="0" rIns="0" bIns="0" rtlCol="0" anchor="t"/>
-          <a:lstStyle/>
-          <a:p>
-            <a:pPr algn="l" indent="0" marL="0">
-              <a:lnSpc>
-                <a:spcPct val="108000"/>
-              </a:lnSpc>
-              <a:buNone/>
-            </a:pPr>
-            <a:r>
-              <a:rPr lang="en-US" sz="1250" dirty="0">
-                <a:solidFill>
-                  <a:srgbClr val="33444F"/>
-                </a:solidFill>
-                <a:latin typeface="Calibri" pitchFamily="34" charset="0"/>
-                <a:ea typeface="Calibri" pitchFamily="34" charset="-122"/>
-                <a:cs typeface="Calibri" pitchFamily="34" charset="-120"/>
-              </a:rPr>
-              <a:t>Macro-analytes (macro-CK, macroprolactin) are immunoglobulin-bound forms causing persistent, clinically silent elevations; confirm with special handling/PEG.</a:t>
-            </a:r>
-            <a:endParaRPr lang="en-US" sz="1250" dirty="0"/>
           </a:p>
         </p:txBody>
       </p:sp>
@@ -12446,6 +12078,10 @@
           </a:solidFill>
           <a:ln/>
         </p:spPr>
+        <p:txBody>
+          <a:bodyPr/>
+          <a:p/>
+        </p:txBody>
       </p:sp>
       <p:sp>
         <p:nvSpPr>
@@ -12473,6 +12109,10 @@
             </a:outerShdw>
           </a:effectLst>
         </p:spPr>
+        <p:txBody>
+          <a:bodyPr/>
+          <a:p/>
+        </p:txBody>
       </p:sp>
       <p:sp>
         <p:nvSpPr>
@@ -12573,6 +12213,10 @@
           </a:solidFill>
           <a:ln/>
         </p:spPr>
+        <p:txBody>
+          <a:bodyPr/>
+          <a:p/>
+        </p:txBody>
       </p:sp>
       <p:sp>
         <p:nvSpPr>
@@ -12600,6 +12244,10 @@
             </a:outerShdw>
           </a:effectLst>
         </p:spPr>
+        <p:txBody>
+          <a:bodyPr/>
+          <a:p/>
+        </p:txBody>
       </p:sp>
       <p:sp>
         <p:nvSpPr>
@@ -12700,6 +12348,10 @@
           </a:solidFill>
           <a:ln/>
         </p:spPr>
+        <p:txBody>
+          <a:bodyPr/>
+          <a:p/>
+        </p:txBody>
       </p:sp>
       <p:sp>
         <p:nvSpPr>
@@ -12727,6 +12379,10 @@
             </a:outerShdw>
           </a:effectLst>
         </p:spPr>
+        <p:txBody>
+          <a:bodyPr/>
+          <a:p/>
+        </p:txBody>
       </p:sp>
       <p:sp>
         <p:nvSpPr>
@@ -12827,6 +12483,10 @@
           </a:solidFill>
           <a:ln/>
         </p:spPr>
+        <p:txBody>
+          <a:bodyPr/>
+          <a:p/>
+        </p:txBody>
       </p:sp>
       <p:sp>
         <p:nvSpPr>
@@ -12854,6 +12514,10 @@
             </a:outerShdw>
           </a:effectLst>
         </p:spPr>
+        <p:txBody>
+          <a:bodyPr/>
+          <a:p/>
+        </p:txBody>
       </p:sp>
       <p:sp>
         <p:nvSpPr>
@@ -12954,6 +12618,10 @@
           </a:solidFill>
           <a:ln/>
         </p:spPr>
+        <p:txBody>
+          <a:bodyPr/>
+          <a:p/>
+        </p:txBody>
       </p:sp>
       <p:sp>
         <p:nvSpPr>
@@ -12981,6 +12649,10 @@
             </a:outerShdw>
           </a:effectLst>
         </p:spPr>
+        <p:txBody>
+          <a:bodyPr/>
+          <a:p/>
+        </p:txBody>
       </p:sp>
       <p:sp>
         <p:nvSpPr>
@@ -13464,6 +13136,994 @@
 </p:sld>
 </file>
 
+<file path=ppt/slides/slide28.xml><?xml version="1.0" encoding="utf-8"?>
+<p:sld xmlns:a="http://schemas.openxmlformats.org/drawingml/2006/main" xmlns:p="http://schemas.openxmlformats.org/presentationml/2006/main" xmlns:r="http://schemas.openxmlformats.org/officeDocument/2006/relationships">
+  <p:cSld>
+    <p:spTree>
+      <p:nvGrpSpPr>
+        <p:cNvPr id="1" name=""/>
+        <p:cNvGrpSpPr/>
+        <p:nvPr/>
+      </p:nvGrpSpPr>
+      <p:grpSpPr/>
+      <p:sp>
+        <p:nvSpPr>
+          <p:cNvPr id="2" name="Text 0"/>
+          <p:cNvSpPr/>
+          <p:nvPr/>
+        </p:nvSpPr>
+        <p:spPr>
+          <a:xfrm>
+            <a:off x="566928" y="329184"/>
+            <a:ext cx="10515600" cy="310896"/>
+          </a:xfrm>
+          <a:prstGeom prst="rect">
+            <a:avLst/>
+          </a:prstGeom>
+          <a:noFill/>
+          <a:ln/>
+        </p:spPr>
+        <p:txBody>
+          <a:bodyPr wrap="square" lIns="0" tIns="0" rIns="0" bIns="0" rtlCol="0" anchor="ctr"/>
+          <a:lstStyle/>
+          <a:p>
+            <a:pPr algn="l" indent="0" marL="0">
+              <a:buNone/>
+            </a:pPr>
+            <a:r>
+              <a:rPr lang="en-US" sz="1100" b="1" spc="150" kern="0" dirty="0">
+                <a:solidFill>
+                  <a:srgbClr val="1565C0"/>
+                </a:solidFill>
+                <a:latin typeface="Calibri" pitchFamily="34" charset="0"/>
+                <a:ea typeface="Calibri" pitchFamily="34" charset="-122"/>
+                <a:cs typeface="Calibri" pitchFamily="34" charset="-120"/>
+              </a:rPr>
+              <a:t>CLINICAL CHEMISTRY   ·   BOARD REVIEW  ·  Q4</a:t>
+            </a:r>
+            <a:endParaRPr lang="en-US" sz="1100" dirty="0"/>
+          </a:p>
+        </p:txBody>
+      </p:sp>
+      <p:sp>
+        <p:nvSpPr>
+          <p:cNvPr id="3" name="Text 1"/>
+          <p:cNvSpPr/>
+          <p:nvPr/>
+        </p:nvSpPr>
+        <p:spPr>
+          <a:xfrm>
+            <a:off x="566928" y="713232"/>
+            <a:ext cx="11064240" cy="749808"/>
+          </a:xfrm>
+          <a:prstGeom prst="rect">
+            <a:avLst/>
+          </a:prstGeom>
+          <a:noFill/>
+          <a:ln/>
+        </p:spPr>
+        <p:txBody>
+          <a:bodyPr wrap="square" lIns="0" tIns="0" rIns="0" bIns="0" rtlCol="0" anchor="ctr"/>
+          <a:lstStyle/>
+          <a:p>
+            <a:pPr algn="l" indent="0" marL="0">
+              <a:buNone/>
+            </a:pPr>
+            <a:r>
+              <a:rPr lang="en-US" sz="2600" b="1" dirty="0">
+                <a:solidFill>
+                  <a:srgbClr val="0E3A5F"/>
+                </a:solidFill>
+                <a:latin typeface="Calibri" pitchFamily="34" charset="0"/>
+                <a:ea typeface="Calibri" pitchFamily="34" charset="-122"/>
+                <a:cs typeface="Calibri" pitchFamily="34" charset="-120"/>
+              </a:rPr>
+              <a:t>Board-Style Review</a:t>
+            </a:r>
+            <a:endParaRPr lang="en-US" sz="2600" dirty="0"/>
+          </a:p>
+        </p:txBody>
+      </p:sp>
+      <p:sp>
+        <p:nvSpPr>
+          <p:cNvPr id="4" name="Text 2"/>
+          <p:cNvSpPr/>
+          <p:nvPr/>
+        </p:nvSpPr>
+        <p:spPr>
+          <a:xfrm>
+            <a:off x="566928" y="1417320"/>
+            <a:ext cx="11057839" cy="914400"/>
+          </a:xfrm>
+          <a:prstGeom prst="rect">
+            <a:avLst/>
+          </a:prstGeom>
+          <a:noFill/>
+          <a:ln/>
+        </p:spPr>
+        <p:txBody>
+          <a:bodyPr wrap="square" lIns="0" tIns="0" rIns="0" bIns="0" rtlCol="0" anchor="t"/>
+          <a:lstStyle/>
+          <a:p>
+            <a:pPr algn="l" indent="0" marL="0">
+              <a:lnSpc>
+                <a:spcPct val="105000"/>
+              </a:lnSpc>
+              <a:buNone/>
+            </a:pPr>
+            <a:r>
+              <a:rPr lang="en-US" sz="1450" b="1" dirty="0">
+                <a:solidFill>
+                  <a:srgbClr val="1B2A38"/>
+                </a:solidFill>
+                <a:latin typeface="Calibri" pitchFamily="34" charset="0"/>
+                <a:ea typeface="Calibri" pitchFamily="34" charset="-122"/>
+                <a:cs typeface="Calibri" pitchFamily="34" charset="-120"/>
+              </a:rPr>
+              <a:t>A persistently elevated CK with no clinical correlate and normal other muscle markers most likely reflects:</a:t>
+            </a:r>
+            <a:endParaRPr lang="en-US" sz="1450" dirty="0"/>
+          </a:p>
+        </p:txBody>
+      </p:sp>
+      <p:sp>
+        <p:nvSpPr>
+          <p:cNvPr id="5" name="Text 3"/>
+          <p:cNvSpPr/>
+          <p:nvPr/>
+        </p:nvSpPr>
+        <p:spPr>
+          <a:xfrm>
+            <a:off x="658368" y="2395728"/>
+            <a:ext cx="6192390" cy="3017520"/>
+          </a:xfrm>
+          <a:prstGeom prst="rect">
+            <a:avLst/>
+          </a:prstGeom>
+          <a:noFill/>
+          <a:ln/>
+        </p:spPr>
+        <p:txBody>
+          <a:bodyPr wrap="square" lIns="0" tIns="0" rIns="0" bIns="0" rtlCol="0" anchor="t"/>
+          <a:lstStyle/>
+          <a:p>
+            <a:pPr algn="l" indent="0" marL="0">
+              <a:spcAft>
+                <a:spcPts val="600"/>
+              </a:spcAft>
+              <a:buNone/>
+            </a:pPr>
+            <a:r>
+              <a:rPr lang="en-US" sz="1350" dirty="0">
+                <a:solidFill>
+                  <a:srgbClr val="33444F"/>
+                </a:solidFill>
+                <a:latin typeface="Calibri" pitchFamily="34" charset="0"/>
+                <a:ea typeface="Calibri" pitchFamily="34" charset="-122"/>
+                <a:cs typeface="Calibri" pitchFamily="34" charset="-120"/>
+              </a:rPr>
+              <a:t>A. Acute myocardial infarction</a:t>
+            </a:r>
+            <a:endParaRPr lang="en-US" sz="1350" dirty="0"/>
+          </a:p>
+          <a:p>
+            <a:pPr algn="l" indent="0" marL="0">
+              <a:spcAft>
+                <a:spcPts val="600"/>
+              </a:spcAft>
+              <a:buNone/>
+            </a:pPr>
+            <a:r>
+              <a:rPr lang="en-US" sz="1350" b="1" dirty="0">
+                <a:solidFill>
+                  <a:srgbClr val="0D4A92"/>
+                </a:solidFill>
+                <a:latin typeface="Calibri" pitchFamily="34" charset="0"/>
+                <a:ea typeface="Calibri" pitchFamily="34" charset="-122"/>
+                <a:cs typeface="Calibri" pitchFamily="34" charset="-120"/>
+              </a:rPr>
+              <a:t>B. Macro-CK (immunoglobulin-bound CK)</a:t>
+            </a:r>
+            <a:endParaRPr lang="en-US" sz="1350" dirty="0"/>
+          </a:p>
+          <a:p>
+            <a:pPr algn="l" indent="0" marL="0">
+              <a:spcAft>
+                <a:spcPts val="600"/>
+              </a:spcAft>
+              <a:buNone/>
+            </a:pPr>
+            <a:r>
+              <a:rPr lang="en-US" sz="1350" dirty="0">
+                <a:solidFill>
+                  <a:srgbClr val="33444F"/>
+                </a:solidFill>
+                <a:latin typeface="Calibri" pitchFamily="34" charset="0"/>
+                <a:ea typeface="Calibri" pitchFamily="34" charset="-122"/>
+                <a:cs typeface="Calibri" pitchFamily="34" charset="-120"/>
+              </a:rPr>
+              <a:t>C. Rhabdomyolysis</a:t>
+            </a:r>
+            <a:endParaRPr lang="en-US" sz="1350" dirty="0"/>
+          </a:p>
+          <a:p>
+            <a:pPr algn="l" indent="0" marL="0">
+              <a:spcAft>
+                <a:spcPts val="600"/>
+              </a:spcAft>
+              <a:buNone/>
+            </a:pPr>
+            <a:r>
+              <a:rPr lang="en-US" sz="1350" dirty="0">
+                <a:solidFill>
+                  <a:srgbClr val="33444F"/>
+                </a:solidFill>
+                <a:latin typeface="Calibri" pitchFamily="34" charset="0"/>
+                <a:ea typeface="Calibri" pitchFamily="34" charset="-122"/>
+                <a:cs typeface="Calibri" pitchFamily="34" charset="-120"/>
+              </a:rPr>
+              <a:t>D. Hemolysis</a:t>
+            </a:r>
+            <a:endParaRPr lang="en-US" sz="1350" dirty="0"/>
+          </a:p>
+          <a:p>
+            <a:pPr algn="l" indent="0" marL="0">
+              <a:spcAft>
+                <a:spcPts val="600"/>
+              </a:spcAft>
+              <a:buNone/>
+            </a:pPr>
+            <a:r>
+              <a:rPr lang="en-US" sz="1350" dirty="0">
+                <a:solidFill>
+                  <a:srgbClr val="33444F"/>
+                </a:solidFill>
+                <a:latin typeface="Calibri" pitchFamily="34" charset="0"/>
+                <a:ea typeface="Calibri" pitchFamily="34" charset="-122"/>
+                <a:cs typeface="Calibri" pitchFamily="34" charset="-120"/>
+              </a:rPr>
+              <a:t>E. Biotin interference</a:t>
+            </a:r>
+            <a:endParaRPr lang="en-US" sz="1350" dirty="0"/>
+          </a:p>
+        </p:txBody>
+      </p:sp>
+      <p:sp>
+        <p:nvSpPr>
+          <p:cNvPr id="6" name="Shape 4"/>
+          <p:cNvSpPr/>
+          <p:nvPr/>
+        </p:nvSpPr>
+        <p:spPr>
+          <a:xfrm>
+            <a:off x="7201632" y="2395728"/>
+            <a:ext cx="4423136" cy="3246120"/>
+          </a:xfrm>
+          <a:prstGeom prst="roundRect">
+            <a:avLst>
+              <a:gd name="adj" fmla="val 2535"/>
+            </a:avLst>
+          </a:prstGeom>
+          <a:solidFill>
+            <a:srgbClr val="E7EFFA"/>
+          </a:solidFill>
+          <a:ln/>
+          <a:effectLst>
+            <a:outerShdw sx="100000" sy="100000" kx="0" ky="0" algn="bl" rotWithShape="0" blurRad="88900" dist="25400" dir="5400000">
+              <a:srgbClr val="22303C">
+                <a:alpha val="12000"/>
+              </a:srgbClr>
+            </a:outerShdw>
+          </a:effectLst>
+        </p:spPr>
+        <p:txBody>
+          <a:bodyPr/>
+          <a:p/>
+        </p:txBody>
+      </p:sp>
+      <p:sp>
+        <p:nvSpPr>
+          <p:cNvPr id="7" name="Text 5"/>
+          <p:cNvSpPr/>
+          <p:nvPr/>
+        </p:nvSpPr>
+        <p:spPr>
+          <a:xfrm>
+            <a:off x="7439376" y="2578608"/>
+            <a:ext cx="3965936" cy="457200"/>
+          </a:xfrm>
+          <a:prstGeom prst="rect">
+            <a:avLst/>
+          </a:prstGeom>
+          <a:noFill/>
+          <a:ln/>
+        </p:spPr>
+        <p:txBody>
+          <a:bodyPr wrap="square" lIns="0" tIns="0" rIns="0" bIns="0" rtlCol="0" anchor="ctr"/>
+          <a:lstStyle/>
+          <a:p>
+            <a:pPr indent="0" marL="0">
+              <a:buNone/>
+            </a:pPr>
+            <a:r>
+              <a:rPr lang="en-US" sz="1500" b="1" dirty="0">
+                <a:solidFill>
+                  <a:srgbClr val="1565C0"/>
+                </a:solidFill>
+                <a:latin typeface="Calibri" pitchFamily="34" charset="0"/>
+                <a:ea typeface="Calibri" pitchFamily="34" charset="-122"/>
+                <a:cs typeface="Calibri" pitchFamily="34" charset="-120"/>
+              </a:rPr>
+              <a:t>ANSWER  </a:t>
+            </a:r>
+            <a:pPr indent="0" marL="0">
+              <a:buNone/>
+            </a:pPr>
+            <a:r>
+              <a:rPr lang="en-US" sz="1500" b="1" dirty="0">
+                <a:solidFill>
+                  <a:srgbClr val="1B2A38"/>
+                </a:solidFill>
+                <a:latin typeface="Calibri" pitchFamily="34" charset="0"/>
+                <a:ea typeface="Calibri" pitchFamily="34" charset="-122"/>
+                <a:cs typeface="Calibri" pitchFamily="34" charset="-120"/>
+              </a:rPr>
+              <a:t>B — Macro-CK</a:t>
+            </a:r>
+            <a:endParaRPr lang="en-US" sz="1500" dirty="0"/>
+          </a:p>
+        </p:txBody>
+      </p:sp>
+      <p:sp>
+        <p:nvSpPr>
+          <p:cNvPr id="8" name="Text 6"/>
+          <p:cNvSpPr/>
+          <p:nvPr/>
+        </p:nvSpPr>
+        <p:spPr>
+          <a:xfrm>
+            <a:off x="7439376" y="3127248"/>
+            <a:ext cx="3947648" cy="2377440"/>
+          </a:xfrm>
+          <a:prstGeom prst="rect">
+            <a:avLst/>
+          </a:prstGeom>
+          <a:noFill/>
+          <a:ln/>
+        </p:spPr>
+        <p:txBody>
+          <a:bodyPr wrap="square" lIns="0" tIns="0" rIns="0" bIns="0" rtlCol="0" anchor="t"/>
+          <a:lstStyle/>
+          <a:p>
+            <a:pPr algn="l" indent="0" marL="0">
+              <a:lnSpc>
+                <a:spcPct val="108000"/>
+              </a:lnSpc>
+              <a:buNone/>
+            </a:pPr>
+            <a:r>
+              <a:rPr lang="en-US" sz="1250" dirty="0">
+                <a:solidFill>
+                  <a:srgbClr val="33444F"/>
+                </a:solidFill>
+                <a:latin typeface="Calibri" pitchFamily="34" charset="0"/>
+                <a:ea typeface="Calibri" pitchFamily="34" charset="-122"/>
+                <a:cs typeface="Calibri" pitchFamily="34" charset="-120"/>
+              </a:rPr>
+              <a:t>Macro-analytes (macro-CK, macroprolactin) are immunoglobulin-bound forms causing persistent, clinically silent elevations; confirm with special handling/PEG.</a:t>
+            </a:r>
+            <a:endParaRPr lang="en-US" sz="1250" dirty="0"/>
+          </a:p>
+        </p:txBody>
+      </p:sp>
+      <p:sp>
+        <p:nvSpPr>
+          <p:cNvPr id="9" name="Text 7"/>
+          <p:cNvSpPr/>
+          <p:nvPr/>
+        </p:nvSpPr>
+        <p:spPr>
+          <a:xfrm>
+            <a:off x="566928" y="6473952"/>
+            <a:ext cx="7772400" cy="274320"/>
+          </a:xfrm>
+          <a:prstGeom prst="rect">
+            <a:avLst/>
+          </a:prstGeom>
+          <a:noFill/>
+          <a:ln/>
+        </p:spPr>
+        <p:txBody>
+          <a:bodyPr wrap="square" lIns="0" tIns="0" rIns="0" bIns="0" rtlCol="0" anchor="ctr"/>
+          <a:lstStyle/>
+          <a:p>
+            <a:pPr algn="l" indent="0" marL="0">
+              <a:buNone/>
+            </a:pPr>
+            <a:r>
+              <a:rPr lang="en-US" sz="850" dirty="0">
+                <a:solidFill>
+                  <a:srgbClr val="9AA8B4"/>
+                </a:solidFill>
+                <a:latin typeface="Calibri" pitchFamily="34" charset="0"/>
+                <a:ea typeface="Calibri" pitchFamily="34" charset="-122"/>
+                <a:cs typeface="Calibri" pitchFamily="34" charset="-120"/>
+              </a:rPr>
+              <a:t>Makassed General Hospital  ·  Department of Laboratory Medicine</a:t>
+            </a:r>
+            <a:endParaRPr lang="en-US" sz="850" dirty="0"/>
+          </a:p>
+        </p:txBody>
+      </p:sp>
+      <p:sp>
+        <p:nvSpPr>
+          <p:cNvPr id="10" name="Text 8"/>
+          <p:cNvSpPr/>
+          <p:nvPr/>
+        </p:nvSpPr>
+        <p:spPr>
+          <a:xfrm>
+            <a:off x="9814255" y="6473952"/>
+            <a:ext cx="1828800" cy="274320"/>
+          </a:xfrm>
+          <a:prstGeom prst="rect">
+            <a:avLst/>
+          </a:prstGeom>
+          <a:noFill/>
+          <a:ln/>
+        </p:spPr>
+        <p:txBody>
+          <a:bodyPr wrap="square" lIns="0" tIns="0" rIns="0" bIns="0" rtlCol="0" anchor="ctr"/>
+          <a:lstStyle/>
+          <a:p>
+            <a:pPr algn="r" indent="0" marL="0">
+              <a:buNone/>
+            </a:pPr>
+            <a:r>
+              <a:rPr lang="en-US" sz="850" dirty="0">
+                <a:solidFill>
+                  <a:srgbClr val="9AA8B4"/>
+                </a:solidFill>
+                <a:latin typeface="Calibri" pitchFamily="34" charset="0"/>
+                <a:ea typeface="Calibri" pitchFamily="34" charset="-122"/>
+                <a:cs typeface="Calibri" pitchFamily="34" charset="-120"/>
+              </a:rPr>
+              <a:t>CP Lecture Series</a:t>
+            </a:r>
+            <a:pPr algn="r" indent="0" marL="0">
+              <a:buNone/>
+            </a:pPr>
+            <a:r>
+              <a:rPr lang="en-US" sz="850" dirty="0">
+                <a:solidFill>
+                  <a:srgbClr val="DCE4EC"/>
+                </a:solidFill>
+                <a:latin typeface="Calibri" pitchFamily="34" charset="0"/>
+                <a:ea typeface="Calibri" pitchFamily="34" charset="-122"/>
+                <a:cs typeface="Calibri" pitchFamily="34" charset="-120"/>
+              </a:rPr>
+              <a:t>   ·   </a:t>
+            </a:r>
+            <a:pPr algn="r" indent="0" marL="0">
+              <a:buNone/>
+            </a:pPr>
+            <a:r>
+              <a:rPr lang="en-US" sz="850" b="1" dirty="0">
+                <a:solidFill>
+                  <a:srgbClr val="1565C0"/>
+                </a:solidFill>
+                <a:latin typeface="Calibri" pitchFamily="34" charset="0"/>
+                <a:ea typeface="Calibri" pitchFamily="34" charset="-122"/>
+                <a:cs typeface="Calibri" pitchFamily="34" charset="-120"/>
+              </a:rPr>
+              <a:t>22</a:t>
+            </a:r>
+            <a:endParaRPr lang="en-US" sz="850" dirty="0"/>
+          </a:p>
+        </p:txBody>
+      </p:sp>
+    </p:spTree>
+  </p:cSld>
+  <p:clrMapOvr>
+    <a:masterClrMapping/>
+  </p:clrMapOvr>
+</p:sld>
+</file>
+
+<file path=ppt/slides/slide29.xml><?xml version="1.0" encoding="utf-8"?>
+<p:sld xmlns:a="http://schemas.openxmlformats.org/drawingml/2006/main" xmlns:p="http://schemas.openxmlformats.org/presentationml/2006/main" xmlns:r="http://schemas.openxmlformats.org/officeDocument/2006/relationships">
+  <p:cSld>
+    <p:spTree>
+      <p:nvGrpSpPr>
+        <p:cNvPr id="1" name=""/>
+        <p:cNvGrpSpPr/>
+        <p:nvPr/>
+      </p:nvGrpSpPr>
+      <p:grpSpPr/>
+      <p:sp>
+        <p:nvSpPr>
+          <p:cNvPr id="2" name="Text 0"/>
+          <p:cNvSpPr/>
+          <p:nvPr/>
+        </p:nvSpPr>
+        <p:spPr>
+          <a:xfrm>
+            <a:off x="566928" y="329184"/>
+            <a:ext cx="10515600" cy="310896"/>
+          </a:xfrm>
+          <a:prstGeom prst="rect">
+            <a:avLst/>
+          </a:prstGeom>
+          <a:noFill/>
+          <a:ln/>
+        </p:spPr>
+        <p:txBody>
+          <a:bodyPr wrap="square" lIns="0" tIns="0" rIns="0" bIns="0" rtlCol="0" anchor="ctr"/>
+          <a:lstStyle/>
+          <a:p>
+            <a:pPr algn="l" indent="0" marL="0">
+              <a:buNone/>
+            </a:pPr>
+            <a:r>
+              <a:rPr lang="en-US" sz="1100" b="1" spc="150" kern="0" dirty="0">
+                <a:solidFill>
+                  <a:srgbClr val="1565C0"/>
+                </a:solidFill>
+                <a:latin typeface="Calibri" pitchFamily="34" charset="0"/>
+                <a:ea typeface="Calibri" pitchFamily="34" charset="-122"/>
+                <a:cs typeface="Calibri" pitchFamily="34" charset="-120"/>
+              </a:rPr>
+              <a:t>CLINICAL CHEMISTRY   ·   BOARD REVIEW  ·  Q3</a:t>
+            </a:r>
+            <a:endParaRPr lang="en-US" sz="1100" dirty="0"/>
+          </a:p>
+        </p:txBody>
+      </p:sp>
+      <p:sp>
+        <p:nvSpPr>
+          <p:cNvPr id="3" name="Text 1"/>
+          <p:cNvSpPr/>
+          <p:nvPr/>
+        </p:nvSpPr>
+        <p:spPr>
+          <a:xfrm>
+            <a:off x="566928" y="713232"/>
+            <a:ext cx="11064240" cy="749808"/>
+          </a:xfrm>
+          <a:prstGeom prst="rect">
+            <a:avLst/>
+          </a:prstGeom>
+          <a:noFill/>
+          <a:ln/>
+        </p:spPr>
+        <p:txBody>
+          <a:bodyPr wrap="square" lIns="0" tIns="0" rIns="0" bIns="0" rtlCol="0" anchor="ctr"/>
+          <a:lstStyle/>
+          <a:p>
+            <a:pPr algn="l" indent="0" marL="0">
+              <a:buNone/>
+            </a:pPr>
+            <a:r>
+              <a:rPr lang="en-US" sz="2600" b="1" dirty="0">
+                <a:solidFill>
+                  <a:srgbClr val="0E3A5F"/>
+                </a:solidFill>
+                <a:latin typeface="Calibri" pitchFamily="34" charset="0"/>
+                <a:ea typeface="Calibri" pitchFamily="34" charset="-122"/>
+                <a:cs typeface="Calibri" pitchFamily="34" charset="-120"/>
+              </a:rPr>
+              <a:t>Board-Style Review</a:t>
+            </a:r>
+            <a:endParaRPr lang="en-US" sz="2600" dirty="0"/>
+          </a:p>
+        </p:txBody>
+      </p:sp>
+      <p:sp>
+        <p:nvSpPr>
+          <p:cNvPr id="4" name="Text 2"/>
+          <p:cNvSpPr/>
+          <p:nvPr/>
+        </p:nvSpPr>
+        <p:spPr>
+          <a:xfrm>
+            <a:off x="566928" y="1417320"/>
+            <a:ext cx="11057839" cy="914400"/>
+          </a:xfrm>
+          <a:prstGeom prst="rect">
+            <a:avLst/>
+          </a:prstGeom>
+          <a:noFill/>
+          <a:ln/>
+        </p:spPr>
+        <p:txBody>
+          <a:bodyPr wrap="square" lIns="0" tIns="0" rIns="0" bIns="0" rtlCol="0" anchor="t"/>
+          <a:lstStyle/>
+          <a:p>
+            <a:pPr algn="l" indent="0" marL="0">
+              <a:lnSpc>
+                <a:spcPct val="105000"/>
+              </a:lnSpc>
+              <a:buNone/>
+            </a:pPr>
+            <a:r>
+              <a:rPr lang="en-US" sz="1450" b="1" dirty="0">
+                <a:solidFill>
+                  <a:srgbClr val="1B2A38"/>
+                </a:solidFill>
+                <a:latin typeface="Calibri" pitchFamily="34" charset="0"/>
+                <a:ea typeface="Calibri" pitchFamily="34" charset="-122"/>
+                <a:cs typeface="Calibri" pitchFamily="34" charset="-120"/>
+              </a:rPr>
+              <a:t>On a Levey-Jennings chart, the control mean gradually drifts upward over two weeks. This indicates:</a:t>
+            </a:r>
+            <a:endParaRPr lang="en-US" sz="1450" dirty="0"/>
+          </a:p>
+        </p:txBody>
+      </p:sp>
+      <p:sp>
+        <p:nvSpPr>
+          <p:cNvPr id="5" name="Text 3"/>
+          <p:cNvSpPr/>
+          <p:nvPr/>
+        </p:nvSpPr>
+        <p:spPr>
+          <a:xfrm>
+            <a:off x="658368" y="2395728"/>
+            <a:ext cx="6192390" cy="3017520"/>
+          </a:xfrm>
+          <a:prstGeom prst="rect">
+            <a:avLst/>
+          </a:prstGeom>
+          <a:noFill/>
+          <a:ln/>
+        </p:spPr>
+        <p:txBody>
+          <a:bodyPr wrap="square" lIns="0" tIns="0" rIns="0" bIns="0" rtlCol="0" anchor="t"/>
+          <a:lstStyle/>
+          <a:p>
+            <a:pPr algn="l" indent="0" marL="0">
+              <a:spcAft>
+                <a:spcPts val="600"/>
+              </a:spcAft>
+              <a:buNone/>
+            </a:pPr>
+            <a:r>
+              <a:rPr lang="en-US" sz="1350" dirty="0">
+                <a:solidFill>
+                  <a:srgbClr val="33444F"/>
+                </a:solidFill>
+                <a:latin typeface="Calibri" pitchFamily="34" charset="0"/>
+                <a:ea typeface="Calibri" pitchFamily="34" charset="-122"/>
+                <a:cs typeface="Calibri" pitchFamily="34" charset="-120"/>
+              </a:rPr>
+              <a:t>A. Random error</a:t>
+            </a:r>
+            <a:endParaRPr lang="en-US" sz="1350" dirty="0"/>
+          </a:p>
+          <a:p>
+            <a:pPr algn="l" indent="0" marL="0">
+              <a:spcAft>
+                <a:spcPts val="600"/>
+              </a:spcAft>
+              <a:buNone/>
+            </a:pPr>
+            <a:r>
+              <a:rPr lang="en-US" sz="1350" b="1" dirty="0">
+                <a:solidFill>
+                  <a:srgbClr val="0D4A92"/>
+                </a:solidFill>
+                <a:latin typeface="Calibri" pitchFamily="34" charset="0"/>
+                <a:ea typeface="Calibri" pitchFamily="34" charset="-122"/>
+                <a:cs typeface="Calibri" pitchFamily="34" charset="-120"/>
+              </a:rPr>
+              <a:t>B. A trend (systematic error, e.g., reagent deterioration)</a:t>
+            </a:r>
+            <a:endParaRPr lang="en-US" sz="1350" dirty="0"/>
+          </a:p>
+          <a:p>
+            <a:pPr algn="l" indent="0" marL="0">
+              <a:spcAft>
+                <a:spcPts val="600"/>
+              </a:spcAft>
+              <a:buNone/>
+            </a:pPr>
+            <a:r>
+              <a:rPr lang="en-US" sz="1350" dirty="0">
+                <a:solidFill>
+                  <a:srgbClr val="33444F"/>
+                </a:solidFill>
+                <a:latin typeface="Calibri" pitchFamily="34" charset="0"/>
+                <a:ea typeface="Calibri" pitchFamily="34" charset="-122"/>
+                <a:cs typeface="Calibri" pitchFamily="34" charset="-120"/>
+              </a:rPr>
+              <a:t>C. Normal variation</a:t>
+            </a:r>
+            <a:endParaRPr lang="en-US" sz="1350" dirty="0"/>
+          </a:p>
+          <a:p>
+            <a:pPr algn="l" indent="0" marL="0">
+              <a:spcAft>
+                <a:spcPts val="600"/>
+              </a:spcAft>
+              <a:buNone/>
+            </a:pPr>
+            <a:r>
+              <a:rPr lang="en-US" sz="1350" dirty="0">
+                <a:solidFill>
+                  <a:srgbClr val="33444F"/>
+                </a:solidFill>
+                <a:latin typeface="Calibri" pitchFamily="34" charset="0"/>
+                <a:ea typeface="Calibri" pitchFamily="34" charset="-122"/>
+                <a:cs typeface="Calibri" pitchFamily="34" charset="-120"/>
+              </a:rPr>
+              <a:t>D. A shift from a new lot</a:t>
+            </a:r>
+            <a:endParaRPr lang="en-US" sz="1350" dirty="0"/>
+          </a:p>
+          <a:p>
+            <a:pPr algn="l" indent="0" marL="0">
+              <a:spcAft>
+                <a:spcPts val="600"/>
+              </a:spcAft>
+              <a:buNone/>
+            </a:pPr>
+            <a:r>
+              <a:rPr lang="en-US" sz="1350" dirty="0">
+                <a:solidFill>
+                  <a:srgbClr val="33444F"/>
+                </a:solidFill>
+                <a:latin typeface="Calibri" pitchFamily="34" charset="0"/>
+                <a:ea typeface="Calibri" pitchFamily="34" charset="-122"/>
+                <a:cs typeface="Calibri" pitchFamily="34" charset="-120"/>
+              </a:rPr>
+              <a:t>E. Clerical error</a:t>
+            </a:r>
+            <a:endParaRPr lang="en-US" sz="1350" dirty="0"/>
+          </a:p>
+        </p:txBody>
+      </p:sp>
+      <p:sp>
+        <p:nvSpPr>
+          <p:cNvPr id="6" name="Shape 4"/>
+          <p:cNvSpPr/>
+          <p:nvPr/>
+        </p:nvSpPr>
+        <p:spPr>
+          <a:xfrm>
+            <a:off x="7201632" y="2395728"/>
+            <a:ext cx="4423136" cy="3246120"/>
+          </a:xfrm>
+          <a:prstGeom prst="roundRect">
+            <a:avLst>
+              <a:gd name="adj" fmla="val 2535"/>
+            </a:avLst>
+          </a:prstGeom>
+          <a:solidFill>
+            <a:srgbClr val="E7EFFA"/>
+          </a:solidFill>
+          <a:ln/>
+          <a:effectLst>
+            <a:outerShdw sx="100000" sy="100000" kx="0" ky="0" algn="bl" rotWithShape="0" blurRad="88900" dist="25400" dir="5400000">
+              <a:srgbClr val="22303C">
+                <a:alpha val="12000"/>
+              </a:srgbClr>
+            </a:outerShdw>
+          </a:effectLst>
+        </p:spPr>
+        <p:txBody>
+          <a:bodyPr/>
+          <a:p/>
+        </p:txBody>
+      </p:sp>
+      <p:sp>
+        <p:nvSpPr>
+          <p:cNvPr id="7" name="Text 5"/>
+          <p:cNvSpPr/>
+          <p:nvPr/>
+        </p:nvSpPr>
+        <p:spPr>
+          <a:xfrm>
+            <a:off x="7439376" y="2578608"/>
+            <a:ext cx="3965936" cy="457200"/>
+          </a:xfrm>
+          <a:prstGeom prst="rect">
+            <a:avLst/>
+          </a:prstGeom>
+          <a:noFill/>
+          <a:ln/>
+        </p:spPr>
+        <p:txBody>
+          <a:bodyPr wrap="square" lIns="0" tIns="0" rIns="0" bIns="0" rtlCol="0" anchor="ctr"/>
+          <a:lstStyle/>
+          <a:p>
+            <a:pPr indent="0" marL="0">
+              <a:buNone/>
+            </a:pPr>
+            <a:r>
+              <a:rPr lang="en-US" sz="1500" b="1" dirty="0">
+                <a:solidFill>
+                  <a:srgbClr val="1565C0"/>
+                </a:solidFill>
+                <a:latin typeface="Calibri" pitchFamily="34" charset="0"/>
+                <a:ea typeface="Calibri" pitchFamily="34" charset="-122"/>
+                <a:cs typeface="Calibri" pitchFamily="34" charset="-120"/>
+              </a:rPr>
+              <a:t>ANSWER  </a:t>
+            </a:r>
+            <a:pPr indent="0" marL="0">
+              <a:buNone/>
+            </a:pPr>
+            <a:r>
+              <a:rPr lang="en-US" sz="1500" b="1" dirty="0">
+                <a:solidFill>
+                  <a:srgbClr val="1B2A38"/>
+                </a:solidFill>
+                <a:latin typeface="Calibri" pitchFamily="34" charset="0"/>
+                <a:ea typeface="Calibri" pitchFamily="34" charset="-122"/>
+                <a:cs typeface="Calibri" pitchFamily="34" charset="-120"/>
+              </a:rPr>
+              <a:t>B — A trend (systematic error)</a:t>
+            </a:r>
+            <a:endParaRPr lang="en-US" sz="1500" dirty="0"/>
+          </a:p>
+        </p:txBody>
+      </p:sp>
+      <p:sp>
+        <p:nvSpPr>
+          <p:cNvPr id="8" name="Text 6"/>
+          <p:cNvSpPr/>
+          <p:nvPr/>
+        </p:nvSpPr>
+        <p:spPr>
+          <a:xfrm>
+            <a:off x="7439376" y="3127248"/>
+            <a:ext cx="3947648" cy="2377440"/>
+          </a:xfrm>
+          <a:prstGeom prst="rect">
+            <a:avLst/>
+          </a:prstGeom>
+          <a:noFill/>
+          <a:ln/>
+        </p:spPr>
+        <p:txBody>
+          <a:bodyPr wrap="square" lIns="0" tIns="0" rIns="0" bIns="0" rtlCol="0" anchor="t"/>
+          <a:lstStyle/>
+          <a:p>
+            <a:pPr algn="l" indent="0" marL="0">
+              <a:lnSpc>
+                <a:spcPct val="108000"/>
+              </a:lnSpc>
+              <a:buNone/>
+            </a:pPr>
+            <a:r>
+              <a:rPr lang="en-US" sz="1250" dirty="0">
+                <a:solidFill>
+                  <a:srgbClr val="33444F"/>
+                </a:solidFill>
+                <a:latin typeface="Calibri" pitchFamily="34" charset="0"/>
+                <a:ea typeface="Calibri" pitchFamily="34" charset="-122"/>
+                <a:cs typeface="Calibri" pitchFamily="34" charset="-120"/>
+              </a:rPr>
+              <a:t>A gradual, progressive drift is a trend (systematic error). An abrupt step would be a shift (new lot/calibration).</a:t>
+            </a:r>
+            <a:endParaRPr lang="en-US" sz="1250" dirty="0"/>
+          </a:p>
+        </p:txBody>
+      </p:sp>
+      <p:sp>
+        <p:nvSpPr>
+          <p:cNvPr id="9" name="Text 7"/>
+          <p:cNvSpPr/>
+          <p:nvPr/>
+        </p:nvSpPr>
+        <p:spPr>
+          <a:xfrm>
+            <a:off x="566928" y="6473952"/>
+            <a:ext cx="7772400" cy="274320"/>
+          </a:xfrm>
+          <a:prstGeom prst="rect">
+            <a:avLst/>
+          </a:prstGeom>
+          <a:noFill/>
+          <a:ln/>
+        </p:spPr>
+        <p:txBody>
+          <a:bodyPr wrap="square" lIns="0" tIns="0" rIns="0" bIns="0" rtlCol="0" anchor="ctr"/>
+          <a:lstStyle/>
+          <a:p>
+            <a:pPr algn="l" indent="0" marL="0">
+              <a:buNone/>
+            </a:pPr>
+            <a:r>
+              <a:rPr lang="en-US" sz="850" dirty="0">
+                <a:solidFill>
+                  <a:srgbClr val="9AA8B4"/>
+                </a:solidFill>
+                <a:latin typeface="Calibri" pitchFamily="34" charset="0"/>
+                <a:ea typeface="Calibri" pitchFamily="34" charset="-122"/>
+                <a:cs typeface="Calibri" pitchFamily="34" charset="-120"/>
+              </a:rPr>
+              <a:t>Makassed General Hospital  ·  Department of Laboratory Medicine</a:t>
+            </a:r>
+            <a:endParaRPr lang="en-US" sz="850" dirty="0"/>
+          </a:p>
+        </p:txBody>
+      </p:sp>
+      <p:sp>
+        <p:nvSpPr>
+          <p:cNvPr id="10" name="Text 8"/>
+          <p:cNvSpPr/>
+          <p:nvPr/>
+        </p:nvSpPr>
+        <p:spPr>
+          <a:xfrm>
+            <a:off x="9814255" y="6473952"/>
+            <a:ext cx="1828800" cy="274320"/>
+          </a:xfrm>
+          <a:prstGeom prst="rect">
+            <a:avLst/>
+          </a:prstGeom>
+          <a:noFill/>
+          <a:ln/>
+        </p:spPr>
+        <p:txBody>
+          <a:bodyPr wrap="square" lIns="0" tIns="0" rIns="0" bIns="0" rtlCol="0" anchor="ctr"/>
+          <a:lstStyle/>
+          <a:p>
+            <a:pPr algn="r" indent="0" marL="0">
+              <a:buNone/>
+            </a:pPr>
+            <a:r>
+              <a:rPr lang="en-US" sz="850" dirty="0">
+                <a:solidFill>
+                  <a:srgbClr val="9AA8B4"/>
+                </a:solidFill>
+                <a:latin typeface="Calibri" pitchFamily="34" charset="0"/>
+                <a:ea typeface="Calibri" pitchFamily="34" charset="-122"/>
+                <a:cs typeface="Calibri" pitchFamily="34" charset="-120"/>
+              </a:rPr>
+              <a:t>CP Lecture Series</a:t>
+            </a:r>
+            <a:pPr algn="r" indent="0" marL="0">
+              <a:buNone/>
+            </a:pPr>
+            <a:r>
+              <a:rPr lang="en-US" sz="850" dirty="0">
+                <a:solidFill>
+                  <a:srgbClr val="DCE4EC"/>
+                </a:solidFill>
+                <a:latin typeface="Calibri" pitchFamily="34" charset="0"/>
+                <a:ea typeface="Calibri" pitchFamily="34" charset="-122"/>
+                <a:cs typeface="Calibri" pitchFamily="34" charset="-120"/>
+              </a:rPr>
+              <a:t>   ·   </a:t>
+            </a:r>
+            <a:pPr algn="r" indent="0" marL="0">
+              <a:buNone/>
+            </a:pPr>
+            <a:r>
+              <a:rPr lang="en-US" sz="850" b="1" dirty="0">
+                <a:solidFill>
+                  <a:srgbClr val="1565C0"/>
+                </a:solidFill>
+                <a:latin typeface="Calibri" pitchFamily="34" charset="0"/>
+                <a:ea typeface="Calibri" pitchFamily="34" charset="-122"/>
+                <a:cs typeface="Calibri" pitchFamily="34" charset="-120"/>
+              </a:rPr>
+              <a:t>21</a:t>
+            </a:r>
+            <a:endParaRPr lang="en-US" sz="850" dirty="0"/>
+          </a:p>
+        </p:txBody>
+      </p:sp>
+    </p:spTree>
+  </p:cSld>
+  <p:clrMapOvr>
+    <a:masterClrMapping/>
+  </p:clrMapOvr>
+</p:sld>
+</file>
+
 <file path=ppt/slides/slide3.xml><?xml version="1.0" encoding="utf-8"?>
 <p:sld xmlns:a="http://schemas.openxmlformats.org/drawingml/2006/main" xmlns:r="http://schemas.openxmlformats.org/officeDocument/2006/relationships" xmlns:p="http://schemas.openxmlformats.org/presentationml/2006/main">
   <p:cSld name="Slide 3">
@@ -13594,6 +14254,10 @@
             </a:outerShdw>
           </a:effectLst>
         </p:spPr>
+        <p:txBody>
+          <a:bodyPr/>
+          <a:p/>
+        </p:txBody>
       </p:sp>
       <p:sp>
         <p:nvSpPr>
@@ -13621,6 +14285,10 @@
             </a:outerShdw>
           </a:effectLst>
         </p:spPr>
+        <p:txBody>
+          <a:bodyPr/>
+          <a:p/>
+        </p:txBody>
       </p:sp>
       <p:sp>
         <p:nvSpPr>
@@ -13728,6 +14396,10 @@
             </a:outerShdw>
           </a:effectLst>
         </p:spPr>
+        <p:txBody>
+          <a:bodyPr/>
+          <a:p/>
+        </p:txBody>
       </p:sp>
       <p:sp>
         <p:nvSpPr>
@@ -13755,6 +14427,10 @@
             </a:outerShdw>
           </a:effectLst>
         </p:spPr>
+        <p:txBody>
+          <a:bodyPr/>
+          <a:p/>
+        </p:txBody>
       </p:sp>
       <p:sp>
         <p:nvSpPr>
@@ -13862,6 +14538,10 @@
             </a:outerShdw>
           </a:effectLst>
         </p:spPr>
+        <p:txBody>
+          <a:bodyPr/>
+          <a:p/>
+        </p:txBody>
       </p:sp>
       <p:sp>
         <p:nvSpPr>
@@ -13889,6 +14569,10 @@
             </a:outerShdw>
           </a:effectLst>
         </p:spPr>
+        <p:txBody>
+          <a:bodyPr/>
+          <a:p/>
+        </p:txBody>
       </p:sp>
       <p:sp>
         <p:nvSpPr>
@@ -13996,6 +14680,10 @@
             </a:outerShdw>
           </a:effectLst>
         </p:spPr>
+        <p:txBody>
+          <a:bodyPr/>
+          <a:p/>
+        </p:txBody>
       </p:sp>
       <p:sp>
         <p:nvSpPr>
@@ -14023,6 +14711,10 @@
             </a:outerShdw>
           </a:effectLst>
         </p:spPr>
+        <p:txBody>
+          <a:bodyPr/>
+          <a:p/>
+        </p:txBody>
       </p:sp>
       <p:sp>
         <p:nvSpPr>
@@ -14130,6 +14822,10 @@
             </a:outerShdw>
           </a:effectLst>
         </p:spPr>
+        <p:txBody>
+          <a:bodyPr/>
+          <a:p/>
+        </p:txBody>
       </p:sp>
       <p:sp>
         <p:nvSpPr>
@@ -14157,6 +14853,10 @@
             </a:outerShdw>
           </a:effectLst>
         </p:spPr>
+        <p:txBody>
+          <a:bodyPr/>
+          <a:p/>
+        </p:txBody>
       </p:sp>
       <p:sp>
         <p:nvSpPr>
@@ -14264,6 +14964,10 @@
             </a:outerShdw>
           </a:effectLst>
         </p:spPr>
+        <p:txBody>
+          <a:bodyPr/>
+          <a:p/>
+        </p:txBody>
       </p:sp>
       <p:sp>
         <p:nvSpPr>
@@ -14291,6 +14995,10 @@
             </a:outerShdw>
           </a:effectLst>
         </p:spPr>
+        <p:txBody>
+          <a:bodyPr/>
+          <a:p/>
+        </p:txBody>
       </p:sp>
       <p:sp>
         <p:nvSpPr>
@@ -14471,6 +15179,994 @@
                 <a:cs typeface="Calibri" pitchFamily="34" charset="-120"/>
               </a:rPr>
               <a:t>3</a:t>
+            </a:r>
+            <a:endParaRPr lang="en-US" sz="850" dirty="0"/>
+          </a:p>
+        </p:txBody>
+      </p:sp>
+    </p:spTree>
+  </p:cSld>
+  <p:clrMapOvr>
+    <a:masterClrMapping/>
+  </p:clrMapOvr>
+</p:sld>
+</file>
+
+<file path=ppt/slides/slide30.xml><?xml version="1.0" encoding="utf-8"?>
+<p:sld xmlns:a="http://schemas.openxmlformats.org/drawingml/2006/main" xmlns:p="http://schemas.openxmlformats.org/presentationml/2006/main" xmlns:r="http://schemas.openxmlformats.org/officeDocument/2006/relationships">
+  <p:cSld>
+    <p:spTree>
+      <p:nvGrpSpPr>
+        <p:cNvPr id="1" name=""/>
+        <p:cNvGrpSpPr/>
+        <p:nvPr/>
+      </p:nvGrpSpPr>
+      <p:grpSpPr/>
+      <p:sp>
+        <p:nvSpPr>
+          <p:cNvPr id="2" name="Text 0"/>
+          <p:cNvSpPr/>
+          <p:nvPr/>
+        </p:nvSpPr>
+        <p:spPr>
+          <a:xfrm>
+            <a:off x="566928" y="329184"/>
+            <a:ext cx="10515600" cy="310896"/>
+          </a:xfrm>
+          <a:prstGeom prst="rect">
+            <a:avLst/>
+          </a:prstGeom>
+          <a:noFill/>
+          <a:ln/>
+        </p:spPr>
+        <p:txBody>
+          <a:bodyPr wrap="square" lIns="0" tIns="0" rIns="0" bIns="0" rtlCol="0" anchor="ctr"/>
+          <a:lstStyle/>
+          <a:p>
+            <a:pPr algn="l" indent="0" marL="0">
+              <a:buNone/>
+            </a:pPr>
+            <a:r>
+              <a:rPr lang="en-US" sz="1100" b="1" spc="150" kern="0" dirty="0">
+                <a:solidFill>
+                  <a:srgbClr val="1565C0"/>
+                </a:solidFill>
+                <a:latin typeface="Calibri" pitchFamily="34" charset="0"/>
+                <a:ea typeface="Calibri" pitchFamily="34" charset="-122"/>
+                <a:cs typeface="Calibri" pitchFamily="34" charset="-120"/>
+              </a:rPr>
+              <a:t>CLINICAL CHEMISTRY   ·   BOARD REVIEW  ·  Q2</a:t>
+            </a:r>
+            <a:endParaRPr lang="en-US" sz="1100" dirty="0"/>
+          </a:p>
+        </p:txBody>
+      </p:sp>
+      <p:sp>
+        <p:nvSpPr>
+          <p:cNvPr id="3" name="Text 1"/>
+          <p:cNvSpPr/>
+          <p:nvPr/>
+        </p:nvSpPr>
+        <p:spPr>
+          <a:xfrm>
+            <a:off x="566928" y="713232"/>
+            <a:ext cx="11064240" cy="749808"/>
+          </a:xfrm>
+          <a:prstGeom prst="rect">
+            <a:avLst/>
+          </a:prstGeom>
+          <a:noFill/>
+          <a:ln/>
+        </p:spPr>
+        <p:txBody>
+          <a:bodyPr wrap="square" lIns="0" tIns="0" rIns="0" bIns="0" rtlCol="0" anchor="ctr"/>
+          <a:lstStyle/>
+          <a:p>
+            <a:pPr algn="l" indent="0" marL="0">
+              <a:buNone/>
+            </a:pPr>
+            <a:r>
+              <a:rPr lang="en-US" sz="2600" b="1" dirty="0">
+                <a:solidFill>
+                  <a:srgbClr val="0E3A5F"/>
+                </a:solidFill>
+                <a:latin typeface="Calibri" pitchFamily="34" charset="0"/>
+                <a:ea typeface="Calibri" pitchFamily="34" charset="-122"/>
+                <a:cs typeface="Calibri" pitchFamily="34" charset="-120"/>
+              </a:rPr>
+              <a:t>Board-Style Review</a:t>
+            </a:r>
+            <a:endParaRPr lang="en-US" sz="2600" dirty="0"/>
+          </a:p>
+        </p:txBody>
+      </p:sp>
+      <p:sp>
+        <p:nvSpPr>
+          <p:cNvPr id="4" name="Text 2"/>
+          <p:cNvSpPr/>
+          <p:nvPr/>
+        </p:nvSpPr>
+        <p:spPr>
+          <a:xfrm>
+            <a:off x="566928" y="1417320"/>
+            <a:ext cx="11057839" cy="914400"/>
+          </a:xfrm>
+          <a:prstGeom prst="rect">
+            <a:avLst/>
+          </a:prstGeom>
+          <a:noFill/>
+          <a:ln/>
+        </p:spPr>
+        <p:txBody>
+          <a:bodyPr wrap="square" lIns="0" tIns="0" rIns="0" bIns="0" rtlCol="0" anchor="t"/>
+          <a:lstStyle/>
+          <a:p>
+            <a:pPr algn="l" indent="0" marL="0">
+              <a:lnSpc>
+                <a:spcPct val="105000"/>
+              </a:lnSpc>
+              <a:buNone/>
+            </a:pPr>
+            <a:r>
+              <a:rPr lang="en-US" sz="1450" b="1" dirty="0">
+                <a:solidFill>
+                  <a:srgbClr val="1B2A38"/>
+                </a:solidFill>
+                <a:latin typeface="Calibri" pitchFamily="34" charset="0"/>
+                <a:ea typeface="Calibri" pitchFamily="34" charset="-122"/>
+                <a:cs typeface="Calibri" pitchFamily="34" charset="-120"/>
+              </a:rPr>
+              <a:t>Which analytes characteristically rise together due to in vitro hemolysis?</a:t>
+            </a:r>
+            <a:endParaRPr lang="en-US" sz="1450" dirty="0"/>
+          </a:p>
+        </p:txBody>
+      </p:sp>
+      <p:sp>
+        <p:nvSpPr>
+          <p:cNvPr id="5" name="Text 3"/>
+          <p:cNvSpPr/>
+          <p:nvPr/>
+        </p:nvSpPr>
+        <p:spPr>
+          <a:xfrm>
+            <a:off x="658368" y="2395728"/>
+            <a:ext cx="6192390" cy="3017520"/>
+          </a:xfrm>
+          <a:prstGeom prst="rect">
+            <a:avLst/>
+          </a:prstGeom>
+          <a:noFill/>
+          <a:ln/>
+        </p:spPr>
+        <p:txBody>
+          <a:bodyPr wrap="square" lIns="0" tIns="0" rIns="0" bIns="0" rtlCol="0" anchor="t"/>
+          <a:lstStyle/>
+          <a:p>
+            <a:pPr algn="l" indent="0" marL="0">
+              <a:spcAft>
+                <a:spcPts val="600"/>
+              </a:spcAft>
+              <a:buNone/>
+            </a:pPr>
+            <a:r>
+              <a:rPr lang="en-US" sz="1350" dirty="0">
+                <a:solidFill>
+                  <a:srgbClr val="33444F"/>
+                </a:solidFill>
+                <a:latin typeface="Calibri" pitchFamily="34" charset="0"/>
+                <a:ea typeface="Calibri" pitchFamily="34" charset="-122"/>
+                <a:cs typeface="Calibri" pitchFamily="34" charset="-120"/>
+              </a:rPr>
+              <a:t>A. Sodium, chloride, glucose</a:t>
+            </a:r>
+            <a:endParaRPr lang="en-US" sz="1350" dirty="0"/>
+          </a:p>
+          <a:p>
+            <a:pPr algn="l" indent="0" marL="0">
+              <a:spcAft>
+                <a:spcPts val="600"/>
+              </a:spcAft>
+              <a:buNone/>
+            </a:pPr>
+            <a:r>
+              <a:rPr lang="en-US" sz="1350" b="1" dirty="0">
+                <a:solidFill>
+                  <a:srgbClr val="0D4A92"/>
+                </a:solidFill>
+                <a:latin typeface="Calibri" pitchFamily="34" charset="0"/>
+                <a:ea typeface="Calibri" pitchFamily="34" charset="-122"/>
+                <a:cs typeface="Calibri" pitchFamily="34" charset="-120"/>
+              </a:rPr>
+              <a:t>B. Potassium, LDH, AST, phosphate</a:t>
+            </a:r>
+            <a:endParaRPr lang="en-US" sz="1350" dirty="0"/>
+          </a:p>
+          <a:p>
+            <a:pPr algn="l" indent="0" marL="0">
+              <a:spcAft>
+                <a:spcPts val="600"/>
+              </a:spcAft>
+              <a:buNone/>
+            </a:pPr>
+            <a:r>
+              <a:rPr lang="en-US" sz="1350" dirty="0">
+                <a:solidFill>
+                  <a:srgbClr val="33444F"/>
+                </a:solidFill>
+                <a:latin typeface="Calibri" pitchFamily="34" charset="0"/>
+                <a:ea typeface="Calibri" pitchFamily="34" charset="-122"/>
+                <a:cs typeface="Calibri" pitchFamily="34" charset="-120"/>
+              </a:rPr>
+              <a:t>C. Calcium, albumin, ALP</a:t>
+            </a:r>
+            <a:endParaRPr lang="en-US" sz="1350" dirty="0"/>
+          </a:p>
+          <a:p>
+            <a:pPr algn="l" indent="0" marL="0">
+              <a:spcAft>
+                <a:spcPts val="600"/>
+              </a:spcAft>
+              <a:buNone/>
+            </a:pPr>
+            <a:r>
+              <a:rPr lang="en-US" sz="1350" dirty="0">
+                <a:solidFill>
+                  <a:srgbClr val="33444F"/>
+                </a:solidFill>
+                <a:latin typeface="Calibri" pitchFamily="34" charset="0"/>
+                <a:ea typeface="Calibri" pitchFamily="34" charset="-122"/>
+                <a:cs typeface="Calibri" pitchFamily="34" charset="-120"/>
+              </a:rPr>
+              <a:t>D. Bicarbonate, BUN, creatinine</a:t>
+            </a:r>
+            <a:endParaRPr lang="en-US" sz="1350" dirty="0"/>
+          </a:p>
+          <a:p>
+            <a:pPr algn="l" indent="0" marL="0">
+              <a:spcAft>
+                <a:spcPts val="600"/>
+              </a:spcAft>
+              <a:buNone/>
+            </a:pPr>
+            <a:r>
+              <a:rPr lang="en-US" sz="1350" dirty="0">
+                <a:solidFill>
+                  <a:srgbClr val="33444F"/>
+                </a:solidFill>
+                <a:latin typeface="Calibri" pitchFamily="34" charset="0"/>
+                <a:ea typeface="Calibri" pitchFamily="34" charset="-122"/>
+                <a:cs typeface="Calibri" pitchFamily="34" charset="-120"/>
+              </a:rPr>
+              <a:t>E. TSH, free T4</a:t>
+            </a:r>
+            <a:endParaRPr lang="en-US" sz="1350" dirty="0"/>
+          </a:p>
+        </p:txBody>
+      </p:sp>
+      <p:sp>
+        <p:nvSpPr>
+          <p:cNvPr id="6" name="Shape 4"/>
+          <p:cNvSpPr/>
+          <p:nvPr/>
+        </p:nvSpPr>
+        <p:spPr>
+          <a:xfrm>
+            <a:off x="7201632" y="2395728"/>
+            <a:ext cx="4423136" cy="3246120"/>
+          </a:xfrm>
+          <a:prstGeom prst="roundRect">
+            <a:avLst>
+              <a:gd name="adj" fmla="val 2535"/>
+            </a:avLst>
+          </a:prstGeom>
+          <a:solidFill>
+            <a:srgbClr val="E7EFFA"/>
+          </a:solidFill>
+          <a:ln/>
+          <a:effectLst>
+            <a:outerShdw sx="100000" sy="100000" kx="0" ky="0" algn="bl" rotWithShape="0" blurRad="88900" dist="25400" dir="5400000">
+              <a:srgbClr val="22303C">
+                <a:alpha val="12000"/>
+              </a:srgbClr>
+            </a:outerShdw>
+          </a:effectLst>
+        </p:spPr>
+        <p:txBody>
+          <a:bodyPr/>
+          <a:p/>
+        </p:txBody>
+      </p:sp>
+      <p:sp>
+        <p:nvSpPr>
+          <p:cNvPr id="7" name="Text 5"/>
+          <p:cNvSpPr/>
+          <p:nvPr/>
+        </p:nvSpPr>
+        <p:spPr>
+          <a:xfrm>
+            <a:off x="7439376" y="2578608"/>
+            <a:ext cx="3965936" cy="457200"/>
+          </a:xfrm>
+          <a:prstGeom prst="rect">
+            <a:avLst/>
+          </a:prstGeom>
+          <a:noFill/>
+          <a:ln/>
+        </p:spPr>
+        <p:txBody>
+          <a:bodyPr wrap="square" lIns="0" tIns="0" rIns="0" bIns="0" rtlCol="0" anchor="ctr"/>
+          <a:lstStyle/>
+          <a:p>
+            <a:pPr indent="0" marL="0">
+              <a:buNone/>
+            </a:pPr>
+            <a:r>
+              <a:rPr lang="en-US" sz="1500" b="1" dirty="0">
+                <a:solidFill>
+                  <a:srgbClr val="1565C0"/>
+                </a:solidFill>
+                <a:latin typeface="Calibri" pitchFamily="34" charset="0"/>
+                <a:ea typeface="Calibri" pitchFamily="34" charset="-122"/>
+                <a:cs typeface="Calibri" pitchFamily="34" charset="-120"/>
+              </a:rPr>
+              <a:t>ANSWER  </a:t>
+            </a:r>
+            <a:pPr indent="0" marL="0">
+              <a:buNone/>
+            </a:pPr>
+            <a:r>
+              <a:rPr lang="en-US" sz="1500" b="1" dirty="0">
+                <a:solidFill>
+                  <a:srgbClr val="1B2A38"/>
+                </a:solidFill>
+                <a:latin typeface="Calibri" pitchFamily="34" charset="0"/>
+                <a:ea typeface="Calibri" pitchFamily="34" charset="-122"/>
+                <a:cs typeface="Calibri" pitchFamily="34" charset="-120"/>
+              </a:rPr>
+              <a:t>B — Potassium, LDH, AST, phosphate</a:t>
+            </a:r>
+            <a:endParaRPr lang="en-US" sz="1500" dirty="0"/>
+          </a:p>
+        </p:txBody>
+      </p:sp>
+      <p:sp>
+        <p:nvSpPr>
+          <p:cNvPr id="8" name="Text 6"/>
+          <p:cNvSpPr/>
+          <p:nvPr/>
+        </p:nvSpPr>
+        <p:spPr>
+          <a:xfrm>
+            <a:off x="7439376" y="3127248"/>
+            <a:ext cx="3947648" cy="2377440"/>
+          </a:xfrm>
+          <a:prstGeom prst="rect">
+            <a:avLst/>
+          </a:prstGeom>
+          <a:noFill/>
+          <a:ln/>
+        </p:spPr>
+        <p:txBody>
+          <a:bodyPr wrap="square" lIns="0" tIns="0" rIns="0" bIns="0" rtlCol="0" anchor="t"/>
+          <a:lstStyle/>
+          <a:p>
+            <a:pPr algn="l" indent="0" marL="0">
+              <a:lnSpc>
+                <a:spcPct val="108000"/>
+              </a:lnSpc>
+              <a:buNone/>
+            </a:pPr>
+            <a:r>
+              <a:rPr lang="en-US" sz="1250" dirty="0">
+                <a:solidFill>
+                  <a:srgbClr val="33444F"/>
+                </a:solidFill>
+                <a:latin typeface="Calibri" pitchFamily="34" charset="0"/>
+                <a:ea typeface="Calibri" pitchFamily="34" charset="-122"/>
+                <a:cs typeface="Calibri" pitchFamily="34" charset="-120"/>
+              </a:rPr>
+              <a:t>These are concentrated intracellularly; red-cell lysis releases them, producing concordant spurious elevations.</a:t>
+            </a:r>
+            <a:endParaRPr lang="en-US" sz="1250" dirty="0"/>
+          </a:p>
+        </p:txBody>
+      </p:sp>
+      <p:sp>
+        <p:nvSpPr>
+          <p:cNvPr id="9" name="Text 7"/>
+          <p:cNvSpPr/>
+          <p:nvPr/>
+        </p:nvSpPr>
+        <p:spPr>
+          <a:xfrm>
+            <a:off x="566928" y="6473952"/>
+            <a:ext cx="7772400" cy="274320"/>
+          </a:xfrm>
+          <a:prstGeom prst="rect">
+            <a:avLst/>
+          </a:prstGeom>
+          <a:noFill/>
+          <a:ln/>
+        </p:spPr>
+        <p:txBody>
+          <a:bodyPr wrap="square" lIns="0" tIns="0" rIns="0" bIns="0" rtlCol="0" anchor="ctr"/>
+          <a:lstStyle/>
+          <a:p>
+            <a:pPr algn="l" indent="0" marL="0">
+              <a:buNone/>
+            </a:pPr>
+            <a:r>
+              <a:rPr lang="en-US" sz="850" dirty="0">
+                <a:solidFill>
+                  <a:srgbClr val="9AA8B4"/>
+                </a:solidFill>
+                <a:latin typeface="Calibri" pitchFamily="34" charset="0"/>
+                <a:ea typeface="Calibri" pitchFamily="34" charset="-122"/>
+                <a:cs typeface="Calibri" pitchFamily="34" charset="-120"/>
+              </a:rPr>
+              <a:t>Makassed General Hospital  ·  Department of Laboratory Medicine</a:t>
+            </a:r>
+            <a:endParaRPr lang="en-US" sz="850" dirty="0"/>
+          </a:p>
+        </p:txBody>
+      </p:sp>
+      <p:sp>
+        <p:nvSpPr>
+          <p:cNvPr id="10" name="Text 8"/>
+          <p:cNvSpPr/>
+          <p:nvPr/>
+        </p:nvSpPr>
+        <p:spPr>
+          <a:xfrm>
+            <a:off x="9814255" y="6473952"/>
+            <a:ext cx="1828800" cy="274320"/>
+          </a:xfrm>
+          <a:prstGeom prst="rect">
+            <a:avLst/>
+          </a:prstGeom>
+          <a:noFill/>
+          <a:ln/>
+        </p:spPr>
+        <p:txBody>
+          <a:bodyPr wrap="square" lIns="0" tIns="0" rIns="0" bIns="0" rtlCol="0" anchor="ctr"/>
+          <a:lstStyle/>
+          <a:p>
+            <a:pPr algn="r" indent="0" marL="0">
+              <a:buNone/>
+            </a:pPr>
+            <a:r>
+              <a:rPr lang="en-US" sz="850" dirty="0">
+                <a:solidFill>
+                  <a:srgbClr val="9AA8B4"/>
+                </a:solidFill>
+                <a:latin typeface="Calibri" pitchFamily="34" charset="0"/>
+                <a:ea typeface="Calibri" pitchFamily="34" charset="-122"/>
+                <a:cs typeface="Calibri" pitchFamily="34" charset="-120"/>
+              </a:rPr>
+              <a:t>CP Lecture Series</a:t>
+            </a:r>
+            <a:pPr algn="r" indent="0" marL="0">
+              <a:buNone/>
+            </a:pPr>
+            <a:r>
+              <a:rPr lang="en-US" sz="850" dirty="0">
+                <a:solidFill>
+                  <a:srgbClr val="DCE4EC"/>
+                </a:solidFill>
+                <a:latin typeface="Calibri" pitchFamily="34" charset="0"/>
+                <a:ea typeface="Calibri" pitchFamily="34" charset="-122"/>
+                <a:cs typeface="Calibri" pitchFamily="34" charset="-120"/>
+              </a:rPr>
+              <a:t>   ·   </a:t>
+            </a:r>
+            <a:pPr algn="r" indent="0" marL="0">
+              <a:buNone/>
+            </a:pPr>
+            <a:r>
+              <a:rPr lang="en-US" sz="850" b="1" dirty="0">
+                <a:solidFill>
+                  <a:srgbClr val="1565C0"/>
+                </a:solidFill>
+                <a:latin typeface="Calibri" pitchFamily="34" charset="0"/>
+                <a:ea typeface="Calibri" pitchFamily="34" charset="-122"/>
+                <a:cs typeface="Calibri" pitchFamily="34" charset="-120"/>
+              </a:rPr>
+              <a:t>20</a:t>
+            </a:r>
+            <a:endParaRPr lang="en-US" sz="850" dirty="0"/>
+          </a:p>
+        </p:txBody>
+      </p:sp>
+    </p:spTree>
+  </p:cSld>
+  <p:clrMapOvr>
+    <a:masterClrMapping/>
+  </p:clrMapOvr>
+</p:sld>
+</file>
+
+<file path=ppt/slides/slide31.xml><?xml version="1.0" encoding="utf-8"?>
+<p:sld xmlns:a="http://schemas.openxmlformats.org/drawingml/2006/main" xmlns:p="http://schemas.openxmlformats.org/presentationml/2006/main" xmlns:r="http://schemas.openxmlformats.org/officeDocument/2006/relationships">
+  <p:cSld>
+    <p:spTree>
+      <p:nvGrpSpPr>
+        <p:cNvPr id="1" name=""/>
+        <p:cNvGrpSpPr/>
+        <p:nvPr/>
+      </p:nvGrpSpPr>
+      <p:grpSpPr/>
+      <p:sp>
+        <p:nvSpPr>
+          <p:cNvPr id="2" name="Text 0"/>
+          <p:cNvSpPr/>
+          <p:nvPr/>
+        </p:nvSpPr>
+        <p:spPr>
+          <a:xfrm>
+            <a:off x="566928" y="329184"/>
+            <a:ext cx="10515600" cy="310896"/>
+          </a:xfrm>
+          <a:prstGeom prst="rect">
+            <a:avLst/>
+          </a:prstGeom>
+          <a:noFill/>
+          <a:ln/>
+        </p:spPr>
+        <p:txBody>
+          <a:bodyPr wrap="square" lIns="0" tIns="0" rIns="0" bIns="0" rtlCol="0" anchor="ctr"/>
+          <a:lstStyle/>
+          <a:p>
+            <a:pPr algn="l" indent="0" marL="0">
+              <a:buNone/>
+            </a:pPr>
+            <a:r>
+              <a:rPr lang="en-US" sz="1100" b="1" spc="150" kern="0" dirty="0">
+                <a:solidFill>
+                  <a:srgbClr val="1565C0"/>
+                </a:solidFill>
+                <a:latin typeface="Calibri" pitchFamily="34" charset="0"/>
+                <a:ea typeface="Calibri" pitchFamily="34" charset="-122"/>
+                <a:cs typeface="Calibri" pitchFamily="34" charset="-120"/>
+              </a:rPr>
+              <a:t>CLINICAL CHEMISTRY   ·   BOARD REVIEW  ·  Q1</a:t>
+            </a:r>
+            <a:endParaRPr lang="en-US" sz="1100" dirty="0"/>
+          </a:p>
+        </p:txBody>
+      </p:sp>
+      <p:sp>
+        <p:nvSpPr>
+          <p:cNvPr id="3" name="Text 1"/>
+          <p:cNvSpPr/>
+          <p:nvPr/>
+        </p:nvSpPr>
+        <p:spPr>
+          <a:xfrm>
+            <a:off x="566928" y="713232"/>
+            <a:ext cx="11064240" cy="749808"/>
+          </a:xfrm>
+          <a:prstGeom prst="rect">
+            <a:avLst/>
+          </a:prstGeom>
+          <a:noFill/>
+          <a:ln/>
+        </p:spPr>
+        <p:txBody>
+          <a:bodyPr wrap="square" lIns="0" tIns="0" rIns="0" bIns="0" rtlCol="0" anchor="ctr"/>
+          <a:lstStyle/>
+          <a:p>
+            <a:pPr algn="l" indent="0" marL="0">
+              <a:buNone/>
+            </a:pPr>
+            <a:r>
+              <a:rPr lang="en-US" sz="2600" b="1" dirty="0">
+                <a:solidFill>
+                  <a:srgbClr val="0E3A5F"/>
+                </a:solidFill>
+                <a:latin typeface="Calibri" pitchFamily="34" charset="0"/>
+                <a:ea typeface="Calibri" pitchFamily="34" charset="-122"/>
+                <a:cs typeface="Calibri" pitchFamily="34" charset="-120"/>
+              </a:rPr>
+              <a:t>Board-Style Review</a:t>
+            </a:r>
+            <a:endParaRPr lang="en-US" sz="2600" dirty="0"/>
+          </a:p>
+        </p:txBody>
+      </p:sp>
+      <p:sp>
+        <p:nvSpPr>
+          <p:cNvPr id="4" name="Text 2"/>
+          <p:cNvSpPr/>
+          <p:nvPr/>
+        </p:nvSpPr>
+        <p:spPr>
+          <a:xfrm>
+            <a:off x="566928" y="1417320"/>
+            <a:ext cx="11057839" cy="914400"/>
+          </a:xfrm>
+          <a:prstGeom prst="rect">
+            <a:avLst/>
+          </a:prstGeom>
+          <a:noFill/>
+          <a:ln/>
+        </p:spPr>
+        <p:txBody>
+          <a:bodyPr wrap="square" lIns="0" tIns="0" rIns="0" bIns="0" rtlCol="0" anchor="t"/>
+          <a:lstStyle/>
+          <a:p>
+            <a:pPr algn="l" indent="0" marL="0">
+              <a:lnSpc>
+                <a:spcPct val="105000"/>
+              </a:lnSpc>
+              <a:buNone/>
+            </a:pPr>
+            <a:r>
+              <a:rPr lang="en-US" sz="1450" b="1" dirty="0">
+                <a:solidFill>
+                  <a:srgbClr val="1B2A38"/>
+                </a:solidFill>
+                <a:latin typeface="Calibri" pitchFamily="34" charset="0"/>
+                <a:ea typeface="Calibri" pitchFamily="34" charset="-122"/>
+                <a:cs typeface="Calibri" pitchFamily="34" charset="-120"/>
+              </a:rPr>
+              <a:t>A sandwich immunoassay reports an unexpectedly LOW value in a patient you suspect has very high analyte. Best next step?</a:t>
+            </a:r>
+            <a:endParaRPr lang="en-US" sz="1450" dirty="0"/>
+          </a:p>
+        </p:txBody>
+      </p:sp>
+      <p:sp>
+        <p:nvSpPr>
+          <p:cNvPr id="5" name="Text 3"/>
+          <p:cNvSpPr/>
+          <p:nvPr/>
+        </p:nvSpPr>
+        <p:spPr>
+          <a:xfrm>
+            <a:off x="658368" y="2395728"/>
+            <a:ext cx="6192390" cy="3017520"/>
+          </a:xfrm>
+          <a:prstGeom prst="rect">
+            <a:avLst/>
+          </a:prstGeom>
+          <a:noFill/>
+          <a:ln/>
+        </p:spPr>
+        <p:txBody>
+          <a:bodyPr wrap="square" lIns="0" tIns="0" rIns="0" bIns="0" rtlCol="0" anchor="t"/>
+          <a:lstStyle/>
+          <a:p>
+            <a:pPr algn="l" indent="0" marL="0">
+              <a:spcAft>
+                <a:spcPts val="600"/>
+              </a:spcAft>
+              <a:buNone/>
+            </a:pPr>
+            <a:r>
+              <a:rPr lang="en-US" sz="1350" dirty="0">
+                <a:solidFill>
+                  <a:srgbClr val="33444F"/>
+                </a:solidFill>
+                <a:latin typeface="Calibri" pitchFamily="34" charset="0"/>
+                <a:ea typeface="Calibri" pitchFamily="34" charset="-122"/>
+                <a:cs typeface="Calibri" pitchFamily="34" charset="-120"/>
+              </a:rPr>
+              <a:t>A. Report the low value</a:t>
+            </a:r>
+            <a:endParaRPr lang="en-US" sz="1350" dirty="0"/>
+          </a:p>
+          <a:p>
+            <a:pPr algn="l" indent="0" marL="0">
+              <a:spcAft>
+                <a:spcPts val="600"/>
+              </a:spcAft>
+              <a:buNone/>
+            </a:pPr>
+            <a:r>
+              <a:rPr lang="en-US" sz="1350" b="1" dirty="0">
+                <a:solidFill>
+                  <a:srgbClr val="0D4A92"/>
+                </a:solidFill>
+                <a:latin typeface="Calibri" pitchFamily="34" charset="0"/>
+                <a:ea typeface="Calibri" pitchFamily="34" charset="-122"/>
+                <a:cs typeface="Calibri" pitchFamily="34" charset="-120"/>
+              </a:rPr>
+              <a:t>B. Dilute the sample and re-assay (suspect hook effect)</a:t>
+            </a:r>
+            <a:endParaRPr lang="en-US" sz="1350" dirty="0"/>
+          </a:p>
+          <a:p>
+            <a:pPr algn="l" indent="0" marL="0">
+              <a:spcAft>
+                <a:spcPts val="600"/>
+              </a:spcAft>
+              <a:buNone/>
+            </a:pPr>
+            <a:r>
+              <a:rPr lang="en-US" sz="1350" dirty="0">
+                <a:solidFill>
+                  <a:srgbClr val="33444F"/>
+                </a:solidFill>
+                <a:latin typeface="Calibri" pitchFamily="34" charset="0"/>
+                <a:ea typeface="Calibri" pitchFamily="34" charset="-122"/>
+                <a:cs typeface="Calibri" pitchFamily="34" charset="-120"/>
+              </a:rPr>
+              <a:t>C. Add more conjugate</a:t>
+            </a:r>
+            <a:endParaRPr lang="en-US" sz="1350" dirty="0"/>
+          </a:p>
+          <a:p>
+            <a:pPr algn="l" indent="0" marL="0">
+              <a:spcAft>
+                <a:spcPts val="600"/>
+              </a:spcAft>
+              <a:buNone/>
+            </a:pPr>
+            <a:r>
+              <a:rPr lang="en-US" sz="1350" dirty="0">
+                <a:solidFill>
+                  <a:srgbClr val="33444F"/>
+                </a:solidFill>
+                <a:latin typeface="Calibri" pitchFamily="34" charset="0"/>
+                <a:ea typeface="Calibri" pitchFamily="34" charset="-122"/>
+                <a:cs typeface="Calibri" pitchFamily="34" charset="-120"/>
+              </a:rPr>
+              <a:t>D. Switch to a competitive assay only</a:t>
+            </a:r>
+            <a:endParaRPr lang="en-US" sz="1350" dirty="0"/>
+          </a:p>
+          <a:p>
+            <a:pPr algn="l" indent="0" marL="0">
+              <a:spcAft>
+                <a:spcPts val="600"/>
+              </a:spcAft>
+              <a:buNone/>
+            </a:pPr>
+            <a:r>
+              <a:rPr lang="en-US" sz="1350" dirty="0">
+                <a:solidFill>
+                  <a:srgbClr val="33444F"/>
+                </a:solidFill>
+                <a:latin typeface="Calibri" pitchFamily="34" charset="0"/>
+                <a:ea typeface="Calibri" pitchFamily="34" charset="-122"/>
+                <a:cs typeface="Calibri" pitchFamily="34" charset="-120"/>
+              </a:rPr>
+              <a:t>E. Repeat without changes</a:t>
+            </a:r>
+            <a:endParaRPr lang="en-US" sz="1350" dirty="0"/>
+          </a:p>
+        </p:txBody>
+      </p:sp>
+      <p:sp>
+        <p:nvSpPr>
+          <p:cNvPr id="6" name="Shape 4"/>
+          <p:cNvSpPr/>
+          <p:nvPr/>
+        </p:nvSpPr>
+        <p:spPr>
+          <a:xfrm>
+            <a:off x="7201632" y="2395728"/>
+            <a:ext cx="4423136" cy="3246120"/>
+          </a:xfrm>
+          <a:prstGeom prst="roundRect">
+            <a:avLst>
+              <a:gd name="adj" fmla="val 2535"/>
+            </a:avLst>
+          </a:prstGeom>
+          <a:solidFill>
+            <a:srgbClr val="E7EFFA"/>
+          </a:solidFill>
+          <a:ln/>
+          <a:effectLst>
+            <a:outerShdw sx="100000" sy="100000" kx="0" ky="0" algn="bl" rotWithShape="0" blurRad="88900" dist="25400" dir="5400000">
+              <a:srgbClr val="22303C">
+                <a:alpha val="12000"/>
+              </a:srgbClr>
+            </a:outerShdw>
+          </a:effectLst>
+        </p:spPr>
+        <p:txBody>
+          <a:bodyPr/>
+          <a:p/>
+        </p:txBody>
+      </p:sp>
+      <p:sp>
+        <p:nvSpPr>
+          <p:cNvPr id="7" name="Text 5"/>
+          <p:cNvSpPr/>
+          <p:nvPr/>
+        </p:nvSpPr>
+        <p:spPr>
+          <a:xfrm>
+            <a:off x="7439376" y="2578608"/>
+            <a:ext cx="3965936" cy="457200"/>
+          </a:xfrm>
+          <a:prstGeom prst="rect">
+            <a:avLst/>
+          </a:prstGeom>
+          <a:noFill/>
+          <a:ln/>
+        </p:spPr>
+        <p:txBody>
+          <a:bodyPr wrap="square" lIns="0" tIns="0" rIns="0" bIns="0" rtlCol="0" anchor="ctr"/>
+          <a:lstStyle/>
+          <a:p>
+            <a:pPr indent="0" marL="0">
+              <a:buNone/>
+            </a:pPr>
+            <a:r>
+              <a:rPr lang="en-US" sz="1500" b="1" dirty="0">
+                <a:solidFill>
+                  <a:srgbClr val="1565C0"/>
+                </a:solidFill>
+                <a:latin typeface="Calibri" pitchFamily="34" charset="0"/>
+                <a:ea typeface="Calibri" pitchFamily="34" charset="-122"/>
+                <a:cs typeface="Calibri" pitchFamily="34" charset="-120"/>
+              </a:rPr>
+              <a:t>ANSWER  </a:t>
+            </a:r>
+            <a:pPr indent="0" marL="0">
+              <a:buNone/>
+            </a:pPr>
+            <a:r>
+              <a:rPr lang="en-US" sz="1500" b="1" dirty="0">
+                <a:solidFill>
+                  <a:srgbClr val="1B2A38"/>
+                </a:solidFill>
+                <a:latin typeface="Calibri" pitchFamily="34" charset="0"/>
+                <a:ea typeface="Calibri" pitchFamily="34" charset="-122"/>
+                <a:cs typeface="Calibri" pitchFamily="34" charset="-120"/>
+              </a:rPr>
+              <a:t>B — Dilute and re-assay (hook effect)</a:t>
+            </a:r>
+            <a:endParaRPr lang="en-US" sz="1500" dirty="0"/>
+          </a:p>
+        </p:txBody>
+      </p:sp>
+      <p:sp>
+        <p:nvSpPr>
+          <p:cNvPr id="8" name="Text 6"/>
+          <p:cNvSpPr/>
+          <p:nvPr/>
+        </p:nvSpPr>
+        <p:spPr>
+          <a:xfrm>
+            <a:off x="7439376" y="3127248"/>
+            <a:ext cx="3947648" cy="2377440"/>
+          </a:xfrm>
+          <a:prstGeom prst="rect">
+            <a:avLst/>
+          </a:prstGeom>
+          <a:noFill/>
+          <a:ln/>
+        </p:spPr>
+        <p:txBody>
+          <a:bodyPr wrap="square" lIns="0" tIns="0" rIns="0" bIns="0" rtlCol="0" anchor="t"/>
+          <a:lstStyle/>
+          <a:p>
+            <a:pPr algn="l" indent="0" marL="0">
+              <a:lnSpc>
+                <a:spcPct val="108000"/>
+              </a:lnSpc>
+              <a:buNone/>
+            </a:pPr>
+            <a:r>
+              <a:rPr lang="en-US" sz="1250" dirty="0">
+                <a:solidFill>
+                  <a:srgbClr val="33444F"/>
+                </a:solidFill>
+                <a:latin typeface="Calibri" pitchFamily="34" charset="0"/>
+                <a:ea typeface="Calibri" pitchFamily="34" charset="-122"/>
+                <a:cs typeface="Calibri" pitchFamily="34" charset="-120"/>
+              </a:rPr>
+              <a:t>Extremely high analyte saturates a sandwich assay’s antibodies and lowers signal (hook). Dilution relieves saturation and yields the true value.</a:t>
+            </a:r>
+            <a:endParaRPr lang="en-US" sz="1250" dirty="0"/>
+          </a:p>
+        </p:txBody>
+      </p:sp>
+      <p:sp>
+        <p:nvSpPr>
+          <p:cNvPr id="9" name="Text 7"/>
+          <p:cNvSpPr/>
+          <p:nvPr/>
+        </p:nvSpPr>
+        <p:spPr>
+          <a:xfrm>
+            <a:off x="566928" y="6473952"/>
+            <a:ext cx="7772400" cy="274320"/>
+          </a:xfrm>
+          <a:prstGeom prst="rect">
+            <a:avLst/>
+          </a:prstGeom>
+          <a:noFill/>
+          <a:ln/>
+        </p:spPr>
+        <p:txBody>
+          <a:bodyPr wrap="square" lIns="0" tIns="0" rIns="0" bIns="0" rtlCol="0" anchor="ctr"/>
+          <a:lstStyle/>
+          <a:p>
+            <a:pPr algn="l" indent="0" marL="0">
+              <a:buNone/>
+            </a:pPr>
+            <a:r>
+              <a:rPr lang="en-US" sz="850" dirty="0">
+                <a:solidFill>
+                  <a:srgbClr val="9AA8B4"/>
+                </a:solidFill>
+                <a:latin typeface="Calibri" pitchFamily="34" charset="0"/>
+                <a:ea typeface="Calibri" pitchFamily="34" charset="-122"/>
+                <a:cs typeface="Calibri" pitchFamily="34" charset="-120"/>
+              </a:rPr>
+              <a:t>Makassed General Hospital  ·  Department of Laboratory Medicine</a:t>
+            </a:r>
+            <a:endParaRPr lang="en-US" sz="850" dirty="0"/>
+          </a:p>
+        </p:txBody>
+      </p:sp>
+      <p:sp>
+        <p:nvSpPr>
+          <p:cNvPr id="10" name="Text 8"/>
+          <p:cNvSpPr/>
+          <p:nvPr/>
+        </p:nvSpPr>
+        <p:spPr>
+          <a:xfrm>
+            <a:off x="9814255" y="6473952"/>
+            <a:ext cx="1828800" cy="274320"/>
+          </a:xfrm>
+          <a:prstGeom prst="rect">
+            <a:avLst/>
+          </a:prstGeom>
+          <a:noFill/>
+          <a:ln/>
+        </p:spPr>
+        <p:txBody>
+          <a:bodyPr wrap="square" lIns="0" tIns="0" rIns="0" bIns="0" rtlCol="0" anchor="ctr"/>
+          <a:lstStyle/>
+          <a:p>
+            <a:pPr algn="r" indent="0" marL="0">
+              <a:buNone/>
+            </a:pPr>
+            <a:r>
+              <a:rPr lang="en-US" sz="850" dirty="0">
+                <a:solidFill>
+                  <a:srgbClr val="9AA8B4"/>
+                </a:solidFill>
+                <a:latin typeface="Calibri" pitchFamily="34" charset="0"/>
+                <a:ea typeface="Calibri" pitchFamily="34" charset="-122"/>
+                <a:cs typeface="Calibri" pitchFamily="34" charset="-120"/>
+              </a:rPr>
+              <a:t>CP Lecture Series</a:t>
+            </a:r>
+            <a:pPr algn="r" indent="0" marL="0">
+              <a:buNone/>
+            </a:pPr>
+            <a:r>
+              <a:rPr lang="en-US" sz="850" dirty="0">
+                <a:solidFill>
+                  <a:srgbClr val="DCE4EC"/>
+                </a:solidFill>
+                <a:latin typeface="Calibri" pitchFamily="34" charset="0"/>
+                <a:ea typeface="Calibri" pitchFamily="34" charset="-122"/>
+                <a:cs typeface="Calibri" pitchFamily="34" charset="-120"/>
+              </a:rPr>
+              <a:t>   ·   </a:t>
+            </a:r>
+            <a:pPr algn="r" indent="0" marL="0">
+              <a:buNone/>
+            </a:pPr>
+            <a:r>
+              <a:rPr lang="en-US" sz="850" b="1" dirty="0">
+                <a:solidFill>
+                  <a:srgbClr val="1565C0"/>
+                </a:solidFill>
+                <a:latin typeface="Calibri" pitchFamily="34" charset="0"/>
+                <a:ea typeface="Calibri" pitchFamily="34" charset="-122"/>
+                <a:cs typeface="Calibri" pitchFamily="34" charset="-120"/>
+              </a:rPr>
+              <a:t>19</a:t>
             </a:r>
             <a:endParaRPr lang="en-US" sz="850" dirty="0"/>
           </a:p>
@@ -14614,6 +16310,10 @@
             </a:outerShdw>
           </a:effectLst>
         </p:spPr>
+        <p:txBody>
+          <a:bodyPr/>
+          <a:p/>
+        </p:txBody>
       </p:sp>
       <p:sp>
         <p:nvSpPr>
@@ -14641,6 +16341,10 @@
             </a:outerShdw>
           </a:effectLst>
         </p:spPr>
+        <p:txBody>
+          <a:bodyPr/>
+          <a:p/>
+        </p:txBody>
       </p:sp>
       <p:sp>
         <p:nvSpPr>
@@ -14755,6 +16459,10 @@
           </a:solidFill>
           <a:ln/>
         </p:spPr>
+        <p:txBody>
+          <a:bodyPr/>
+          <a:p/>
+        </p:txBody>
       </p:sp>
       <p:sp>
         <p:nvSpPr>
@@ -14782,6 +16490,10 @@
             </a:outerShdw>
           </a:effectLst>
         </p:spPr>
+        <p:txBody>
+          <a:bodyPr/>
+          <a:p/>
+        </p:txBody>
       </p:sp>
       <p:sp>
         <p:nvSpPr>
@@ -14903,6 +16615,10 @@
             </a:outerShdw>
           </a:effectLst>
         </p:spPr>
+        <p:txBody>
+          <a:bodyPr/>
+          <a:p/>
+        </p:txBody>
       </p:sp>
       <p:sp>
         <p:nvSpPr>
@@ -14930,6 +16646,10 @@
             </a:outerShdw>
           </a:effectLst>
         </p:spPr>
+        <p:txBody>
+          <a:bodyPr/>
+          <a:p/>
+        </p:txBody>
       </p:sp>
       <p:sp>
         <p:nvSpPr>
@@ -15044,6 +16764,10 @@
           </a:solidFill>
           <a:ln/>
         </p:spPr>
+        <p:txBody>
+          <a:bodyPr/>
+          <a:p/>
+        </p:txBody>
       </p:sp>
       <p:sp>
         <p:nvSpPr>
@@ -15071,6 +16795,10 @@
             </a:outerShdw>
           </a:effectLst>
         </p:spPr>
+        <p:txBody>
+          <a:bodyPr/>
+          <a:p/>
+        </p:txBody>
       </p:sp>
       <p:sp>
         <p:nvSpPr>
@@ -15192,6 +16920,10 @@
             </a:outerShdw>
           </a:effectLst>
         </p:spPr>
+        <p:txBody>
+          <a:bodyPr/>
+          <a:p/>
+        </p:txBody>
       </p:sp>
       <p:sp>
         <p:nvSpPr>
@@ -15219,6 +16951,10 @@
             </a:outerShdw>
           </a:effectLst>
         </p:spPr>
+        <p:txBody>
+          <a:bodyPr/>
+          <a:p/>
+        </p:txBody>
       </p:sp>
       <p:sp>
         <p:nvSpPr>
@@ -15333,6 +17069,10 @@
           </a:solidFill>
           <a:ln/>
         </p:spPr>
+        <p:txBody>
+          <a:bodyPr/>
+          <a:p/>
+        </p:txBody>
       </p:sp>
       <p:sp>
         <p:nvSpPr>
@@ -15360,6 +17100,10 @@
             </a:outerShdw>
           </a:effectLst>
         </p:spPr>
+        <p:txBody>
+          <a:bodyPr/>
+          <a:p/>
+        </p:txBody>
       </p:sp>
       <p:sp>
         <p:nvSpPr>
@@ -15598,6 +17342,10 @@
           </a:solidFill>
           <a:ln/>
         </p:spPr>
+        <p:txBody>
+          <a:bodyPr/>
+          <a:p/>
+        </p:txBody>
       </p:sp>
       <p:sp>
         <p:nvSpPr>
@@ -15620,6 +17368,10 @@
           </a:solidFill>
           <a:ln/>
         </p:spPr>
+        <p:txBody>
+          <a:bodyPr/>
+          <a:p/>
+        </p:txBody>
       </p:sp>
       <p:sp>
         <p:nvSpPr>
@@ -15876,6 +17628,10 @@
             </a:outerShdw>
           </a:effectLst>
         </p:spPr>
+        <p:txBody>
+          <a:bodyPr/>
+          <a:p/>
+        </p:txBody>
       </p:sp>
       <p:sp>
         <p:nvSpPr>
@@ -16050,6 +17806,10 @@
             </a:outerShdw>
           </a:effectLst>
         </p:spPr>
+        <p:txBody>
+          <a:bodyPr/>
+          <a:p/>
+        </p:txBody>
       </p:sp>
       <p:sp>
         <p:nvSpPr>
@@ -16445,6 +18205,10 @@
             </a:outerShdw>
           </a:effectLst>
         </p:spPr>
+        <p:txBody>
+          <a:bodyPr/>
+          <a:p/>
+        </p:txBody>
       </p:sp>
       <p:pic>
         <p:nvPicPr>
@@ -16753,6 +18517,10 @@
             </a:outerShdw>
           </a:effectLst>
         </p:spPr>
+        <p:txBody>
+          <a:bodyPr/>
+          <a:p/>
+        </p:txBody>
       </p:sp>
       <p:sp>
         <p:nvSpPr>
@@ -16927,6 +18695,10 @@
             </a:outerShdw>
           </a:effectLst>
         </p:spPr>
+        <p:txBody>
+          <a:bodyPr/>
+          <a:p/>
+        </p:txBody>
       </p:sp>
       <p:sp>
         <p:nvSpPr>
@@ -17317,6 +19089,10 @@
             </a:outerShdw>
           </a:effectLst>
         </p:spPr>
+        <p:txBody>
+          <a:bodyPr/>
+          <a:p/>
+        </p:txBody>
       </p:sp>
       <p:sp>
         <p:nvSpPr>
@@ -17491,6 +19267,10 @@
             </a:outerShdw>
           </a:effectLst>
         </p:spPr>
+        <p:txBody>
+          <a:bodyPr/>
+          <a:p/>
+        </p:txBody>
       </p:sp>
       <p:sp>
         <p:nvSpPr>
